--- a/ADAPTIVE CONTROL UNIT.pptx
+++ b/ADAPTIVE CONTROL UNIT.pptx
@@ -17,6 +17,8 @@
     <p:sldId id="262" r:id="rId12"/>
     <p:sldId id="263" r:id="rId13"/>
     <p:sldId id="264" r:id="rId14"/>
+    <p:sldId id="265" r:id="rId15"/>
+    <p:sldId id="266" r:id="rId16"/>
   </p:sldIdLst>
   <p:sldSz cy="5143500" cx="9144000"/>
   <p:notesSz cx="6858000" cy="9144000"/>
@@ -793,6 +795,204 @@
 </p:notes>
 </file>
 
+<file path=ppt/notesSlides/notesSlide10.xml><?xml version="1.0" encoding="utf-8"?>
+<p:notes xmlns:a="http://schemas.openxmlformats.org/drawingml/2006/main" xmlns:r="http://schemas.openxmlformats.org/officeDocument/2006/relationships" xmlns:mc="http://schemas.openxmlformats.org/markup-compatibility/2006" xmlns:mv="urn:schemas-microsoft-com:mac:vml" xmlns:p="http://schemas.openxmlformats.org/presentationml/2006/main" xmlns:c="http://schemas.openxmlformats.org/drawingml/2006/chart" xmlns:dgm="http://schemas.openxmlformats.org/drawingml/2006/diagram" xmlns:o="urn:schemas-microsoft-com:office:office" xmlns:v="urn:schemas-microsoft-com:vml" xmlns:pvml="urn:schemas-microsoft-com:office:powerpoint" xmlns:com="http://schemas.openxmlformats.org/drawingml/2006/compatibility" xmlns:p14="http://schemas.microsoft.com/office/powerpoint/2010/main" xmlns:p15="http://schemas.microsoft.com/office/powerpoint/2012/main" xmlns:ahyp="http://schemas.microsoft.com/office/drawing/2018/hyperlinkcolor" showMasterPhAnim="0" showMasterSp="0">
+  <p:cSld>
+    <p:spTree>
+      <p:nvGrpSpPr>
+        <p:cNvPr id="105" name="Shape 105"/>
+        <p:cNvGrpSpPr/>
+        <p:nvPr/>
+      </p:nvGrpSpPr>
+      <p:grpSpPr>
+        <a:xfrm>
+          <a:off x="0" y="0"/>
+          <a:ext cx="0" cy="0"/>
+          <a:chOff x="0" y="0"/>
+          <a:chExt cx="0" cy="0"/>
+        </a:xfrm>
+      </p:grpSpPr>
+      <p:sp>
+        <p:nvSpPr>
+          <p:cNvPr id="106" name="Google Shape;106;g3e1d1037a72_0_41:notes"/>
+          <p:cNvSpPr/>
+          <p:nvPr>
+            <p:ph idx="2" type="sldImg"/>
+          </p:nvPr>
+        </p:nvSpPr>
+        <p:spPr>
+          <a:xfrm>
+            <a:off x="381300" y="685800"/>
+            <a:ext cx="6096000" cy="3429000"/>
+          </a:xfrm>
+          <a:custGeom>
+            <a:rect b="b" l="l" r="r" t="t"/>
+            <a:pathLst>
+              <a:path extrusionOk="0" h="120000" w="120000">
+                <a:moveTo>
+                  <a:pt x="0" y="0"/>
+                </a:moveTo>
+                <a:lnTo>
+                  <a:pt x="120000" y="0"/>
+                </a:lnTo>
+                <a:lnTo>
+                  <a:pt x="120000" y="120000"/>
+                </a:lnTo>
+                <a:lnTo>
+                  <a:pt x="0" y="120000"/>
+                </a:lnTo>
+                <a:close/>
+              </a:path>
+            </a:pathLst>
+          </a:custGeom>
+        </p:spPr>
+      </p:sp>
+      <p:sp>
+        <p:nvSpPr>
+          <p:cNvPr id="107" name="Google Shape;107;g3e1d1037a72_0_41:notes"/>
+          <p:cNvSpPr txBox="1"/>
+          <p:nvPr>
+            <p:ph idx="1" type="body"/>
+          </p:nvPr>
+        </p:nvSpPr>
+        <p:spPr>
+          <a:xfrm>
+            <a:off x="685800" y="4343400"/>
+            <a:ext cx="5486400" cy="4114800"/>
+          </a:xfrm>
+          <a:prstGeom prst="rect">
+            <a:avLst/>
+          </a:prstGeom>
+        </p:spPr>
+        <p:txBody>
+          <a:bodyPr anchorCtr="0" anchor="t" bIns="91425" lIns="91425" spcFirstLastPara="1" rIns="91425" wrap="square" tIns="91425">
+            <a:noAutofit/>
+          </a:bodyPr>
+          <a:lstStyle/>
+          <a:p>
+            <a:pPr indent="0" lvl="0" marL="0" rtl="0" algn="l">
+              <a:spcBef>
+                <a:spcPts val="0"/>
+              </a:spcBef>
+              <a:spcAft>
+                <a:spcPts val="0"/>
+              </a:spcAft>
+              <a:buNone/>
+            </a:pPr>
+            <a:r>
+              <a:t/>
+            </a:r>
+            <a:endParaRPr/>
+          </a:p>
+        </p:txBody>
+      </p:sp>
+    </p:spTree>
+  </p:cSld>
+  <p:clrMapOvr>
+    <a:masterClrMapping/>
+  </p:clrMapOvr>
+</p:notes>
+</file>
+
+<file path=ppt/notesSlides/notesSlide11.xml><?xml version="1.0" encoding="utf-8"?>
+<p:notes xmlns:a="http://schemas.openxmlformats.org/drawingml/2006/main" xmlns:r="http://schemas.openxmlformats.org/officeDocument/2006/relationships" xmlns:mc="http://schemas.openxmlformats.org/markup-compatibility/2006" xmlns:mv="urn:schemas-microsoft-com:mac:vml" xmlns:p="http://schemas.openxmlformats.org/presentationml/2006/main" xmlns:c="http://schemas.openxmlformats.org/drawingml/2006/chart" xmlns:dgm="http://schemas.openxmlformats.org/drawingml/2006/diagram" xmlns:o="urn:schemas-microsoft-com:office:office" xmlns:v="urn:schemas-microsoft-com:vml" xmlns:pvml="urn:schemas-microsoft-com:office:powerpoint" xmlns:com="http://schemas.openxmlformats.org/drawingml/2006/compatibility" xmlns:p14="http://schemas.microsoft.com/office/powerpoint/2010/main" xmlns:p15="http://schemas.microsoft.com/office/powerpoint/2012/main" xmlns:ahyp="http://schemas.microsoft.com/office/drawing/2018/hyperlinkcolor" showMasterPhAnim="0" showMasterSp="0">
+  <p:cSld>
+    <p:spTree>
+      <p:nvGrpSpPr>
+        <p:cNvPr id="111" name="Shape 111"/>
+        <p:cNvGrpSpPr/>
+        <p:nvPr/>
+      </p:nvGrpSpPr>
+      <p:grpSpPr>
+        <a:xfrm>
+          <a:off x="0" y="0"/>
+          <a:ext cx="0" cy="0"/>
+          <a:chOff x="0" y="0"/>
+          <a:chExt cx="0" cy="0"/>
+        </a:xfrm>
+      </p:grpSpPr>
+      <p:sp>
+        <p:nvSpPr>
+          <p:cNvPr id="112" name="Google Shape;112;g3e1d1037a72_0_47:notes"/>
+          <p:cNvSpPr/>
+          <p:nvPr>
+            <p:ph idx="2" type="sldImg"/>
+          </p:nvPr>
+        </p:nvSpPr>
+        <p:spPr>
+          <a:xfrm>
+            <a:off x="381300" y="685800"/>
+            <a:ext cx="6096000" cy="3429000"/>
+          </a:xfrm>
+          <a:custGeom>
+            <a:rect b="b" l="l" r="r" t="t"/>
+            <a:pathLst>
+              <a:path extrusionOk="0" h="120000" w="120000">
+                <a:moveTo>
+                  <a:pt x="0" y="0"/>
+                </a:moveTo>
+                <a:lnTo>
+                  <a:pt x="120000" y="0"/>
+                </a:lnTo>
+                <a:lnTo>
+                  <a:pt x="120000" y="120000"/>
+                </a:lnTo>
+                <a:lnTo>
+                  <a:pt x="0" y="120000"/>
+                </a:lnTo>
+                <a:close/>
+              </a:path>
+            </a:pathLst>
+          </a:custGeom>
+        </p:spPr>
+      </p:sp>
+      <p:sp>
+        <p:nvSpPr>
+          <p:cNvPr id="113" name="Google Shape;113;g3e1d1037a72_0_47:notes"/>
+          <p:cNvSpPr txBox="1"/>
+          <p:nvPr>
+            <p:ph idx="1" type="body"/>
+          </p:nvPr>
+        </p:nvSpPr>
+        <p:spPr>
+          <a:xfrm>
+            <a:off x="685800" y="4343400"/>
+            <a:ext cx="5486400" cy="4114800"/>
+          </a:xfrm>
+          <a:prstGeom prst="rect">
+            <a:avLst/>
+          </a:prstGeom>
+        </p:spPr>
+        <p:txBody>
+          <a:bodyPr anchorCtr="0" anchor="t" bIns="91425" lIns="91425" spcFirstLastPara="1" rIns="91425" wrap="square" tIns="91425">
+            <a:noAutofit/>
+          </a:bodyPr>
+          <a:lstStyle/>
+          <a:p>
+            <a:pPr indent="0" lvl="0" marL="0" rtl="0" algn="l">
+              <a:spcBef>
+                <a:spcPts val="0"/>
+              </a:spcBef>
+              <a:spcAft>
+                <a:spcPts val="0"/>
+              </a:spcAft>
+              <a:buNone/>
+            </a:pPr>
+            <a:r>
+              <a:t/>
+            </a:r>
+            <a:endParaRPr/>
+          </a:p>
+        </p:txBody>
+      </p:sp>
+    </p:spTree>
+  </p:cSld>
+  <p:clrMapOvr>
+    <a:masterClrMapping/>
+  </p:clrMapOvr>
+</p:notes>
+</file>
+
 <file path=ppt/notesSlides/notesSlide2.xml><?xml version="1.0" encoding="utf-8"?>
 <p:notes xmlns:a="http://schemas.openxmlformats.org/drawingml/2006/main" xmlns:r="http://schemas.openxmlformats.org/officeDocument/2006/relationships" xmlns:mc="http://schemas.openxmlformats.org/markup-compatibility/2006" xmlns:mv="urn:schemas-microsoft-com:mac:vml" xmlns:p="http://schemas.openxmlformats.org/presentationml/2006/main" xmlns:c="http://schemas.openxmlformats.org/drawingml/2006/chart" xmlns:dgm="http://schemas.openxmlformats.org/drawingml/2006/diagram" xmlns:o="urn:schemas-microsoft-com:office:office" xmlns:v="urn:schemas-microsoft-com:vml" xmlns:pvml="urn:schemas-microsoft-com:office:powerpoint" xmlns:com="http://schemas.openxmlformats.org/drawingml/2006/compatibility" xmlns:p14="http://schemas.microsoft.com/office/powerpoint/2010/main" xmlns:p15="http://schemas.microsoft.com/office/powerpoint/2012/main" xmlns:ahyp="http://schemas.microsoft.com/office/drawing/2018/hyperlinkcolor" showMasterPhAnim="0" showMasterSp="0">
   <p:cSld>
@@ -1307,7 +1507,7 @@
       </p:grpSpPr>
       <p:sp>
         <p:nvSpPr>
-          <p:cNvPr id="88" name="Google Shape;88;g3e1d1037a72_0_35:notes"/>
+          <p:cNvPr id="88" name="Google Shape;88;g3e223eb21ce_0_0:notes"/>
           <p:cNvSpPr/>
           <p:nvPr>
             <p:ph idx="2" type="sldImg"/>
@@ -1342,7 +1542,7 @@
       </p:sp>
       <p:sp>
         <p:nvSpPr>
-          <p:cNvPr id="89" name="Google Shape;89;g3e1d1037a72_0_35:notes"/>
+          <p:cNvPr id="89" name="Google Shape;89;g3e223eb21ce_0_0:notes"/>
           <p:cNvSpPr txBox="1"/>
           <p:nvPr>
             <p:ph idx="1" type="body"/>
@@ -1406,7 +1606,7 @@
       </p:grpSpPr>
       <p:sp>
         <p:nvSpPr>
-          <p:cNvPr id="94" name="Google Shape;94;g3e1d1037a72_0_41:notes"/>
+          <p:cNvPr id="94" name="Google Shape;94;g3e223eb21ce_0_11:notes"/>
           <p:cNvSpPr/>
           <p:nvPr>
             <p:ph idx="2" type="sldImg"/>
@@ -1441,7 +1641,7 @@
       </p:sp>
       <p:sp>
         <p:nvSpPr>
-          <p:cNvPr id="95" name="Google Shape;95;g3e1d1037a72_0_41:notes"/>
+          <p:cNvPr id="95" name="Google Shape;95;g3e223eb21ce_0_11:notes"/>
           <p:cNvSpPr txBox="1"/>
           <p:nvPr>
             <p:ph idx="1" type="body"/>
@@ -1505,7 +1705,7 @@
       </p:grpSpPr>
       <p:sp>
         <p:nvSpPr>
-          <p:cNvPr id="100" name="Google Shape;100;g3e1d1037a72_0_47:notes"/>
+          <p:cNvPr id="100" name="Google Shape;100;g3e1d1037a72_0_35:notes"/>
           <p:cNvSpPr/>
           <p:nvPr>
             <p:ph idx="2" type="sldImg"/>
@@ -1540,7 +1740,7 @@
       </p:sp>
       <p:sp>
         <p:nvSpPr>
-          <p:cNvPr id="101" name="Google Shape;101;g3e1d1037a72_0_47:notes"/>
+          <p:cNvPr id="101" name="Google Shape;101;g3e1d1037a72_0_35:notes"/>
           <p:cNvSpPr txBox="1"/>
           <p:nvPr>
             <p:ph idx="1" type="body"/>
@@ -6454,6 +6654,808 @@
 </p:sld>
 </file>
 
+<file path=ppt/slides/slide10.xml><?xml version="1.0" encoding="utf-8"?>
+<p:sld xmlns:a="http://schemas.openxmlformats.org/drawingml/2006/main" xmlns:r="http://schemas.openxmlformats.org/officeDocument/2006/relationships" xmlns:mc="http://schemas.openxmlformats.org/markup-compatibility/2006" xmlns:mv="urn:schemas-microsoft-com:mac:vml" xmlns:p="http://schemas.openxmlformats.org/presentationml/2006/main" xmlns:c="http://schemas.openxmlformats.org/drawingml/2006/chart" xmlns:dgm="http://schemas.openxmlformats.org/drawingml/2006/diagram" xmlns:o="urn:schemas-microsoft-com:office:office" xmlns:v="urn:schemas-microsoft-com:vml" xmlns:pvml="urn:schemas-microsoft-com:office:powerpoint" xmlns:com="http://schemas.openxmlformats.org/drawingml/2006/compatibility" xmlns:p14="http://schemas.microsoft.com/office/powerpoint/2010/main" xmlns:p15="http://schemas.microsoft.com/office/powerpoint/2012/main" xmlns:ahyp="http://schemas.microsoft.com/office/drawing/2018/hyperlinkcolor">
+  <p:cSld>
+    <p:spTree>
+      <p:nvGrpSpPr>
+        <p:cNvPr id="108" name="Shape 108"/>
+        <p:cNvGrpSpPr/>
+        <p:nvPr/>
+      </p:nvGrpSpPr>
+      <p:grpSpPr>
+        <a:xfrm>
+          <a:off x="0" y="0"/>
+          <a:ext cx="0" cy="0"/>
+          <a:chOff x="0" y="0"/>
+          <a:chExt cx="0" cy="0"/>
+        </a:xfrm>
+      </p:grpSpPr>
+      <p:sp>
+        <p:nvSpPr>
+          <p:cNvPr id="109" name="Google Shape;109;p22"/>
+          <p:cNvSpPr txBox="1"/>
+          <p:nvPr>
+            <p:ph type="title"/>
+          </p:nvPr>
+        </p:nvSpPr>
+        <p:spPr>
+          <a:xfrm>
+            <a:off x="311700" y="445025"/>
+            <a:ext cx="8520600" cy="572700"/>
+          </a:xfrm>
+          <a:prstGeom prst="rect">
+            <a:avLst/>
+          </a:prstGeom>
+        </p:spPr>
+        <p:txBody>
+          <a:bodyPr anchorCtr="0" anchor="t" bIns="91425" lIns="91425" spcFirstLastPara="1" rIns="91425" wrap="square" tIns="91425">
+            <a:noAutofit/>
+          </a:bodyPr>
+          <a:lstStyle/>
+          <a:p>
+            <a:pPr indent="0" lvl="0" marL="0" rtl="0" algn="l">
+              <a:spcBef>
+                <a:spcPts val="0"/>
+              </a:spcBef>
+              <a:spcAft>
+                <a:spcPts val="0"/>
+              </a:spcAft>
+              <a:buNone/>
+            </a:pPr>
+            <a:r>
+              <a:rPr b="1" lang="en" sz="3600">
+                <a:highlight>
+                  <a:schemeClr val="lt1"/>
+                </a:highlight>
+                <a:latin typeface="Courier New"/>
+                <a:ea typeface="Courier New"/>
+                <a:cs typeface="Courier New"/>
+                <a:sym typeface="Courier New"/>
+              </a:rPr>
+              <a:t>DISADVANTAGES</a:t>
+            </a:r>
+            <a:endParaRPr sz="3600">
+              <a:highlight>
+                <a:schemeClr val="lt1"/>
+              </a:highlight>
+            </a:endParaRPr>
+          </a:p>
+        </p:txBody>
+      </p:sp>
+      <p:sp>
+        <p:nvSpPr>
+          <p:cNvPr id="110" name="Google Shape;110;p22"/>
+          <p:cNvSpPr txBox="1"/>
+          <p:nvPr>
+            <p:ph idx="1" type="body"/>
+          </p:nvPr>
+        </p:nvSpPr>
+        <p:spPr>
+          <a:xfrm>
+            <a:off x="213475" y="1313850"/>
+            <a:ext cx="8520600" cy="3416400"/>
+          </a:xfrm>
+          <a:prstGeom prst="rect">
+            <a:avLst/>
+          </a:prstGeom>
+        </p:spPr>
+        <p:txBody>
+          <a:bodyPr anchorCtr="0" anchor="t" bIns="91425" lIns="91425" spcFirstLastPara="1" rIns="91425" wrap="square" tIns="91425">
+            <a:noAutofit/>
+          </a:bodyPr>
+          <a:lstStyle/>
+          <a:p>
+            <a:pPr indent="0" lvl="0" marL="0" rtl="0" algn="l">
+              <a:lnSpc>
+                <a:spcPct val="135714"/>
+              </a:lnSpc>
+              <a:spcBef>
+                <a:spcPts val="0"/>
+              </a:spcBef>
+              <a:spcAft>
+                <a:spcPts val="0"/>
+              </a:spcAft>
+              <a:buClr>
+                <a:schemeClr val="dk1"/>
+              </a:buClr>
+              <a:buSzPts val="1100"/>
+              <a:buFont typeface="Arial"/>
+              <a:buNone/>
+            </a:pPr>
+            <a:r>
+              <a:rPr lang="en" sz="2000">
+                <a:solidFill>
+                  <a:schemeClr val="dk1"/>
+                </a:solidFill>
+                <a:highlight>
+                  <a:srgbClr val="FFFFFF"/>
+                </a:highlight>
+                <a:latin typeface="Courier New"/>
+                <a:ea typeface="Courier New"/>
+                <a:cs typeface="Courier New"/>
+                <a:sym typeface="Courier New"/>
+              </a:rPr>
+              <a:t>- </a:t>
+            </a:r>
+            <a:r>
+              <a:rPr b="1" lang="en" sz="2000">
+                <a:solidFill>
+                  <a:schemeClr val="dk1"/>
+                </a:solidFill>
+                <a:highlight>
+                  <a:srgbClr val="FFFFFF"/>
+                </a:highlight>
+                <a:latin typeface="Courier New"/>
+                <a:ea typeface="Courier New"/>
+                <a:cs typeface="Courier New"/>
+                <a:sym typeface="Courier New"/>
+              </a:rPr>
+              <a:t>Area Overhead:</a:t>
+            </a:r>
+            <a:r>
+              <a:rPr lang="en" sz="2000">
+                <a:solidFill>
+                  <a:schemeClr val="dk1"/>
+                </a:solidFill>
+                <a:highlight>
+                  <a:srgbClr val="FFFFFF"/>
+                </a:highlight>
+                <a:latin typeface="Courier New"/>
+                <a:ea typeface="Courier New"/>
+                <a:cs typeface="Courier New"/>
+                <a:sym typeface="Courier New"/>
+              </a:rPr>
+              <a:t> Duplicate control path logic</a:t>
+            </a:r>
+            <a:endParaRPr sz="2000">
+              <a:solidFill>
+                <a:schemeClr val="dk1"/>
+              </a:solidFill>
+              <a:highlight>
+                <a:srgbClr val="FFFFFF"/>
+              </a:highlight>
+              <a:latin typeface="Courier New"/>
+              <a:ea typeface="Courier New"/>
+              <a:cs typeface="Courier New"/>
+              <a:sym typeface="Courier New"/>
+            </a:endParaRPr>
+          </a:p>
+          <a:p>
+            <a:pPr indent="0" lvl="0" marL="0" rtl="0" algn="l">
+              <a:lnSpc>
+                <a:spcPct val="135714"/>
+              </a:lnSpc>
+              <a:spcBef>
+                <a:spcPts val="0"/>
+              </a:spcBef>
+              <a:spcAft>
+                <a:spcPts val="0"/>
+              </a:spcAft>
+              <a:buClr>
+                <a:schemeClr val="dk1"/>
+              </a:buClr>
+              <a:buSzPts val="1100"/>
+              <a:buFont typeface="Arial"/>
+              <a:buNone/>
+            </a:pPr>
+            <a:r>
+              <a:rPr lang="en" sz="2000">
+                <a:solidFill>
+                  <a:schemeClr val="dk1"/>
+                </a:solidFill>
+                <a:highlight>
+                  <a:srgbClr val="FFFFFF"/>
+                </a:highlight>
+                <a:latin typeface="Courier New"/>
+                <a:ea typeface="Courier New"/>
+                <a:cs typeface="Courier New"/>
+                <a:sym typeface="Courier New"/>
+              </a:rPr>
+              <a:t>- </a:t>
+            </a:r>
+            <a:r>
+              <a:rPr b="1" lang="en" sz="2000">
+                <a:solidFill>
+                  <a:schemeClr val="dk1"/>
+                </a:solidFill>
+                <a:highlight>
+                  <a:srgbClr val="FFFFFF"/>
+                </a:highlight>
+                <a:latin typeface="Courier New"/>
+                <a:ea typeface="Courier New"/>
+                <a:cs typeface="Courier New"/>
+                <a:sym typeface="Courier New"/>
+              </a:rPr>
+              <a:t>Complexity:</a:t>
+            </a:r>
+            <a:r>
+              <a:rPr lang="en" sz="2000">
+                <a:solidFill>
+                  <a:schemeClr val="dk1"/>
+                </a:solidFill>
+                <a:highlight>
+                  <a:srgbClr val="FFFFFF"/>
+                </a:highlight>
+                <a:latin typeface="Courier New"/>
+                <a:ea typeface="Courier New"/>
+                <a:cs typeface="Courier New"/>
+                <a:sym typeface="Courier New"/>
+              </a:rPr>
+              <a:t> Mode switching introduces timing considerations</a:t>
+            </a:r>
+            <a:endParaRPr sz="2000">
+              <a:solidFill>
+                <a:schemeClr val="dk1"/>
+              </a:solidFill>
+              <a:highlight>
+                <a:srgbClr val="FFFFFF"/>
+              </a:highlight>
+              <a:latin typeface="Courier New"/>
+              <a:ea typeface="Courier New"/>
+              <a:cs typeface="Courier New"/>
+              <a:sym typeface="Courier New"/>
+            </a:endParaRPr>
+          </a:p>
+          <a:p>
+            <a:pPr indent="0" lvl="0" marL="0" rtl="0" algn="l">
+              <a:lnSpc>
+                <a:spcPct val="135714"/>
+              </a:lnSpc>
+              <a:spcBef>
+                <a:spcPts val="0"/>
+              </a:spcBef>
+              <a:spcAft>
+                <a:spcPts val="0"/>
+              </a:spcAft>
+              <a:buClr>
+                <a:schemeClr val="dk1"/>
+              </a:buClr>
+              <a:buSzPts val="1100"/>
+              <a:buFont typeface="Arial"/>
+              <a:buNone/>
+            </a:pPr>
+            <a:r>
+              <a:rPr lang="en" sz="2000">
+                <a:solidFill>
+                  <a:schemeClr val="dk1"/>
+                </a:solidFill>
+                <a:highlight>
+                  <a:srgbClr val="FFFFFF"/>
+                </a:highlight>
+                <a:latin typeface="Courier New"/>
+                <a:ea typeface="Courier New"/>
+                <a:cs typeface="Courier New"/>
+                <a:sym typeface="Courier New"/>
+              </a:rPr>
+              <a:t>- </a:t>
+            </a:r>
+            <a:r>
+              <a:rPr b="1" lang="en" sz="2000">
+                <a:solidFill>
+                  <a:schemeClr val="dk1"/>
+                </a:solidFill>
+                <a:highlight>
+                  <a:srgbClr val="FFFFFF"/>
+                </a:highlight>
+                <a:latin typeface="Courier New"/>
+                <a:ea typeface="Courier New"/>
+                <a:cs typeface="Courier New"/>
+                <a:sym typeface="Courier New"/>
+              </a:rPr>
+              <a:t>Latency:</a:t>
+            </a:r>
+            <a:r>
+              <a:rPr lang="en" sz="2000">
+                <a:solidFill>
+                  <a:schemeClr val="dk1"/>
+                </a:solidFill>
+                <a:highlight>
+                  <a:srgbClr val="FFFFFF"/>
+                </a:highlight>
+                <a:latin typeface="Courier New"/>
+                <a:ea typeface="Courier New"/>
+                <a:cs typeface="Courier New"/>
+                <a:sym typeface="Courier New"/>
+              </a:rPr>
+              <a:t> Low-power mode adds pipeline register delay</a:t>
+            </a:r>
+            <a:endParaRPr sz="2000">
+              <a:solidFill>
+                <a:schemeClr val="dk1"/>
+              </a:solidFill>
+              <a:highlight>
+                <a:srgbClr val="FFFFFF"/>
+              </a:highlight>
+              <a:latin typeface="Courier New"/>
+              <a:ea typeface="Courier New"/>
+              <a:cs typeface="Courier New"/>
+              <a:sym typeface="Courier New"/>
+            </a:endParaRPr>
+          </a:p>
+          <a:p>
+            <a:pPr indent="0" lvl="0" marL="0" rtl="0" algn="l">
+              <a:lnSpc>
+                <a:spcPct val="135714"/>
+              </a:lnSpc>
+              <a:spcBef>
+                <a:spcPts val="0"/>
+              </a:spcBef>
+              <a:spcAft>
+                <a:spcPts val="0"/>
+              </a:spcAft>
+              <a:buClr>
+                <a:schemeClr val="dk1"/>
+              </a:buClr>
+              <a:buSzPts val="1100"/>
+              <a:buFont typeface="Arial"/>
+              <a:buNone/>
+            </a:pPr>
+            <a:r>
+              <a:rPr lang="en" sz="2000">
+                <a:solidFill>
+                  <a:schemeClr val="dk1"/>
+                </a:solidFill>
+                <a:highlight>
+                  <a:srgbClr val="FFFFFF"/>
+                </a:highlight>
+                <a:latin typeface="Courier New"/>
+                <a:ea typeface="Courier New"/>
+                <a:cs typeface="Courier New"/>
+                <a:sym typeface="Courier New"/>
+              </a:rPr>
+              <a:t>- </a:t>
+            </a:r>
+            <a:r>
+              <a:rPr b="1" lang="en" sz="2000">
+                <a:solidFill>
+                  <a:schemeClr val="dk1"/>
+                </a:solidFill>
+                <a:highlight>
+                  <a:srgbClr val="FFFFFF"/>
+                </a:highlight>
+                <a:latin typeface="Courier New"/>
+                <a:ea typeface="Courier New"/>
+                <a:cs typeface="Courier New"/>
+                <a:sym typeface="Courier New"/>
+              </a:rPr>
+              <a:t>Design Effort:</a:t>
+            </a:r>
+            <a:r>
+              <a:rPr lang="en" sz="2000">
+                <a:solidFill>
+                  <a:schemeClr val="dk1"/>
+                </a:solidFill>
+                <a:highlight>
+                  <a:srgbClr val="FFFFFF"/>
+                </a:highlight>
+                <a:latin typeface="Courier New"/>
+                <a:ea typeface="Courier New"/>
+                <a:cs typeface="Courier New"/>
+                <a:sym typeface="Courier New"/>
+              </a:rPr>
+              <a:t> Need to maintain two control units</a:t>
+            </a:r>
+            <a:endParaRPr sz="2000">
+              <a:solidFill>
+                <a:schemeClr val="dk1"/>
+              </a:solidFill>
+              <a:highlight>
+                <a:srgbClr val="FFFFFF"/>
+              </a:highlight>
+              <a:latin typeface="Courier New"/>
+              <a:ea typeface="Courier New"/>
+              <a:cs typeface="Courier New"/>
+              <a:sym typeface="Courier New"/>
+            </a:endParaRPr>
+          </a:p>
+          <a:p>
+            <a:pPr indent="0" lvl="0" marL="0" rtl="0" algn="l">
+              <a:spcBef>
+                <a:spcPts val="0"/>
+              </a:spcBef>
+              <a:spcAft>
+                <a:spcPts val="1200"/>
+              </a:spcAft>
+              <a:buNone/>
+            </a:pPr>
+            <a:r>
+              <a:t/>
+            </a:r>
+            <a:endParaRPr sz="2000">
+              <a:solidFill>
+                <a:schemeClr val="dk1"/>
+              </a:solidFill>
+              <a:highlight>
+                <a:srgbClr val="FFFFFF"/>
+              </a:highlight>
+              <a:latin typeface="Courier New"/>
+              <a:ea typeface="Courier New"/>
+              <a:cs typeface="Courier New"/>
+              <a:sym typeface="Courier New"/>
+            </a:endParaRPr>
+          </a:p>
+        </p:txBody>
+      </p:sp>
+    </p:spTree>
+  </p:cSld>
+  <p:clrMapOvr>
+    <a:masterClrMapping/>
+  </p:clrMapOvr>
+</p:sld>
+</file>
+
+<file path=ppt/slides/slide11.xml><?xml version="1.0" encoding="utf-8"?>
+<p:sld xmlns:a="http://schemas.openxmlformats.org/drawingml/2006/main" xmlns:r="http://schemas.openxmlformats.org/officeDocument/2006/relationships" xmlns:mc="http://schemas.openxmlformats.org/markup-compatibility/2006" xmlns:mv="urn:schemas-microsoft-com:mac:vml" xmlns:p="http://schemas.openxmlformats.org/presentationml/2006/main" xmlns:c="http://schemas.openxmlformats.org/drawingml/2006/chart" xmlns:dgm="http://schemas.openxmlformats.org/drawingml/2006/diagram" xmlns:o="urn:schemas-microsoft-com:office:office" xmlns:v="urn:schemas-microsoft-com:vml" xmlns:pvml="urn:schemas-microsoft-com:office:powerpoint" xmlns:com="http://schemas.openxmlformats.org/drawingml/2006/compatibility" xmlns:p14="http://schemas.microsoft.com/office/powerpoint/2010/main" xmlns:p15="http://schemas.microsoft.com/office/powerpoint/2012/main" xmlns:ahyp="http://schemas.microsoft.com/office/drawing/2018/hyperlinkcolor">
+  <p:cSld>
+    <p:spTree>
+      <p:nvGrpSpPr>
+        <p:cNvPr id="114" name="Shape 114"/>
+        <p:cNvGrpSpPr/>
+        <p:nvPr/>
+      </p:nvGrpSpPr>
+      <p:grpSpPr>
+        <a:xfrm>
+          <a:off x="0" y="0"/>
+          <a:ext cx="0" cy="0"/>
+          <a:chOff x="0" y="0"/>
+          <a:chExt cx="0" cy="0"/>
+        </a:xfrm>
+      </p:grpSpPr>
+      <p:sp>
+        <p:nvSpPr>
+          <p:cNvPr id="115" name="Google Shape;115;p23"/>
+          <p:cNvSpPr txBox="1"/>
+          <p:nvPr>
+            <p:ph type="title"/>
+          </p:nvPr>
+        </p:nvSpPr>
+        <p:spPr>
+          <a:xfrm>
+            <a:off x="311700" y="445025"/>
+            <a:ext cx="8520600" cy="572700"/>
+          </a:xfrm>
+          <a:prstGeom prst="rect">
+            <a:avLst/>
+          </a:prstGeom>
+        </p:spPr>
+        <p:txBody>
+          <a:bodyPr anchorCtr="0" anchor="t" bIns="91425" lIns="91425" spcFirstLastPara="1" rIns="91425" wrap="square" tIns="91425">
+            <a:noAutofit/>
+          </a:bodyPr>
+          <a:lstStyle/>
+          <a:p>
+            <a:pPr indent="0" lvl="0" marL="0" rtl="0" algn="l">
+              <a:spcBef>
+                <a:spcPts val="0"/>
+              </a:spcBef>
+              <a:spcAft>
+                <a:spcPts val="0"/>
+              </a:spcAft>
+              <a:buNone/>
+            </a:pPr>
+            <a:r>
+              <a:rPr b="1" lang="en" sz="3600">
+                <a:highlight>
+                  <a:schemeClr val="lt1"/>
+                </a:highlight>
+                <a:latin typeface="Courier New"/>
+                <a:ea typeface="Courier New"/>
+                <a:cs typeface="Courier New"/>
+                <a:sym typeface="Courier New"/>
+              </a:rPr>
+              <a:t>CONCLUSION</a:t>
+            </a:r>
+            <a:endParaRPr sz="3600">
+              <a:highlight>
+                <a:schemeClr val="lt1"/>
+              </a:highlight>
+            </a:endParaRPr>
+          </a:p>
+        </p:txBody>
+      </p:sp>
+      <p:sp>
+        <p:nvSpPr>
+          <p:cNvPr id="116" name="Google Shape;116;p23"/>
+          <p:cNvSpPr txBox="1"/>
+          <p:nvPr>
+            <p:ph idx="1" type="body"/>
+          </p:nvPr>
+        </p:nvSpPr>
+        <p:spPr>
+          <a:xfrm>
+            <a:off x="213475" y="1313850"/>
+            <a:ext cx="8768400" cy="3416400"/>
+          </a:xfrm>
+          <a:prstGeom prst="rect">
+            <a:avLst/>
+          </a:prstGeom>
+        </p:spPr>
+        <p:txBody>
+          <a:bodyPr anchorCtr="0" anchor="t" bIns="91425" lIns="91425" spcFirstLastPara="1" rIns="91425" wrap="square" tIns="91425">
+            <a:noAutofit/>
+          </a:bodyPr>
+          <a:lstStyle/>
+          <a:p>
+            <a:pPr indent="0" lvl="0" marL="0" rtl="0" algn="l">
+              <a:lnSpc>
+                <a:spcPct val="135714"/>
+              </a:lnSpc>
+              <a:spcBef>
+                <a:spcPts val="0"/>
+              </a:spcBef>
+              <a:spcAft>
+                <a:spcPts val="0"/>
+              </a:spcAft>
+              <a:buClr>
+                <a:schemeClr val="dk1"/>
+              </a:buClr>
+              <a:buSzPts val="1100"/>
+              <a:buFont typeface="Arial"/>
+              <a:buNone/>
+            </a:pPr>
+            <a:r>
+              <a:rPr lang="en" sz="1900">
+                <a:solidFill>
+                  <a:srgbClr val="0451A5"/>
+                </a:solidFill>
+                <a:highlight>
+                  <a:srgbClr val="FFFFFF"/>
+                </a:highlight>
+                <a:latin typeface="Courier New"/>
+                <a:ea typeface="Courier New"/>
+                <a:cs typeface="Courier New"/>
+                <a:sym typeface="Courier New"/>
+              </a:rPr>
+              <a:t>-</a:t>
+            </a:r>
+            <a:r>
+              <a:rPr lang="en" sz="1900">
+                <a:solidFill>
+                  <a:schemeClr val="dk1"/>
+                </a:solidFill>
+                <a:highlight>
+                  <a:srgbClr val="FFFFFF"/>
+                </a:highlight>
+                <a:latin typeface="Courier New"/>
+                <a:ea typeface="Courier New"/>
+                <a:cs typeface="Courier New"/>
+                <a:sym typeface="Courier New"/>
+              </a:rPr>
+              <a:t> Successfully implemented adaptive control unit in SystemVerilog</a:t>
+            </a:r>
+            <a:endParaRPr sz="1900">
+              <a:solidFill>
+                <a:schemeClr val="dk1"/>
+              </a:solidFill>
+              <a:highlight>
+                <a:srgbClr val="FFFFFF"/>
+              </a:highlight>
+              <a:latin typeface="Courier New"/>
+              <a:ea typeface="Courier New"/>
+              <a:cs typeface="Courier New"/>
+              <a:sym typeface="Courier New"/>
+            </a:endParaRPr>
+          </a:p>
+          <a:p>
+            <a:pPr indent="0" lvl="0" marL="0" rtl="0" algn="l">
+              <a:lnSpc>
+                <a:spcPct val="135714"/>
+              </a:lnSpc>
+              <a:spcBef>
+                <a:spcPts val="0"/>
+              </a:spcBef>
+              <a:spcAft>
+                <a:spcPts val="0"/>
+              </a:spcAft>
+              <a:buClr>
+                <a:schemeClr val="dk1"/>
+              </a:buClr>
+              <a:buSzPts val="1100"/>
+              <a:buFont typeface="Arial"/>
+              <a:buNone/>
+            </a:pPr>
+            <a:r>
+              <a:rPr lang="en" sz="1900">
+                <a:solidFill>
+                  <a:srgbClr val="0451A5"/>
+                </a:solidFill>
+                <a:highlight>
+                  <a:srgbClr val="FFFFFF"/>
+                </a:highlight>
+                <a:latin typeface="Courier New"/>
+                <a:ea typeface="Courier New"/>
+                <a:cs typeface="Courier New"/>
+                <a:sym typeface="Courier New"/>
+              </a:rPr>
+              <a:t>-</a:t>
+            </a:r>
+            <a:r>
+              <a:rPr lang="en" sz="1900">
+                <a:solidFill>
+                  <a:schemeClr val="dk1"/>
+                </a:solidFill>
+                <a:highlight>
+                  <a:srgbClr val="FFFFFF"/>
+                </a:highlight>
+                <a:latin typeface="Courier New"/>
+                <a:ea typeface="Courier New"/>
+                <a:cs typeface="Courier New"/>
+                <a:sym typeface="Courier New"/>
+              </a:rPr>
+              <a:t> Demonstrated power-performance tradeoff via dual-mode design</a:t>
+            </a:r>
+            <a:endParaRPr sz="1900">
+              <a:solidFill>
+                <a:schemeClr val="dk1"/>
+              </a:solidFill>
+              <a:highlight>
+                <a:srgbClr val="FFFFFF"/>
+              </a:highlight>
+              <a:latin typeface="Courier New"/>
+              <a:ea typeface="Courier New"/>
+              <a:cs typeface="Courier New"/>
+              <a:sym typeface="Courier New"/>
+            </a:endParaRPr>
+          </a:p>
+          <a:p>
+            <a:pPr indent="0" lvl="0" marL="0" rtl="0" algn="l">
+              <a:lnSpc>
+                <a:spcPct val="135714"/>
+              </a:lnSpc>
+              <a:spcBef>
+                <a:spcPts val="0"/>
+              </a:spcBef>
+              <a:spcAft>
+                <a:spcPts val="0"/>
+              </a:spcAft>
+              <a:buClr>
+                <a:schemeClr val="dk1"/>
+              </a:buClr>
+              <a:buSzPts val="1100"/>
+              <a:buFont typeface="Arial"/>
+              <a:buNone/>
+            </a:pPr>
+            <a:r>
+              <a:rPr lang="en" sz="1900">
+                <a:solidFill>
+                  <a:srgbClr val="0451A5"/>
+                </a:solidFill>
+                <a:highlight>
+                  <a:srgbClr val="FFFFFF"/>
+                </a:highlight>
+                <a:latin typeface="Courier New"/>
+                <a:ea typeface="Courier New"/>
+                <a:cs typeface="Courier New"/>
+                <a:sym typeface="Courier New"/>
+              </a:rPr>
+              <a:t>-</a:t>
+            </a:r>
+            <a:r>
+              <a:rPr lang="en" sz="1900">
+                <a:solidFill>
+                  <a:schemeClr val="dk1"/>
+                </a:solidFill>
+                <a:highlight>
+                  <a:srgbClr val="FFFFFF"/>
+                </a:highlight>
+                <a:latin typeface="Courier New"/>
+                <a:ea typeface="Courier New"/>
+                <a:cs typeface="Courier New"/>
+                <a:sym typeface="Courier New"/>
+              </a:rPr>
+              <a:t> Verified functionality through comprehensive testbench</a:t>
+            </a:r>
+            <a:endParaRPr sz="1900">
+              <a:solidFill>
+                <a:schemeClr val="dk1"/>
+              </a:solidFill>
+              <a:highlight>
+                <a:srgbClr val="FFFFFF"/>
+              </a:highlight>
+              <a:latin typeface="Courier New"/>
+              <a:ea typeface="Courier New"/>
+              <a:cs typeface="Courier New"/>
+              <a:sym typeface="Courier New"/>
+            </a:endParaRPr>
+          </a:p>
+          <a:p>
+            <a:pPr indent="0" lvl="0" marL="0" rtl="0" algn="l">
+              <a:lnSpc>
+                <a:spcPct val="135714"/>
+              </a:lnSpc>
+              <a:spcBef>
+                <a:spcPts val="0"/>
+              </a:spcBef>
+              <a:spcAft>
+                <a:spcPts val="0"/>
+              </a:spcAft>
+              <a:buClr>
+                <a:schemeClr val="dk1"/>
+              </a:buClr>
+              <a:buSzPts val="1100"/>
+              <a:buFont typeface="Arial"/>
+              <a:buNone/>
+            </a:pPr>
+            <a:r>
+              <a:rPr lang="en" sz="1900">
+                <a:solidFill>
+                  <a:srgbClr val="0451A5"/>
+                </a:solidFill>
+                <a:highlight>
+                  <a:srgbClr val="FFFFFF"/>
+                </a:highlight>
+                <a:latin typeface="Courier New"/>
+                <a:ea typeface="Courier New"/>
+                <a:cs typeface="Courier New"/>
+                <a:sym typeface="Courier New"/>
+              </a:rPr>
+              <a:t>-</a:t>
+            </a:r>
+            <a:r>
+              <a:rPr lang="en" sz="1900">
+                <a:solidFill>
+                  <a:schemeClr val="dk1"/>
+                </a:solidFill>
+                <a:highlight>
+                  <a:srgbClr val="FFFFFF"/>
+                </a:highlight>
+                <a:latin typeface="Courier New"/>
+                <a:ea typeface="Courier New"/>
+                <a:cs typeface="Courier New"/>
+                <a:sym typeface="Courier New"/>
+              </a:rPr>
+              <a:t> Future work: Add more control modes, integrate with processor pipeline</a:t>
+            </a:r>
+            <a:endParaRPr sz="1900">
+              <a:solidFill>
+                <a:schemeClr val="dk1"/>
+              </a:solidFill>
+              <a:highlight>
+                <a:srgbClr val="FFFFFF"/>
+              </a:highlight>
+              <a:latin typeface="Courier New"/>
+              <a:ea typeface="Courier New"/>
+              <a:cs typeface="Courier New"/>
+              <a:sym typeface="Courier New"/>
+            </a:endParaRPr>
+          </a:p>
+          <a:p>
+            <a:pPr indent="0" lvl="0" marL="0" rtl="0" algn="l">
+              <a:spcBef>
+                <a:spcPts val="0"/>
+              </a:spcBef>
+              <a:spcAft>
+                <a:spcPts val="1200"/>
+              </a:spcAft>
+              <a:buNone/>
+            </a:pPr>
+            <a:r>
+              <a:t/>
+            </a:r>
+            <a:endParaRPr sz="1900">
+              <a:solidFill>
+                <a:schemeClr val="dk1"/>
+              </a:solidFill>
+              <a:highlight>
+                <a:srgbClr val="FFFFFF"/>
+              </a:highlight>
+              <a:latin typeface="Courier New"/>
+              <a:ea typeface="Courier New"/>
+              <a:cs typeface="Courier New"/>
+              <a:sym typeface="Courier New"/>
+            </a:endParaRPr>
+          </a:p>
+        </p:txBody>
+      </p:sp>
+    </p:spTree>
+  </p:cSld>
+  <p:clrMapOvr>
+    <a:masterClrMapping/>
+  </p:clrMapOvr>
+</p:sld>
+</file>
+
 <file path=ppt/slides/slide2.xml><?xml version="1.0" encoding="utf-8"?>
 <p:sld xmlns:a="http://schemas.openxmlformats.org/drawingml/2006/main" xmlns:r="http://schemas.openxmlformats.org/officeDocument/2006/relationships" xmlns:mc="http://schemas.openxmlformats.org/markup-compatibility/2006" xmlns:mv="urn:schemas-microsoft-com:mac:vml" xmlns:p="http://schemas.openxmlformats.org/presentationml/2006/main" xmlns:c="http://schemas.openxmlformats.org/drawingml/2006/chart" xmlns:dgm="http://schemas.openxmlformats.org/drawingml/2006/diagram" xmlns:o="urn:schemas-microsoft-com:office:office" xmlns:v="urn:schemas-microsoft-com:vml" xmlns:pvml="urn:schemas-microsoft-com:office:powerpoint" xmlns:com="http://schemas.openxmlformats.org/drawingml/2006/compatibility" xmlns:p14="http://schemas.microsoft.com/office/powerpoint/2010/main" xmlns:p15="http://schemas.microsoft.com/office/powerpoint/2012/main" xmlns:ahyp="http://schemas.microsoft.com/office/drawing/2018/hyperlinkcolor">
   <p:cSld>
@@ -7062,34 +8064,7 @@
               <a:buNone/>
             </a:pPr>
             <a:r>
-              <a:rPr lang="en" sz="2000">
-                <a:solidFill>
-                  <a:srgbClr val="0451A5"/>
-                </a:solidFill>
-                <a:highlight>
-                  <a:srgbClr val="FFFFFF"/>
-                </a:highlight>
-                <a:latin typeface="Courier New"/>
-                <a:ea typeface="Courier New"/>
-                <a:cs typeface="Courier New"/>
-                <a:sym typeface="Courier New"/>
-              </a:rPr>
-              <a:t>-</a:t>
-            </a:r>
-            <a:r>
-              <a:rPr lang="en" sz="2000">
-                <a:solidFill>
-                  <a:schemeClr val="dk1"/>
-                </a:solidFill>
-                <a:highlight>
-                  <a:srgbClr val="FFFFFF"/>
-                </a:highlight>
-                <a:latin typeface="Courier New"/>
-                <a:ea typeface="Courier New"/>
-                <a:cs typeface="Courier New"/>
-                <a:sym typeface="Courier New"/>
-              </a:rPr>
-              <a:t> Verify functionality through UVM-style testbench</a:t>
+              <a:t/>
             </a:r>
             <a:endParaRPr sz="2000">
               <a:solidFill>
@@ -8246,97 +9221,6 @@
                 <a:cs typeface="Courier New"/>
                 <a:sym typeface="Courier New"/>
               </a:rPr>
-              <a:t>Output</a:t>
-            </a:r>
-            <a:r>
-              <a:rPr lang="en" sz="2000">
-                <a:solidFill>
-                  <a:schemeClr val="dk1"/>
-                </a:solidFill>
-                <a:highlight>
-                  <a:srgbClr val="FFFFFF"/>
-                </a:highlight>
-                <a:latin typeface="Courier New"/>
-                <a:ea typeface="Courier New"/>
-                <a:cs typeface="Courier New"/>
-                <a:sym typeface="Courier New"/>
-              </a:rPr>
-              <a:t>: reg_write, mem_read, mem_write, alu_src, alu_op, branch</a:t>
-            </a:r>
-            <a:endParaRPr sz="2000">
-              <a:solidFill>
-                <a:schemeClr val="dk1"/>
-              </a:solidFill>
-              <a:highlight>
-                <a:srgbClr val="FFFFFF"/>
-              </a:highlight>
-              <a:latin typeface="Courier New"/>
-              <a:ea typeface="Courier New"/>
-              <a:cs typeface="Courier New"/>
-              <a:sym typeface="Courier New"/>
-            </a:endParaRPr>
-          </a:p>
-          <a:p>
-            <a:pPr indent="0" lvl="0" marL="0" rtl="0" algn="l">
-              <a:lnSpc>
-                <a:spcPct val="135714"/>
-              </a:lnSpc>
-              <a:spcBef>
-                <a:spcPts val="0"/>
-              </a:spcBef>
-              <a:spcAft>
-                <a:spcPts val="0"/>
-              </a:spcAft>
-              <a:buClr>
-                <a:schemeClr val="dk1"/>
-              </a:buClr>
-              <a:buSzPts val="1100"/>
-              <a:buFont typeface="Arial"/>
-              <a:buNone/>
-            </a:pPr>
-            <a:r>
-              <a:rPr lang="en" sz="2000">
-                <a:solidFill>
-                  <a:srgbClr val="0451A5"/>
-                </a:solidFill>
-                <a:highlight>
-                  <a:srgbClr val="FFFFFF"/>
-                </a:highlight>
-                <a:latin typeface="Courier New"/>
-                <a:ea typeface="Courier New"/>
-                <a:cs typeface="Courier New"/>
-                <a:sym typeface="Courier New"/>
-              </a:rPr>
-              <a:t>-</a:t>
-            </a:r>
-            <a:r>
-              <a:rPr lang="en" sz="2000">
-                <a:solidFill>
-                  <a:schemeClr val="dk1"/>
-                </a:solidFill>
-                <a:highlight>
-                  <a:srgbClr val="FFFFFF"/>
-                </a:highlight>
-                <a:latin typeface="Courier New"/>
-                <a:ea typeface="Courier New"/>
-                <a:cs typeface="Courier New"/>
-                <a:sym typeface="Courier New"/>
-              </a:rPr>
-              <a:t> </a:t>
-            </a:r>
-            <a:r>
-              <a:rPr b="1" lang="en" sz="2000">
-                <a:solidFill>
-                  <a:schemeClr val="dk1"/>
-                </a:solidFill>
-                <a:highlight>
-                  <a:srgbClr val="FFFFFF"/>
-                </a:highlight>
-                <a:latin typeface="Courier New"/>
-                <a:ea typeface="Courier New"/>
-                <a:cs typeface="Courier New"/>
-                <a:sym typeface="Courier New"/>
-              </a:rPr>
               <a:t>Mode=0</a:t>
             </a:r>
             <a:r>
@@ -8648,7 +9532,7 @@
                 <a:cs typeface="Courier New"/>
                 <a:sym typeface="Courier New"/>
               </a:rPr>
-              <a:t>ADVANTAGES</a:t>
+              <a:t>POWER REPORT</a:t>
             </a:r>
             <a:endParaRPr sz="3600">
               <a:highlight>
@@ -8658,436 +9542,34 @@
           </a:p>
         </p:txBody>
       </p:sp>
-      <p:sp>
-        <p:nvSpPr>
+      <p:pic>
+        <p:nvPicPr>
           <p:cNvPr id="92" name="Google Shape;92;p19"/>
-          <p:cNvSpPr txBox="1"/>
-          <p:nvPr>
-            <p:ph idx="1" type="body"/>
-          </p:nvPr>
-        </p:nvSpPr>
+          <p:cNvPicPr preferRelativeResize="0"/>
+          <p:nvPr/>
+        </p:nvPicPr>
+        <p:blipFill>
+          <a:blip r:embed="rId3">
+            <a:alphaModFix/>
+          </a:blip>
+          <a:stretch>
+            <a:fillRect/>
+          </a:stretch>
+        </p:blipFill>
         <p:spPr>
           <a:xfrm>
-            <a:off x="213475" y="1313850"/>
-            <a:ext cx="8520600" cy="3416400"/>
+            <a:off x="213476" y="1650676"/>
+            <a:ext cx="8520599" cy="1783381"/>
           </a:xfrm>
           <a:prstGeom prst="rect">
             <a:avLst/>
           </a:prstGeom>
+          <a:noFill/>
+          <a:ln>
+            <a:noFill/>
+          </a:ln>
         </p:spPr>
-        <p:txBody>
-          <a:bodyPr anchorCtr="0" anchor="t" bIns="91425" lIns="91425" spcFirstLastPara="1" rIns="91425" wrap="square" tIns="91425">
-            <a:noAutofit/>
-          </a:bodyPr>
-          <a:lstStyle/>
-          <a:p>
-            <a:pPr indent="0" lvl="0" marL="0" rtl="0" algn="l">
-              <a:lnSpc>
-                <a:spcPct val="135714"/>
-              </a:lnSpc>
-              <a:spcBef>
-                <a:spcPts val="0"/>
-              </a:spcBef>
-              <a:spcAft>
-                <a:spcPts val="0"/>
-              </a:spcAft>
-              <a:buClr>
-                <a:schemeClr val="dk1"/>
-              </a:buClr>
-              <a:buSzPts val="1100"/>
-              <a:buFont typeface="Arial"/>
-              <a:buNone/>
-            </a:pPr>
-            <a:r>
-              <a:rPr lang="en" sz="2000">
-                <a:solidFill>
-                  <a:schemeClr val="dk1"/>
-                </a:solidFill>
-                <a:highlight>
-                  <a:srgbClr val="FFFFFF"/>
-                </a:highlight>
-                <a:latin typeface="Courier New"/>
-                <a:ea typeface="Courier New"/>
-                <a:cs typeface="Courier New"/>
-                <a:sym typeface="Courier New"/>
-              </a:rPr>
-              <a:t>- </a:t>
-            </a:r>
-            <a:r>
-              <a:rPr b="1" lang="en" sz="2000">
-                <a:solidFill>
-                  <a:schemeClr val="dk1"/>
-                </a:solidFill>
-                <a:highlight>
-                  <a:srgbClr val="FFFFFF"/>
-                </a:highlight>
-                <a:latin typeface="Courier New"/>
-                <a:ea typeface="Courier New"/>
-                <a:cs typeface="Courier New"/>
-                <a:sym typeface="Courier New"/>
-              </a:rPr>
-              <a:t>Flexibility:</a:t>
-            </a:r>
-            <a:r>
-              <a:rPr lang="en" sz="2000">
-                <a:solidFill>
-                  <a:schemeClr val="dk1"/>
-                </a:solidFill>
-                <a:highlight>
-                  <a:srgbClr val="FFFFFF"/>
-                </a:highlight>
-                <a:latin typeface="Courier New"/>
-                <a:ea typeface="Courier New"/>
-                <a:cs typeface="Courier New"/>
-                <a:sym typeface="Courier New"/>
-              </a:rPr>
-              <a:t> Dynamic runtime mode switching</a:t>
-            </a:r>
-            <a:endParaRPr sz="2000">
-              <a:solidFill>
-                <a:schemeClr val="dk1"/>
-              </a:solidFill>
-              <a:highlight>
-                <a:srgbClr val="FFFFFF"/>
-              </a:highlight>
-              <a:latin typeface="Courier New"/>
-              <a:ea typeface="Courier New"/>
-              <a:cs typeface="Courier New"/>
-              <a:sym typeface="Courier New"/>
-            </a:endParaRPr>
-          </a:p>
-          <a:p>
-            <a:pPr indent="0" lvl="0" marL="0" rtl="0" algn="l">
-              <a:lnSpc>
-                <a:spcPct val="135714"/>
-              </a:lnSpc>
-              <a:spcBef>
-                <a:spcPts val="0"/>
-              </a:spcBef>
-              <a:spcAft>
-                <a:spcPts val="0"/>
-              </a:spcAft>
-              <a:buClr>
-                <a:schemeClr val="dk1"/>
-              </a:buClr>
-              <a:buSzPts val="1100"/>
-              <a:buFont typeface="Arial"/>
-              <a:buNone/>
-            </a:pPr>
-            <a:r>
-              <a:rPr lang="en" sz="2000">
-                <a:solidFill>
-                  <a:schemeClr val="dk1"/>
-                </a:solidFill>
-                <a:highlight>
-                  <a:srgbClr val="FFFFFF"/>
-                </a:highlight>
-                <a:latin typeface="Courier New"/>
-                <a:ea typeface="Courier New"/>
-                <a:cs typeface="Courier New"/>
-                <a:sym typeface="Courier New"/>
-              </a:rPr>
-              <a:t>- </a:t>
-            </a:r>
-            <a:r>
-              <a:rPr b="1" lang="en" sz="2000">
-                <a:solidFill>
-                  <a:schemeClr val="dk1"/>
-                </a:solidFill>
-                <a:highlight>
-                  <a:srgbClr val="FFFFFF"/>
-                </a:highlight>
-                <a:latin typeface="Courier New"/>
-                <a:ea typeface="Courier New"/>
-                <a:cs typeface="Courier New"/>
-                <a:sym typeface="Courier New"/>
-              </a:rPr>
-              <a:t>Power Saving:</a:t>
-            </a:r>
-            <a:r>
-              <a:rPr lang="en" sz="2000">
-                <a:solidFill>
-                  <a:schemeClr val="dk1"/>
-                </a:solidFill>
-                <a:highlight>
-                  <a:srgbClr val="FFFFFF"/>
-                </a:highlight>
-                <a:latin typeface="Courier New"/>
-                <a:ea typeface="Courier New"/>
-                <a:cs typeface="Courier New"/>
-                <a:sym typeface="Courier New"/>
-              </a:rPr>
-              <a:t> Use low-power mode for simple tasks</a:t>
-            </a:r>
-            <a:endParaRPr sz="2000">
-              <a:solidFill>
-                <a:schemeClr val="dk1"/>
-              </a:solidFill>
-              <a:highlight>
-                <a:srgbClr val="FFFFFF"/>
-              </a:highlight>
-              <a:latin typeface="Courier New"/>
-              <a:ea typeface="Courier New"/>
-              <a:cs typeface="Courier New"/>
-              <a:sym typeface="Courier New"/>
-            </a:endParaRPr>
-          </a:p>
-          <a:p>
-            <a:pPr indent="0" lvl="0" marL="0" rtl="0" algn="l">
-              <a:lnSpc>
-                <a:spcPct val="135714"/>
-              </a:lnSpc>
-              <a:spcBef>
-                <a:spcPts val="0"/>
-              </a:spcBef>
-              <a:spcAft>
-                <a:spcPts val="0"/>
-              </a:spcAft>
-              <a:buClr>
-                <a:schemeClr val="dk1"/>
-              </a:buClr>
-              <a:buSzPts val="1100"/>
-              <a:buFont typeface="Arial"/>
-              <a:buNone/>
-            </a:pPr>
-            <a:r>
-              <a:rPr lang="en" sz="2000">
-                <a:solidFill>
-                  <a:schemeClr val="dk1"/>
-                </a:solidFill>
-                <a:highlight>
-                  <a:srgbClr val="FFFFFF"/>
-                </a:highlight>
-                <a:latin typeface="Courier New"/>
-                <a:ea typeface="Courier New"/>
-                <a:cs typeface="Courier New"/>
-                <a:sym typeface="Courier New"/>
-              </a:rPr>
-              <a:t>- </a:t>
-            </a:r>
-            <a:r>
-              <a:rPr b="1" lang="en" sz="2000">
-                <a:solidFill>
-                  <a:schemeClr val="dk1"/>
-                </a:solidFill>
-                <a:highlight>
-                  <a:srgbClr val="FFFFFF"/>
-                </a:highlight>
-                <a:latin typeface="Courier New"/>
-                <a:ea typeface="Courier New"/>
-                <a:cs typeface="Courier New"/>
-                <a:sym typeface="Courier New"/>
-              </a:rPr>
-              <a:t>Performance:</a:t>
-            </a:r>
-            <a:r>
-              <a:rPr lang="en" sz="2000">
-                <a:solidFill>
-                  <a:schemeClr val="dk1"/>
-                </a:solidFill>
-                <a:highlight>
-                  <a:srgbClr val="FFFFFF"/>
-                </a:highlight>
-                <a:latin typeface="Courier New"/>
-                <a:ea typeface="Courier New"/>
-                <a:cs typeface="Courier New"/>
-                <a:sym typeface="Courier New"/>
-              </a:rPr>
-              <a:t> Use high-perf mode for critical operations</a:t>
-            </a:r>
-            <a:endParaRPr sz="2000">
-              <a:solidFill>
-                <a:schemeClr val="dk1"/>
-              </a:solidFill>
-              <a:highlight>
-                <a:srgbClr val="FFFFFF"/>
-              </a:highlight>
-              <a:latin typeface="Courier New"/>
-              <a:ea typeface="Courier New"/>
-              <a:cs typeface="Courier New"/>
-              <a:sym typeface="Courier New"/>
-            </a:endParaRPr>
-          </a:p>
-          <a:p>
-            <a:pPr indent="0" lvl="0" marL="0" rtl="0" algn="l">
-              <a:lnSpc>
-                <a:spcPct val="135714"/>
-              </a:lnSpc>
-              <a:spcBef>
-                <a:spcPts val="0"/>
-              </a:spcBef>
-              <a:spcAft>
-                <a:spcPts val="0"/>
-              </a:spcAft>
-              <a:buClr>
-                <a:schemeClr val="dk1"/>
-              </a:buClr>
-              <a:buSzPts val="1100"/>
-              <a:buFont typeface="Arial"/>
-              <a:buNone/>
-            </a:pPr>
-            <a:r>
-              <a:rPr lang="en" sz="2000">
-                <a:solidFill>
-                  <a:schemeClr val="dk1"/>
-                </a:solidFill>
-                <a:highlight>
-                  <a:srgbClr val="FFFFFF"/>
-                </a:highlight>
-                <a:latin typeface="Courier New"/>
-                <a:ea typeface="Courier New"/>
-                <a:cs typeface="Courier New"/>
-                <a:sym typeface="Courier New"/>
-              </a:rPr>
-              <a:t>- </a:t>
-            </a:r>
-            <a:r>
-              <a:rPr b="1" lang="en" sz="2000">
-                <a:solidFill>
-                  <a:schemeClr val="dk1"/>
-                </a:solidFill>
-                <a:highlight>
-                  <a:srgbClr val="FFFFFF"/>
-                </a:highlight>
-                <a:latin typeface="Courier New"/>
-                <a:ea typeface="Courier New"/>
-                <a:cs typeface="Courier New"/>
-                <a:sym typeface="Courier New"/>
-              </a:rPr>
-              <a:t>Scalability:</a:t>
-            </a:r>
-            <a:r>
-              <a:rPr lang="en" sz="2000">
-                <a:solidFill>
-                  <a:schemeClr val="dk1"/>
-                </a:solidFill>
-                <a:highlight>
-                  <a:srgbClr val="FFFFFF"/>
-                </a:highlight>
-                <a:latin typeface="Courier New"/>
-                <a:ea typeface="Courier New"/>
-                <a:cs typeface="Courier New"/>
-                <a:sym typeface="Courier New"/>
-              </a:rPr>
-              <a:t> Architecture easily extensible</a:t>
-            </a:r>
-            <a:endParaRPr sz="2000">
-              <a:solidFill>
-                <a:schemeClr val="dk1"/>
-              </a:solidFill>
-              <a:highlight>
-                <a:srgbClr val="FFFFFF"/>
-              </a:highlight>
-              <a:latin typeface="Courier New"/>
-              <a:ea typeface="Courier New"/>
-              <a:cs typeface="Courier New"/>
-              <a:sym typeface="Courier New"/>
-            </a:endParaRPr>
-          </a:p>
-          <a:p>
-            <a:pPr indent="0" lvl="0" marL="0" rtl="0" algn="l">
-              <a:lnSpc>
-                <a:spcPct val="135714"/>
-              </a:lnSpc>
-              <a:spcBef>
-                <a:spcPts val="0"/>
-              </a:spcBef>
-              <a:spcAft>
-                <a:spcPts val="0"/>
-              </a:spcAft>
-              <a:buClr>
-                <a:schemeClr val="dk1"/>
-              </a:buClr>
-              <a:buSzPts val="1100"/>
-              <a:buFont typeface="Arial"/>
-              <a:buNone/>
-            </a:pPr>
-            <a:r>
-              <a:rPr lang="en" sz="2000">
-                <a:solidFill>
-                  <a:schemeClr val="dk1"/>
-                </a:solidFill>
-                <a:highlight>
-                  <a:srgbClr val="FFFFFF"/>
-                </a:highlight>
-                <a:latin typeface="Courier New"/>
-                <a:ea typeface="Courier New"/>
-                <a:cs typeface="Courier New"/>
-                <a:sym typeface="Courier New"/>
-              </a:rPr>
-              <a:t>- </a:t>
-            </a:r>
-            <a:r>
-              <a:rPr b="1" lang="en" sz="2000">
-                <a:solidFill>
-                  <a:schemeClr val="dk1"/>
-                </a:solidFill>
-                <a:highlight>
-                  <a:srgbClr val="FFFFFF"/>
-                </a:highlight>
-                <a:latin typeface="Courier New"/>
-                <a:ea typeface="Courier New"/>
-                <a:cs typeface="Courier New"/>
-                <a:sym typeface="Courier New"/>
-              </a:rPr>
-              <a:t>Verification:</a:t>
-            </a:r>
-            <a:r>
-              <a:rPr lang="en" sz="2000">
-                <a:solidFill>
-                  <a:schemeClr val="dk1"/>
-                </a:solidFill>
-                <a:highlight>
-                  <a:srgbClr val="FFFFFF"/>
-                </a:highlight>
-                <a:latin typeface="Courier New"/>
-                <a:ea typeface="Courier New"/>
-                <a:cs typeface="Courier New"/>
-                <a:sym typeface="Courier New"/>
-              </a:rPr>
-              <a:t> UVM-style testbench with comprehensive coverage</a:t>
-            </a:r>
-            <a:endParaRPr sz="2000">
-              <a:solidFill>
-                <a:schemeClr val="dk1"/>
-              </a:solidFill>
-              <a:highlight>
-                <a:srgbClr val="FFFFFF"/>
-              </a:highlight>
-              <a:latin typeface="Courier New"/>
-              <a:ea typeface="Courier New"/>
-              <a:cs typeface="Courier New"/>
-              <a:sym typeface="Courier New"/>
-            </a:endParaRPr>
-          </a:p>
-          <a:p>
-            <a:pPr indent="0" lvl="0" marL="0" rtl="0" algn="l">
-              <a:spcBef>
-                <a:spcPts val="0"/>
-              </a:spcBef>
-              <a:spcAft>
-                <a:spcPts val="1200"/>
-              </a:spcAft>
-              <a:buNone/>
-            </a:pPr>
-            <a:r>
-              <a:t/>
-            </a:r>
-            <a:endParaRPr sz="2000">
-              <a:solidFill>
-                <a:schemeClr val="dk1"/>
-              </a:solidFill>
-              <a:highlight>
-                <a:srgbClr val="FFFFFF"/>
-              </a:highlight>
-              <a:latin typeface="Courier New"/>
-              <a:ea typeface="Courier New"/>
-              <a:cs typeface="Courier New"/>
-              <a:sym typeface="Courier New"/>
-            </a:endParaRPr>
-          </a:p>
-        </p:txBody>
-      </p:sp>
+      </p:pic>
     </p:spTree>
   </p:cSld>
   <p:clrMapOvr>
@@ -9155,7 +9637,7 @@
                 <a:cs typeface="Courier New"/>
                 <a:sym typeface="Courier New"/>
               </a:rPr>
-              <a:t>DISADVANTAGES</a:t>
+              <a:t>TIMING REPORT</a:t>
             </a:r>
             <a:endParaRPr sz="3600">
               <a:highlight>
@@ -9165,360 +9647,33 @@
           </a:p>
         </p:txBody>
       </p:sp>
-      <p:sp>
-        <p:nvSpPr>
+      <p:pic>
+        <p:nvPicPr>
           <p:cNvPr id="98" name="Google Shape;98;p20"/>
-          <p:cNvSpPr txBox="1"/>
-          <p:nvPr>
-            <p:ph idx="1" type="body"/>
-          </p:nvPr>
-        </p:nvSpPr>
+          <p:cNvPicPr preferRelativeResize="0"/>
+          <p:nvPr/>
+        </p:nvPicPr>
+        <p:blipFill rotWithShape="1">
+          <a:blip r:embed="rId3">
+            <a:alphaModFix/>
+          </a:blip>
+          <a:srcRect b="33402" l="8834" r="0" t="11252"/>
+          <a:stretch/>
+        </p:blipFill>
         <p:spPr>
           <a:xfrm>
-            <a:off x="213475" y="1313850"/>
-            <a:ext cx="8520600" cy="3416400"/>
+            <a:off x="84225" y="1298150"/>
+            <a:ext cx="8994424" cy="2133200"/>
           </a:xfrm>
           <a:prstGeom prst="rect">
             <a:avLst/>
           </a:prstGeom>
+          <a:noFill/>
+          <a:ln>
+            <a:noFill/>
+          </a:ln>
         </p:spPr>
-        <p:txBody>
-          <a:bodyPr anchorCtr="0" anchor="t" bIns="91425" lIns="91425" spcFirstLastPara="1" rIns="91425" wrap="square" tIns="91425">
-            <a:noAutofit/>
-          </a:bodyPr>
-          <a:lstStyle/>
-          <a:p>
-            <a:pPr indent="0" lvl="0" marL="0" rtl="0" algn="l">
-              <a:lnSpc>
-                <a:spcPct val="135714"/>
-              </a:lnSpc>
-              <a:spcBef>
-                <a:spcPts val="0"/>
-              </a:spcBef>
-              <a:spcAft>
-                <a:spcPts val="0"/>
-              </a:spcAft>
-              <a:buClr>
-                <a:schemeClr val="dk1"/>
-              </a:buClr>
-              <a:buSzPts val="1100"/>
-              <a:buFont typeface="Arial"/>
-              <a:buNone/>
-            </a:pPr>
-            <a:r>
-              <a:rPr lang="en" sz="2000">
-                <a:solidFill>
-                  <a:schemeClr val="dk1"/>
-                </a:solidFill>
-                <a:highlight>
-                  <a:srgbClr val="FFFFFF"/>
-                </a:highlight>
-                <a:latin typeface="Courier New"/>
-                <a:ea typeface="Courier New"/>
-                <a:cs typeface="Courier New"/>
-                <a:sym typeface="Courier New"/>
-              </a:rPr>
-              <a:t>- </a:t>
-            </a:r>
-            <a:r>
-              <a:rPr b="1" lang="en" sz="2000">
-                <a:solidFill>
-                  <a:schemeClr val="dk1"/>
-                </a:solidFill>
-                <a:highlight>
-                  <a:srgbClr val="FFFFFF"/>
-                </a:highlight>
-                <a:latin typeface="Courier New"/>
-                <a:ea typeface="Courier New"/>
-                <a:cs typeface="Courier New"/>
-                <a:sym typeface="Courier New"/>
-              </a:rPr>
-              <a:t>Area Overhead:</a:t>
-            </a:r>
-            <a:r>
-              <a:rPr lang="en" sz="2000">
-                <a:solidFill>
-                  <a:schemeClr val="dk1"/>
-                </a:solidFill>
-                <a:highlight>
-                  <a:srgbClr val="FFFFFF"/>
-                </a:highlight>
-                <a:latin typeface="Courier New"/>
-                <a:ea typeface="Courier New"/>
-                <a:cs typeface="Courier New"/>
-                <a:sym typeface="Courier New"/>
-              </a:rPr>
-              <a:t> Duplicate control path logic</a:t>
-            </a:r>
-            <a:endParaRPr sz="2000">
-              <a:solidFill>
-                <a:schemeClr val="dk1"/>
-              </a:solidFill>
-              <a:highlight>
-                <a:srgbClr val="FFFFFF"/>
-              </a:highlight>
-              <a:latin typeface="Courier New"/>
-              <a:ea typeface="Courier New"/>
-              <a:cs typeface="Courier New"/>
-              <a:sym typeface="Courier New"/>
-            </a:endParaRPr>
-          </a:p>
-          <a:p>
-            <a:pPr indent="0" lvl="0" marL="0" rtl="0" algn="l">
-              <a:lnSpc>
-                <a:spcPct val="135714"/>
-              </a:lnSpc>
-              <a:spcBef>
-                <a:spcPts val="0"/>
-              </a:spcBef>
-              <a:spcAft>
-                <a:spcPts val="0"/>
-              </a:spcAft>
-              <a:buClr>
-                <a:schemeClr val="dk1"/>
-              </a:buClr>
-              <a:buSzPts val="1100"/>
-              <a:buFont typeface="Arial"/>
-              <a:buNone/>
-            </a:pPr>
-            <a:r>
-              <a:rPr lang="en" sz="2000">
-                <a:solidFill>
-                  <a:schemeClr val="dk1"/>
-                </a:solidFill>
-                <a:highlight>
-                  <a:srgbClr val="FFFFFF"/>
-                </a:highlight>
-                <a:latin typeface="Courier New"/>
-                <a:ea typeface="Courier New"/>
-                <a:cs typeface="Courier New"/>
-                <a:sym typeface="Courier New"/>
-              </a:rPr>
-              <a:t>- </a:t>
-            </a:r>
-            <a:r>
-              <a:rPr b="1" lang="en" sz="2000">
-                <a:solidFill>
-                  <a:schemeClr val="dk1"/>
-                </a:solidFill>
-                <a:highlight>
-                  <a:srgbClr val="FFFFFF"/>
-                </a:highlight>
-                <a:latin typeface="Courier New"/>
-                <a:ea typeface="Courier New"/>
-                <a:cs typeface="Courier New"/>
-                <a:sym typeface="Courier New"/>
-              </a:rPr>
-              <a:t>Complexity:</a:t>
-            </a:r>
-            <a:r>
-              <a:rPr lang="en" sz="2000">
-                <a:solidFill>
-                  <a:schemeClr val="dk1"/>
-                </a:solidFill>
-                <a:highlight>
-                  <a:srgbClr val="FFFFFF"/>
-                </a:highlight>
-                <a:latin typeface="Courier New"/>
-                <a:ea typeface="Courier New"/>
-                <a:cs typeface="Courier New"/>
-                <a:sym typeface="Courier New"/>
-              </a:rPr>
-              <a:t> Mode switching introduces timing considerations</a:t>
-            </a:r>
-            <a:endParaRPr sz="2000">
-              <a:solidFill>
-                <a:schemeClr val="dk1"/>
-              </a:solidFill>
-              <a:highlight>
-                <a:srgbClr val="FFFFFF"/>
-              </a:highlight>
-              <a:latin typeface="Courier New"/>
-              <a:ea typeface="Courier New"/>
-              <a:cs typeface="Courier New"/>
-              <a:sym typeface="Courier New"/>
-            </a:endParaRPr>
-          </a:p>
-          <a:p>
-            <a:pPr indent="0" lvl="0" marL="0" rtl="0" algn="l">
-              <a:lnSpc>
-                <a:spcPct val="135714"/>
-              </a:lnSpc>
-              <a:spcBef>
-                <a:spcPts val="0"/>
-              </a:spcBef>
-              <a:spcAft>
-                <a:spcPts val="0"/>
-              </a:spcAft>
-              <a:buClr>
-                <a:schemeClr val="dk1"/>
-              </a:buClr>
-              <a:buSzPts val="1100"/>
-              <a:buFont typeface="Arial"/>
-              <a:buNone/>
-            </a:pPr>
-            <a:r>
-              <a:rPr lang="en" sz="2000">
-                <a:solidFill>
-                  <a:schemeClr val="dk1"/>
-                </a:solidFill>
-                <a:highlight>
-                  <a:srgbClr val="FFFFFF"/>
-                </a:highlight>
-                <a:latin typeface="Courier New"/>
-                <a:ea typeface="Courier New"/>
-                <a:cs typeface="Courier New"/>
-                <a:sym typeface="Courier New"/>
-              </a:rPr>
-              <a:t>- </a:t>
-            </a:r>
-            <a:r>
-              <a:rPr b="1" lang="en" sz="2000">
-                <a:solidFill>
-                  <a:schemeClr val="dk1"/>
-                </a:solidFill>
-                <a:highlight>
-                  <a:srgbClr val="FFFFFF"/>
-                </a:highlight>
-                <a:latin typeface="Courier New"/>
-                <a:ea typeface="Courier New"/>
-                <a:cs typeface="Courier New"/>
-                <a:sym typeface="Courier New"/>
-              </a:rPr>
-              <a:t>Latency:</a:t>
-            </a:r>
-            <a:r>
-              <a:rPr lang="en" sz="2000">
-                <a:solidFill>
-                  <a:schemeClr val="dk1"/>
-                </a:solidFill>
-                <a:highlight>
-                  <a:srgbClr val="FFFFFF"/>
-                </a:highlight>
-                <a:latin typeface="Courier New"/>
-                <a:ea typeface="Courier New"/>
-                <a:cs typeface="Courier New"/>
-                <a:sym typeface="Courier New"/>
-              </a:rPr>
-              <a:t> Low-power mode adds pipeline register delay</a:t>
-            </a:r>
-            <a:endParaRPr sz="2000">
-              <a:solidFill>
-                <a:schemeClr val="dk1"/>
-              </a:solidFill>
-              <a:highlight>
-                <a:srgbClr val="FFFFFF"/>
-              </a:highlight>
-              <a:latin typeface="Courier New"/>
-              <a:ea typeface="Courier New"/>
-              <a:cs typeface="Courier New"/>
-              <a:sym typeface="Courier New"/>
-            </a:endParaRPr>
-          </a:p>
-          <a:p>
-            <a:pPr indent="0" lvl="0" marL="0" rtl="0" algn="l">
-              <a:lnSpc>
-                <a:spcPct val="135714"/>
-              </a:lnSpc>
-              <a:spcBef>
-                <a:spcPts val="0"/>
-              </a:spcBef>
-              <a:spcAft>
-                <a:spcPts val="0"/>
-              </a:spcAft>
-              <a:buClr>
-                <a:schemeClr val="dk1"/>
-              </a:buClr>
-              <a:buSzPts val="1100"/>
-              <a:buFont typeface="Arial"/>
-              <a:buNone/>
-            </a:pPr>
-            <a:r>
-              <a:rPr lang="en" sz="2000">
-                <a:solidFill>
-                  <a:schemeClr val="dk1"/>
-                </a:solidFill>
-                <a:highlight>
-                  <a:srgbClr val="FFFFFF"/>
-                </a:highlight>
-                <a:latin typeface="Courier New"/>
-                <a:ea typeface="Courier New"/>
-                <a:cs typeface="Courier New"/>
-                <a:sym typeface="Courier New"/>
-              </a:rPr>
-              <a:t>- </a:t>
-            </a:r>
-            <a:r>
-              <a:rPr b="1" lang="en" sz="2000">
-                <a:solidFill>
-                  <a:schemeClr val="dk1"/>
-                </a:solidFill>
-                <a:highlight>
-                  <a:srgbClr val="FFFFFF"/>
-                </a:highlight>
-                <a:latin typeface="Courier New"/>
-                <a:ea typeface="Courier New"/>
-                <a:cs typeface="Courier New"/>
-                <a:sym typeface="Courier New"/>
-              </a:rPr>
-              <a:t>Design Effort:</a:t>
-            </a:r>
-            <a:r>
-              <a:rPr lang="en" sz="2000">
-                <a:solidFill>
-                  <a:schemeClr val="dk1"/>
-                </a:solidFill>
-                <a:highlight>
-                  <a:srgbClr val="FFFFFF"/>
-                </a:highlight>
-                <a:latin typeface="Courier New"/>
-                <a:ea typeface="Courier New"/>
-                <a:cs typeface="Courier New"/>
-                <a:sym typeface="Courier New"/>
-              </a:rPr>
-              <a:t> Need to maintain two control units</a:t>
-            </a:r>
-            <a:endParaRPr sz="2000">
-              <a:solidFill>
-                <a:schemeClr val="dk1"/>
-              </a:solidFill>
-              <a:highlight>
-                <a:srgbClr val="FFFFFF"/>
-              </a:highlight>
-              <a:latin typeface="Courier New"/>
-              <a:ea typeface="Courier New"/>
-              <a:cs typeface="Courier New"/>
-              <a:sym typeface="Courier New"/>
-            </a:endParaRPr>
-          </a:p>
-          <a:p>
-            <a:pPr indent="0" lvl="0" marL="0" rtl="0" algn="l">
-              <a:spcBef>
-                <a:spcPts val="0"/>
-              </a:spcBef>
-              <a:spcAft>
-                <a:spcPts val="1200"/>
-              </a:spcAft>
-              <a:buNone/>
-            </a:pPr>
-            <a:r>
-              <a:t/>
-            </a:r>
-            <a:endParaRPr sz="2000">
-              <a:solidFill>
-                <a:schemeClr val="dk1"/>
-              </a:solidFill>
-              <a:highlight>
-                <a:srgbClr val="FFFFFF"/>
-              </a:highlight>
-              <a:latin typeface="Courier New"/>
-              <a:ea typeface="Courier New"/>
-              <a:cs typeface="Courier New"/>
-              <a:sym typeface="Courier New"/>
-            </a:endParaRPr>
-          </a:p>
-        </p:txBody>
-      </p:sp>
+      </p:pic>
     </p:spTree>
   </p:cSld>
   <p:clrMapOvr>
@@ -9586,7 +9741,7 @@
                 <a:cs typeface="Courier New"/>
                 <a:sym typeface="Courier New"/>
               </a:rPr>
-              <a:t>CONCLUSION</a:t>
+              <a:t>ADVANTAGES</a:t>
             </a:r>
             <a:endParaRPr sz="3600">
               <a:highlight>
@@ -9607,7 +9762,7 @@
         <p:spPr>
           <a:xfrm>
             <a:off x="213475" y="1313850"/>
-            <a:ext cx="8768400" cy="3416400"/>
+            <a:ext cx="8520600" cy="3416400"/>
           </a:xfrm>
           <a:prstGeom prst="rect">
             <a:avLst/>
@@ -9637,9 +9792,9 @@
               <a:buNone/>
             </a:pPr>
             <a:r>
-              <a:rPr lang="en" sz="1900">
-                <a:solidFill>
-                  <a:srgbClr val="0451A5"/>
+              <a:rPr lang="en" sz="2000">
+                <a:solidFill>
+                  <a:schemeClr val="dk1"/>
                 </a:solidFill>
                 <a:highlight>
                   <a:srgbClr val="FFFFFF"/>
@@ -9649,10 +9804,10 @@
                 <a:cs typeface="Courier New"/>
                 <a:sym typeface="Courier New"/>
               </a:rPr>
-              <a:t>-</a:t>
-            </a:r>
-            <a:r>
-              <a:rPr lang="en" sz="1900">
+              <a:t>- </a:t>
+            </a:r>
+            <a:r>
+              <a:rPr b="1" lang="en" sz="2000">
                 <a:solidFill>
                   <a:schemeClr val="dk1"/>
                 </a:solidFill>
@@ -9664,9 +9819,24 @@
                 <a:cs typeface="Courier New"/>
                 <a:sym typeface="Courier New"/>
               </a:rPr>
-              <a:t> Successfully implemented adaptive control unit in SystemVerilog</a:t>
-            </a:r>
-            <a:endParaRPr sz="1900">
+              <a:t>Flexibility:</a:t>
+            </a:r>
+            <a:r>
+              <a:rPr lang="en" sz="2000">
+                <a:solidFill>
+                  <a:schemeClr val="dk1"/>
+                </a:solidFill>
+                <a:highlight>
+                  <a:srgbClr val="FFFFFF"/>
+                </a:highlight>
+                <a:latin typeface="Courier New"/>
+                <a:ea typeface="Courier New"/>
+                <a:cs typeface="Courier New"/>
+                <a:sym typeface="Courier New"/>
+              </a:rPr>
+              <a:t> Dynamic runtime mode switching</a:t>
+            </a:r>
+            <a:endParaRPr sz="2000">
               <a:solidFill>
                 <a:schemeClr val="dk1"/>
               </a:solidFill>
@@ -9698,9 +9868,9 @@
               <a:buNone/>
             </a:pPr>
             <a:r>
-              <a:rPr lang="en" sz="1900">
-                <a:solidFill>
-                  <a:srgbClr val="0451A5"/>
+              <a:rPr lang="en" sz="2000">
+                <a:solidFill>
+                  <a:schemeClr val="dk1"/>
                 </a:solidFill>
                 <a:highlight>
                   <a:srgbClr val="FFFFFF"/>
@@ -9710,10 +9880,10 @@
                 <a:cs typeface="Courier New"/>
                 <a:sym typeface="Courier New"/>
               </a:rPr>
-              <a:t>-</a:t>
-            </a:r>
-            <a:r>
-              <a:rPr lang="en" sz="1900">
+              <a:t>- </a:t>
+            </a:r>
+            <a:r>
+              <a:rPr b="1" lang="en" sz="2000">
                 <a:solidFill>
                   <a:schemeClr val="dk1"/>
                 </a:solidFill>
@@ -9725,9 +9895,24 @@
                 <a:cs typeface="Courier New"/>
                 <a:sym typeface="Courier New"/>
               </a:rPr>
-              <a:t> Demonstrated power-performance tradeoff via dual-mode design</a:t>
-            </a:r>
-            <a:endParaRPr sz="1900">
+              <a:t>Power Saving:</a:t>
+            </a:r>
+            <a:r>
+              <a:rPr lang="en" sz="2000">
+                <a:solidFill>
+                  <a:schemeClr val="dk1"/>
+                </a:solidFill>
+                <a:highlight>
+                  <a:srgbClr val="FFFFFF"/>
+                </a:highlight>
+                <a:latin typeface="Courier New"/>
+                <a:ea typeface="Courier New"/>
+                <a:cs typeface="Courier New"/>
+                <a:sym typeface="Courier New"/>
+              </a:rPr>
+              <a:t> Use low-power mode for simple tasks</a:t>
+            </a:r>
+            <a:endParaRPr sz="2000">
               <a:solidFill>
                 <a:schemeClr val="dk1"/>
               </a:solidFill>
@@ -9759,9 +9944,9 @@
               <a:buNone/>
             </a:pPr>
             <a:r>
-              <a:rPr lang="en" sz="1900">
-                <a:solidFill>
-                  <a:srgbClr val="0451A5"/>
+              <a:rPr lang="en" sz="2000">
+                <a:solidFill>
+                  <a:schemeClr val="dk1"/>
                 </a:solidFill>
                 <a:highlight>
                   <a:srgbClr val="FFFFFF"/>
@@ -9771,10 +9956,10 @@
                 <a:cs typeface="Courier New"/>
                 <a:sym typeface="Courier New"/>
               </a:rPr>
-              <a:t>-</a:t>
-            </a:r>
-            <a:r>
-              <a:rPr lang="en" sz="1900">
+              <a:t>- </a:t>
+            </a:r>
+            <a:r>
+              <a:rPr b="1" lang="en" sz="2000">
                 <a:solidFill>
                   <a:schemeClr val="dk1"/>
                 </a:solidFill>
@@ -9786,9 +9971,24 @@
                 <a:cs typeface="Courier New"/>
                 <a:sym typeface="Courier New"/>
               </a:rPr>
-              <a:t> Verified functionality through comprehensive testbench</a:t>
-            </a:r>
-            <a:endParaRPr sz="1900">
+              <a:t>Performance:</a:t>
+            </a:r>
+            <a:r>
+              <a:rPr lang="en" sz="2000">
+                <a:solidFill>
+                  <a:schemeClr val="dk1"/>
+                </a:solidFill>
+                <a:highlight>
+                  <a:srgbClr val="FFFFFF"/>
+                </a:highlight>
+                <a:latin typeface="Courier New"/>
+                <a:ea typeface="Courier New"/>
+                <a:cs typeface="Courier New"/>
+                <a:sym typeface="Courier New"/>
+              </a:rPr>
+              <a:t> Use high-perf mode for critical operations</a:t>
+            </a:r>
+            <a:endParaRPr sz="2000">
               <a:solidFill>
                 <a:schemeClr val="dk1"/>
               </a:solidFill>
@@ -9820,9 +10020,9 @@
               <a:buNone/>
             </a:pPr>
             <a:r>
-              <a:rPr lang="en" sz="1900">
-                <a:solidFill>
-                  <a:srgbClr val="0451A5"/>
+              <a:rPr lang="en" sz="2000">
+                <a:solidFill>
+                  <a:schemeClr val="dk1"/>
                 </a:solidFill>
                 <a:highlight>
                   <a:srgbClr val="FFFFFF"/>
@@ -9832,10 +10032,10 @@
                 <a:cs typeface="Courier New"/>
                 <a:sym typeface="Courier New"/>
               </a:rPr>
-              <a:t>-</a:t>
-            </a:r>
-            <a:r>
-              <a:rPr lang="en" sz="1900">
+              <a:t>- </a:t>
+            </a:r>
+            <a:r>
+              <a:rPr b="1" lang="en" sz="2000">
                 <a:solidFill>
                   <a:schemeClr val="dk1"/>
                 </a:solidFill>
@@ -9847,9 +10047,24 @@
                 <a:cs typeface="Courier New"/>
                 <a:sym typeface="Courier New"/>
               </a:rPr>
-              <a:t> Future work: Add more control modes, integrate with processor pipeline</a:t>
-            </a:r>
-            <a:endParaRPr sz="1900">
+              <a:t>Scalability:</a:t>
+            </a:r>
+            <a:r>
+              <a:rPr lang="en" sz="2000">
+                <a:solidFill>
+                  <a:schemeClr val="dk1"/>
+                </a:solidFill>
+                <a:highlight>
+                  <a:srgbClr val="FFFFFF"/>
+                </a:highlight>
+                <a:latin typeface="Courier New"/>
+                <a:ea typeface="Courier New"/>
+                <a:cs typeface="Courier New"/>
+                <a:sym typeface="Courier New"/>
+              </a:rPr>
+              <a:t> Architecture easily extensible</a:t>
+            </a:r>
+            <a:endParaRPr sz="2000">
               <a:solidFill>
                 <a:schemeClr val="dk1"/>
               </a:solidFill>
@@ -9864,6 +10079,82 @@
           </a:p>
           <a:p>
             <a:pPr indent="0" lvl="0" marL="0" rtl="0" algn="l">
+              <a:lnSpc>
+                <a:spcPct val="135714"/>
+              </a:lnSpc>
+              <a:spcBef>
+                <a:spcPts val="0"/>
+              </a:spcBef>
+              <a:spcAft>
+                <a:spcPts val="0"/>
+              </a:spcAft>
+              <a:buClr>
+                <a:schemeClr val="dk1"/>
+              </a:buClr>
+              <a:buSzPts val="1100"/>
+              <a:buFont typeface="Arial"/>
+              <a:buNone/>
+            </a:pPr>
+            <a:r>
+              <a:rPr lang="en" sz="2000">
+                <a:solidFill>
+                  <a:schemeClr val="dk1"/>
+                </a:solidFill>
+                <a:highlight>
+                  <a:srgbClr val="FFFFFF"/>
+                </a:highlight>
+                <a:latin typeface="Courier New"/>
+                <a:ea typeface="Courier New"/>
+                <a:cs typeface="Courier New"/>
+                <a:sym typeface="Courier New"/>
+              </a:rPr>
+              <a:t>- </a:t>
+            </a:r>
+            <a:r>
+              <a:rPr b="1" lang="en" sz="2000">
+                <a:solidFill>
+                  <a:schemeClr val="dk1"/>
+                </a:solidFill>
+                <a:highlight>
+                  <a:srgbClr val="FFFFFF"/>
+                </a:highlight>
+                <a:latin typeface="Courier New"/>
+                <a:ea typeface="Courier New"/>
+                <a:cs typeface="Courier New"/>
+                <a:sym typeface="Courier New"/>
+              </a:rPr>
+              <a:t>Verification:</a:t>
+            </a:r>
+            <a:r>
+              <a:rPr lang="en" sz="2000">
+                <a:solidFill>
+                  <a:schemeClr val="dk1"/>
+                </a:solidFill>
+                <a:highlight>
+                  <a:srgbClr val="FFFFFF"/>
+                </a:highlight>
+                <a:latin typeface="Courier New"/>
+                <a:ea typeface="Courier New"/>
+                <a:cs typeface="Courier New"/>
+                <a:sym typeface="Courier New"/>
+              </a:rPr>
+              <a:t> UVM-style testbench with comprehensive coverage</a:t>
+            </a:r>
+            <a:endParaRPr sz="2000">
+              <a:solidFill>
+                <a:schemeClr val="dk1"/>
+              </a:solidFill>
+              <a:highlight>
+                <a:srgbClr val="FFFFFF"/>
+              </a:highlight>
+              <a:latin typeface="Courier New"/>
+              <a:ea typeface="Courier New"/>
+              <a:cs typeface="Courier New"/>
+              <a:sym typeface="Courier New"/>
+            </a:endParaRPr>
+          </a:p>
+          <a:p>
+            <a:pPr indent="0" lvl="0" marL="0" rtl="0" algn="l">
               <a:spcBef>
                 <a:spcPts val="0"/>
               </a:spcBef>
@@ -9875,7 +10166,7 @@
             <a:r>
               <a:t/>
             </a:r>
-            <a:endParaRPr sz="1900">
+            <a:endParaRPr sz="2000">
               <a:solidFill>
                 <a:schemeClr val="dk1"/>
               </a:solidFill>
@@ -9899,6 +10190,285 @@
 </file>
 
 <file path=ppt/theme/theme1.xml><?xml version="1.0" encoding="utf-8"?>
+<a:theme xmlns:a="http://schemas.openxmlformats.org/drawingml/2006/main" xmlns:r="http://schemas.openxmlformats.org/officeDocument/2006/relationships">
+  <a:themeElements>
+    <a:clrScheme name="Default">
+      <a:dk1>
+        <a:srgbClr val="000000"/>
+      </a:dk1>
+      <a:lt1>
+        <a:srgbClr val="FFFFFF"/>
+      </a:lt1>
+      <a:dk2>
+        <a:srgbClr val="158158"/>
+      </a:dk2>
+      <a:lt2>
+        <a:srgbClr val="F3F3F3"/>
+      </a:lt2>
+      <a:accent1>
+        <a:srgbClr val="058DC7"/>
+      </a:accent1>
+      <a:accent2>
+        <a:srgbClr val="50B432"/>
+      </a:accent2>
+      <a:accent3>
+        <a:srgbClr val="ED561B"/>
+      </a:accent3>
+      <a:accent4>
+        <a:srgbClr val="EDEF00"/>
+      </a:accent4>
+      <a:accent5>
+        <a:srgbClr val="24CBE5"/>
+      </a:accent5>
+      <a:accent6>
+        <a:srgbClr val="64E572"/>
+      </a:accent6>
+      <a:hlink>
+        <a:srgbClr val="2200CC"/>
+      </a:hlink>
+      <a:folHlink>
+        <a:srgbClr val="551A8B"/>
+      </a:folHlink>
+    </a:clrScheme>
+    <a:fontScheme name="Office">
+      <a:majorFont>
+        <a:latin typeface="Arial"/>
+        <a:ea typeface=""/>
+        <a:cs typeface=""/>
+        <a:font script="Jpan" typeface="ＭＳ Ｐゴシック"/>
+        <a:font script="Hang" typeface="맑은 고딕"/>
+        <a:font script="Hans" typeface="宋体"/>
+        <a:font script="Hant" typeface="新細明體"/>
+        <a:font script="Arab" typeface="Times New Roman"/>
+        <a:font script="Hebr" typeface="Times New Roman"/>
+        <a:font script="Thai" typeface="Angsana New"/>
+        <a:font script="Ethi" typeface="Nyala"/>
+        <a:font script="Beng" typeface="Vrinda"/>
+        <a:font script="Gujr" typeface="Shruti"/>
+        <a:font script="Khmr" typeface="MoolBoran"/>
+        <a:font script="Knda" typeface="Tunga"/>
+        <a:font script="Guru" typeface="Raavi"/>
+        <a:font script="Cans" typeface="Euphemia"/>
+        <a:font script="Cher" typeface="Plantagenet Cherokee"/>
+        <a:font script="Yiii" typeface="Microsoft Yi Baiti"/>
+        <a:font script="Tibt" typeface="Microsoft Himalaya"/>
+        <a:font script="Thaa" typeface="MV Boli"/>
+        <a:font script="Deva" typeface="Mangal"/>
+        <a:font script="Telu" typeface="Gautami"/>
+        <a:font script="Taml" typeface="Latha"/>
+        <a:font script="Syrc" typeface="Estrangelo Edessa"/>
+        <a:font script="Orya" typeface="Kalinga"/>
+        <a:font script="Mlym" typeface="Kartika"/>
+        <a:font script="Laoo" typeface="DokChampa"/>
+        <a:font script="Sinh" typeface="Iskoola Pota"/>
+        <a:font script="Mong" typeface="Mongolian Baiti"/>
+        <a:font script="Viet" typeface="Times New Roman"/>
+        <a:font script="Uigh" typeface="Microsoft Uighur"/>
+        <a:font script="Geor" typeface="Sylfaen"/>
+      </a:majorFont>
+      <a:minorFont>
+        <a:latin typeface="Arial"/>
+        <a:ea typeface=""/>
+        <a:cs typeface=""/>
+        <a:font script="Jpan" typeface="ＭＳ Ｐゴシック"/>
+        <a:font script="Hang" typeface="맑은 고딕"/>
+        <a:font script="Hans" typeface="宋体"/>
+        <a:font script="Hant" typeface="新細明體"/>
+        <a:font script="Arab" typeface="Arial"/>
+        <a:font script="Hebr" typeface="Arial"/>
+        <a:font script="Thai" typeface="Cordia New"/>
+        <a:font script="Ethi" typeface="Nyala"/>
+        <a:font script="Beng" typeface="Vrinda"/>
+        <a:font script="Gujr" typeface="Shruti"/>
+        <a:font script="Khmr" typeface="DaunPenh"/>
+        <a:font script="Knda" typeface="Tunga"/>
+        <a:font script="Guru" typeface="Raavi"/>
+        <a:font script="Cans" typeface="Euphemia"/>
+        <a:font script="Cher" typeface="Plantagenet Cherokee"/>
+        <a:font script="Yiii" typeface="Microsoft Yi Baiti"/>
+        <a:font script="Tibt" typeface="Microsoft Himalaya"/>
+        <a:font script="Thaa" typeface="MV Boli"/>
+        <a:font script="Deva" typeface="Mangal"/>
+        <a:font script="Telu" typeface="Gautami"/>
+        <a:font script="Taml" typeface="Latha"/>
+        <a:font script="Syrc" typeface="Estrangelo Edessa"/>
+        <a:font script="Orya" typeface="Kalinga"/>
+        <a:font script="Mlym" typeface="Kartika"/>
+        <a:font script="Laoo" typeface="DokChampa"/>
+        <a:font script="Sinh" typeface="Iskoola Pota"/>
+        <a:font script="Mong" typeface="Mongolian Baiti"/>
+        <a:font script="Viet" typeface="Arial"/>
+        <a:font script="Uigh" typeface="Microsoft Uighur"/>
+        <a:font script="Geor" typeface="Sylfaen"/>
+      </a:minorFont>
+    </a:fontScheme>
+    <a:fmtScheme name="Office">
+      <a:fillStyleLst>
+        <a:solidFill>
+          <a:schemeClr val="phClr"/>
+        </a:solidFill>
+        <a:gradFill rotWithShape="1">
+          <a:gsLst>
+            <a:gs pos="0">
+              <a:schemeClr val="phClr">
+                <a:tint val="50000"/>
+                <a:satMod val="300000"/>
+              </a:schemeClr>
+            </a:gs>
+            <a:gs pos="35000">
+              <a:schemeClr val="phClr">
+                <a:tint val="37000"/>
+                <a:satMod val="300000"/>
+              </a:schemeClr>
+            </a:gs>
+            <a:gs pos="100000">
+              <a:schemeClr val="phClr">
+                <a:tint val="15000"/>
+                <a:satMod val="350000"/>
+              </a:schemeClr>
+            </a:gs>
+          </a:gsLst>
+          <a:lin ang="16200000" scaled="1"/>
+        </a:gradFill>
+        <a:gradFill rotWithShape="1">
+          <a:gsLst>
+            <a:gs pos="0">
+              <a:schemeClr val="phClr">
+                <a:tint val="100000"/>
+                <a:shade val="100000"/>
+                <a:satMod val="130000"/>
+              </a:schemeClr>
+            </a:gs>
+            <a:gs pos="100000">
+              <a:schemeClr val="phClr">
+                <a:tint val="50000"/>
+                <a:shade val="100000"/>
+                <a:satMod val="350000"/>
+              </a:schemeClr>
+            </a:gs>
+          </a:gsLst>
+          <a:lin ang="16200000" scaled="0"/>
+        </a:gradFill>
+      </a:fillStyleLst>
+      <a:lnStyleLst>
+        <a:ln w="9525" cap="flat" cmpd="sng" algn="ctr">
+          <a:solidFill>
+            <a:schemeClr val="phClr">
+              <a:shade val="95000"/>
+              <a:satMod val="105000"/>
+            </a:schemeClr>
+          </a:solidFill>
+          <a:prstDash val="solid"/>
+        </a:ln>
+        <a:ln w="25400" cap="flat" cmpd="sng" algn="ctr">
+          <a:solidFill>
+            <a:schemeClr val="phClr"/>
+          </a:solidFill>
+          <a:prstDash val="solid"/>
+        </a:ln>
+        <a:ln w="38100" cap="flat" cmpd="sng" algn="ctr">
+          <a:solidFill>
+            <a:schemeClr val="phClr"/>
+          </a:solidFill>
+          <a:prstDash val="solid"/>
+        </a:ln>
+      </a:lnStyleLst>
+      <a:effectStyleLst>
+        <a:effectStyle>
+          <a:effectLst>
+            <a:outerShdw blurRad="40000" dist="20000" dir="5400000" rotWithShape="0">
+              <a:srgbClr val="000000">
+                <a:alpha val="38000"/>
+              </a:srgbClr>
+            </a:outerShdw>
+          </a:effectLst>
+        </a:effectStyle>
+        <a:effectStyle>
+          <a:effectLst>
+            <a:outerShdw blurRad="40000" dist="23000" dir="5400000" rotWithShape="0">
+              <a:srgbClr val="000000">
+                <a:alpha val="35000"/>
+              </a:srgbClr>
+            </a:outerShdw>
+          </a:effectLst>
+        </a:effectStyle>
+        <a:effectStyle>
+          <a:effectLst>
+            <a:outerShdw blurRad="40000" dist="23000" dir="5400000" rotWithShape="0">
+              <a:srgbClr val="000000">
+                <a:alpha val="35000"/>
+              </a:srgbClr>
+            </a:outerShdw>
+          </a:effectLst>
+          <a:scene3d>
+            <a:camera prst="orthographicFront">
+              <a:rot lat="0" lon="0" rev="0"/>
+            </a:camera>
+            <a:lightRig rig="threePt" dir="t">
+              <a:rot lat="0" lon="0" rev="1200000"/>
+            </a:lightRig>
+          </a:scene3d>
+          <a:sp3d>
+            <a:bevelT w="63500" h="25400"/>
+          </a:sp3d>
+        </a:effectStyle>
+      </a:effectStyleLst>
+      <a:bgFillStyleLst>
+        <a:solidFill>
+          <a:schemeClr val="phClr"/>
+        </a:solidFill>
+        <a:gradFill rotWithShape="1">
+          <a:gsLst>
+            <a:gs pos="0">
+              <a:schemeClr val="phClr">
+                <a:tint val="40000"/>
+                <a:satMod val="350000"/>
+              </a:schemeClr>
+            </a:gs>
+            <a:gs pos="40000">
+              <a:schemeClr val="phClr">
+                <a:tint val="45000"/>
+                <a:shade val="99000"/>
+                <a:satMod val="350000"/>
+              </a:schemeClr>
+            </a:gs>
+            <a:gs pos="100000">
+              <a:schemeClr val="phClr">
+                <a:shade val="20000"/>
+                <a:satMod val="255000"/>
+              </a:schemeClr>
+            </a:gs>
+          </a:gsLst>
+          <a:path path="circle">
+            <a:fillToRect l="50000" t="-80000" r="50000" b="180000"/>
+          </a:path>
+        </a:gradFill>
+        <a:gradFill rotWithShape="1">
+          <a:gsLst>
+            <a:gs pos="0">
+              <a:schemeClr val="phClr">
+                <a:tint val="80000"/>
+                <a:satMod val="300000"/>
+              </a:schemeClr>
+            </a:gs>
+            <a:gs pos="100000">
+              <a:schemeClr val="phClr">
+                <a:shade val="30000"/>
+                <a:satMod val="200000"/>
+              </a:schemeClr>
+            </a:gs>
+          </a:gsLst>
+          <a:path path="circle">
+            <a:fillToRect l="50000" t="50000" r="50000" b="50000"/>
+          </a:path>
+        </a:gradFill>
+      </a:bgFillStyleLst>
+    </a:fmtScheme>
+  </a:themeElements>
+</a:theme>
+</file>
+
+<file path=ppt/theme/theme2.xml><?xml version="1.0" encoding="utf-8"?>
 <a:theme xmlns:a="http://schemas.openxmlformats.org/drawingml/2006/main" xmlns:r="http://schemas.openxmlformats.org/officeDocument/2006/relationships" name="Simple Light">
   <a:themeElements>
     <a:clrScheme name="Simple Light">
@@ -10175,283 +10745,4 @@
     </a:fmtScheme>
   </a:themeElements>
 </a:theme>
-</file>
-
-<file path=ppt/theme/theme2.xml><?xml version="1.0" encoding="utf-8"?>
-<a:theme xmlns:a="http://schemas.openxmlformats.org/drawingml/2006/main" xmlns:r="http://schemas.openxmlformats.org/officeDocument/2006/relationships">
-  <a:themeElements>
-    <a:clrScheme name="Default">
-      <a:dk1>
-        <a:srgbClr val="000000"/>
-      </a:dk1>
-      <a:lt1>
-        <a:srgbClr val="FFFFFF"/>
-      </a:lt1>
-      <a:dk2>
-        <a:srgbClr val="158158"/>
-      </a:dk2>
-      <a:lt2>
-        <a:srgbClr val="F3F3F3"/>
-      </a:lt2>
-      <a:accent1>
-        <a:srgbClr val="058DC7"/>
-      </a:accent1>
-      <a:accent2>
-        <a:srgbClr val="50B432"/>
-      </a:accent2>
-      <a:accent3>
-        <a:srgbClr val="ED561B"/>
-      </a:accent3>
-      <a:accent4>
-        <a:srgbClr val="EDEF00"/>
-      </a:accent4>
-      <a:accent5>
-        <a:srgbClr val="24CBE5"/>
-      </a:accent5>
-      <a:accent6>
-        <a:srgbClr val="64E572"/>
-      </a:accent6>
-      <a:hlink>
-        <a:srgbClr val="2200CC"/>
-      </a:hlink>
-      <a:folHlink>
-        <a:srgbClr val="551A8B"/>
-      </a:folHlink>
-    </a:clrScheme>
-    <a:fontScheme name="Office">
-      <a:majorFont>
-        <a:latin typeface="Arial"/>
-        <a:ea typeface=""/>
-        <a:cs typeface=""/>
-        <a:font script="Jpan" typeface="ＭＳ Ｐゴシック"/>
-        <a:font script="Hang" typeface="맑은 고딕"/>
-        <a:font script="Hans" typeface="宋体"/>
-        <a:font script="Hant" typeface="新細明體"/>
-        <a:font script="Arab" typeface="Times New Roman"/>
-        <a:font script="Hebr" typeface="Times New Roman"/>
-        <a:font script="Thai" typeface="Angsana New"/>
-        <a:font script="Ethi" typeface="Nyala"/>
-        <a:font script="Beng" typeface="Vrinda"/>
-        <a:font script="Gujr" typeface="Shruti"/>
-        <a:font script="Khmr" typeface="MoolBoran"/>
-        <a:font script="Knda" typeface="Tunga"/>
-        <a:font script="Guru" typeface="Raavi"/>
-        <a:font script="Cans" typeface="Euphemia"/>
-        <a:font script="Cher" typeface="Plantagenet Cherokee"/>
-        <a:font script="Yiii" typeface="Microsoft Yi Baiti"/>
-        <a:font script="Tibt" typeface="Microsoft Himalaya"/>
-        <a:font script="Thaa" typeface="MV Boli"/>
-        <a:font script="Deva" typeface="Mangal"/>
-        <a:font script="Telu" typeface="Gautami"/>
-        <a:font script="Taml" typeface="Latha"/>
-        <a:font script="Syrc" typeface="Estrangelo Edessa"/>
-        <a:font script="Orya" typeface="Kalinga"/>
-        <a:font script="Mlym" typeface="Kartika"/>
-        <a:font script="Laoo" typeface="DokChampa"/>
-        <a:font script="Sinh" typeface="Iskoola Pota"/>
-        <a:font script="Mong" typeface="Mongolian Baiti"/>
-        <a:font script="Viet" typeface="Times New Roman"/>
-        <a:font script="Uigh" typeface="Microsoft Uighur"/>
-        <a:font script="Geor" typeface="Sylfaen"/>
-      </a:majorFont>
-      <a:minorFont>
-        <a:latin typeface="Arial"/>
-        <a:ea typeface=""/>
-        <a:cs typeface=""/>
-        <a:font script="Jpan" typeface="ＭＳ Ｐゴシック"/>
-        <a:font script="Hang" typeface="맑은 고딕"/>
-        <a:font script="Hans" typeface="宋体"/>
-        <a:font script="Hant" typeface="新細明體"/>
-        <a:font script="Arab" typeface="Arial"/>
-        <a:font script="Hebr" typeface="Arial"/>
-        <a:font script="Thai" typeface="Cordia New"/>
-        <a:font script="Ethi" typeface="Nyala"/>
-        <a:font script="Beng" typeface="Vrinda"/>
-        <a:font script="Gujr" typeface="Shruti"/>
-        <a:font script="Khmr" typeface="DaunPenh"/>
-        <a:font script="Knda" typeface="Tunga"/>
-        <a:font script="Guru" typeface="Raavi"/>
-        <a:font script="Cans" typeface="Euphemia"/>
-        <a:font script="Cher" typeface="Plantagenet Cherokee"/>
-        <a:font script="Yiii" typeface="Microsoft Yi Baiti"/>
-        <a:font script="Tibt" typeface="Microsoft Himalaya"/>
-        <a:font script="Thaa" typeface="MV Boli"/>
-        <a:font script="Deva" typeface="Mangal"/>
-        <a:font script="Telu" typeface="Gautami"/>
-        <a:font script="Taml" typeface="Latha"/>
-        <a:font script="Syrc" typeface="Estrangelo Edessa"/>
-        <a:font script="Orya" typeface="Kalinga"/>
-        <a:font script="Mlym" typeface="Kartika"/>
-        <a:font script="Laoo" typeface="DokChampa"/>
-        <a:font script="Sinh" typeface="Iskoola Pota"/>
-        <a:font script="Mong" typeface="Mongolian Baiti"/>
-        <a:font script="Viet" typeface="Arial"/>
-        <a:font script="Uigh" typeface="Microsoft Uighur"/>
-        <a:font script="Geor" typeface="Sylfaen"/>
-      </a:minorFont>
-    </a:fontScheme>
-    <a:fmtScheme name="Office">
-      <a:fillStyleLst>
-        <a:solidFill>
-          <a:schemeClr val="phClr"/>
-        </a:solidFill>
-        <a:gradFill rotWithShape="1">
-          <a:gsLst>
-            <a:gs pos="0">
-              <a:schemeClr val="phClr">
-                <a:tint val="50000"/>
-                <a:satMod val="300000"/>
-              </a:schemeClr>
-            </a:gs>
-            <a:gs pos="35000">
-              <a:schemeClr val="phClr">
-                <a:tint val="37000"/>
-                <a:satMod val="300000"/>
-              </a:schemeClr>
-            </a:gs>
-            <a:gs pos="100000">
-              <a:schemeClr val="phClr">
-                <a:tint val="15000"/>
-                <a:satMod val="350000"/>
-              </a:schemeClr>
-            </a:gs>
-          </a:gsLst>
-          <a:lin ang="16200000" scaled="1"/>
-        </a:gradFill>
-        <a:gradFill rotWithShape="1">
-          <a:gsLst>
-            <a:gs pos="0">
-              <a:schemeClr val="phClr">
-                <a:tint val="100000"/>
-                <a:shade val="100000"/>
-                <a:satMod val="130000"/>
-              </a:schemeClr>
-            </a:gs>
-            <a:gs pos="100000">
-              <a:schemeClr val="phClr">
-                <a:tint val="50000"/>
-                <a:shade val="100000"/>
-                <a:satMod val="350000"/>
-              </a:schemeClr>
-            </a:gs>
-          </a:gsLst>
-          <a:lin ang="16200000" scaled="0"/>
-        </a:gradFill>
-      </a:fillStyleLst>
-      <a:lnStyleLst>
-        <a:ln w="9525" cap="flat" cmpd="sng" algn="ctr">
-          <a:solidFill>
-            <a:schemeClr val="phClr">
-              <a:shade val="95000"/>
-              <a:satMod val="105000"/>
-            </a:schemeClr>
-          </a:solidFill>
-          <a:prstDash val="solid"/>
-        </a:ln>
-        <a:ln w="25400" cap="flat" cmpd="sng" algn="ctr">
-          <a:solidFill>
-            <a:schemeClr val="phClr"/>
-          </a:solidFill>
-          <a:prstDash val="solid"/>
-        </a:ln>
-        <a:ln w="38100" cap="flat" cmpd="sng" algn="ctr">
-          <a:solidFill>
-            <a:schemeClr val="phClr"/>
-          </a:solidFill>
-          <a:prstDash val="solid"/>
-        </a:ln>
-      </a:lnStyleLst>
-      <a:effectStyleLst>
-        <a:effectStyle>
-          <a:effectLst>
-            <a:outerShdw blurRad="40000" dist="20000" dir="5400000" rotWithShape="0">
-              <a:srgbClr val="000000">
-                <a:alpha val="38000"/>
-              </a:srgbClr>
-            </a:outerShdw>
-          </a:effectLst>
-        </a:effectStyle>
-        <a:effectStyle>
-          <a:effectLst>
-            <a:outerShdw blurRad="40000" dist="23000" dir="5400000" rotWithShape="0">
-              <a:srgbClr val="000000">
-                <a:alpha val="35000"/>
-              </a:srgbClr>
-            </a:outerShdw>
-          </a:effectLst>
-        </a:effectStyle>
-        <a:effectStyle>
-          <a:effectLst>
-            <a:outerShdw blurRad="40000" dist="23000" dir="5400000" rotWithShape="0">
-              <a:srgbClr val="000000">
-                <a:alpha val="35000"/>
-              </a:srgbClr>
-            </a:outerShdw>
-          </a:effectLst>
-          <a:scene3d>
-            <a:camera prst="orthographicFront">
-              <a:rot lat="0" lon="0" rev="0"/>
-            </a:camera>
-            <a:lightRig rig="threePt" dir="t">
-              <a:rot lat="0" lon="0" rev="1200000"/>
-            </a:lightRig>
-          </a:scene3d>
-          <a:sp3d>
-            <a:bevelT w="63500" h="25400"/>
-          </a:sp3d>
-        </a:effectStyle>
-      </a:effectStyleLst>
-      <a:bgFillStyleLst>
-        <a:solidFill>
-          <a:schemeClr val="phClr"/>
-        </a:solidFill>
-        <a:gradFill rotWithShape="1">
-          <a:gsLst>
-            <a:gs pos="0">
-              <a:schemeClr val="phClr">
-                <a:tint val="40000"/>
-                <a:satMod val="350000"/>
-              </a:schemeClr>
-            </a:gs>
-            <a:gs pos="40000">
-              <a:schemeClr val="phClr">
-                <a:tint val="45000"/>
-                <a:shade val="99000"/>
-                <a:satMod val="350000"/>
-              </a:schemeClr>
-            </a:gs>
-            <a:gs pos="100000">
-              <a:schemeClr val="phClr">
-                <a:shade val="20000"/>
-                <a:satMod val="255000"/>
-              </a:schemeClr>
-            </a:gs>
-          </a:gsLst>
-          <a:path path="circle">
-            <a:fillToRect l="50000" t="-80000" r="50000" b="180000"/>
-          </a:path>
-        </a:gradFill>
-        <a:gradFill rotWithShape="1">
-          <a:gsLst>
-            <a:gs pos="0">
-              <a:schemeClr val="phClr">
-                <a:tint val="80000"/>
-                <a:satMod val="300000"/>
-              </a:schemeClr>
-            </a:gs>
-            <a:gs pos="100000">
-              <a:schemeClr val="phClr">
-                <a:shade val="30000"/>
-                <a:satMod val="200000"/>
-              </a:schemeClr>
-            </a:gs>
-          </a:gsLst>
-          <a:path path="circle">
-            <a:fillToRect l="50000" t="50000" r="50000" b="50000"/>
-          </a:path>
-        </a:gradFill>
-      </a:bgFillStyleLst>
-    </a:fmtScheme>
-  </a:themeElements>
-</a:theme>
 </file>
--- a/ADAPTIVE CONTROL UNIT.pptx
+++ b/ADAPTIVE CONTROL UNIT.pptx
@@ -1,29 +1,29 @@
 
 <file path=ppt/presentation.xml><?xml version="1.0" encoding="utf-8"?>
-<p:presentation xmlns:a="http://schemas.openxmlformats.org/drawingml/2006/main" xmlns:r="http://schemas.openxmlformats.org/officeDocument/2006/relationships" xmlns:mc="http://schemas.openxmlformats.org/markup-compatibility/2006" xmlns:mv="urn:schemas-microsoft-com:mac:vml" xmlns:p="http://schemas.openxmlformats.org/presentationml/2006/main" xmlns:c="http://schemas.openxmlformats.org/drawingml/2006/chart" xmlns:dgm="http://schemas.openxmlformats.org/drawingml/2006/diagram" xmlns:o="urn:schemas-microsoft-com:office:office" xmlns:v="urn:schemas-microsoft-com:vml" xmlns:pvml="urn:schemas-microsoft-com:office:powerpoint" xmlns:com="http://schemas.openxmlformats.org/drawingml/2006/compatibility" xmlns:p14="http://schemas.microsoft.com/office/powerpoint/2010/main" xmlns:p15="http://schemas.microsoft.com/office/powerpoint/2012/main" xmlns:ahyp="http://schemas.microsoft.com/office/drawing/2018/hyperlinkcolor" autoCompressPictures="0" strictFirstAndLastChars="0" saveSubsetFonts="1">
+<p:presentation xmlns:a="http://schemas.openxmlformats.org/drawingml/2006/main" xmlns:r="http://schemas.openxmlformats.org/officeDocument/2006/relationships" xmlns:p="http://schemas.openxmlformats.org/presentationml/2006/main" xmlns:m="http://schemas.openxmlformats.org/officeDocument/2006/math" xmlns:w="http://schemas.openxmlformats.org/wordprocessingml/2006/main" autoCompressPictures="0" saveSubsetFonts="1" strictFirstAndLastChars="0">
   <p:sldMasterIdLst>
-    <p:sldMasterId id="2147483659" r:id="rId4"/>
+    <p:sldMasterId id="2147483648" r:id="rId1"/>
   </p:sldMasterIdLst>
   <p:notesMasterIdLst>
-    <p:notesMasterId r:id="rId5"/>
+    <p:notesMasterId r:id="rId15"/>
   </p:notesMasterIdLst>
   <p:sldIdLst>
-    <p:sldId id="256" r:id="rId6"/>
-    <p:sldId id="257" r:id="rId7"/>
-    <p:sldId id="258" r:id="rId8"/>
-    <p:sldId id="259" r:id="rId9"/>
-    <p:sldId id="260" r:id="rId10"/>
-    <p:sldId id="261" r:id="rId11"/>
-    <p:sldId id="262" r:id="rId12"/>
-    <p:sldId id="263" r:id="rId13"/>
-    <p:sldId id="264" r:id="rId14"/>
-    <p:sldId id="265" r:id="rId15"/>
-    <p:sldId id="266" r:id="rId16"/>
+    <p:sldId id="256" r:id="rId4"/>
+    <p:sldId id="257" r:id="rId5"/>
+    <p:sldId id="258" r:id="rId6"/>
+    <p:sldId id="259" r:id="rId7"/>
+    <p:sldId id="260" r:id="rId8"/>
+    <p:sldId id="261" r:id="rId9"/>
+    <p:sldId id="262" r:id="rId10"/>
+    <p:sldId id="263" r:id="rId11"/>
+    <p:sldId id="264" r:id="rId12"/>
+    <p:sldId id="265" r:id="rId13"/>
+    <p:sldId id="266" r:id="rId14"/>
   </p:sldIdLst>
-  <p:sldSz cy="5143500" cx="9144000"/>
+  <p:sldSz cx="9144000" cy="5143500"/>
   <p:notesSz cx="6858000" cy="9144000"/>
   <p:defaultTextStyle>
-    <a:defPPr lvl="0" marR="0" rtl="0" algn="l">
+    <a:defPPr marR="0" lvl="0" algn="l" rtl="0">
       <a:lnSpc>
         <a:spcPct val="100000"/>
       </a:lnSpc>
@@ -34,7 +34,7 @@
         <a:spcPts val="0"/>
       </a:spcAft>
     </a:defPPr>
-    <a:lvl1pPr lvl="0" marR="0" rtl="0" algn="l">
+    <a:lvl1pPr marR="0" lvl="0" algn="l" rtl="0">
       <a:lnSpc>
         <a:spcPct val="100000"/>
       </a:lnSpc>
@@ -48,17 +48,16 @@
         <a:srgbClr val="000000"/>
       </a:buClr>
       <a:buFont typeface="Arial"/>
-      <a:defRPr b="0" i="0" sz="1400" u="none" cap="none" strike="noStrike">
+      <a:defRPr sz="1400" b="0" i="0" u="none" strike="noStrike" cap="none">
         <a:solidFill>
           <a:srgbClr val="000000"/>
         </a:solidFill>
         <a:latin typeface="Arial"/>
         <a:ea typeface="Arial"/>
         <a:cs typeface="Arial"/>
-        <a:sym typeface="Arial"/>
       </a:defRPr>
     </a:lvl1pPr>
-    <a:lvl2pPr lvl="1" marR="0" rtl="0" algn="l">
+    <a:lvl2pPr marR="0" lvl="1" algn="l" rtl="0">
       <a:lnSpc>
         <a:spcPct val="100000"/>
       </a:lnSpc>
@@ -72,17 +71,16 @@
         <a:srgbClr val="000000"/>
       </a:buClr>
       <a:buFont typeface="Arial"/>
-      <a:defRPr b="0" i="0" sz="1400" u="none" cap="none" strike="noStrike">
+      <a:defRPr sz="1400" b="0" i="0" u="none" strike="noStrike" cap="none">
         <a:solidFill>
           <a:srgbClr val="000000"/>
         </a:solidFill>
         <a:latin typeface="Arial"/>
         <a:ea typeface="Arial"/>
         <a:cs typeface="Arial"/>
-        <a:sym typeface="Arial"/>
       </a:defRPr>
     </a:lvl2pPr>
-    <a:lvl3pPr lvl="2" marR="0" rtl="0" algn="l">
+    <a:lvl3pPr marR="0" lvl="2" algn="l" rtl="0">
       <a:lnSpc>
         <a:spcPct val="100000"/>
       </a:lnSpc>
@@ -96,17 +94,16 @@
         <a:srgbClr val="000000"/>
       </a:buClr>
       <a:buFont typeface="Arial"/>
-      <a:defRPr b="0" i="0" sz="1400" u="none" cap="none" strike="noStrike">
+      <a:defRPr sz="1400" b="0" i="0" u="none" strike="noStrike" cap="none">
         <a:solidFill>
           <a:srgbClr val="000000"/>
         </a:solidFill>
         <a:latin typeface="Arial"/>
         <a:ea typeface="Arial"/>
         <a:cs typeface="Arial"/>
-        <a:sym typeface="Arial"/>
       </a:defRPr>
     </a:lvl3pPr>
-    <a:lvl4pPr lvl="3" marR="0" rtl="0" algn="l">
+    <a:lvl4pPr marR="0" lvl="3" algn="l" rtl="0">
       <a:lnSpc>
         <a:spcPct val="100000"/>
       </a:lnSpc>
@@ -120,17 +117,16 @@
         <a:srgbClr val="000000"/>
       </a:buClr>
       <a:buFont typeface="Arial"/>
-      <a:defRPr b="0" i="0" sz="1400" u="none" cap="none" strike="noStrike">
+      <a:defRPr sz="1400" b="0" i="0" u="none" strike="noStrike" cap="none">
         <a:solidFill>
           <a:srgbClr val="000000"/>
         </a:solidFill>
         <a:latin typeface="Arial"/>
         <a:ea typeface="Arial"/>
         <a:cs typeface="Arial"/>
-        <a:sym typeface="Arial"/>
       </a:defRPr>
     </a:lvl4pPr>
-    <a:lvl5pPr lvl="4" marR="0" rtl="0" algn="l">
+    <a:lvl5pPr marR="0" lvl="4" algn="l" rtl="0">
       <a:lnSpc>
         <a:spcPct val="100000"/>
       </a:lnSpc>
@@ -144,17 +140,16 @@
         <a:srgbClr val="000000"/>
       </a:buClr>
       <a:buFont typeface="Arial"/>
-      <a:defRPr b="0" i="0" sz="1400" u="none" cap="none" strike="noStrike">
+      <a:defRPr sz="1400" b="0" i="0" u="none" strike="noStrike" cap="none">
         <a:solidFill>
           <a:srgbClr val="000000"/>
         </a:solidFill>
         <a:latin typeface="Arial"/>
         <a:ea typeface="Arial"/>
         <a:cs typeface="Arial"/>
-        <a:sym typeface="Arial"/>
       </a:defRPr>
     </a:lvl5pPr>
-    <a:lvl6pPr lvl="5" marR="0" rtl="0" algn="l">
+    <a:lvl6pPr marR="0" lvl="5" algn="l" rtl="0">
       <a:lnSpc>
         <a:spcPct val="100000"/>
       </a:lnSpc>
@@ -168,17 +163,16 @@
         <a:srgbClr val="000000"/>
       </a:buClr>
       <a:buFont typeface="Arial"/>
-      <a:defRPr b="0" i="0" sz="1400" u="none" cap="none" strike="noStrike">
+      <a:defRPr sz="1400" b="0" i="0" u="none" strike="noStrike" cap="none">
         <a:solidFill>
           <a:srgbClr val="000000"/>
         </a:solidFill>
         <a:latin typeface="Arial"/>
         <a:ea typeface="Arial"/>
         <a:cs typeface="Arial"/>
-        <a:sym typeface="Arial"/>
       </a:defRPr>
     </a:lvl6pPr>
-    <a:lvl7pPr lvl="6" marR="0" rtl="0" algn="l">
+    <a:lvl7pPr marR="0" lvl="6" algn="l" rtl="0">
       <a:lnSpc>
         <a:spcPct val="100000"/>
       </a:lnSpc>
@@ -192,17 +186,16 @@
         <a:srgbClr val="000000"/>
       </a:buClr>
       <a:buFont typeface="Arial"/>
-      <a:defRPr b="0" i="0" sz="1400" u="none" cap="none" strike="noStrike">
+      <a:defRPr sz="1400" b="0" i="0" u="none" strike="noStrike" cap="none">
         <a:solidFill>
           <a:srgbClr val="000000"/>
         </a:solidFill>
         <a:latin typeface="Arial"/>
         <a:ea typeface="Arial"/>
         <a:cs typeface="Arial"/>
-        <a:sym typeface="Arial"/>
       </a:defRPr>
     </a:lvl7pPr>
-    <a:lvl8pPr lvl="7" marR="0" rtl="0" algn="l">
+    <a:lvl8pPr marR="0" lvl="7" algn="l" rtl="0">
       <a:lnSpc>
         <a:spcPct val="100000"/>
       </a:lnSpc>
@@ -216,17 +209,16 @@
         <a:srgbClr val="000000"/>
       </a:buClr>
       <a:buFont typeface="Arial"/>
-      <a:defRPr b="0" i="0" sz="1400" u="none" cap="none" strike="noStrike">
+      <a:defRPr sz="1400" b="0" i="0" u="none" strike="noStrike" cap="none">
         <a:solidFill>
           <a:srgbClr val="000000"/>
         </a:solidFill>
         <a:latin typeface="Arial"/>
         <a:ea typeface="Arial"/>
         <a:cs typeface="Arial"/>
-        <a:sym typeface="Arial"/>
       </a:defRPr>
     </a:lvl8pPr>
-    <a:lvl9pPr lvl="8" marR="0" rtl="0" algn="l">
+    <a:lvl9pPr marR="0" lvl="8" algn="l" rtl="0">
       <a:lnSpc>
         <a:spcPct val="100000"/>
       </a:lnSpc>
@@ -240,46 +232,29 @@
         <a:srgbClr val="000000"/>
       </a:buClr>
       <a:buFont typeface="Arial"/>
-      <a:defRPr b="0" i="0" sz="1400" u="none" cap="none" strike="noStrike">
+      <a:defRPr sz="1400" b="0" i="0" u="none" strike="noStrike" cap="none">
         <a:solidFill>
           <a:srgbClr val="000000"/>
         </a:solidFill>
         <a:latin typeface="Arial"/>
         <a:ea typeface="Arial"/>
         <a:cs typeface="Arial"/>
-        <a:sym typeface="Arial"/>
       </a:defRPr>
     </a:lvl9pPr>
   </p:defaultTextStyle>
-  <p:extLst>
-    <p:ext uri="{EFAFB233-063F-42B5-8137-9DF3F51BA10A}">
-      <p15:sldGuideLst>
-        <p15:guide id="1" orient="horz" pos="1620">
-          <p15:clr>
-            <a:srgbClr val="747775"/>
-          </p15:clr>
-        </p15:guide>
-        <p15:guide id="2" pos="2880">
-          <p15:clr>
-            <a:srgbClr val="747775"/>
-          </p15:clr>
-        </p15:guide>
-      </p15:sldGuideLst>
-    </p:ext>
-  </p:extLst>
 </p:presentation>
 </file>
 
 <file path=ppt/notesMasters/notesMaster1.xml><?xml version="1.0" encoding="utf-8"?>
-<p:notesMaster xmlns:a="http://schemas.openxmlformats.org/drawingml/2006/main" xmlns:r="http://schemas.openxmlformats.org/officeDocument/2006/relationships" xmlns:mc="http://schemas.openxmlformats.org/markup-compatibility/2006" xmlns:mv="urn:schemas-microsoft-com:mac:vml" xmlns:p="http://schemas.openxmlformats.org/presentationml/2006/main" xmlns:c="http://schemas.openxmlformats.org/drawingml/2006/chart" xmlns:dgm="http://schemas.openxmlformats.org/drawingml/2006/diagram" xmlns:o="urn:schemas-microsoft-com:office:office" xmlns:v="urn:schemas-microsoft-com:vml" xmlns:pvml="urn:schemas-microsoft-com:office:powerpoint" xmlns:com="http://schemas.openxmlformats.org/drawingml/2006/compatibility" xmlns:p14="http://schemas.microsoft.com/office/powerpoint/2010/main" xmlns:p15="http://schemas.microsoft.com/office/powerpoint/2012/main" xmlns:ahyp="http://schemas.microsoft.com/office/drawing/2018/hyperlinkcolor">
-  <p:cSld>
+<p:notesMaster xmlns:a="http://schemas.openxmlformats.org/drawingml/2006/main" xmlns:r="http://schemas.openxmlformats.org/officeDocument/2006/relationships" xmlns:p="http://schemas.openxmlformats.org/presentationml/2006/main">
+  <p:cSld name="">
     <p:spTree>
       <p:nvGrpSpPr>
-        <p:cNvPr id="2" name="Shape 2"/>
+        <p:cNvPr id="1" name=""/>
         <p:cNvGrpSpPr/>
         <p:nvPr/>
       </p:nvGrpSpPr>
-      <p:grpSpPr>
+      <p:grpSpPr bwMode="auto">
         <a:xfrm>
           <a:off x="0" y="0"/>
           <a:ext cx="0" cy="0"/>
@@ -289,21 +264,25 @@
       </p:grpSpPr>
       <p:sp>
         <p:nvSpPr>
-          <p:cNvPr id="3" name="Google Shape;3;n"/>
+          <p:cNvPr id="605317538" name="Google Shape;3;n"/>
           <p:cNvSpPr/>
           <p:nvPr>
-            <p:ph idx="2" type="sldImg"/>
+            <p:ph type="sldImg" idx="2"/>
           </p:nvPr>
         </p:nvSpPr>
-        <p:spPr>
+        <p:spPr bwMode="auto">
           <a:xfrm>
             <a:off x="381300" y="685800"/>
             <a:ext cx="6096075" cy="3429000"/>
           </a:xfrm>
           <a:custGeom>
-            <a:rect b="b" l="l" r="r" t="t"/>
+            <a:avLst/>
+            <a:gdLst/>
+            <a:ahLst/>
+            <a:cxnLst/>
+            <a:rect l="l" t="t" r="r" b="b"/>
             <a:pathLst>
-              <a:path extrusionOk="0" h="120000" w="120000">
+              <a:path w="120000" h="120000" fill="norm" stroke="1" extrusionOk="0">
                 <a:moveTo>
                   <a:pt x="0" y="0"/>
                 </a:moveTo>
@@ -321,26 +300,26 @@
             </a:pathLst>
           </a:custGeom>
           <a:noFill/>
-          <a:ln cap="flat" cmpd="sng" w="9525">
+          <a:ln w="9525" cap="flat" cmpd="sng">
             <a:solidFill>
               <a:srgbClr val="000000"/>
             </a:solidFill>
             <a:prstDash val="solid"/>
             <a:round/>
-            <a:headEnd len="sm" w="sm" type="none"/>
-            <a:tailEnd len="sm" w="sm" type="none"/>
+            <a:headEnd type="none" w="sm" len="sm"/>
+            <a:tailEnd type="none" w="sm" len="sm"/>
           </a:ln>
         </p:spPr>
       </p:sp>
       <p:sp>
         <p:nvSpPr>
-          <p:cNvPr id="4" name="Google Shape;4;n"/>
+          <p:cNvPr id="611205471" name="Google Shape;4;n"/>
           <p:cNvSpPr txBox="1"/>
           <p:nvPr>
-            <p:ph idx="1" type="body"/>
+            <p:ph type="body" idx="1"/>
           </p:nvPr>
         </p:nvSpPr>
-        <p:spPr>
+        <p:spPr bwMode="auto">
           <a:xfrm>
             <a:off x="685800" y="4343400"/>
             <a:ext cx="5486400" cy="4114800"/>
@@ -354,11 +333,11 @@
           </a:ln>
         </p:spPr>
         <p:txBody>
-          <a:bodyPr anchorCtr="0" anchor="t" bIns="91425" lIns="91425" spcFirstLastPara="1" rIns="91425" wrap="square" tIns="91425">
+          <a:bodyPr spcFirstLastPara="1" wrap="square" lIns="91425" tIns="91425" rIns="91425" bIns="91425" anchor="t" anchorCtr="0">
             <a:noAutofit/>
           </a:bodyPr>
           <a:lstStyle>
-            <a:lvl1pPr indent="-298450" lvl="0" marL="457200">
+            <a:lvl1pPr marL="457200" lvl="0" indent="-298450">
               <a:spcBef>
                 <a:spcPts val="0"/>
               </a:spcBef>
@@ -369,7 +348,7 @@
               <a:buChar char="●"/>
               <a:defRPr sz="1100"/>
             </a:lvl1pPr>
-            <a:lvl2pPr indent="-298450" lvl="1" marL="914400">
+            <a:lvl2pPr marL="914400" lvl="1" indent="-298450">
               <a:spcBef>
                 <a:spcPts val="0"/>
               </a:spcBef>
@@ -380,7 +359,7 @@
               <a:buChar char="○"/>
               <a:defRPr sz="1100"/>
             </a:lvl2pPr>
-            <a:lvl3pPr indent="-298450" lvl="2" marL="1371600">
+            <a:lvl3pPr marL="1371600" lvl="2" indent="-298450">
               <a:spcBef>
                 <a:spcPts val="0"/>
               </a:spcBef>
@@ -391,7 +370,7 @@
               <a:buChar char="■"/>
               <a:defRPr sz="1100"/>
             </a:lvl3pPr>
-            <a:lvl4pPr indent="-298450" lvl="3" marL="1828800">
+            <a:lvl4pPr marL="1828800" lvl="3" indent="-298450">
               <a:spcBef>
                 <a:spcPts val="0"/>
               </a:spcBef>
@@ -402,7 +381,7 @@
               <a:buChar char="●"/>
               <a:defRPr sz="1100"/>
             </a:lvl4pPr>
-            <a:lvl5pPr indent="-298450" lvl="4" marL="2286000">
+            <a:lvl5pPr marL="2286000" lvl="4" indent="-298450">
               <a:spcBef>
                 <a:spcPts val="0"/>
               </a:spcBef>
@@ -413,7 +392,7 @@
               <a:buChar char="○"/>
               <a:defRPr sz="1100"/>
             </a:lvl5pPr>
-            <a:lvl6pPr indent="-298450" lvl="5" marL="2743200">
+            <a:lvl6pPr marL="2743200" lvl="5" indent="-298450">
               <a:spcBef>
                 <a:spcPts val="0"/>
               </a:spcBef>
@@ -424,7 +403,7 @@
               <a:buChar char="■"/>
               <a:defRPr sz="1100"/>
             </a:lvl6pPr>
-            <a:lvl7pPr indent="-298450" lvl="6" marL="3200400">
+            <a:lvl7pPr marL="3200400" lvl="6" indent="-298450">
               <a:spcBef>
                 <a:spcPts val="0"/>
               </a:spcBef>
@@ -435,7 +414,7 @@
               <a:buChar char="●"/>
               <a:defRPr sz="1100"/>
             </a:lvl7pPr>
-            <a:lvl8pPr indent="-298450" lvl="7" marL="3657600">
+            <a:lvl8pPr marL="3657600" lvl="7" indent="-298450">
               <a:spcBef>
                 <a:spcPts val="0"/>
               </a:spcBef>
@@ -446,7 +425,7 @@
               <a:buChar char="○"/>
               <a:defRPr sz="1100"/>
             </a:lvl8pPr>
-            <a:lvl9pPr indent="-298450" lvl="8" marL="4114800">
+            <a:lvl9pPr marL="4114800" lvl="8" indent="-298450">
               <a:spcBef>
                 <a:spcPts val="0"/>
               </a:spcBef>
@@ -458,14 +437,19 @@
               <a:defRPr sz="1100"/>
             </a:lvl9pPr>
           </a:lstStyle>
-          <a:p/>
+          <a:p>
+            <a:pPr>
+              <a:defRPr/>
+            </a:pPr>
+            <a:endParaRPr/>
+          </a:p>
         </p:txBody>
       </p:sp>
     </p:spTree>
   </p:cSld>
-  <p:clrMap accent1="accent1" accent2="accent2" accent3="accent3" accent4="accent4" accent5="accent5" accent6="accent6" bg1="lt1" bg2="dk2" tx1="dk1" tx2="lt2" folHlink="folHlink" hlink="hlink"/>
+  <p:clrMap bg1="lt1" tx1="dk1" bg2="dk2" tx2="lt2" accent1="accent1" accent2="accent2" accent3="accent3" accent4="accent4" accent5="accent5" accent6="accent6" hlink="hlink" folHlink="folHlink"/>
   <p:notesStyle>
-    <a:defPPr lvl="0" marR="0" rtl="0" algn="l">
+    <a:defPPr marR="0" lvl="0" algn="l" rtl="0">
       <a:lnSpc>
         <a:spcPct val="100000"/>
       </a:lnSpc>
@@ -476,7 +460,7 @@
         <a:spcPts val="0"/>
       </a:spcAft>
     </a:defPPr>
-    <a:lvl1pPr lvl="0" marR="0" rtl="0" algn="l">
+    <a:lvl1pPr marR="0" lvl="0" algn="l" rtl="0">
       <a:lnSpc>
         <a:spcPct val="100000"/>
       </a:lnSpc>
@@ -490,17 +474,16 @@
         <a:srgbClr val="000000"/>
       </a:buClr>
       <a:buFont typeface="Arial"/>
-      <a:defRPr b="0" i="0" sz="1400" u="none" cap="none" strike="noStrike">
+      <a:defRPr sz="1400" b="0" i="0" u="none" strike="noStrike" cap="none">
         <a:solidFill>
           <a:srgbClr val="000000"/>
         </a:solidFill>
         <a:latin typeface="Arial"/>
         <a:ea typeface="Arial"/>
         <a:cs typeface="Arial"/>
-        <a:sym typeface="Arial"/>
       </a:defRPr>
     </a:lvl1pPr>
-    <a:lvl2pPr lvl="1" marR="0" rtl="0" algn="l">
+    <a:lvl2pPr marR="0" lvl="1" algn="l" rtl="0">
       <a:lnSpc>
         <a:spcPct val="100000"/>
       </a:lnSpc>
@@ -514,17 +497,16 @@
         <a:srgbClr val="000000"/>
       </a:buClr>
       <a:buFont typeface="Arial"/>
-      <a:defRPr b="0" i="0" sz="1400" u="none" cap="none" strike="noStrike">
+      <a:defRPr sz="1400" b="0" i="0" u="none" strike="noStrike" cap="none">
         <a:solidFill>
           <a:srgbClr val="000000"/>
         </a:solidFill>
         <a:latin typeface="Arial"/>
         <a:ea typeface="Arial"/>
         <a:cs typeface="Arial"/>
-        <a:sym typeface="Arial"/>
       </a:defRPr>
     </a:lvl2pPr>
-    <a:lvl3pPr lvl="2" marR="0" rtl="0" algn="l">
+    <a:lvl3pPr marR="0" lvl="2" algn="l" rtl="0">
       <a:lnSpc>
         <a:spcPct val="100000"/>
       </a:lnSpc>
@@ -538,17 +520,16 @@
         <a:srgbClr val="000000"/>
       </a:buClr>
       <a:buFont typeface="Arial"/>
-      <a:defRPr b="0" i="0" sz="1400" u="none" cap="none" strike="noStrike">
+      <a:defRPr sz="1400" b="0" i="0" u="none" strike="noStrike" cap="none">
         <a:solidFill>
           <a:srgbClr val="000000"/>
         </a:solidFill>
         <a:latin typeface="Arial"/>
         <a:ea typeface="Arial"/>
         <a:cs typeface="Arial"/>
-        <a:sym typeface="Arial"/>
       </a:defRPr>
     </a:lvl3pPr>
-    <a:lvl4pPr lvl="3" marR="0" rtl="0" algn="l">
+    <a:lvl4pPr marR="0" lvl="3" algn="l" rtl="0">
       <a:lnSpc>
         <a:spcPct val="100000"/>
       </a:lnSpc>
@@ -562,17 +543,16 @@
         <a:srgbClr val="000000"/>
       </a:buClr>
       <a:buFont typeface="Arial"/>
-      <a:defRPr b="0" i="0" sz="1400" u="none" cap="none" strike="noStrike">
+      <a:defRPr sz="1400" b="0" i="0" u="none" strike="noStrike" cap="none">
         <a:solidFill>
           <a:srgbClr val="000000"/>
         </a:solidFill>
         <a:latin typeface="Arial"/>
         <a:ea typeface="Arial"/>
         <a:cs typeface="Arial"/>
-        <a:sym typeface="Arial"/>
       </a:defRPr>
     </a:lvl4pPr>
-    <a:lvl5pPr lvl="4" marR="0" rtl="0" algn="l">
+    <a:lvl5pPr marR="0" lvl="4" algn="l" rtl="0">
       <a:lnSpc>
         <a:spcPct val="100000"/>
       </a:lnSpc>
@@ -586,17 +566,16 @@
         <a:srgbClr val="000000"/>
       </a:buClr>
       <a:buFont typeface="Arial"/>
-      <a:defRPr b="0" i="0" sz="1400" u="none" cap="none" strike="noStrike">
+      <a:defRPr sz="1400" b="0" i="0" u="none" strike="noStrike" cap="none">
         <a:solidFill>
           <a:srgbClr val="000000"/>
         </a:solidFill>
         <a:latin typeface="Arial"/>
         <a:ea typeface="Arial"/>
         <a:cs typeface="Arial"/>
-        <a:sym typeface="Arial"/>
       </a:defRPr>
     </a:lvl5pPr>
-    <a:lvl6pPr lvl="5" marR="0" rtl="0" algn="l">
+    <a:lvl6pPr marR="0" lvl="5" algn="l" rtl="0">
       <a:lnSpc>
         <a:spcPct val="100000"/>
       </a:lnSpc>
@@ -610,17 +589,16 @@
         <a:srgbClr val="000000"/>
       </a:buClr>
       <a:buFont typeface="Arial"/>
-      <a:defRPr b="0" i="0" sz="1400" u="none" cap="none" strike="noStrike">
+      <a:defRPr sz="1400" b="0" i="0" u="none" strike="noStrike" cap="none">
         <a:solidFill>
           <a:srgbClr val="000000"/>
         </a:solidFill>
         <a:latin typeface="Arial"/>
         <a:ea typeface="Arial"/>
         <a:cs typeface="Arial"/>
-        <a:sym typeface="Arial"/>
       </a:defRPr>
     </a:lvl6pPr>
-    <a:lvl7pPr lvl="6" marR="0" rtl="0" algn="l">
+    <a:lvl7pPr marR="0" lvl="6" algn="l" rtl="0">
       <a:lnSpc>
         <a:spcPct val="100000"/>
       </a:lnSpc>
@@ -634,17 +612,16 @@
         <a:srgbClr val="000000"/>
       </a:buClr>
       <a:buFont typeface="Arial"/>
-      <a:defRPr b="0" i="0" sz="1400" u="none" cap="none" strike="noStrike">
+      <a:defRPr sz="1400" b="0" i="0" u="none" strike="noStrike" cap="none">
         <a:solidFill>
           <a:srgbClr val="000000"/>
         </a:solidFill>
         <a:latin typeface="Arial"/>
         <a:ea typeface="Arial"/>
         <a:cs typeface="Arial"/>
-        <a:sym typeface="Arial"/>
       </a:defRPr>
     </a:lvl7pPr>
-    <a:lvl8pPr lvl="7" marR="0" rtl="0" algn="l">
+    <a:lvl8pPr marR="0" lvl="7" algn="l" rtl="0">
       <a:lnSpc>
         <a:spcPct val="100000"/>
       </a:lnSpc>
@@ -658,17 +635,16 @@
         <a:srgbClr val="000000"/>
       </a:buClr>
       <a:buFont typeface="Arial"/>
-      <a:defRPr b="0" i="0" sz="1400" u="none" cap="none" strike="noStrike">
+      <a:defRPr sz="1400" b="0" i="0" u="none" strike="noStrike" cap="none">
         <a:solidFill>
           <a:srgbClr val="000000"/>
         </a:solidFill>
         <a:latin typeface="Arial"/>
         <a:ea typeface="Arial"/>
         <a:cs typeface="Arial"/>
-        <a:sym typeface="Arial"/>
       </a:defRPr>
     </a:lvl8pPr>
-    <a:lvl9pPr lvl="8" marR="0" rtl="0" algn="l">
+    <a:lvl9pPr marR="0" lvl="8" algn="l" rtl="0">
       <a:lnSpc>
         <a:spcPct val="100000"/>
       </a:lnSpc>
@@ -682,14 +658,13 @@
         <a:srgbClr val="000000"/>
       </a:buClr>
       <a:buFont typeface="Arial"/>
-      <a:defRPr b="0" i="0" sz="1400" u="none" cap="none" strike="noStrike">
+      <a:defRPr sz="1400" b="0" i="0" u="none" strike="noStrike" cap="none">
         <a:solidFill>
           <a:srgbClr val="000000"/>
         </a:solidFill>
         <a:latin typeface="Arial"/>
         <a:ea typeface="Arial"/>
         <a:cs typeface="Arial"/>
-        <a:sym typeface="Arial"/>
       </a:defRPr>
     </a:lvl9pPr>
   </p:notesStyle>
@@ -697,15 +672,15 @@
 </file>
 
 <file path=ppt/notesSlides/notesSlide1.xml><?xml version="1.0" encoding="utf-8"?>
-<p:notes xmlns:a="http://schemas.openxmlformats.org/drawingml/2006/main" xmlns:r="http://schemas.openxmlformats.org/officeDocument/2006/relationships" xmlns:mc="http://schemas.openxmlformats.org/markup-compatibility/2006" xmlns:mv="urn:schemas-microsoft-com:mac:vml" xmlns:p="http://schemas.openxmlformats.org/presentationml/2006/main" xmlns:c="http://schemas.openxmlformats.org/drawingml/2006/chart" xmlns:dgm="http://schemas.openxmlformats.org/drawingml/2006/diagram" xmlns:o="urn:schemas-microsoft-com:office:office" xmlns:v="urn:schemas-microsoft-com:vml" xmlns:pvml="urn:schemas-microsoft-com:office:powerpoint" xmlns:com="http://schemas.openxmlformats.org/drawingml/2006/compatibility" xmlns:p14="http://schemas.microsoft.com/office/powerpoint/2010/main" xmlns:p15="http://schemas.microsoft.com/office/powerpoint/2012/main" xmlns:ahyp="http://schemas.microsoft.com/office/drawing/2018/hyperlinkcolor" showMasterPhAnim="0" showMasterSp="0">
-  <p:cSld>
+<p:notes xmlns:a="http://schemas.openxmlformats.org/drawingml/2006/main" xmlns:r="http://schemas.openxmlformats.org/officeDocument/2006/relationships" xmlns:p="http://schemas.openxmlformats.org/presentationml/2006/main" xmlns:m="http://schemas.openxmlformats.org/officeDocument/2006/math" xmlns:w="http://schemas.openxmlformats.org/wordprocessingml/2006/main" showMasterPhAnim="0" showMasterSp="0">
+  <p:cSld name="">
     <p:spTree>
       <p:nvGrpSpPr>
-        <p:cNvPr id="50" name="Shape 50"/>
+        <p:cNvPr id="1" name=""/>
         <p:cNvGrpSpPr/>
         <p:nvPr/>
       </p:nvGrpSpPr>
-      <p:grpSpPr>
+      <p:grpSpPr bwMode="auto">
         <a:xfrm>
           <a:off x="0" y="0"/>
           <a:ext cx="0" cy="0"/>
@@ -715,21 +690,25 @@
       </p:grpSpPr>
       <p:sp>
         <p:nvSpPr>
-          <p:cNvPr id="51" name="Google Shape;51;p:notes"/>
+          <p:cNvPr id="1173095131" name="Google Shape;51;p:notes"/>
           <p:cNvSpPr/>
           <p:nvPr>
-            <p:ph idx="2" type="sldImg"/>
+            <p:ph type="sldImg" idx="2"/>
           </p:nvPr>
         </p:nvSpPr>
-        <p:spPr>
+        <p:spPr bwMode="auto">
           <a:xfrm>
             <a:off x="381300" y="685800"/>
             <a:ext cx="6096075" cy="3429000"/>
           </a:xfrm>
           <a:custGeom>
-            <a:rect b="b" l="l" r="r" t="t"/>
+            <a:avLst/>
+            <a:gdLst/>
+            <a:ahLst/>
+            <a:cxnLst/>
+            <a:rect l="l" t="t" r="r" b="b"/>
             <a:pathLst>
-              <a:path extrusionOk="0" h="120000" w="120000">
+              <a:path w="120000" h="120000" fill="norm" stroke="1" extrusionOk="0">
                 <a:moveTo>
                   <a:pt x="0" y="0"/>
                 </a:moveTo>
@@ -750,13 +729,13 @@
       </p:sp>
       <p:sp>
         <p:nvSpPr>
-          <p:cNvPr id="52" name="Google Shape;52;p:notes"/>
+          <p:cNvPr id="612484062" name="Google Shape;52;p:notes"/>
           <p:cNvSpPr txBox="1"/>
           <p:nvPr>
-            <p:ph idx="1" type="body"/>
+            <p:ph type="body" idx="1"/>
           </p:nvPr>
         </p:nvSpPr>
-        <p:spPr>
+        <p:spPr bwMode="auto">
           <a:xfrm>
             <a:off x="685800" y="4343400"/>
             <a:ext cx="5486400" cy="4114800"/>
@@ -766,23 +745,21 @@
           </a:prstGeom>
         </p:spPr>
         <p:txBody>
-          <a:bodyPr anchorCtr="0" anchor="t" bIns="91425" lIns="91425" spcFirstLastPara="1" rIns="91425" wrap="square" tIns="91425">
+          <a:bodyPr spcFirstLastPara="1" wrap="square" lIns="91425" tIns="91425" rIns="91425" bIns="91425" anchor="t" anchorCtr="0">
             <a:noAutofit/>
           </a:bodyPr>
           <a:lstStyle/>
           <a:p>
-            <a:pPr indent="0" lvl="0" marL="0" rtl="0" algn="l">
-              <a:spcBef>
-                <a:spcPts val="0"/>
-              </a:spcBef>
-              <a:spcAft>
-                <a:spcPts val="0"/>
-              </a:spcAft>
-              <a:buNone/>
+            <a:pPr marL="0" lvl="0" indent="0" algn="l" rtl="0">
+              <a:spcBef>
+                <a:spcPts val="0"/>
+              </a:spcBef>
+              <a:spcAft>
+                <a:spcPts val="0"/>
+              </a:spcAft>
+              <a:buNone/>
+              <a:defRPr/>
             </a:pPr>
-            <a:r>
-              <a:t/>
-            </a:r>
             <a:endParaRPr/>
           </a:p>
         </p:txBody>
@@ -796,15 +773,15 @@
 </file>
 
 <file path=ppt/notesSlides/notesSlide10.xml><?xml version="1.0" encoding="utf-8"?>
-<p:notes xmlns:a="http://schemas.openxmlformats.org/drawingml/2006/main" xmlns:r="http://schemas.openxmlformats.org/officeDocument/2006/relationships" xmlns:mc="http://schemas.openxmlformats.org/markup-compatibility/2006" xmlns:mv="urn:schemas-microsoft-com:mac:vml" xmlns:p="http://schemas.openxmlformats.org/presentationml/2006/main" xmlns:c="http://schemas.openxmlformats.org/drawingml/2006/chart" xmlns:dgm="http://schemas.openxmlformats.org/drawingml/2006/diagram" xmlns:o="urn:schemas-microsoft-com:office:office" xmlns:v="urn:schemas-microsoft-com:vml" xmlns:pvml="urn:schemas-microsoft-com:office:powerpoint" xmlns:com="http://schemas.openxmlformats.org/drawingml/2006/compatibility" xmlns:p14="http://schemas.microsoft.com/office/powerpoint/2010/main" xmlns:p15="http://schemas.microsoft.com/office/powerpoint/2012/main" xmlns:ahyp="http://schemas.microsoft.com/office/drawing/2018/hyperlinkcolor" showMasterPhAnim="0" showMasterSp="0">
-  <p:cSld>
+<p:notes xmlns:a="http://schemas.openxmlformats.org/drawingml/2006/main" xmlns:r="http://schemas.openxmlformats.org/officeDocument/2006/relationships" xmlns:p="http://schemas.openxmlformats.org/presentationml/2006/main" xmlns:m="http://schemas.openxmlformats.org/officeDocument/2006/math" xmlns:w="http://schemas.openxmlformats.org/wordprocessingml/2006/main" showMasterPhAnim="0" showMasterSp="0">
+  <p:cSld name="">
     <p:spTree>
       <p:nvGrpSpPr>
-        <p:cNvPr id="105" name="Shape 105"/>
+        <p:cNvPr id="1" name=""/>
         <p:cNvGrpSpPr/>
         <p:nvPr/>
       </p:nvGrpSpPr>
-      <p:grpSpPr>
+      <p:grpSpPr bwMode="auto">
         <a:xfrm>
           <a:off x="0" y="0"/>
           <a:ext cx="0" cy="0"/>
@@ -814,21 +791,25 @@
       </p:grpSpPr>
       <p:sp>
         <p:nvSpPr>
-          <p:cNvPr id="106" name="Google Shape;106;g3e1d1037a72_0_41:notes"/>
+          <p:cNvPr id="475952578" name="Google Shape;106;g3e1d1037a72_0_41:notes"/>
           <p:cNvSpPr/>
           <p:nvPr>
-            <p:ph idx="2" type="sldImg"/>
+            <p:ph type="sldImg" idx="2"/>
           </p:nvPr>
         </p:nvSpPr>
-        <p:spPr>
+        <p:spPr bwMode="auto">
           <a:xfrm>
             <a:off x="381300" y="685800"/>
             <a:ext cx="6096000" cy="3429000"/>
           </a:xfrm>
           <a:custGeom>
-            <a:rect b="b" l="l" r="r" t="t"/>
+            <a:avLst/>
+            <a:gdLst/>
+            <a:ahLst/>
+            <a:cxnLst/>
+            <a:rect l="l" t="t" r="r" b="b"/>
             <a:pathLst>
-              <a:path extrusionOk="0" h="120000" w="120000">
+              <a:path w="120000" h="120000" fill="norm" stroke="1" extrusionOk="0">
                 <a:moveTo>
                   <a:pt x="0" y="0"/>
                 </a:moveTo>
@@ -849,13 +830,13 @@
       </p:sp>
       <p:sp>
         <p:nvSpPr>
-          <p:cNvPr id="107" name="Google Shape;107;g3e1d1037a72_0_41:notes"/>
+          <p:cNvPr id="139605816" name="Google Shape;107;g3e1d1037a72_0_41:notes"/>
           <p:cNvSpPr txBox="1"/>
           <p:nvPr>
-            <p:ph idx="1" type="body"/>
+            <p:ph type="body" idx="1"/>
           </p:nvPr>
         </p:nvSpPr>
-        <p:spPr>
+        <p:spPr bwMode="auto">
           <a:xfrm>
             <a:off x="685800" y="4343400"/>
             <a:ext cx="5486400" cy="4114800"/>
@@ -865,23 +846,21 @@
           </a:prstGeom>
         </p:spPr>
         <p:txBody>
-          <a:bodyPr anchorCtr="0" anchor="t" bIns="91425" lIns="91425" spcFirstLastPara="1" rIns="91425" wrap="square" tIns="91425">
+          <a:bodyPr spcFirstLastPara="1" wrap="square" lIns="91425" tIns="91425" rIns="91425" bIns="91425" anchor="t" anchorCtr="0">
             <a:noAutofit/>
           </a:bodyPr>
           <a:lstStyle/>
           <a:p>
-            <a:pPr indent="0" lvl="0" marL="0" rtl="0" algn="l">
-              <a:spcBef>
-                <a:spcPts val="0"/>
-              </a:spcBef>
-              <a:spcAft>
-                <a:spcPts val="0"/>
-              </a:spcAft>
-              <a:buNone/>
+            <a:pPr marL="0" lvl="0" indent="0" algn="l" rtl="0">
+              <a:spcBef>
+                <a:spcPts val="0"/>
+              </a:spcBef>
+              <a:spcAft>
+                <a:spcPts val="0"/>
+              </a:spcAft>
+              <a:buNone/>
+              <a:defRPr/>
             </a:pPr>
-            <a:r>
-              <a:t/>
-            </a:r>
             <a:endParaRPr/>
           </a:p>
         </p:txBody>
@@ -895,15 +874,15 @@
 </file>
 
 <file path=ppt/notesSlides/notesSlide11.xml><?xml version="1.0" encoding="utf-8"?>
-<p:notes xmlns:a="http://schemas.openxmlformats.org/drawingml/2006/main" xmlns:r="http://schemas.openxmlformats.org/officeDocument/2006/relationships" xmlns:mc="http://schemas.openxmlformats.org/markup-compatibility/2006" xmlns:mv="urn:schemas-microsoft-com:mac:vml" xmlns:p="http://schemas.openxmlformats.org/presentationml/2006/main" xmlns:c="http://schemas.openxmlformats.org/drawingml/2006/chart" xmlns:dgm="http://schemas.openxmlformats.org/drawingml/2006/diagram" xmlns:o="urn:schemas-microsoft-com:office:office" xmlns:v="urn:schemas-microsoft-com:vml" xmlns:pvml="urn:schemas-microsoft-com:office:powerpoint" xmlns:com="http://schemas.openxmlformats.org/drawingml/2006/compatibility" xmlns:p14="http://schemas.microsoft.com/office/powerpoint/2010/main" xmlns:p15="http://schemas.microsoft.com/office/powerpoint/2012/main" xmlns:ahyp="http://schemas.microsoft.com/office/drawing/2018/hyperlinkcolor" showMasterPhAnim="0" showMasterSp="0">
-  <p:cSld>
+<p:notes xmlns:a="http://schemas.openxmlformats.org/drawingml/2006/main" xmlns:r="http://schemas.openxmlformats.org/officeDocument/2006/relationships" xmlns:p="http://schemas.openxmlformats.org/presentationml/2006/main" xmlns:m="http://schemas.openxmlformats.org/officeDocument/2006/math" xmlns:w="http://schemas.openxmlformats.org/wordprocessingml/2006/main" showMasterPhAnim="0" showMasterSp="0">
+  <p:cSld name="">
     <p:spTree>
       <p:nvGrpSpPr>
-        <p:cNvPr id="111" name="Shape 111"/>
+        <p:cNvPr id="1" name=""/>
         <p:cNvGrpSpPr/>
         <p:nvPr/>
       </p:nvGrpSpPr>
-      <p:grpSpPr>
+      <p:grpSpPr bwMode="auto">
         <a:xfrm>
           <a:off x="0" y="0"/>
           <a:ext cx="0" cy="0"/>
@@ -913,21 +892,25 @@
       </p:grpSpPr>
       <p:sp>
         <p:nvSpPr>
-          <p:cNvPr id="112" name="Google Shape;112;g3e1d1037a72_0_47:notes"/>
+          <p:cNvPr id="2102039676" name="Google Shape;112;g3e1d1037a72_0_47:notes"/>
           <p:cNvSpPr/>
           <p:nvPr>
-            <p:ph idx="2" type="sldImg"/>
+            <p:ph type="sldImg" idx="2"/>
           </p:nvPr>
         </p:nvSpPr>
-        <p:spPr>
+        <p:spPr bwMode="auto">
           <a:xfrm>
             <a:off x="381300" y="685800"/>
             <a:ext cx="6096000" cy="3429000"/>
           </a:xfrm>
           <a:custGeom>
-            <a:rect b="b" l="l" r="r" t="t"/>
+            <a:avLst/>
+            <a:gdLst/>
+            <a:ahLst/>
+            <a:cxnLst/>
+            <a:rect l="l" t="t" r="r" b="b"/>
             <a:pathLst>
-              <a:path extrusionOk="0" h="120000" w="120000">
+              <a:path w="120000" h="120000" fill="norm" stroke="1" extrusionOk="0">
                 <a:moveTo>
                   <a:pt x="0" y="0"/>
                 </a:moveTo>
@@ -948,13 +931,13 @@
       </p:sp>
       <p:sp>
         <p:nvSpPr>
-          <p:cNvPr id="113" name="Google Shape;113;g3e1d1037a72_0_47:notes"/>
+          <p:cNvPr id="714718888" name="Google Shape;113;g3e1d1037a72_0_47:notes"/>
           <p:cNvSpPr txBox="1"/>
           <p:nvPr>
-            <p:ph idx="1" type="body"/>
+            <p:ph type="body" idx="1"/>
           </p:nvPr>
         </p:nvSpPr>
-        <p:spPr>
+        <p:spPr bwMode="auto">
           <a:xfrm>
             <a:off x="685800" y="4343400"/>
             <a:ext cx="5486400" cy="4114800"/>
@@ -964,23 +947,21 @@
           </a:prstGeom>
         </p:spPr>
         <p:txBody>
-          <a:bodyPr anchorCtr="0" anchor="t" bIns="91425" lIns="91425" spcFirstLastPara="1" rIns="91425" wrap="square" tIns="91425">
+          <a:bodyPr spcFirstLastPara="1" wrap="square" lIns="91425" tIns="91425" rIns="91425" bIns="91425" anchor="t" anchorCtr="0">
             <a:noAutofit/>
           </a:bodyPr>
           <a:lstStyle/>
           <a:p>
-            <a:pPr indent="0" lvl="0" marL="0" rtl="0" algn="l">
-              <a:spcBef>
-                <a:spcPts val="0"/>
-              </a:spcBef>
-              <a:spcAft>
-                <a:spcPts val="0"/>
-              </a:spcAft>
-              <a:buNone/>
+            <a:pPr marL="0" lvl="0" indent="0" algn="l" rtl="0">
+              <a:spcBef>
+                <a:spcPts val="0"/>
+              </a:spcBef>
+              <a:spcAft>
+                <a:spcPts val="0"/>
+              </a:spcAft>
+              <a:buNone/>
+              <a:defRPr/>
             </a:pPr>
-            <a:r>
-              <a:t/>
-            </a:r>
             <a:endParaRPr/>
           </a:p>
         </p:txBody>
@@ -994,15 +975,15 @@
 </file>
 
 <file path=ppt/notesSlides/notesSlide2.xml><?xml version="1.0" encoding="utf-8"?>
-<p:notes xmlns:a="http://schemas.openxmlformats.org/drawingml/2006/main" xmlns:r="http://schemas.openxmlformats.org/officeDocument/2006/relationships" xmlns:mc="http://schemas.openxmlformats.org/markup-compatibility/2006" xmlns:mv="urn:schemas-microsoft-com:mac:vml" xmlns:p="http://schemas.openxmlformats.org/presentationml/2006/main" xmlns:c="http://schemas.openxmlformats.org/drawingml/2006/chart" xmlns:dgm="http://schemas.openxmlformats.org/drawingml/2006/diagram" xmlns:o="urn:schemas-microsoft-com:office:office" xmlns:v="urn:schemas-microsoft-com:vml" xmlns:pvml="urn:schemas-microsoft-com:office:powerpoint" xmlns:com="http://schemas.openxmlformats.org/drawingml/2006/compatibility" xmlns:p14="http://schemas.microsoft.com/office/powerpoint/2010/main" xmlns:p15="http://schemas.microsoft.com/office/powerpoint/2012/main" xmlns:ahyp="http://schemas.microsoft.com/office/drawing/2018/hyperlinkcolor" showMasterPhAnim="0" showMasterSp="0">
-  <p:cSld>
+<p:notes xmlns:a="http://schemas.openxmlformats.org/drawingml/2006/main" xmlns:r="http://schemas.openxmlformats.org/officeDocument/2006/relationships" xmlns:p="http://schemas.openxmlformats.org/presentationml/2006/main" xmlns:m="http://schemas.openxmlformats.org/officeDocument/2006/math" xmlns:w="http://schemas.openxmlformats.org/wordprocessingml/2006/main" showMasterPhAnim="0" showMasterSp="0">
+  <p:cSld name="">
     <p:spTree>
       <p:nvGrpSpPr>
-        <p:cNvPr id="57" name="Shape 57"/>
+        <p:cNvPr id="1" name=""/>
         <p:cNvGrpSpPr/>
         <p:nvPr/>
       </p:nvGrpSpPr>
-      <p:grpSpPr>
+      <p:grpSpPr bwMode="auto">
         <a:xfrm>
           <a:off x="0" y="0"/>
           <a:ext cx="0" cy="0"/>
@@ -1012,21 +993,25 @@
       </p:grpSpPr>
       <p:sp>
         <p:nvSpPr>
-          <p:cNvPr id="58" name="Google Shape;58;g3e1d1037a72_0_3:notes"/>
+          <p:cNvPr id="1070629862" name="Google Shape;58;g3e1d1037a72_0_3:notes"/>
           <p:cNvSpPr/>
           <p:nvPr>
-            <p:ph idx="2" type="sldImg"/>
+            <p:ph type="sldImg" idx="2"/>
           </p:nvPr>
         </p:nvSpPr>
-        <p:spPr>
+        <p:spPr bwMode="auto">
           <a:xfrm>
             <a:off x="381300" y="685800"/>
             <a:ext cx="6096000" cy="3429000"/>
           </a:xfrm>
           <a:custGeom>
-            <a:rect b="b" l="l" r="r" t="t"/>
+            <a:avLst/>
+            <a:gdLst/>
+            <a:ahLst/>
+            <a:cxnLst/>
+            <a:rect l="l" t="t" r="r" b="b"/>
             <a:pathLst>
-              <a:path extrusionOk="0" h="120000" w="120000">
+              <a:path w="120000" h="120000" fill="norm" stroke="1" extrusionOk="0">
                 <a:moveTo>
                   <a:pt x="0" y="0"/>
                 </a:moveTo>
@@ -1047,13 +1032,13 @@
       </p:sp>
       <p:sp>
         <p:nvSpPr>
-          <p:cNvPr id="59" name="Google Shape;59;g3e1d1037a72_0_3:notes"/>
+          <p:cNvPr id="689243390" name="Google Shape;59;g3e1d1037a72_0_3:notes"/>
           <p:cNvSpPr txBox="1"/>
           <p:nvPr>
-            <p:ph idx="1" type="body"/>
+            <p:ph type="body" idx="1"/>
           </p:nvPr>
         </p:nvSpPr>
-        <p:spPr>
+        <p:spPr bwMode="auto">
           <a:xfrm>
             <a:off x="685800" y="4343400"/>
             <a:ext cx="5486400" cy="4114800"/>
@@ -1063,23 +1048,21 @@
           </a:prstGeom>
         </p:spPr>
         <p:txBody>
-          <a:bodyPr anchorCtr="0" anchor="t" bIns="91425" lIns="91425" spcFirstLastPara="1" rIns="91425" wrap="square" tIns="91425">
+          <a:bodyPr spcFirstLastPara="1" wrap="square" lIns="91425" tIns="91425" rIns="91425" bIns="91425" anchor="t" anchorCtr="0">
             <a:noAutofit/>
           </a:bodyPr>
           <a:lstStyle/>
           <a:p>
-            <a:pPr indent="0" lvl="0" marL="0" rtl="0" algn="l">
-              <a:spcBef>
-                <a:spcPts val="0"/>
-              </a:spcBef>
-              <a:spcAft>
-                <a:spcPts val="0"/>
-              </a:spcAft>
-              <a:buNone/>
+            <a:pPr marL="0" lvl="0" indent="0" algn="l" rtl="0">
+              <a:spcBef>
+                <a:spcPts val="0"/>
+              </a:spcBef>
+              <a:spcAft>
+                <a:spcPts val="0"/>
+              </a:spcAft>
+              <a:buNone/>
+              <a:defRPr/>
             </a:pPr>
-            <a:r>
-              <a:t/>
-            </a:r>
             <a:endParaRPr/>
           </a:p>
         </p:txBody>
@@ -1093,15 +1076,15 @@
 </file>
 
 <file path=ppt/notesSlides/notesSlide3.xml><?xml version="1.0" encoding="utf-8"?>
-<p:notes xmlns:a="http://schemas.openxmlformats.org/drawingml/2006/main" xmlns:r="http://schemas.openxmlformats.org/officeDocument/2006/relationships" xmlns:mc="http://schemas.openxmlformats.org/markup-compatibility/2006" xmlns:mv="urn:schemas-microsoft-com:mac:vml" xmlns:p="http://schemas.openxmlformats.org/presentationml/2006/main" xmlns:c="http://schemas.openxmlformats.org/drawingml/2006/chart" xmlns:dgm="http://schemas.openxmlformats.org/drawingml/2006/diagram" xmlns:o="urn:schemas-microsoft-com:office:office" xmlns:v="urn:schemas-microsoft-com:vml" xmlns:pvml="urn:schemas-microsoft-com:office:powerpoint" xmlns:com="http://schemas.openxmlformats.org/drawingml/2006/compatibility" xmlns:p14="http://schemas.microsoft.com/office/powerpoint/2010/main" xmlns:p15="http://schemas.microsoft.com/office/powerpoint/2012/main" xmlns:ahyp="http://schemas.microsoft.com/office/drawing/2018/hyperlinkcolor" showMasterPhAnim="0" showMasterSp="0">
-  <p:cSld>
+<p:notes xmlns:a="http://schemas.openxmlformats.org/drawingml/2006/main" xmlns:r="http://schemas.openxmlformats.org/officeDocument/2006/relationships" xmlns:p="http://schemas.openxmlformats.org/presentationml/2006/main" xmlns:m="http://schemas.openxmlformats.org/officeDocument/2006/math" xmlns:w="http://schemas.openxmlformats.org/wordprocessingml/2006/main" showMasterPhAnim="0" showMasterSp="0">
+  <p:cSld name="">
     <p:spTree>
       <p:nvGrpSpPr>
-        <p:cNvPr id="63" name="Shape 63"/>
+        <p:cNvPr id="1" name=""/>
         <p:cNvGrpSpPr/>
         <p:nvPr/>
       </p:nvGrpSpPr>
-      <p:grpSpPr>
+      <p:grpSpPr bwMode="auto">
         <a:xfrm>
           <a:off x="0" y="0"/>
           <a:ext cx="0" cy="0"/>
@@ -1111,21 +1094,25 @@
       </p:grpSpPr>
       <p:sp>
         <p:nvSpPr>
-          <p:cNvPr id="64" name="Google Shape;64;g3e1d1037a72_0_11:notes"/>
+          <p:cNvPr id="1033646953" name="Google Shape;64;g3e1d1037a72_0_11:notes"/>
           <p:cNvSpPr/>
           <p:nvPr>
-            <p:ph idx="2" type="sldImg"/>
+            <p:ph type="sldImg" idx="2"/>
           </p:nvPr>
         </p:nvSpPr>
-        <p:spPr>
+        <p:spPr bwMode="auto">
           <a:xfrm>
             <a:off x="381300" y="685800"/>
             <a:ext cx="6096000" cy="3429000"/>
           </a:xfrm>
           <a:custGeom>
-            <a:rect b="b" l="l" r="r" t="t"/>
+            <a:avLst/>
+            <a:gdLst/>
+            <a:ahLst/>
+            <a:cxnLst/>
+            <a:rect l="l" t="t" r="r" b="b"/>
             <a:pathLst>
-              <a:path extrusionOk="0" h="120000" w="120000">
+              <a:path w="120000" h="120000" fill="norm" stroke="1" extrusionOk="0">
                 <a:moveTo>
                   <a:pt x="0" y="0"/>
                 </a:moveTo>
@@ -1146,13 +1133,13 @@
       </p:sp>
       <p:sp>
         <p:nvSpPr>
-          <p:cNvPr id="65" name="Google Shape;65;g3e1d1037a72_0_11:notes"/>
+          <p:cNvPr id="530149057" name="Google Shape;65;g3e1d1037a72_0_11:notes"/>
           <p:cNvSpPr txBox="1"/>
           <p:nvPr>
-            <p:ph idx="1" type="body"/>
+            <p:ph type="body" idx="1"/>
           </p:nvPr>
         </p:nvSpPr>
-        <p:spPr>
+        <p:spPr bwMode="auto">
           <a:xfrm>
             <a:off x="685800" y="4343400"/>
             <a:ext cx="5486400" cy="4114800"/>
@@ -1162,23 +1149,21 @@
           </a:prstGeom>
         </p:spPr>
         <p:txBody>
-          <a:bodyPr anchorCtr="0" anchor="t" bIns="91425" lIns="91425" spcFirstLastPara="1" rIns="91425" wrap="square" tIns="91425">
+          <a:bodyPr spcFirstLastPara="1" wrap="square" lIns="91425" tIns="91425" rIns="91425" bIns="91425" anchor="t" anchorCtr="0">
             <a:noAutofit/>
           </a:bodyPr>
           <a:lstStyle/>
           <a:p>
-            <a:pPr indent="0" lvl="0" marL="0" rtl="0" algn="l">
-              <a:spcBef>
-                <a:spcPts val="0"/>
-              </a:spcBef>
-              <a:spcAft>
-                <a:spcPts val="0"/>
-              </a:spcAft>
-              <a:buNone/>
+            <a:pPr marL="0" lvl="0" indent="0" algn="l" rtl="0">
+              <a:spcBef>
+                <a:spcPts val="0"/>
+              </a:spcBef>
+              <a:spcAft>
+                <a:spcPts val="0"/>
+              </a:spcAft>
+              <a:buNone/>
+              <a:defRPr/>
             </a:pPr>
-            <a:r>
-              <a:t/>
-            </a:r>
             <a:endParaRPr/>
           </a:p>
         </p:txBody>
@@ -1192,15 +1177,15 @@
 </file>
 
 <file path=ppt/notesSlides/notesSlide4.xml><?xml version="1.0" encoding="utf-8"?>
-<p:notes xmlns:a="http://schemas.openxmlformats.org/drawingml/2006/main" xmlns:r="http://schemas.openxmlformats.org/officeDocument/2006/relationships" xmlns:mc="http://schemas.openxmlformats.org/markup-compatibility/2006" xmlns:mv="urn:schemas-microsoft-com:mac:vml" xmlns:p="http://schemas.openxmlformats.org/presentationml/2006/main" xmlns:c="http://schemas.openxmlformats.org/drawingml/2006/chart" xmlns:dgm="http://schemas.openxmlformats.org/drawingml/2006/diagram" xmlns:o="urn:schemas-microsoft-com:office:office" xmlns:v="urn:schemas-microsoft-com:vml" xmlns:pvml="urn:schemas-microsoft-com:office:powerpoint" xmlns:com="http://schemas.openxmlformats.org/drawingml/2006/compatibility" xmlns:p14="http://schemas.microsoft.com/office/powerpoint/2010/main" xmlns:p15="http://schemas.microsoft.com/office/powerpoint/2012/main" xmlns:ahyp="http://schemas.microsoft.com/office/drawing/2018/hyperlinkcolor" showMasterPhAnim="0" showMasterSp="0">
-  <p:cSld>
+<p:notes xmlns:a="http://schemas.openxmlformats.org/drawingml/2006/main" xmlns:r="http://schemas.openxmlformats.org/officeDocument/2006/relationships" xmlns:p="http://schemas.openxmlformats.org/presentationml/2006/main" xmlns:m="http://schemas.openxmlformats.org/officeDocument/2006/math" xmlns:w="http://schemas.openxmlformats.org/wordprocessingml/2006/main" showMasterPhAnim="0" showMasterSp="0">
+  <p:cSld name="">
     <p:spTree>
       <p:nvGrpSpPr>
-        <p:cNvPr id="69" name="Shape 69"/>
+        <p:cNvPr id="1" name=""/>
         <p:cNvGrpSpPr/>
         <p:nvPr/>
       </p:nvGrpSpPr>
-      <p:grpSpPr>
+      <p:grpSpPr bwMode="auto">
         <a:xfrm>
           <a:off x="0" y="0"/>
           <a:ext cx="0" cy="0"/>
@@ -1210,21 +1195,25 @@
       </p:grpSpPr>
       <p:sp>
         <p:nvSpPr>
-          <p:cNvPr id="70" name="Google Shape;70;g3e1d1037a72_0_17:notes"/>
+          <p:cNvPr id="2136760258" name="Google Shape;70;g3e1d1037a72_0_17:notes"/>
           <p:cNvSpPr/>
           <p:nvPr>
-            <p:ph idx="2" type="sldImg"/>
+            <p:ph type="sldImg" idx="2"/>
           </p:nvPr>
         </p:nvSpPr>
-        <p:spPr>
+        <p:spPr bwMode="auto">
           <a:xfrm>
             <a:off x="381300" y="685800"/>
             <a:ext cx="6096000" cy="3429000"/>
           </a:xfrm>
           <a:custGeom>
-            <a:rect b="b" l="l" r="r" t="t"/>
+            <a:avLst/>
+            <a:gdLst/>
+            <a:ahLst/>
+            <a:cxnLst/>
+            <a:rect l="l" t="t" r="r" b="b"/>
             <a:pathLst>
-              <a:path extrusionOk="0" h="120000" w="120000">
+              <a:path w="120000" h="120000" fill="norm" stroke="1" extrusionOk="0">
                 <a:moveTo>
                   <a:pt x="0" y="0"/>
                 </a:moveTo>
@@ -1245,13 +1234,13 @@
       </p:sp>
       <p:sp>
         <p:nvSpPr>
-          <p:cNvPr id="71" name="Google Shape;71;g3e1d1037a72_0_17:notes"/>
+          <p:cNvPr id="1844548370" name="Google Shape;71;g3e1d1037a72_0_17:notes"/>
           <p:cNvSpPr txBox="1"/>
           <p:nvPr>
-            <p:ph idx="1" type="body"/>
+            <p:ph type="body" idx="1"/>
           </p:nvPr>
         </p:nvSpPr>
-        <p:spPr>
+        <p:spPr bwMode="auto">
           <a:xfrm>
             <a:off x="685800" y="4343400"/>
             <a:ext cx="5486400" cy="4114800"/>
@@ -1261,23 +1250,21 @@
           </a:prstGeom>
         </p:spPr>
         <p:txBody>
-          <a:bodyPr anchorCtr="0" anchor="t" bIns="91425" lIns="91425" spcFirstLastPara="1" rIns="91425" wrap="square" tIns="91425">
+          <a:bodyPr spcFirstLastPara="1" wrap="square" lIns="91425" tIns="91425" rIns="91425" bIns="91425" anchor="t" anchorCtr="0">
             <a:noAutofit/>
           </a:bodyPr>
           <a:lstStyle/>
           <a:p>
-            <a:pPr indent="0" lvl="0" marL="0" rtl="0" algn="l">
-              <a:spcBef>
-                <a:spcPts val="0"/>
-              </a:spcBef>
-              <a:spcAft>
-                <a:spcPts val="0"/>
-              </a:spcAft>
-              <a:buNone/>
+            <a:pPr marL="0" lvl="0" indent="0" algn="l" rtl="0">
+              <a:spcBef>
+                <a:spcPts val="0"/>
+              </a:spcBef>
+              <a:spcAft>
+                <a:spcPts val="0"/>
+              </a:spcAft>
+              <a:buNone/>
+              <a:defRPr/>
             </a:pPr>
-            <a:r>
-              <a:t/>
-            </a:r>
             <a:endParaRPr/>
           </a:p>
         </p:txBody>
@@ -1291,15 +1278,15 @@
 </file>
 
 <file path=ppt/notesSlides/notesSlide5.xml><?xml version="1.0" encoding="utf-8"?>
-<p:notes xmlns:a="http://schemas.openxmlformats.org/drawingml/2006/main" xmlns:r="http://schemas.openxmlformats.org/officeDocument/2006/relationships" xmlns:mc="http://schemas.openxmlformats.org/markup-compatibility/2006" xmlns:mv="urn:schemas-microsoft-com:mac:vml" xmlns:p="http://schemas.openxmlformats.org/presentationml/2006/main" xmlns:c="http://schemas.openxmlformats.org/drawingml/2006/chart" xmlns:dgm="http://schemas.openxmlformats.org/drawingml/2006/diagram" xmlns:o="urn:schemas-microsoft-com:office:office" xmlns:v="urn:schemas-microsoft-com:vml" xmlns:pvml="urn:schemas-microsoft-com:office:powerpoint" xmlns:com="http://schemas.openxmlformats.org/drawingml/2006/compatibility" xmlns:p14="http://schemas.microsoft.com/office/powerpoint/2010/main" xmlns:p15="http://schemas.microsoft.com/office/powerpoint/2012/main" xmlns:ahyp="http://schemas.microsoft.com/office/drawing/2018/hyperlinkcolor" showMasterPhAnim="0" showMasterSp="0">
-  <p:cSld>
+<p:notes xmlns:a="http://schemas.openxmlformats.org/drawingml/2006/main" xmlns:r="http://schemas.openxmlformats.org/officeDocument/2006/relationships" xmlns:p="http://schemas.openxmlformats.org/presentationml/2006/main" xmlns:m="http://schemas.openxmlformats.org/officeDocument/2006/math" xmlns:w="http://schemas.openxmlformats.org/wordprocessingml/2006/main" showMasterPhAnim="0" showMasterSp="0">
+  <p:cSld name="">
     <p:spTree>
       <p:nvGrpSpPr>
-        <p:cNvPr id="75" name="Shape 75"/>
+        <p:cNvPr id="1" name=""/>
         <p:cNvGrpSpPr/>
         <p:nvPr/>
       </p:nvGrpSpPr>
-      <p:grpSpPr>
+      <p:grpSpPr bwMode="auto">
         <a:xfrm>
           <a:off x="0" y="0"/>
           <a:ext cx="0" cy="0"/>
@@ -1309,21 +1296,25 @@
       </p:grpSpPr>
       <p:sp>
         <p:nvSpPr>
-          <p:cNvPr id="76" name="Google Shape;76;g3e1d1037a72_0_23:notes"/>
+          <p:cNvPr id="414979778" name="Google Shape;76;g3e1d1037a72_0_23:notes"/>
           <p:cNvSpPr/>
           <p:nvPr>
-            <p:ph idx="2" type="sldImg"/>
+            <p:ph type="sldImg" idx="2"/>
           </p:nvPr>
         </p:nvSpPr>
-        <p:spPr>
+        <p:spPr bwMode="auto">
           <a:xfrm>
             <a:off x="381300" y="685800"/>
             <a:ext cx="6096000" cy="3429000"/>
           </a:xfrm>
           <a:custGeom>
-            <a:rect b="b" l="l" r="r" t="t"/>
+            <a:avLst/>
+            <a:gdLst/>
+            <a:ahLst/>
+            <a:cxnLst/>
+            <a:rect l="l" t="t" r="r" b="b"/>
             <a:pathLst>
-              <a:path extrusionOk="0" h="120000" w="120000">
+              <a:path w="120000" h="120000" fill="norm" stroke="1" extrusionOk="0">
                 <a:moveTo>
                   <a:pt x="0" y="0"/>
                 </a:moveTo>
@@ -1344,13 +1335,13 @@
       </p:sp>
       <p:sp>
         <p:nvSpPr>
-          <p:cNvPr id="77" name="Google Shape;77;g3e1d1037a72_0_23:notes"/>
+          <p:cNvPr id="2041911386" name="Google Shape;77;g3e1d1037a72_0_23:notes"/>
           <p:cNvSpPr txBox="1"/>
           <p:nvPr>
-            <p:ph idx="1" type="body"/>
+            <p:ph type="body" idx="1"/>
           </p:nvPr>
         </p:nvSpPr>
-        <p:spPr>
+        <p:spPr bwMode="auto">
           <a:xfrm>
             <a:off x="685800" y="4343400"/>
             <a:ext cx="5486400" cy="4114800"/>
@@ -1360,23 +1351,21 @@
           </a:prstGeom>
         </p:spPr>
         <p:txBody>
-          <a:bodyPr anchorCtr="0" anchor="t" bIns="91425" lIns="91425" spcFirstLastPara="1" rIns="91425" wrap="square" tIns="91425">
+          <a:bodyPr spcFirstLastPara="1" wrap="square" lIns="91425" tIns="91425" rIns="91425" bIns="91425" anchor="t" anchorCtr="0">
             <a:noAutofit/>
           </a:bodyPr>
           <a:lstStyle/>
           <a:p>
-            <a:pPr indent="0" lvl="0" marL="0" rtl="0" algn="l">
-              <a:spcBef>
-                <a:spcPts val="0"/>
-              </a:spcBef>
-              <a:spcAft>
-                <a:spcPts val="0"/>
-              </a:spcAft>
-              <a:buNone/>
+            <a:pPr marL="0" lvl="0" indent="0" algn="l" rtl="0">
+              <a:spcBef>
+                <a:spcPts val="0"/>
+              </a:spcBef>
+              <a:spcAft>
+                <a:spcPts val="0"/>
+              </a:spcAft>
+              <a:buNone/>
+              <a:defRPr/>
             </a:pPr>
-            <a:r>
-              <a:t/>
-            </a:r>
             <a:endParaRPr/>
           </a:p>
         </p:txBody>
@@ -1390,15 +1379,15 @@
 </file>
 
 <file path=ppt/notesSlides/notesSlide6.xml><?xml version="1.0" encoding="utf-8"?>
-<p:notes xmlns:a="http://schemas.openxmlformats.org/drawingml/2006/main" xmlns:r="http://schemas.openxmlformats.org/officeDocument/2006/relationships" xmlns:mc="http://schemas.openxmlformats.org/markup-compatibility/2006" xmlns:mv="urn:schemas-microsoft-com:mac:vml" xmlns:p="http://schemas.openxmlformats.org/presentationml/2006/main" xmlns:c="http://schemas.openxmlformats.org/drawingml/2006/chart" xmlns:dgm="http://schemas.openxmlformats.org/drawingml/2006/diagram" xmlns:o="urn:schemas-microsoft-com:office:office" xmlns:v="urn:schemas-microsoft-com:vml" xmlns:pvml="urn:schemas-microsoft-com:office:powerpoint" xmlns:com="http://schemas.openxmlformats.org/drawingml/2006/compatibility" xmlns:p14="http://schemas.microsoft.com/office/powerpoint/2010/main" xmlns:p15="http://schemas.microsoft.com/office/powerpoint/2012/main" xmlns:ahyp="http://schemas.microsoft.com/office/drawing/2018/hyperlinkcolor" showMasterPhAnim="0" showMasterSp="0">
-  <p:cSld>
+<p:notes xmlns:a="http://schemas.openxmlformats.org/drawingml/2006/main" xmlns:r="http://schemas.openxmlformats.org/officeDocument/2006/relationships" xmlns:p="http://schemas.openxmlformats.org/presentationml/2006/main" xmlns:m="http://schemas.openxmlformats.org/officeDocument/2006/math" xmlns:w="http://schemas.openxmlformats.org/wordprocessingml/2006/main" showMasterPhAnim="0" showMasterSp="0">
+  <p:cSld name="">
     <p:spTree>
       <p:nvGrpSpPr>
-        <p:cNvPr id="81" name="Shape 81"/>
+        <p:cNvPr id="1" name=""/>
         <p:cNvGrpSpPr/>
         <p:nvPr/>
       </p:nvGrpSpPr>
-      <p:grpSpPr>
+      <p:grpSpPr bwMode="auto">
         <a:xfrm>
           <a:off x="0" y="0"/>
           <a:ext cx="0" cy="0"/>
@@ -1408,21 +1397,25 @@
       </p:grpSpPr>
       <p:sp>
         <p:nvSpPr>
-          <p:cNvPr id="82" name="Google Shape;82;g3e1d1037a72_0_29:notes"/>
+          <p:cNvPr id="1278273661" name="Google Shape;82;g3e1d1037a72_0_29:notes"/>
           <p:cNvSpPr/>
           <p:nvPr>
-            <p:ph idx="2" type="sldImg"/>
+            <p:ph type="sldImg" idx="2"/>
           </p:nvPr>
         </p:nvSpPr>
-        <p:spPr>
+        <p:spPr bwMode="auto">
           <a:xfrm>
             <a:off x="381300" y="685800"/>
             <a:ext cx="6096000" cy="3429000"/>
           </a:xfrm>
           <a:custGeom>
-            <a:rect b="b" l="l" r="r" t="t"/>
+            <a:avLst/>
+            <a:gdLst/>
+            <a:ahLst/>
+            <a:cxnLst/>
+            <a:rect l="l" t="t" r="r" b="b"/>
             <a:pathLst>
-              <a:path extrusionOk="0" h="120000" w="120000">
+              <a:path w="120000" h="120000" fill="norm" stroke="1" extrusionOk="0">
                 <a:moveTo>
                   <a:pt x="0" y="0"/>
                 </a:moveTo>
@@ -1443,13 +1436,13 @@
       </p:sp>
       <p:sp>
         <p:nvSpPr>
-          <p:cNvPr id="83" name="Google Shape;83;g3e1d1037a72_0_29:notes"/>
+          <p:cNvPr id="1743393606" name="Google Shape;83;g3e1d1037a72_0_29:notes"/>
           <p:cNvSpPr txBox="1"/>
           <p:nvPr>
-            <p:ph idx="1" type="body"/>
+            <p:ph type="body" idx="1"/>
           </p:nvPr>
         </p:nvSpPr>
-        <p:spPr>
+        <p:spPr bwMode="auto">
           <a:xfrm>
             <a:off x="685800" y="4343400"/>
             <a:ext cx="5486400" cy="4114800"/>
@@ -1459,23 +1452,21 @@
           </a:prstGeom>
         </p:spPr>
         <p:txBody>
-          <a:bodyPr anchorCtr="0" anchor="t" bIns="91425" lIns="91425" spcFirstLastPara="1" rIns="91425" wrap="square" tIns="91425">
+          <a:bodyPr spcFirstLastPara="1" wrap="square" lIns="91425" tIns="91425" rIns="91425" bIns="91425" anchor="t" anchorCtr="0">
             <a:noAutofit/>
           </a:bodyPr>
           <a:lstStyle/>
           <a:p>
-            <a:pPr indent="0" lvl="0" marL="0" rtl="0" algn="l">
-              <a:spcBef>
-                <a:spcPts val="0"/>
-              </a:spcBef>
-              <a:spcAft>
-                <a:spcPts val="0"/>
-              </a:spcAft>
-              <a:buNone/>
+            <a:pPr marL="0" lvl="0" indent="0" algn="l" rtl="0">
+              <a:spcBef>
+                <a:spcPts val="0"/>
+              </a:spcBef>
+              <a:spcAft>
+                <a:spcPts val="0"/>
+              </a:spcAft>
+              <a:buNone/>
+              <a:defRPr/>
             </a:pPr>
-            <a:r>
-              <a:t/>
-            </a:r>
             <a:endParaRPr/>
           </a:p>
         </p:txBody>
@@ -1489,15 +1480,15 @@
 </file>
 
 <file path=ppt/notesSlides/notesSlide7.xml><?xml version="1.0" encoding="utf-8"?>
-<p:notes xmlns:a="http://schemas.openxmlformats.org/drawingml/2006/main" xmlns:r="http://schemas.openxmlformats.org/officeDocument/2006/relationships" xmlns:mc="http://schemas.openxmlformats.org/markup-compatibility/2006" xmlns:mv="urn:schemas-microsoft-com:mac:vml" xmlns:p="http://schemas.openxmlformats.org/presentationml/2006/main" xmlns:c="http://schemas.openxmlformats.org/drawingml/2006/chart" xmlns:dgm="http://schemas.openxmlformats.org/drawingml/2006/diagram" xmlns:o="urn:schemas-microsoft-com:office:office" xmlns:v="urn:schemas-microsoft-com:vml" xmlns:pvml="urn:schemas-microsoft-com:office:powerpoint" xmlns:com="http://schemas.openxmlformats.org/drawingml/2006/compatibility" xmlns:p14="http://schemas.microsoft.com/office/powerpoint/2010/main" xmlns:p15="http://schemas.microsoft.com/office/powerpoint/2012/main" xmlns:ahyp="http://schemas.microsoft.com/office/drawing/2018/hyperlinkcolor" showMasterPhAnim="0" showMasterSp="0">
-  <p:cSld>
+<p:notes xmlns:a="http://schemas.openxmlformats.org/drawingml/2006/main" xmlns:r="http://schemas.openxmlformats.org/officeDocument/2006/relationships" xmlns:p="http://schemas.openxmlformats.org/presentationml/2006/main" xmlns:m="http://schemas.openxmlformats.org/officeDocument/2006/math" xmlns:w="http://schemas.openxmlformats.org/wordprocessingml/2006/main" showMasterPhAnim="0" showMasterSp="0">
+  <p:cSld name="">
     <p:spTree>
       <p:nvGrpSpPr>
-        <p:cNvPr id="87" name="Shape 87"/>
+        <p:cNvPr id="1" name=""/>
         <p:cNvGrpSpPr/>
         <p:nvPr/>
       </p:nvGrpSpPr>
-      <p:grpSpPr>
+      <p:grpSpPr bwMode="auto">
         <a:xfrm>
           <a:off x="0" y="0"/>
           <a:ext cx="0" cy="0"/>
@@ -1507,21 +1498,25 @@
       </p:grpSpPr>
       <p:sp>
         <p:nvSpPr>
-          <p:cNvPr id="88" name="Google Shape;88;g3e223eb21ce_0_0:notes"/>
+          <p:cNvPr id="936695642" name="Google Shape;88;g3e223eb21ce_0_0:notes"/>
           <p:cNvSpPr/>
           <p:nvPr>
-            <p:ph idx="2" type="sldImg"/>
+            <p:ph type="sldImg" idx="2"/>
           </p:nvPr>
         </p:nvSpPr>
-        <p:spPr>
+        <p:spPr bwMode="auto">
           <a:xfrm>
             <a:off x="381300" y="685800"/>
             <a:ext cx="6096000" cy="3429000"/>
           </a:xfrm>
           <a:custGeom>
-            <a:rect b="b" l="l" r="r" t="t"/>
+            <a:avLst/>
+            <a:gdLst/>
+            <a:ahLst/>
+            <a:cxnLst/>
+            <a:rect l="l" t="t" r="r" b="b"/>
             <a:pathLst>
-              <a:path extrusionOk="0" h="120000" w="120000">
+              <a:path w="120000" h="120000" fill="norm" stroke="1" extrusionOk="0">
                 <a:moveTo>
                   <a:pt x="0" y="0"/>
                 </a:moveTo>
@@ -1542,13 +1537,13 @@
       </p:sp>
       <p:sp>
         <p:nvSpPr>
-          <p:cNvPr id="89" name="Google Shape;89;g3e223eb21ce_0_0:notes"/>
+          <p:cNvPr id="1582986791" name="Google Shape;89;g3e223eb21ce_0_0:notes"/>
           <p:cNvSpPr txBox="1"/>
           <p:nvPr>
-            <p:ph idx="1" type="body"/>
+            <p:ph type="body" idx="1"/>
           </p:nvPr>
         </p:nvSpPr>
-        <p:spPr>
+        <p:spPr bwMode="auto">
           <a:xfrm>
             <a:off x="685800" y="4343400"/>
             <a:ext cx="5486400" cy="4114800"/>
@@ -1558,23 +1553,21 @@
           </a:prstGeom>
         </p:spPr>
         <p:txBody>
-          <a:bodyPr anchorCtr="0" anchor="t" bIns="91425" lIns="91425" spcFirstLastPara="1" rIns="91425" wrap="square" tIns="91425">
+          <a:bodyPr spcFirstLastPara="1" wrap="square" lIns="91425" tIns="91425" rIns="91425" bIns="91425" anchor="t" anchorCtr="0">
             <a:noAutofit/>
           </a:bodyPr>
           <a:lstStyle/>
           <a:p>
-            <a:pPr indent="0" lvl="0" marL="0" rtl="0" algn="l">
-              <a:spcBef>
-                <a:spcPts val="0"/>
-              </a:spcBef>
-              <a:spcAft>
-                <a:spcPts val="0"/>
-              </a:spcAft>
-              <a:buNone/>
+            <a:pPr marL="0" lvl="0" indent="0" algn="l" rtl="0">
+              <a:spcBef>
+                <a:spcPts val="0"/>
+              </a:spcBef>
+              <a:spcAft>
+                <a:spcPts val="0"/>
+              </a:spcAft>
+              <a:buNone/>
+              <a:defRPr/>
             </a:pPr>
-            <a:r>
-              <a:t/>
-            </a:r>
             <a:endParaRPr/>
           </a:p>
         </p:txBody>
@@ -1588,15 +1581,15 @@
 </file>
 
 <file path=ppt/notesSlides/notesSlide8.xml><?xml version="1.0" encoding="utf-8"?>
-<p:notes xmlns:a="http://schemas.openxmlformats.org/drawingml/2006/main" xmlns:r="http://schemas.openxmlformats.org/officeDocument/2006/relationships" xmlns:mc="http://schemas.openxmlformats.org/markup-compatibility/2006" xmlns:mv="urn:schemas-microsoft-com:mac:vml" xmlns:p="http://schemas.openxmlformats.org/presentationml/2006/main" xmlns:c="http://schemas.openxmlformats.org/drawingml/2006/chart" xmlns:dgm="http://schemas.openxmlformats.org/drawingml/2006/diagram" xmlns:o="urn:schemas-microsoft-com:office:office" xmlns:v="urn:schemas-microsoft-com:vml" xmlns:pvml="urn:schemas-microsoft-com:office:powerpoint" xmlns:com="http://schemas.openxmlformats.org/drawingml/2006/compatibility" xmlns:p14="http://schemas.microsoft.com/office/powerpoint/2010/main" xmlns:p15="http://schemas.microsoft.com/office/powerpoint/2012/main" xmlns:ahyp="http://schemas.microsoft.com/office/drawing/2018/hyperlinkcolor" showMasterPhAnim="0" showMasterSp="0">
-  <p:cSld>
+<p:notes xmlns:a="http://schemas.openxmlformats.org/drawingml/2006/main" xmlns:r="http://schemas.openxmlformats.org/officeDocument/2006/relationships" xmlns:p="http://schemas.openxmlformats.org/presentationml/2006/main" xmlns:m="http://schemas.openxmlformats.org/officeDocument/2006/math" xmlns:w="http://schemas.openxmlformats.org/wordprocessingml/2006/main" showMasterPhAnim="0" showMasterSp="0">
+  <p:cSld name="">
     <p:spTree>
       <p:nvGrpSpPr>
-        <p:cNvPr id="93" name="Shape 93"/>
+        <p:cNvPr id="1" name=""/>
         <p:cNvGrpSpPr/>
         <p:nvPr/>
       </p:nvGrpSpPr>
-      <p:grpSpPr>
+      <p:grpSpPr bwMode="auto">
         <a:xfrm>
           <a:off x="0" y="0"/>
           <a:ext cx="0" cy="0"/>
@@ -1606,21 +1599,25 @@
       </p:grpSpPr>
       <p:sp>
         <p:nvSpPr>
-          <p:cNvPr id="94" name="Google Shape;94;g3e223eb21ce_0_11:notes"/>
+          <p:cNvPr id="1730497498" name="Google Shape;94;g3e223eb21ce_0_11:notes"/>
           <p:cNvSpPr/>
           <p:nvPr>
-            <p:ph idx="2" type="sldImg"/>
+            <p:ph type="sldImg" idx="2"/>
           </p:nvPr>
         </p:nvSpPr>
-        <p:spPr>
+        <p:spPr bwMode="auto">
           <a:xfrm>
             <a:off x="381300" y="685800"/>
             <a:ext cx="6096000" cy="3429000"/>
           </a:xfrm>
           <a:custGeom>
-            <a:rect b="b" l="l" r="r" t="t"/>
+            <a:avLst/>
+            <a:gdLst/>
+            <a:ahLst/>
+            <a:cxnLst/>
+            <a:rect l="l" t="t" r="r" b="b"/>
             <a:pathLst>
-              <a:path extrusionOk="0" h="120000" w="120000">
+              <a:path w="120000" h="120000" fill="norm" stroke="1" extrusionOk="0">
                 <a:moveTo>
                   <a:pt x="0" y="0"/>
                 </a:moveTo>
@@ -1641,13 +1638,13 @@
       </p:sp>
       <p:sp>
         <p:nvSpPr>
-          <p:cNvPr id="95" name="Google Shape;95;g3e223eb21ce_0_11:notes"/>
+          <p:cNvPr id="950966757" name="Google Shape;95;g3e223eb21ce_0_11:notes"/>
           <p:cNvSpPr txBox="1"/>
           <p:nvPr>
-            <p:ph idx="1" type="body"/>
+            <p:ph type="body" idx="1"/>
           </p:nvPr>
         </p:nvSpPr>
-        <p:spPr>
+        <p:spPr bwMode="auto">
           <a:xfrm>
             <a:off x="685800" y="4343400"/>
             <a:ext cx="5486400" cy="4114800"/>
@@ -1657,23 +1654,21 @@
           </a:prstGeom>
         </p:spPr>
         <p:txBody>
-          <a:bodyPr anchorCtr="0" anchor="t" bIns="91425" lIns="91425" spcFirstLastPara="1" rIns="91425" wrap="square" tIns="91425">
+          <a:bodyPr spcFirstLastPara="1" wrap="square" lIns="91425" tIns="91425" rIns="91425" bIns="91425" anchor="t" anchorCtr="0">
             <a:noAutofit/>
           </a:bodyPr>
           <a:lstStyle/>
           <a:p>
-            <a:pPr indent="0" lvl="0" marL="0" rtl="0" algn="l">
-              <a:spcBef>
-                <a:spcPts val="0"/>
-              </a:spcBef>
-              <a:spcAft>
-                <a:spcPts val="0"/>
-              </a:spcAft>
-              <a:buNone/>
+            <a:pPr marL="0" lvl="0" indent="0" algn="l" rtl="0">
+              <a:spcBef>
+                <a:spcPts val="0"/>
+              </a:spcBef>
+              <a:spcAft>
+                <a:spcPts val="0"/>
+              </a:spcAft>
+              <a:buNone/>
+              <a:defRPr/>
             </a:pPr>
-            <a:r>
-              <a:t/>
-            </a:r>
             <a:endParaRPr/>
           </a:p>
         </p:txBody>
@@ -1687,15 +1682,15 @@
 </file>
 
 <file path=ppt/notesSlides/notesSlide9.xml><?xml version="1.0" encoding="utf-8"?>
-<p:notes xmlns:a="http://schemas.openxmlformats.org/drawingml/2006/main" xmlns:r="http://schemas.openxmlformats.org/officeDocument/2006/relationships" xmlns:mc="http://schemas.openxmlformats.org/markup-compatibility/2006" xmlns:mv="urn:schemas-microsoft-com:mac:vml" xmlns:p="http://schemas.openxmlformats.org/presentationml/2006/main" xmlns:c="http://schemas.openxmlformats.org/drawingml/2006/chart" xmlns:dgm="http://schemas.openxmlformats.org/drawingml/2006/diagram" xmlns:o="urn:schemas-microsoft-com:office:office" xmlns:v="urn:schemas-microsoft-com:vml" xmlns:pvml="urn:schemas-microsoft-com:office:powerpoint" xmlns:com="http://schemas.openxmlformats.org/drawingml/2006/compatibility" xmlns:p14="http://schemas.microsoft.com/office/powerpoint/2010/main" xmlns:p15="http://schemas.microsoft.com/office/powerpoint/2012/main" xmlns:ahyp="http://schemas.microsoft.com/office/drawing/2018/hyperlinkcolor" showMasterPhAnim="0" showMasterSp="0">
-  <p:cSld>
+<p:notes xmlns:a="http://schemas.openxmlformats.org/drawingml/2006/main" xmlns:r="http://schemas.openxmlformats.org/officeDocument/2006/relationships" xmlns:p="http://schemas.openxmlformats.org/presentationml/2006/main" xmlns:m="http://schemas.openxmlformats.org/officeDocument/2006/math" xmlns:w="http://schemas.openxmlformats.org/wordprocessingml/2006/main" showMasterPhAnim="0" showMasterSp="0">
+  <p:cSld name="">
     <p:spTree>
       <p:nvGrpSpPr>
-        <p:cNvPr id="99" name="Shape 99"/>
+        <p:cNvPr id="1" name=""/>
         <p:cNvGrpSpPr/>
         <p:nvPr/>
       </p:nvGrpSpPr>
-      <p:grpSpPr>
+      <p:grpSpPr bwMode="auto">
         <a:xfrm>
           <a:off x="0" y="0"/>
           <a:ext cx="0" cy="0"/>
@@ -1705,21 +1700,25 @@
       </p:grpSpPr>
       <p:sp>
         <p:nvSpPr>
-          <p:cNvPr id="100" name="Google Shape;100;g3e1d1037a72_0_35:notes"/>
+          <p:cNvPr id="593548016" name="Google Shape;100;g3e1d1037a72_0_35:notes"/>
           <p:cNvSpPr/>
           <p:nvPr>
-            <p:ph idx="2" type="sldImg"/>
+            <p:ph type="sldImg" idx="2"/>
           </p:nvPr>
         </p:nvSpPr>
-        <p:spPr>
+        <p:spPr bwMode="auto">
           <a:xfrm>
             <a:off x="381300" y="685800"/>
             <a:ext cx="6096000" cy="3429000"/>
           </a:xfrm>
           <a:custGeom>
-            <a:rect b="b" l="l" r="r" t="t"/>
+            <a:avLst/>
+            <a:gdLst/>
+            <a:ahLst/>
+            <a:cxnLst/>
+            <a:rect l="l" t="t" r="r" b="b"/>
             <a:pathLst>
-              <a:path extrusionOk="0" h="120000" w="120000">
+              <a:path w="120000" h="120000" fill="norm" stroke="1" extrusionOk="0">
                 <a:moveTo>
                   <a:pt x="0" y="0"/>
                 </a:moveTo>
@@ -1740,13 +1739,13 @@
       </p:sp>
       <p:sp>
         <p:nvSpPr>
-          <p:cNvPr id="101" name="Google Shape;101;g3e1d1037a72_0_35:notes"/>
+          <p:cNvPr id="154811141" name="Google Shape;101;g3e1d1037a72_0_35:notes"/>
           <p:cNvSpPr txBox="1"/>
           <p:nvPr>
-            <p:ph idx="1" type="body"/>
+            <p:ph type="body" idx="1"/>
           </p:nvPr>
         </p:nvSpPr>
-        <p:spPr>
+        <p:spPr bwMode="auto">
           <a:xfrm>
             <a:off x="685800" y="4343400"/>
             <a:ext cx="5486400" cy="4114800"/>
@@ -1756,23 +1755,21 @@
           </a:prstGeom>
         </p:spPr>
         <p:txBody>
-          <a:bodyPr anchorCtr="0" anchor="t" bIns="91425" lIns="91425" spcFirstLastPara="1" rIns="91425" wrap="square" tIns="91425">
+          <a:bodyPr spcFirstLastPara="1" wrap="square" lIns="91425" tIns="91425" rIns="91425" bIns="91425" anchor="t" anchorCtr="0">
             <a:noAutofit/>
           </a:bodyPr>
           <a:lstStyle/>
           <a:p>
-            <a:pPr indent="0" lvl="0" marL="0" rtl="0" algn="l">
-              <a:spcBef>
-                <a:spcPts val="0"/>
-              </a:spcBef>
-              <a:spcAft>
-                <a:spcPts val="0"/>
-              </a:spcAft>
-              <a:buNone/>
+            <a:pPr marL="0" lvl="0" indent="0" algn="l" rtl="0">
+              <a:spcBef>
+                <a:spcPts val="0"/>
+              </a:spcBef>
+              <a:spcAft>
+                <a:spcPts val="0"/>
+              </a:spcAft>
+              <a:buNone/>
+              <a:defRPr/>
             </a:pPr>
-            <a:r>
-              <a:t/>
-            </a:r>
             <a:endParaRPr/>
           </a:p>
         </p:txBody>
@@ -1786,15 +1783,15 @@
 </file>
 
 <file path=ppt/slideLayouts/slideLayout1.xml><?xml version="1.0" encoding="utf-8"?>
-<p:sldLayout xmlns:a="http://schemas.openxmlformats.org/drawingml/2006/main" xmlns:r="http://schemas.openxmlformats.org/officeDocument/2006/relationships" xmlns:mc="http://schemas.openxmlformats.org/markup-compatibility/2006" xmlns:mv="urn:schemas-microsoft-com:mac:vml" xmlns:p="http://schemas.openxmlformats.org/presentationml/2006/main" xmlns:c="http://schemas.openxmlformats.org/drawingml/2006/chart" xmlns:dgm="http://schemas.openxmlformats.org/drawingml/2006/diagram" xmlns:o="urn:schemas-microsoft-com:office:office" xmlns:v="urn:schemas-microsoft-com:vml" xmlns:pvml="urn:schemas-microsoft-com:office:powerpoint" xmlns:com="http://schemas.openxmlformats.org/drawingml/2006/compatibility" xmlns:p14="http://schemas.microsoft.com/office/powerpoint/2010/main" xmlns:p15="http://schemas.microsoft.com/office/powerpoint/2012/main" xmlns:ahyp="http://schemas.microsoft.com/office/drawing/2018/hyperlinkcolor" matchingName="Title slide" type="title">
+<p:sldLayout xmlns:a="http://schemas.openxmlformats.org/drawingml/2006/main" xmlns:r="http://schemas.openxmlformats.org/officeDocument/2006/relationships" xmlns:p="http://schemas.openxmlformats.org/presentationml/2006/main" xmlns:m="http://schemas.openxmlformats.org/officeDocument/2006/math" xmlns:w="http://schemas.openxmlformats.org/wordprocessingml/2006/main" matchingName="Title slide" preserve="0" showMasterPhAnim="0" showMasterSp="1" type="title" userDrawn="1">
   <p:cSld name="TITLE">
     <p:spTree>
       <p:nvGrpSpPr>
-        <p:cNvPr id="9" name="Shape 9"/>
+        <p:cNvPr id="1" name=""/>
         <p:cNvGrpSpPr/>
         <p:nvPr/>
       </p:nvGrpSpPr>
-      <p:grpSpPr>
+      <p:grpSpPr bwMode="auto">
         <a:xfrm>
           <a:off x="0" y="0"/>
           <a:ext cx="0" cy="0"/>
@@ -1804,13 +1801,13 @@
       </p:grpSpPr>
       <p:sp>
         <p:nvSpPr>
-          <p:cNvPr id="10" name="Google Shape;10;p2"/>
+          <p:cNvPr id="678228340" name="Google Shape;10;p2"/>
           <p:cNvSpPr txBox="1"/>
           <p:nvPr>
             <p:ph type="ctrTitle"/>
           </p:nvPr>
         </p:nvSpPr>
-        <p:spPr>
+        <p:spPr bwMode="auto">
           <a:xfrm>
             <a:off x="311708" y="744575"/>
             <a:ext cx="8520600" cy="2052600"/>
@@ -1820,7 +1817,7 @@
           </a:prstGeom>
         </p:spPr>
         <p:txBody>
-          <a:bodyPr anchorCtr="0" anchor="b" bIns="91425" lIns="91425" spcFirstLastPara="1" rIns="91425" wrap="square" tIns="91425">
+          <a:bodyPr spcFirstLastPara="1" wrap="square" lIns="91425" tIns="91425" rIns="91425" bIns="91425" anchor="b" anchorCtr="0">
             <a:normAutofit/>
           </a:bodyPr>
           <a:lstStyle>
@@ -1924,18 +1921,23 @@
               <a:defRPr sz="5200"/>
             </a:lvl9pPr>
           </a:lstStyle>
-          <a:p/>
+          <a:p>
+            <a:pPr>
+              <a:defRPr/>
+            </a:pPr>
+            <a:endParaRPr/>
+          </a:p>
         </p:txBody>
       </p:sp>
       <p:sp>
         <p:nvSpPr>
-          <p:cNvPr id="11" name="Google Shape;11;p2"/>
+          <p:cNvPr id="1191444249" name="Google Shape;11;p2"/>
           <p:cNvSpPr txBox="1"/>
           <p:nvPr>
-            <p:ph idx="1" type="subTitle"/>
+            <p:ph type="subTitle" idx="1"/>
           </p:nvPr>
         </p:nvSpPr>
-        <p:spPr>
+        <p:spPr bwMode="auto">
           <a:xfrm>
             <a:off x="311700" y="2834125"/>
             <a:ext cx="8520600" cy="792600"/>
@@ -1945,7 +1947,7 @@
           </a:prstGeom>
         </p:spPr>
         <p:txBody>
-          <a:bodyPr anchorCtr="0" anchor="t" bIns="91425" lIns="91425" spcFirstLastPara="1" rIns="91425" wrap="square" tIns="91425">
+          <a:bodyPr spcFirstLastPara="1" wrap="square" lIns="91425" tIns="91425" rIns="91425" bIns="91425" anchor="t" anchorCtr="0">
             <a:normAutofit/>
           </a:bodyPr>
           <a:lstStyle>
@@ -2076,18 +2078,23 @@
               <a:defRPr sz="2800"/>
             </a:lvl9pPr>
           </a:lstStyle>
-          <a:p/>
+          <a:p>
+            <a:pPr>
+              <a:defRPr/>
+            </a:pPr>
+            <a:endParaRPr/>
+          </a:p>
         </p:txBody>
       </p:sp>
       <p:sp>
         <p:nvSpPr>
-          <p:cNvPr id="12" name="Google Shape;12;p2"/>
+          <p:cNvPr id="152414300" name="Google Shape;12;p2"/>
           <p:cNvSpPr txBox="1"/>
           <p:nvPr>
-            <p:ph idx="12" type="sldNum"/>
+            <p:ph type="sldNum" idx="12"/>
           </p:nvPr>
         </p:nvSpPr>
-        <p:spPr>
+        <p:spPr bwMode="auto">
           <a:xfrm>
             <a:off x="8472458" y="4663217"/>
             <a:ext cx="548700" cy="393600"/>
@@ -2097,7 +2104,7 @@
           </a:prstGeom>
         </p:spPr>
         <p:txBody>
-          <a:bodyPr anchorCtr="0" anchor="ctr" bIns="91425" lIns="91425" spcFirstLastPara="1" rIns="91425" wrap="square" tIns="91425">
+          <a:bodyPr spcFirstLastPara="1" wrap="square" lIns="91425" tIns="91425" rIns="91425" bIns="91425" anchor="ctr" anchorCtr="0">
             <a:normAutofit/>
           </a:bodyPr>
           <a:lstStyle>
@@ -2139,14 +2146,15 @@
             </a:lvl9pPr>
           </a:lstStyle>
           <a:p>
-            <a:pPr indent="0" lvl="0" marL="0" rtl="0" algn="r">
-              <a:spcBef>
-                <a:spcPts val="0"/>
-              </a:spcBef>
-              <a:spcAft>
-                <a:spcPts val="0"/>
-              </a:spcAft>
-              <a:buNone/>
+            <a:pPr marL="0" lvl="0" indent="0" algn="r" rtl="0">
+              <a:spcBef>
+                <a:spcPts val="0"/>
+              </a:spcBef>
+              <a:spcAft>
+                <a:spcPts val="0"/>
+              </a:spcAft>
+              <a:buNone/>
+              <a:defRPr/>
             </a:pPr>
             <a:fld id="{00000000-1234-1234-1234-123412341234}" type="slidenum">
               <a:rPr lang="en"/>
@@ -2165,15 +2173,15 @@
 </file>
 
 <file path=ppt/slideLayouts/slideLayout10.xml><?xml version="1.0" encoding="utf-8"?>
-<p:sldLayout xmlns:a="http://schemas.openxmlformats.org/drawingml/2006/main" xmlns:r="http://schemas.openxmlformats.org/officeDocument/2006/relationships" xmlns:mc="http://schemas.openxmlformats.org/markup-compatibility/2006" xmlns:mv="urn:schemas-microsoft-com:mac:vml" xmlns:p="http://schemas.openxmlformats.org/presentationml/2006/main" xmlns:c="http://schemas.openxmlformats.org/drawingml/2006/chart" xmlns:dgm="http://schemas.openxmlformats.org/drawingml/2006/diagram" xmlns:o="urn:schemas-microsoft-com:office:office" xmlns:v="urn:schemas-microsoft-com:vml" xmlns:pvml="urn:schemas-microsoft-com:office:powerpoint" xmlns:com="http://schemas.openxmlformats.org/drawingml/2006/compatibility" xmlns:p14="http://schemas.microsoft.com/office/powerpoint/2010/main" xmlns:p15="http://schemas.microsoft.com/office/powerpoint/2012/main" xmlns:ahyp="http://schemas.microsoft.com/office/drawing/2018/hyperlinkcolor" matchingName="Big number">
+<p:sldLayout xmlns:a="http://schemas.openxmlformats.org/drawingml/2006/main" xmlns:r="http://schemas.openxmlformats.org/officeDocument/2006/relationships" xmlns:p="http://schemas.openxmlformats.org/presentationml/2006/main" xmlns:m="http://schemas.openxmlformats.org/officeDocument/2006/math" xmlns:w="http://schemas.openxmlformats.org/wordprocessingml/2006/main" matchingName="Big number" preserve="0" showMasterPhAnim="0" showMasterSp="1" userDrawn="1">
   <p:cSld name="BIG_NUMBER">
     <p:spTree>
       <p:nvGrpSpPr>
-        <p:cNvPr id="44" name="Shape 44"/>
+        <p:cNvPr id="1" name=""/>
         <p:cNvGrpSpPr/>
         <p:nvPr/>
       </p:nvGrpSpPr>
-      <p:grpSpPr>
+      <p:grpSpPr bwMode="auto">
         <a:xfrm>
           <a:off x="0" y="0"/>
           <a:ext cx="0" cy="0"/>
@@ -2183,13 +2191,13 @@
       </p:grpSpPr>
       <p:sp>
         <p:nvSpPr>
-          <p:cNvPr id="45" name="Google Shape;45;p11"/>
+          <p:cNvPr id="84310478" name="Google Shape;45;p11"/>
           <p:cNvSpPr txBox="1"/>
           <p:nvPr>
-            <p:ph hasCustomPrompt="1" type="title"/>
+            <p:ph type="title" hasCustomPrompt="1"/>
           </p:nvPr>
         </p:nvSpPr>
-        <p:spPr>
+        <p:spPr bwMode="auto">
           <a:xfrm>
             <a:off x="311700" y="1106125"/>
             <a:ext cx="8520600" cy="1963500"/>
@@ -2199,7 +2207,7 @@
           </a:prstGeom>
         </p:spPr>
         <p:txBody>
-          <a:bodyPr anchorCtr="0" anchor="b" bIns="91425" lIns="91425" spcFirstLastPara="1" rIns="91425" wrap="square" tIns="91425">
+          <a:bodyPr spcFirstLastPara="1" wrap="square" lIns="91425" tIns="91425" rIns="91425" bIns="91425" anchor="b" anchorCtr="0">
             <a:normAutofit/>
           </a:bodyPr>
           <a:lstStyle>
@@ -2304,21 +2312,26 @@
             </a:lvl9pPr>
           </a:lstStyle>
           <a:p>
+            <a:pPr>
+              <a:defRPr/>
+            </a:pPr>
             <a:r>
+              <a:rPr/>
               <a:t>xx%</a:t>
             </a:r>
+            <a:endParaRPr/>
           </a:p>
         </p:txBody>
       </p:sp>
       <p:sp>
         <p:nvSpPr>
-          <p:cNvPr id="46" name="Google Shape;46;p11"/>
+          <p:cNvPr id="1458454661" name="Google Shape;46;p11"/>
           <p:cNvSpPr txBox="1"/>
           <p:nvPr>
-            <p:ph idx="1" type="body"/>
+            <p:ph type="body" idx="1"/>
           </p:nvPr>
         </p:nvSpPr>
-        <p:spPr>
+        <p:spPr bwMode="auto">
           <a:xfrm>
             <a:off x="311700" y="3152225"/>
             <a:ext cx="8520600" cy="1300800"/>
@@ -2328,11 +2341,11 @@
           </a:prstGeom>
         </p:spPr>
         <p:txBody>
-          <a:bodyPr anchorCtr="0" anchor="t" bIns="91425" lIns="91425" spcFirstLastPara="1" rIns="91425" wrap="square" tIns="91425">
+          <a:bodyPr spcFirstLastPara="1" wrap="square" lIns="91425" tIns="91425" rIns="91425" bIns="91425" anchor="t" anchorCtr="0">
             <a:normAutofit/>
           </a:bodyPr>
           <a:lstStyle>
-            <a:lvl1pPr indent="-342900" lvl="0" marL="457200" algn="ctr">
+            <a:lvl1pPr marL="457200" lvl="0" indent="-342900" algn="ctr">
               <a:spcBef>
                 <a:spcPts val="0"/>
               </a:spcBef>
@@ -2343,7 +2356,7 @@
               <a:buChar char="●"/>
               <a:defRPr/>
             </a:lvl1pPr>
-            <a:lvl2pPr indent="-317500" lvl="1" marL="914400" algn="ctr">
+            <a:lvl2pPr marL="914400" lvl="1" indent="-317500" algn="ctr">
               <a:spcBef>
                 <a:spcPts val="0"/>
               </a:spcBef>
@@ -2354,7 +2367,7 @@
               <a:buChar char="○"/>
               <a:defRPr/>
             </a:lvl2pPr>
-            <a:lvl3pPr indent="-317500" lvl="2" marL="1371600" algn="ctr">
+            <a:lvl3pPr marL="1371600" lvl="2" indent="-317500" algn="ctr">
               <a:spcBef>
                 <a:spcPts val="0"/>
               </a:spcBef>
@@ -2365,7 +2378,7 @@
               <a:buChar char="■"/>
               <a:defRPr/>
             </a:lvl3pPr>
-            <a:lvl4pPr indent="-317500" lvl="3" marL="1828800" algn="ctr">
+            <a:lvl4pPr marL="1828800" lvl="3" indent="-317500" algn="ctr">
               <a:spcBef>
                 <a:spcPts val="0"/>
               </a:spcBef>
@@ -2376,7 +2389,7 @@
               <a:buChar char="●"/>
               <a:defRPr/>
             </a:lvl4pPr>
-            <a:lvl5pPr indent="-317500" lvl="4" marL="2286000" algn="ctr">
+            <a:lvl5pPr marL="2286000" lvl="4" indent="-317500" algn="ctr">
               <a:spcBef>
                 <a:spcPts val="0"/>
               </a:spcBef>
@@ -2387,7 +2400,7 @@
               <a:buChar char="○"/>
               <a:defRPr/>
             </a:lvl5pPr>
-            <a:lvl6pPr indent="-317500" lvl="5" marL="2743200" algn="ctr">
+            <a:lvl6pPr marL="2743200" lvl="5" indent="-317500" algn="ctr">
               <a:spcBef>
                 <a:spcPts val="0"/>
               </a:spcBef>
@@ -2398,7 +2411,7 @@
               <a:buChar char="■"/>
               <a:defRPr/>
             </a:lvl6pPr>
-            <a:lvl7pPr indent="-317500" lvl="6" marL="3200400" algn="ctr">
+            <a:lvl7pPr marL="3200400" lvl="6" indent="-317500" algn="ctr">
               <a:spcBef>
                 <a:spcPts val="0"/>
               </a:spcBef>
@@ -2409,7 +2422,7 @@
               <a:buChar char="●"/>
               <a:defRPr/>
             </a:lvl7pPr>
-            <a:lvl8pPr indent="-317500" lvl="7" marL="3657600" algn="ctr">
+            <a:lvl8pPr marL="3657600" lvl="7" indent="-317500" algn="ctr">
               <a:spcBef>
                 <a:spcPts val="0"/>
               </a:spcBef>
@@ -2420,7 +2433,7 @@
               <a:buChar char="○"/>
               <a:defRPr/>
             </a:lvl8pPr>
-            <a:lvl9pPr indent="-317500" lvl="8" marL="4114800" algn="ctr">
+            <a:lvl9pPr marL="4114800" lvl="8" indent="-317500" algn="ctr">
               <a:spcBef>
                 <a:spcPts val="0"/>
               </a:spcBef>
@@ -2432,18 +2445,23 @@
               <a:defRPr/>
             </a:lvl9pPr>
           </a:lstStyle>
-          <a:p/>
+          <a:p>
+            <a:pPr>
+              <a:defRPr/>
+            </a:pPr>
+            <a:endParaRPr/>
+          </a:p>
         </p:txBody>
       </p:sp>
       <p:sp>
         <p:nvSpPr>
-          <p:cNvPr id="47" name="Google Shape;47;p11"/>
+          <p:cNvPr id="2064970442" name="Google Shape;47;p11"/>
           <p:cNvSpPr txBox="1"/>
           <p:nvPr>
-            <p:ph idx="12" type="sldNum"/>
+            <p:ph type="sldNum" idx="12"/>
           </p:nvPr>
         </p:nvSpPr>
-        <p:spPr>
+        <p:spPr bwMode="auto">
           <a:xfrm>
             <a:off x="8472458" y="4663217"/>
             <a:ext cx="548700" cy="393600"/>
@@ -2453,7 +2471,7 @@
           </a:prstGeom>
         </p:spPr>
         <p:txBody>
-          <a:bodyPr anchorCtr="0" anchor="ctr" bIns="91425" lIns="91425" spcFirstLastPara="1" rIns="91425" wrap="square" tIns="91425">
+          <a:bodyPr spcFirstLastPara="1" wrap="square" lIns="91425" tIns="91425" rIns="91425" bIns="91425" anchor="ctr" anchorCtr="0">
             <a:normAutofit/>
           </a:bodyPr>
           <a:lstStyle>
@@ -2495,14 +2513,15 @@
             </a:lvl9pPr>
           </a:lstStyle>
           <a:p>
-            <a:pPr indent="0" lvl="0" marL="0" rtl="0" algn="r">
-              <a:spcBef>
-                <a:spcPts val="0"/>
-              </a:spcBef>
-              <a:spcAft>
-                <a:spcPts val="0"/>
-              </a:spcAft>
-              <a:buNone/>
+            <a:pPr marL="0" lvl="0" indent="0" algn="r" rtl="0">
+              <a:spcBef>
+                <a:spcPts val="0"/>
+              </a:spcBef>
+              <a:spcAft>
+                <a:spcPts val="0"/>
+              </a:spcAft>
+              <a:buNone/>
+              <a:defRPr/>
             </a:pPr>
             <a:fld id="{00000000-1234-1234-1234-123412341234}" type="slidenum">
               <a:rPr lang="en"/>
@@ -2521,15 +2540,15 @@
 </file>
 
 <file path=ppt/slideLayouts/slideLayout11.xml><?xml version="1.0" encoding="utf-8"?>
-<p:sldLayout xmlns:a="http://schemas.openxmlformats.org/drawingml/2006/main" xmlns:r="http://schemas.openxmlformats.org/officeDocument/2006/relationships" xmlns:mc="http://schemas.openxmlformats.org/markup-compatibility/2006" xmlns:mv="urn:schemas-microsoft-com:mac:vml" xmlns:p="http://schemas.openxmlformats.org/presentationml/2006/main" xmlns:c="http://schemas.openxmlformats.org/drawingml/2006/chart" xmlns:dgm="http://schemas.openxmlformats.org/drawingml/2006/diagram" xmlns:o="urn:schemas-microsoft-com:office:office" xmlns:v="urn:schemas-microsoft-com:vml" xmlns:pvml="urn:schemas-microsoft-com:office:powerpoint" xmlns:com="http://schemas.openxmlformats.org/drawingml/2006/compatibility" xmlns:p14="http://schemas.microsoft.com/office/powerpoint/2010/main" xmlns:p15="http://schemas.microsoft.com/office/powerpoint/2012/main" xmlns:ahyp="http://schemas.microsoft.com/office/drawing/2018/hyperlinkcolor" matchingName="Blank" type="blank">
+<p:sldLayout xmlns:a="http://schemas.openxmlformats.org/drawingml/2006/main" xmlns:r="http://schemas.openxmlformats.org/officeDocument/2006/relationships" xmlns:p="http://schemas.openxmlformats.org/presentationml/2006/main" xmlns:m="http://schemas.openxmlformats.org/officeDocument/2006/math" xmlns:w="http://schemas.openxmlformats.org/wordprocessingml/2006/main" matchingName="Blank" preserve="0" showMasterPhAnim="0" showMasterSp="1" type="blank" userDrawn="1">
   <p:cSld name="BLANK">
     <p:spTree>
       <p:nvGrpSpPr>
-        <p:cNvPr id="48" name="Shape 48"/>
+        <p:cNvPr id="1" name=""/>
         <p:cNvGrpSpPr/>
         <p:nvPr/>
       </p:nvGrpSpPr>
-      <p:grpSpPr>
+      <p:grpSpPr bwMode="auto">
         <a:xfrm>
           <a:off x="0" y="0"/>
           <a:ext cx="0" cy="0"/>
@@ -2539,13 +2558,13 @@
       </p:grpSpPr>
       <p:sp>
         <p:nvSpPr>
-          <p:cNvPr id="49" name="Google Shape;49;p12"/>
+          <p:cNvPr id="1870993459" name="Google Shape;49;p12"/>
           <p:cNvSpPr txBox="1"/>
           <p:nvPr>
-            <p:ph idx="12" type="sldNum"/>
+            <p:ph type="sldNum" idx="12"/>
           </p:nvPr>
         </p:nvSpPr>
-        <p:spPr>
+        <p:spPr bwMode="auto">
           <a:xfrm>
             <a:off x="8472458" y="4663217"/>
             <a:ext cx="548700" cy="393600"/>
@@ -2555,7 +2574,7 @@
           </a:prstGeom>
         </p:spPr>
         <p:txBody>
-          <a:bodyPr anchorCtr="0" anchor="ctr" bIns="91425" lIns="91425" spcFirstLastPara="1" rIns="91425" wrap="square" tIns="91425">
+          <a:bodyPr spcFirstLastPara="1" wrap="square" lIns="91425" tIns="91425" rIns="91425" bIns="91425" anchor="ctr" anchorCtr="0">
             <a:normAutofit/>
           </a:bodyPr>
           <a:lstStyle>
@@ -2597,14 +2616,15 @@
             </a:lvl9pPr>
           </a:lstStyle>
           <a:p>
-            <a:pPr indent="0" lvl="0" marL="0" rtl="0" algn="r">
-              <a:spcBef>
-                <a:spcPts val="0"/>
-              </a:spcBef>
-              <a:spcAft>
-                <a:spcPts val="0"/>
-              </a:spcAft>
-              <a:buNone/>
+            <a:pPr marL="0" lvl="0" indent="0" algn="r" rtl="0">
+              <a:spcBef>
+                <a:spcPts val="0"/>
+              </a:spcBef>
+              <a:spcAft>
+                <a:spcPts val="0"/>
+              </a:spcAft>
+              <a:buNone/>
+              <a:defRPr/>
             </a:pPr>
             <a:fld id="{00000000-1234-1234-1234-123412341234}" type="slidenum">
               <a:rPr lang="en"/>
@@ -2623,15 +2643,15 @@
 </file>
 
 <file path=ppt/slideLayouts/slideLayout2.xml><?xml version="1.0" encoding="utf-8"?>
-<p:sldLayout xmlns:a="http://schemas.openxmlformats.org/drawingml/2006/main" xmlns:r="http://schemas.openxmlformats.org/officeDocument/2006/relationships" xmlns:mc="http://schemas.openxmlformats.org/markup-compatibility/2006" xmlns:mv="urn:schemas-microsoft-com:mac:vml" xmlns:p="http://schemas.openxmlformats.org/presentationml/2006/main" xmlns:c="http://schemas.openxmlformats.org/drawingml/2006/chart" xmlns:dgm="http://schemas.openxmlformats.org/drawingml/2006/diagram" xmlns:o="urn:schemas-microsoft-com:office:office" xmlns:v="urn:schemas-microsoft-com:vml" xmlns:pvml="urn:schemas-microsoft-com:office:powerpoint" xmlns:com="http://schemas.openxmlformats.org/drawingml/2006/compatibility" xmlns:p14="http://schemas.microsoft.com/office/powerpoint/2010/main" xmlns:p15="http://schemas.microsoft.com/office/powerpoint/2012/main" xmlns:ahyp="http://schemas.microsoft.com/office/drawing/2018/hyperlinkcolor" matchingName="Section header" type="secHead">
+<p:sldLayout xmlns:a="http://schemas.openxmlformats.org/drawingml/2006/main" xmlns:r="http://schemas.openxmlformats.org/officeDocument/2006/relationships" xmlns:p="http://schemas.openxmlformats.org/presentationml/2006/main" xmlns:m="http://schemas.openxmlformats.org/officeDocument/2006/math" xmlns:w="http://schemas.openxmlformats.org/wordprocessingml/2006/main" matchingName="Section header" preserve="0" showMasterPhAnim="0" showMasterSp="1" type="secHead" userDrawn="1">
   <p:cSld name="SECTION_HEADER">
     <p:spTree>
       <p:nvGrpSpPr>
-        <p:cNvPr id="13" name="Shape 13"/>
+        <p:cNvPr id="1" name=""/>
         <p:cNvGrpSpPr/>
         <p:nvPr/>
       </p:nvGrpSpPr>
-      <p:grpSpPr>
+      <p:grpSpPr bwMode="auto">
         <a:xfrm>
           <a:off x="0" y="0"/>
           <a:ext cx="0" cy="0"/>
@@ -2641,13 +2661,13 @@
       </p:grpSpPr>
       <p:sp>
         <p:nvSpPr>
-          <p:cNvPr id="14" name="Google Shape;14;p3"/>
+          <p:cNvPr id="116871937" name="Google Shape;14;p3"/>
           <p:cNvSpPr txBox="1"/>
           <p:nvPr>
             <p:ph type="title"/>
           </p:nvPr>
         </p:nvSpPr>
-        <p:spPr>
+        <p:spPr bwMode="auto">
           <a:xfrm>
             <a:off x="311700" y="2150850"/>
             <a:ext cx="8520600" cy="841800"/>
@@ -2657,7 +2677,7 @@
           </a:prstGeom>
         </p:spPr>
         <p:txBody>
-          <a:bodyPr anchorCtr="0" anchor="ctr" bIns="91425" lIns="91425" spcFirstLastPara="1" rIns="91425" wrap="square" tIns="91425">
+          <a:bodyPr spcFirstLastPara="1" wrap="square" lIns="91425" tIns="91425" rIns="91425" bIns="91425" anchor="ctr" anchorCtr="0">
             <a:normAutofit/>
           </a:bodyPr>
           <a:lstStyle>
@@ -2761,18 +2781,23 @@
               <a:defRPr sz="3600"/>
             </a:lvl9pPr>
           </a:lstStyle>
-          <a:p/>
+          <a:p>
+            <a:pPr>
+              <a:defRPr/>
+            </a:pPr>
+            <a:endParaRPr/>
+          </a:p>
         </p:txBody>
       </p:sp>
       <p:sp>
         <p:nvSpPr>
-          <p:cNvPr id="15" name="Google Shape;15;p3"/>
+          <p:cNvPr id="182523847" name="Google Shape;15;p3"/>
           <p:cNvSpPr txBox="1"/>
           <p:nvPr>
-            <p:ph idx="12" type="sldNum"/>
+            <p:ph type="sldNum" idx="12"/>
           </p:nvPr>
         </p:nvSpPr>
-        <p:spPr>
+        <p:spPr bwMode="auto">
           <a:xfrm>
             <a:off x="8472458" y="4663217"/>
             <a:ext cx="548700" cy="393600"/>
@@ -2782,7 +2807,7 @@
           </a:prstGeom>
         </p:spPr>
         <p:txBody>
-          <a:bodyPr anchorCtr="0" anchor="ctr" bIns="91425" lIns="91425" spcFirstLastPara="1" rIns="91425" wrap="square" tIns="91425">
+          <a:bodyPr spcFirstLastPara="1" wrap="square" lIns="91425" tIns="91425" rIns="91425" bIns="91425" anchor="ctr" anchorCtr="0">
             <a:normAutofit/>
           </a:bodyPr>
           <a:lstStyle>
@@ -2824,14 +2849,15 @@
             </a:lvl9pPr>
           </a:lstStyle>
           <a:p>
-            <a:pPr indent="0" lvl="0" marL="0" rtl="0" algn="r">
-              <a:spcBef>
-                <a:spcPts val="0"/>
-              </a:spcBef>
-              <a:spcAft>
-                <a:spcPts val="0"/>
-              </a:spcAft>
-              <a:buNone/>
+            <a:pPr marL="0" lvl="0" indent="0" algn="r" rtl="0">
+              <a:spcBef>
+                <a:spcPts val="0"/>
+              </a:spcBef>
+              <a:spcAft>
+                <a:spcPts val="0"/>
+              </a:spcAft>
+              <a:buNone/>
+              <a:defRPr/>
             </a:pPr>
             <a:fld id="{00000000-1234-1234-1234-123412341234}" type="slidenum">
               <a:rPr lang="en"/>
@@ -2850,15 +2876,15 @@
 </file>
 
 <file path=ppt/slideLayouts/slideLayout3.xml><?xml version="1.0" encoding="utf-8"?>
-<p:sldLayout xmlns:a="http://schemas.openxmlformats.org/drawingml/2006/main" xmlns:r="http://schemas.openxmlformats.org/officeDocument/2006/relationships" xmlns:mc="http://schemas.openxmlformats.org/markup-compatibility/2006" xmlns:mv="urn:schemas-microsoft-com:mac:vml" xmlns:p="http://schemas.openxmlformats.org/presentationml/2006/main" xmlns:c="http://schemas.openxmlformats.org/drawingml/2006/chart" xmlns:dgm="http://schemas.openxmlformats.org/drawingml/2006/diagram" xmlns:o="urn:schemas-microsoft-com:office:office" xmlns:v="urn:schemas-microsoft-com:vml" xmlns:pvml="urn:schemas-microsoft-com:office:powerpoint" xmlns:com="http://schemas.openxmlformats.org/drawingml/2006/compatibility" xmlns:p14="http://schemas.microsoft.com/office/powerpoint/2010/main" xmlns:p15="http://schemas.microsoft.com/office/powerpoint/2012/main" xmlns:ahyp="http://schemas.microsoft.com/office/drawing/2018/hyperlinkcolor" matchingName="Title and body" type="tx">
+<p:sldLayout xmlns:a="http://schemas.openxmlformats.org/drawingml/2006/main" xmlns:r="http://schemas.openxmlformats.org/officeDocument/2006/relationships" xmlns:p="http://schemas.openxmlformats.org/presentationml/2006/main" xmlns:m="http://schemas.openxmlformats.org/officeDocument/2006/math" xmlns:w="http://schemas.openxmlformats.org/wordprocessingml/2006/main" matchingName="Title and body" preserve="0" showMasterPhAnim="0" showMasterSp="1" type="tx" userDrawn="1">
   <p:cSld name="TITLE_AND_BODY">
     <p:spTree>
       <p:nvGrpSpPr>
-        <p:cNvPr id="16" name="Shape 16"/>
+        <p:cNvPr id="1" name=""/>
         <p:cNvGrpSpPr/>
         <p:nvPr/>
       </p:nvGrpSpPr>
-      <p:grpSpPr>
+      <p:grpSpPr bwMode="auto">
         <a:xfrm>
           <a:off x="0" y="0"/>
           <a:ext cx="0" cy="0"/>
@@ -2868,13 +2894,13 @@
       </p:grpSpPr>
       <p:sp>
         <p:nvSpPr>
-          <p:cNvPr id="17" name="Google Shape;17;p4"/>
+          <p:cNvPr id="1842345606" name="Google Shape;17;p4"/>
           <p:cNvSpPr txBox="1"/>
           <p:nvPr>
             <p:ph type="title"/>
           </p:nvPr>
         </p:nvSpPr>
-        <p:spPr>
+        <p:spPr bwMode="auto">
           <a:xfrm>
             <a:off x="311700" y="445025"/>
             <a:ext cx="8520600" cy="572700"/>
@@ -2884,7 +2910,7 @@
           </a:prstGeom>
         </p:spPr>
         <p:txBody>
-          <a:bodyPr anchorCtr="0" anchor="t" bIns="91425" lIns="91425" spcFirstLastPara="1" rIns="91425" wrap="square" tIns="91425">
+          <a:bodyPr spcFirstLastPara="1" wrap="square" lIns="91425" tIns="91425" rIns="91425" bIns="91425" anchor="t" anchorCtr="0">
             <a:normAutofit/>
           </a:bodyPr>
           <a:lstStyle>
@@ -2988,18 +3014,23 @@
               <a:defRPr/>
             </a:lvl9pPr>
           </a:lstStyle>
-          <a:p/>
+          <a:p>
+            <a:pPr>
+              <a:defRPr/>
+            </a:pPr>
+            <a:endParaRPr/>
+          </a:p>
         </p:txBody>
       </p:sp>
       <p:sp>
         <p:nvSpPr>
-          <p:cNvPr id="18" name="Google Shape;18;p4"/>
+          <p:cNvPr id="1786277976" name="Google Shape;18;p4"/>
           <p:cNvSpPr txBox="1"/>
           <p:nvPr>
-            <p:ph idx="1" type="body"/>
+            <p:ph type="body" idx="1"/>
           </p:nvPr>
         </p:nvSpPr>
-        <p:spPr>
+        <p:spPr bwMode="auto">
           <a:xfrm>
             <a:off x="311700" y="1152475"/>
             <a:ext cx="8520600" cy="3416400"/>
@@ -3009,11 +3040,11 @@
           </a:prstGeom>
         </p:spPr>
         <p:txBody>
-          <a:bodyPr anchorCtr="0" anchor="t" bIns="91425" lIns="91425" spcFirstLastPara="1" rIns="91425" wrap="square" tIns="91425">
+          <a:bodyPr spcFirstLastPara="1" wrap="square" lIns="91425" tIns="91425" rIns="91425" bIns="91425" anchor="t" anchorCtr="0">
             <a:normAutofit/>
           </a:bodyPr>
           <a:lstStyle>
-            <a:lvl1pPr indent="-342900" lvl="0" marL="457200">
+            <a:lvl1pPr marL="457200" lvl="0" indent="-342900">
               <a:spcBef>
                 <a:spcPts val="0"/>
               </a:spcBef>
@@ -3024,7 +3055,7 @@
               <a:buChar char="●"/>
               <a:defRPr/>
             </a:lvl1pPr>
-            <a:lvl2pPr indent="-317500" lvl="1" marL="914400">
+            <a:lvl2pPr marL="914400" lvl="1" indent="-317500">
               <a:spcBef>
                 <a:spcPts val="0"/>
               </a:spcBef>
@@ -3035,7 +3066,7 @@
               <a:buChar char="○"/>
               <a:defRPr/>
             </a:lvl2pPr>
-            <a:lvl3pPr indent="-317500" lvl="2" marL="1371600">
+            <a:lvl3pPr marL="1371600" lvl="2" indent="-317500">
               <a:spcBef>
                 <a:spcPts val="0"/>
               </a:spcBef>
@@ -3046,7 +3077,7 @@
               <a:buChar char="■"/>
               <a:defRPr/>
             </a:lvl3pPr>
-            <a:lvl4pPr indent="-317500" lvl="3" marL="1828800">
+            <a:lvl4pPr marL="1828800" lvl="3" indent="-317500">
               <a:spcBef>
                 <a:spcPts val="0"/>
               </a:spcBef>
@@ -3057,7 +3088,7 @@
               <a:buChar char="●"/>
               <a:defRPr/>
             </a:lvl4pPr>
-            <a:lvl5pPr indent="-317500" lvl="4" marL="2286000">
+            <a:lvl5pPr marL="2286000" lvl="4" indent="-317500">
               <a:spcBef>
                 <a:spcPts val="0"/>
               </a:spcBef>
@@ -3068,7 +3099,7 @@
               <a:buChar char="○"/>
               <a:defRPr/>
             </a:lvl5pPr>
-            <a:lvl6pPr indent="-317500" lvl="5" marL="2743200">
+            <a:lvl6pPr marL="2743200" lvl="5" indent="-317500">
               <a:spcBef>
                 <a:spcPts val="0"/>
               </a:spcBef>
@@ -3079,7 +3110,7 @@
               <a:buChar char="■"/>
               <a:defRPr/>
             </a:lvl6pPr>
-            <a:lvl7pPr indent="-317500" lvl="6" marL="3200400">
+            <a:lvl7pPr marL="3200400" lvl="6" indent="-317500">
               <a:spcBef>
                 <a:spcPts val="0"/>
               </a:spcBef>
@@ -3090,7 +3121,7 @@
               <a:buChar char="●"/>
               <a:defRPr/>
             </a:lvl7pPr>
-            <a:lvl8pPr indent="-317500" lvl="7" marL="3657600">
+            <a:lvl8pPr marL="3657600" lvl="7" indent="-317500">
               <a:spcBef>
                 <a:spcPts val="0"/>
               </a:spcBef>
@@ -3101,7 +3132,7 @@
               <a:buChar char="○"/>
               <a:defRPr/>
             </a:lvl8pPr>
-            <a:lvl9pPr indent="-317500" lvl="8" marL="4114800">
+            <a:lvl9pPr marL="4114800" lvl="8" indent="-317500">
               <a:spcBef>
                 <a:spcPts val="0"/>
               </a:spcBef>
@@ -3113,18 +3144,23 @@
               <a:defRPr/>
             </a:lvl9pPr>
           </a:lstStyle>
-          <a:p/>
+          <a:p>
+            <a:pPr>
+              <a:defRPr/>
+            </a:pPr>
+            <a:endParaRPr/>
+          </a:p>
         </p:txBody>
       </p:sp>
       <p:sp>
         <p:nvSpPr>
-          <p:cNvPr id="19" name="Google Shape;19;p4"/>
+          <p:cNvPr id="1072964511" name="Google Shape;19;p4"/>
           <p:cNvSpPr txBox="1"/>
           <p:nvPr>
-            <p:ph idx="12" type="sldNum"/>
+            <p:ph type="sldNum" idx="12"/>
           </p:nvPr>
         </p:nvSpPr>
-        <p:spPr>
+        <p:spPr bwMode="auto">
           <a:xfrm>
             <a:off x="8472458" y="4663217"/>
             <a:ext cx="548700" cy="393600"/>
@@ -3134,7 +3170,7 @@
           </a:prstGeom>
         </p:spPr>
         <p:txBody>
-          <a:bodyPr anchorCtr="0" anchor="ctr" bIns="91425" lIns="91425" spcFirstLastPara="1" rIns="91425" wrap="square" tIns="91425">
+          <a:bodyPr spcFirstLastPara="1" wrap="square" lIns="91425" tIns="91425" rIns="91425" bIns="91425" anchor="ctr" anchorCtr="0">
             <a:normAutofit/>
           </a:bodyPr>
           <a:lstStyle>
@@ -3176,14 +3212,15 @@
             </a:lvl9pPr>
           </a:lstStyle>
           <a:p>
-            <a:pPr indent="0" lvl="0" marL="0" rtl="0" algn="r">
-              <a:spcBef>
-                <a:spcPts val="0"/>
-              </a:spcBef>
-              <a:spcAft>
-                <a:spcPts val="0"/>
-              </a:spcAft>
-              <a:buNone/>
+            <a:pPr marL="0" lvl="0" indent="0" algn="r" rtl="0">
+              <a:spcBef>
+                <a:spcPts val="0"/>
+              </a:spcBef>
+              <a:spcAft>
+                <a:spcPts val="0"/>
+              </a:spcAft>
+              <a:buNone/>
+              <a:defRPr/>
             </a:pPr>
             <a:fld id="{00000000-1234-1234-1234-123412341234}" type="slidenum">
               <a:rPr lang="en"/>
@@ -3202,15 +3239,15 @@
 </file>
 
 <file path=ppt/slideLayouts/slideLayout4.xml><?xml version="1.0" encoding="utf-8"?>
-<p:sldLayout xmlns:a="http://schemas.openxmlformats.org/drawingml/2006/main" xmlns:r="http://schemas.openxmlformats.org/officeDocument/2006/relationships" xmlns:mc="http://schemas.openxmlformats.org/markup-compatibility/2006" xmlns:mv="urn:schemas-microsoft-com:mac:vml" xmlns:p="http://schemas.openxmlformats.org/presentationml/2006/main" xmlns:c="http://schemas.openxmlformats.org/drawingml/2006/chart" xmlns:dgm="http://schemas.openxmlformats.org/drawingml/2006/diagram" xmlns:o="urn:schemas-microsoft-com:office:office" xmlns:v="urn:schemas-microsoft-com:vml" xmlns:pvml="urn:schemas-microsoft-com:office:powerpoint" xmlns:com="http://schemas.openxmlformats.org/drawingml/2006/compatibility" xmlns:p14="http://schemas.microsoft.com/office/powerpoint/2010/main" xmlns:p15="http://schemas.microsoft.com/office/powerpoint/2012/main" xmlns:ahyp="http://schemas.microsoft.com/office/drawing/2018/hyperlinkcolor" matchingName="Title and two columns" type="twoColTx">
+<p:sldLayout xmlns:a="http://schemas.openxmlformats.org/drawingml/2006/main" xmlns:r="http://schemas.openxmlformats.org/officeDocument/2006/relationships" xmlns:p="http://schemas.openxmlformats.org/presentationml/2006/main" xmlns:m="http://schemas.openxmlformats.org/officeDocument/2006/math" xmlns:w="http://schemas.openxmlformats.org/wordprocessingml/2006/main" matchingName="Title and two columns" preserve="0" showMasterPhAnim="0" showMasterSp="1" type="twoColTx" userDrawn="1">
   <p:cSld name="TITLE_AND_TWO_COLUMNS">
     <p:spTree>
       <p:nvGrpSpPr>
-        <p:cNvPr id="20" name="Shape 20"/>
+        <p:cNvPr id="1" name=""/>
         <p:cNvGrpSpPr/>
         <p:nvPr/>
       </p:nvGrpSpPr>
-      <p:grpSpPr>
+      <p:grpSpPr bwMode="auto">
         <a:xfrm>
           <a:off x="0" y="0"/>
           <a:ext cx="0" cy="0"/>
@@ -3220,13 +3257,13 @@
       </p:grpSpPr>
       <p:sp>
         <p:nvSpPr>
-          <p:cNvPr id="21" name="Google Shape;21;p5"/>
+          <p:cNvPr id="213689793" name="Google Shape;21;p5"/>
           <p:cNvSpPr txBox="1"/>
           <p:nvPr>
             <p:ph type="title"/>
           </p:nvPr>
         </p:nvSpPr>
-        <p:spPr>
+        <p:spPr bwMode="auto">
           <a:xfrm>
             <a:off x="311700" y="445025"/>
             <a:ext cx="8520600" cy="572700"/>
@@ -3236,7 +3273,7 @@
           </a:prstGeom>
         </p:spPr>
         <p:txBody>
-          <a:bodyPr anchorCtr="0" anchor="t" bIns="91425" lIns="91425" spcFirstLastPara="1" rIns="91425" wrap="square" tIns="91425">
+          <a:bodyPr spcFirstLastPara="1" wrap="square" lIns="91425" tIns="91425" rIns="91425" bIns="91425" anchor="t" anchorCtr="0">
             <a:normAutofit/>
           </a:bodyPr>
           <a:lstStyle>
@@ -3340,18 +3377,23 @@
               <a:defRPr/>
             </a:lvl9pPr>
           </a:lstStyle>
-          <a:p/>
+          <a:p>
+            <a:pPr>
+              <a:defRPr/>
+            </a:pPr>
+            <a:endParaRPr/>
+          </a:p>
         </p:txBody>
       </p:sp>
       <p:sp>
         <p:nvSpPr>
-          <p:cNvPr id="22" name="Google Shape;22;p5"/>
+          <p:cNvPr id="1544051682" name="Google Shape;22;p5"/>
           <p:cNvSpPr txBox="1"/>
           <p:nvPr>
-            <p:ph idx="1" type="body"/>
+            <p:ph type="body" idx="1"/>
           </p:nvPr>
         </p:nvSpPr>
-        <p:spPr>
+        <p:spPr bwMode="auto">
           <a:xfrm>
             <a:off x="311700" y="1152475"/>
             <a:ext cx="3999900" cy="3416400"/>
@@ -3361,11 +3403,11 @@
           </a:prstGeom>
         </p:spPr>
         <p:txBody>
-          <a:bodyPr anchorCtr="0" anchor="t" bIns="91425" lIns="91425" spcFirstLastPara="1" rIns="91425" wrap="square" tIns="91425">
+          <a:bodyPr spcFirstLastPara="1" wrap="square" lIns="91425" tIns="91425" rIns="91425" bIns="91425" anchor="t" anchorCtr="0">
             <a:normAutofit/>
           </a:bodyPr>
           <a:lstStyle>
-            <a:lvl1pPr indent="-317500" lvl="0" marL="457200">
+            <a:lvl1pPr marL="457200" lvl="0" indent="-317500">
               <a:spcBef>
                 <a:spcPts val="0"/>
               </a:spcBef>
@@ -3376,7 +3418,7 @@
               <a:buChar char="●"/>
               <a:defRPr sz="1400"/>
             </a:lvl1pPr>
-            <a:lvl2pPr indent="-304800" lvl="1" marL="914400">
+            <a:lvl2pPr marL="914400" lvl="1" indent="-304800">
               <a:spcBef>
                 <a:spcPts val="0"/>
               </a:spcBef>
@@ -3387,7 +3429,7 @@
               <a:buChar char="○"/>
               <a:defRPr sz="1200"/>
             </a:lvl2pPr>
-            <a:lvl3pPr indent="-304800" lvl="2" marL="1371600">
+            <a:lvl3pPr marL="1371600" lvl="2" indent="-304800">
               <a:spcBef>
                 <a:spcPts val="0"/>
               </a:spcBef>
@@ -3398,7 +3440,7 @@
               <a:buChar char="■"/>
               <a:defRPr sz="1200"/>
             </a:lvl3pPr>
-            <a:lvl4pPr indent="-304800" lvl="3" marL="1828800">
+            <a:lvl4pPr marL="1828800" lvl="3" indent="-304800">
               <a:spcBef>
                 <a:spcPts val="0"/>
               </a:spcBef>
@@ -3409,7 +3451,7 @@
               <a:buChar char="●"/>
               <a:defRPr sz="1200"/>
             </a:lvl4pPr>
-            <a:lvl5pPr indent="-304800" lvl="4" marL="2286000">
+            <a:lvl5pPr marL="2286000" lvl="4" indent="-304800">
               <a:spcBef>
                 <a:spcPts val="0"/>
               </a:spcBef>
@@ -3420,7 +3462,7 @@
               <a:buChar char="○"/>
               <a:defRPr sz="1200"/>
             </a:lvl5pPr>
-            <a:lvl6pPr indent="-304800" lvl="5" marL="2743200">
+            <a:lvl6pPr marL="2743200" lvl="5" indent="-304800">
               <a:spcBef>
                 <a:spcPts val="0"/>
               </a:spcBef>
@@ -3431,7 +3473,7 @@
               <a:buChar char="■"/>
               <a:defRPr sz="1200"/>
             </a:lvl6pPr>
-            <a:lvl7pPr indent="-304800" lvl="6" marL="3200400">
+            <a:lvl7pPr marL="3200400" lvl="6" indent="-304800">
               <a:spcBef>
                 <a:spcPts val="0"/>
               </a:spcBef>
@@ -3442,7 +3484,7 @@
               <a:buChar char="●"/>
               <a:defRPr sz="1200"/>
             </a:lvl7pPr>
-            <a:lvl8pPr indent="-304800" lvl="7" marL="3657600">
+            <a:lvl8pPr marL="3657600" lvl="7" indent="-304800">
               <a:spcBef>
                 <a:spcPts val="0"/>
               </a:spcBef>
@@ -3453,7 +3495,7 @@
               <a:buChar char="○"/>
               <a:defRPr sz="1200"/>
             </a:lvl8pPr>
-            <a:lvl9pPr indent="-304800" lvl="8" marL="4114800">
+            <a:lvl9pPr marL="4114800" lvl="8" indent="-304800">
               <a:spcBef>
                 <a:spcPts val="0"/>
               </a:spcBef>
@@ -3465,20 +3507,25 @@
               <a:defRPr sz="1200"/>
             </a:lvl9pPr>
           </a:lstStyle>
-          <a:p/>
+          <a:p>
+            <a:pPr>
+              <a:defRPr/>
+            </a:pPr>
+            <a:endParaRPr/>
+          </a:p>
         </p:txBody>
       </p:sp>
       <p:sp>
         <p:nvSpPr>
-          <p:cNvPr id="23" name="Google Shape;23;p5"/>
+          <p:cNvPr id="412087323" name="Google Shape;23;p5"/>
           <p:cNvSpPr txBox="1"/>
           <p:nvPr>
-            <p:ph idx="2" type="body"/>
+            <p:ph type="body" idx="2"/>
           </p:nvPr>
         </p:nvSpPr>
-        <p:spPr>
+        <p:spPr bwMode="auto">
           <a:xfrm>
-            <a:off x="4832400" y="1152475"/>
+            <a:off x="4832399" y="1152475"/>
             <a:ext cx="3999900" cy="3416400"/>
           </a:xfrm>
           <a:prstGeom prst="rect">
@@ -3486,11 +3533,11 @@
           </a:prstGeom>
         </p:spPr>
         <p:txBody>
-          <a:bodyPr anchorCtr="0" anchor="t" bIns="91425" lIns="91425" spcFirstLastPara="1" rIns="91425" wrap="square" tIns="91425">
+          <a:bodyPr spcFirstLastPara="1" wrap="square" lIns="91425" tIns="91425" rIns="91425" bIns="91425" anchor="t" anchorCtr="0">
             <a:normAutofit/>
           </a:bodyPr>
           <a:lstStyle>
-            <a:lvl1pPr indent="-317500" lvl="0" marL="457200">
+            <a:lvl1pPr marL="457200" lvl="0" indent="-317500">
               <a:spcBef>
                 <a:spcPts val="0"/>
               </a:spcBef>
@@ -3501,7 +3548,7 @@
               <a:buChar char="●"/>
               <a:defRPr sz="1400"/>
             </a:lvl1pPr>
-            <a:lvl2pPr indent="-304800" lvl="1" marL="914400">
+            <a:lvl2pPr marL="914400" lvl="1" indent="-304800">
               <a:spcBef>
                 <a:spcPts val="0"/>
               </a:spcBef>
@@ -3512,7 +3559,7 @@
               <a:buChar char="○"/>
               <a:defRPr sz="1200"/>
             </a:lvl2pPr>
-            <a:lvl3pPr indent="-304800" lvl="2" marL="1371600">
+            <a:lvl3pPr marL="1371600" lvl="2" indent="-304800">
               <a:spcBef>
                 <a:spcPts val="0"/>
               </a:spcBef>
@@ -3523,7 +3570,7 @@
               <a:buChar char="■"/>
               <a:defRPr sz="1200"/>
             </a:lvl3pPr>
-            <a:lvl4pPr indent="-304800" lvl="3" marL="1828800">
+            <a:lvl4pPr marL="1828800" lvl="3" indent="-304800">
               <a:spcBef>
                 <a:spcPts val="0"/>
               </a:spcBef>
@@ -3534,7 +3581,7 @@
               <a:buChar char="●"/>
               <a:defRPr sz="1200"/>
             </a:lvl4pPr>
-            <a:lvl5pPr indent="-304800" lvl="4" marL="2286000">
+            <a:lvl5pPr marL="2286000" lvl="4" indent="-304800">
               <a:spcBef>
                 <a:spcPts val="0"/>
               </a:spcBef>
@@ -3545,7 +3592,7 @@
               <a:buChar char="○"/>
               <a:defRPr sz="1200"/>
             </a:lvl5pPr>
-            <a:lvl6pPr indent="-304800" lvl="5" marL="2743200">
+            <a:lvl6pPr marL="2743200" lvl="5" indent="-304800">
               <a:spcBef>
                 <a:spcPts val="0"/>
               </a:spcBef>
@@ -3556,7 +3603,7 @@
               <a:buChar char="■"/>
               <a:defRPr sz="1200"/>
             </a:lvl6pPr>
-            <a:lvl7pPr indent="-304800" lvl="6" marL="3200400">
+            <a:lvl7pPr marL="3200400" lvl="6" indent="-304800">
               <a:spcBef>
                 <a:spcPts val="0"/>
               </a:spcBef>
@@ -3567,7 +3614,7 @@
               <a:buChar char="●"/>
               <a:defRPr sz="1200"/>
             </a:lvl7pPr>
-            <a:lvl8pPr indent="-304800" lvl="7" marL="3657600">
+            <a:lvl8pPr marL="3657600" lvl="7" indent="-304800">
               <a:spcBef>
                 <a:spcPts val="0"/>
               </a:spcBef>
@@ -3578,7 +3625,7 @@
               <a:buChar char="○"/>
               <a:defRPr sz="1200"/>
             </a:lvl8pPr>
-            <a:lvl9pPr indent="-304800" lvl="8" marL="4114800">
+            <a:lvl9pPr marL="4114800" lvl="8" indent="-304800">
               <a:spcBef>
                 <a:spcPts val="0"/>
               </a:spcBef>
@@ -3590,18 +3637,23 @@
               <a:defRPr sz="1200"/>
             </a:lvl9pPr>
           </a:lstStyle>
-          <a:p/>
+          <a:p>
+            <a:pPr>
+              <a:defRPr/>
+            </a:pPr>
+            <a:endParaRPr/>
+          </a:p>
         </p:txBody>
       </p:sp>
       <p:sp>
         <p:nvSpPr>
-          <p:cNvPr id="24" name="Google Shape;24;p5"/>
+          <p:cNvPr id="1658804702" name="Google Shape;24;p5"/>
           <p:cNvSpPr txBox="1"/>
           <p:nvPr>
-            <p:ph idx="12" type="sldNum"/>
+            <p:ph type="sldNum" idx="12"/>
           </p:nvPr>
         </p:nvSpPr>
-        <p:spPr>
+        <p:spPr bwMode="auto">
           <a:xfrm>
             <a:off x="8472458" y="4663217"/>
             <a:ext cx="548700" cy="393600"/>
@@ -3611,7 +3663,7 @@
           </a:prstGeom>
         </p:spPr>
         <p:txBody>
-          <a:bodyPr anchorCtr="0" anchor="ctr" bIns="91425" lIns="91425" spcFirstLastPara="1" rIns="91425" wrap="square" tIns="91425">
+          <a:bodyPr spcFirstLastPara="1" wrap="square" lIns="91425" tIns="91425" rIns="91425" bIns="91425" anchor="ctr" anchorCtr="0">
             <a:normAutofit/>
           </a:bodyPr>
           <a:lstStyle>
@@ -3653,14 +3705,15 @@
             </a:lvl9pPr>
           </a:lstStyle>
           <a:p>
-            <a:pPr indent="0" lvl="0" marL="0" rtl="0" algn="r">
-              <a:spcBef>
-                <a:spcPts val="0"/>
-              </a:spcBef>
-              <a:spcAft>
-                <a:spcPts val="0"/>
-              </a:spcAft>
-              <a:buNone/>
+            <a:pPr marL="0" lvl="0" indent="0" algn="r" rtl="0">
+              <a:spcBef>
+                <a:spcPts val="0"/>
+              </a:spcBef>
+              <a:spcAft>
+                <a:spcPts val="0"/>
+              </a:spcAft>
+              <a:buNone/>
+              <a:defRPr/>
             </a:pPr>
             <a:fld id="{00000000-1234-1234-1234-123412341234}" type="slidenum">
               <a:rPr lang="en"/>
@@ -3679,15 +3732,15 @@
 </file>
 
 <file path=ppt/slideLayouts/slideLayout5.xml><?xml version="1.0" encoding="utf-8"?>
-<p:sldLayout xmlns:a="http://schemas.openxmlformats.org/drawingml/2006/main" xmlns:r="http://schemas.openxmlformats.org/officeDocument/2006/relationships" xmlns:mc="http://schemas.openxmlformats.org/markup-compatibility/2006" xmlns:mv="urn:schemas-microsoft-com:mac:vml" xmlns:p="http://schemas.openxmlformats.org/presentationml/2006/main" xmlns:c="http://schemas.openxmlformats.org/drawingml/2006/chart" xmlns:dgm="http://schemas.openxmlformats.org/drawingml/2006/diagram" xmlns:o="urn:schemas-microsoft-com:office:office" xmlns:v="urn:schemas-microsoft-com:vml" xmlns:pvml="urn:schemas-microsoft-com:office:powerpoint" xmlns:com="http://schemas.openxmlformats.org/drawingml/2006/compatibility" xmlns:p14="http://schemas.microsoft.com/office/powerpoint/2010/main" xmlns:p15="http://schemas.microsoft.com/office/powerpoint/2012/main" xmlns:ahyp="http://schemas.microsoft.com/office/drawing/2018/hyperlinkcolor" matchingName="Title only" type="titleOnly">
+<p:sldLayout xmlns:a="http://schemas.openxmlformats.org/drawingml/2006/main" xmlns:r="http://schemas.openxmlformats.org/officeDocument/2006/relationships" xmlns:p="http://schemas.openxmlformats.org/presentationml/2006/main" xmlns:m="http://schemas.openxmlformats.org/officeDocument/2006/math" xmlns:w="http://schemas.openxmlformats.org/wordprocessingml/2006/main" matchingName="Title only" preserve="0" showMasterPhAnim="0" showMasterSp="1" type="titleOnly" userDrawn="1">
   <p:cSld name="TITLE_ONLY">
     <p:spTree>
       <p:nvGrpSpPr>
-        <p:cNvPr id="25" name="Shape 25"/>
+        <p:cNvPr id="1" name=""/>
         <p:cNvGrpSpPr/>
         <p:nvPr/>
       </p:nvGrpSpPr>
-      <p:grpSpPr>
+      <p:grpSpPr bwMode="auto">
         <a:xfrm>
           <a:off x="0" y="0"/>
           <a:ext cx="0" cy="0"/>
@@ -3697,13 +3750,13 @@
       </p:grpSpPr>
       <p:sp>
         <p:nvSpPr>
-          <p:cNvPr id="26" name="Google Shape;26;p6"/>
+          <p:cNvPr id="1703275019" name="Google Shape;26;p6"/>
           <p:cNvSpPr txBox="1"/>
           <p:nvPr>
             <p:ph type="title"/>
           </p:nvPr>
         </p:nvSpPr>
-        <p:spPr>
+        <p:spPr bwMode="auto">
           <a:xfrm>
             <a:off x="311700" y="445025"/>
             <a:ext cx="8520600" cy="572700"/>
@@ -3713,7 +3766,7 @@
           </a:prstGeom>
         </p:spPr>
         <p:txBody>
-          <a:bodyPr anchorCtr="0" anchor="t" bIns="91425" lIns="91425" spcFirstLastPara="1" rIns="91425" wrap="square" tIns="91425">
+          <a:bodyPr spcFirstLastPara="1" wrap="square" lIns="91425" tIns="91425" rIns="91425" bIns="91425" anchor="t" anchorCtr="0">
             <a:normAutofit/>
           </a:bodyPr>
           <a:lstStyle>
@@ -3817,18 +3870,23 @@
               <a:defRPr/>
             </a:lvl9pPr>
           </a:lstStyle>
-          <a:p/>
+          <a:p>
+            <a:pPr>
+              <a:defRPr/>
+            </a:pPr>
+            <a:endParaRPr/>
+          </a:p>
         </p:txBody>
       </p:sp>
       <p:sp>
         <p:nvSpPr>
-          <p:cNvPr id="27" name="Google Shape;27;p6"/>
+          <p:cNvPr id="471078067" name="Google Shape;27;p6"/>
           <p:cNvSpPr txBox="1"/>
           <p:nvPr>
-            <p:ph idx="12" type="sldNum"/>
+            <p:ph type="sldNum" idx="12"/>
           </p:nvPr>
         </p:nvSpPr>
-        <p:spPr>
+        <p:spPr bwMode="auto">
           <a:xfrm>
             <a:off x="8472458" y="4663217"/>
             <a:ext cx="548700" cy="393600"/>
@@ -3838,7 +3896,7 @@
           </a:prstGeom>
         </p:spPr>
         <p:txBody>
-          <a:bodyPr anchorCtr="0" anchor="ctr" bIns="91425" lIns="91425" spcFirstLastPara="1" rIns="91425" wrap="square" tIns="91425">
+          <a:bodyPr spcFirstLastPara="1" wrap="square" lIns="91425" tIns="91425" rIns="91425" bIns="91425" anchor="ctr" anchorCtr="0">
             <a:normAutofit/>
           </a:bodyPr>
           <a:lstStyle>
@@ -3880,14 +3938,15 @@
             </a:lvl9pPr>
           </a:lstStyle>
           <a:p>
-            <a:pPr indent="0" lvl="0" marL="0" rtl="0" algn="r">
-              <a:spcBef>
-                <a:spcPts val="0"/>
-              </a:spcBef>
-              <a:spcAft>
-                <a:spcPts val="0"/>
-              </a:spcAft>
-              <a:buNone/>
+            <a:pPr marL="0" lvl="0" indent="0" algn="r" rtl="0">
+              <a:spcBef>
+                <a:spcPts val="0"/>
+              </a:spcBef>
+              <a:spcAft>
+                <a:spcPts val="0"/>
+              </a:spcAft>
+              <a:buNone/>
+              <a:defRPr/>
             </a:pPr>
             <a:fld id="{00000000-1234-1234-1234-123412341234}" type="slidenum">
               <a:rPr lang="en"/>
@@ -3906,15 +3965,15 @@
 </file>
 
 <file path=ppt/slideLayouts/slideLayout6.xml><?xml version="1.0" encoding="utf-8"?>
-<p:sldLayout xmlns:a="http://schemas.openxmlformats.org/drawingml/2006/main" xmlns:r="http://schemas.openxmlformats.org/officeDocument/2006/relationships" xmlns:mc="http://schemas.openxmlformats.org/markup-compatibility/2006" xmlns:mv="urn:schemas-microsoft-com:mac:vml" xmlns:p="http://schemas.openxmlformats.org/presentationml/2006/main" xmlns:c="http://schemas.openxmlformats.org/drawingml/2006/chart" xmlns:dgm="http://schemas.openxmlformats.org/drawingml/2006/diagram" xmlns:o="urn:schemas-microsoft-com:office:office" xmlns:v="urn:schemas-microsoft-com:vml" xmlns:pvml="urn:schemas-microsoft-com:office:powerpoint" xmlns:com="http://schemas.openxmlformats.org/drawingml/2006/compatibility" xmlns:p14="http://schemas.microsoft.com/office/powerpoint/2010/main" xmlns:p15="http://schemas.microsoft.com/office/powerpoint/2012/main" xmlns:ahyp="http://schemas.microsoft.com/office/drawing/2018/hyperlinkcolor" matchingName="One column text">
+<p:sldLayout xmlns:a="http://schemas.openxmlformats.org/drawingml/2006/main" xmlns:r="http://schemas.openxmlformats.org/officeDocument/2006/relationships" xmlns:p="http://schemas.openxmlformats.org/presentationml/2006/main" xmlns:m="http://schemas.openxmlformats.org/officeDocument/2006/math" xmlns:w="http://schemas.openxmlformats.org/wordprocessingml/2006/main" matchingName="One column text" preserve="0" showMasterPhAnim="0" showMasterSp="1" userDrawn="1">
   <p:cSld name="ONE_COLUMN_TEXT">
     <p:spTree>
       <p:nvGrpSpPr>
-        <p:cNvPr id="28" name="Shape 28"/>
+        <p:cNvPr id="1" name=""/>
         <p:cNvGrpSpPr/>
         <p:nvPr/>
       </p:nvGrpSpPr>
-      <p:grpSpPr>
+      <p:grpSpPr bwMode="auto">
         <a:xfrm>
           <a:off x="0" y="0"/>
           <a:ext cx="0" cy="0"/>
@@ -3924,13 +3983,13 @@
       </p:grpSpPr>
       <p:sp>
         <p:nvSpPr>
-          <p:cNvPr id="29" name="Google Shape;29;p7"/>
+          <p:cNvPr id="1800510180" name="Google Shape;29;p7"/>
           <p:cNvSpPr txBox="1"/>
           <p:nvPr>
             <p:ph type="title"/>
           </p:nvPr>
         </p:nvSpPr>
-        <p:spPr>
+        <p:spPr bwMode="auto">
           <a:xfrm>
             <a:off x="311700" y="555600"/>
             <a:ext cx="2808000" cy="755700"/>
@@ -3940,7 +3999,7 @@
           </a:prstGeom>
         </p:spPr>
         <p:txBody>
-          <a:bodyPr anchorCtr="0" anchor="b" bIns="91425" lIns="91425" spcFirstLastPara="1" rIns="91425" wrap="square" tIns="91425">
+          <a:bodyPr spcFirstLastPara="1" wrap="square" lIns="91425" tIns="91425" rIns="91425" bIns="91425" anchor="b" anchorCtr="0">
             <a:normAutofit/>
           </a:bodyPr>
           <a:lstStyle>
@@ -4044,18 +4103,23 @@
               <a:defRPr sz="2400"/>
             </a:lvl9pPr>
           </a:lstStyle>
-          <a:p/>
+          <a:p>
+            <a:pPr>
+              <a:defRPr/>
+            </a:pPr>
+            <a:endParaRPr/>
+          </a:p>
         </p:txBody>
       </p:sp>
       <p:sp>
         <p:nvSpPr>
-          <p:cNvPr id="30" name="Google Shape;30;p7"/>
+          <p:cNvPr id="1627879284" name="Google Shape;30;p7"/>
           <p:cNvSpPr txBox="1"/>
           <p:nvPr>
-            <p:ph idx="1" type="body"/>
+            <p:ph type="body" idx="1"/>
           </p:nvPr>
         </p:nvSpPr>
-        <p:spPr>
+        <p:spPr bwMode="auto">
           <a:xfrm>
             <a:off x="311700" y="1389600"/>
             <a:ext cx="2808000" cy="3179400"/>
@@ -4065,11 +4129,11 @@
           </a:prstGeom>
         </p:spPr>
         <p:txBody>
-          <a:bodyPr anchorCtr="0" anchor="t" bIns="91425" lIns="91425" spcFirstLastPara="1" rIns="91425" wrap="square" tIns="91425">
+          <a:bodyPr spcFirstLastPara="1" wrap="square" lIns="91425" tIns="91425" rIns="91425" bIns="91425" anchor="t" anchorCtr="0">
             <a:normAutofit/>
           </a:bodyPr>
           <a:lstStyle>
-            <a:lvl1pPr indent="-304800" lvl="0" marL="457200">
+            <a:lvl1pPr marL="457200" lvl="0" indent="-304800">
               <a:spcBef>
                 <a:spcPts val="0"/>
               </a:spcBef>
@@ -4080,7 +4144,7 @@
               <a:buChar char="●"/>
               <a:defRPr sz="1200"/>
             </a:lvl1pPr>
-            <a:lvl2pPr indent="-304800" lvl="1" marL="914400">
+            <a:lvl2pPr marL="914400" lvl="1" indent="-304800">
               <a:spcBef>
                 <a:spcPts val="0"/>
               </a:spcBef>
@@ -4091,7 +4155,7 @@
               <a:buChar char="○"/>
               <a:defRPr sz="1200"/>
             </a:lvl2pPr>
-            <a:lvl3pPr indent="-304800" lvl="2" marL="1371600">
+            <a:lvl3pPr marL="1371600" lvl="2" indent="-304800">
               <a:spcBef>
                 <a:spcPts val="0"/>
               </a:spcBef>
@@ -4102,7 +4166,7 @@
               <a:buChar char="■"/>
               <a:defRPr sz="1200"/>
             </a:lvl3pPr>
-            <a:lvl4pPr indent="-304800" lvl="3" marL="1828800">
+            <a:lvl4pPr marL="1828800" lvl="3" indent="-304800">
               <a:spcBef>
                 <a:spcPts val="0"/>
               </a:spcBef>
@@ -4113,7 +4177,7 @@
               <a:buChar char="●"/>
               <a:defRPr sz="1200"/>
             </a:lvl4pPr>
-            <a:lvl5pPr indent="-304800" lvl="4" marL="2286000">
+            <a:lvl5pPr marL="2286000" lvl="4" indent="-304800">
               <a:spcBef>
                 <a:spcPts val="0"/>
               </a:spcBef>
@@ -4124,7 +4188,7 @@
               <a:buChar char="○"/>
               <a:defRPr sz="1200"/>
             </a:lvl5pPr>
-            <a:lvl6pPr indent="-304800" lvl="5" marL="2743200">
+            <a:lvl6pPr marL="2743200" lvl="5" indent="-304800">
               <a:spcBef>
                 <a:spcPts val="0"/>
               </a:spcBef>
@@ -4135,7 +4199,7 @@
               <a:buChar char="■"/>
               <a:defRPr sz="1200"/>
             </a:lvl6pPr>
-            <a:lvl7pPr indent="-304800" lvl="6" marL="3200400">
+            <a:lvl7pPr marL="3200400" lvl="6" indent="-304800">
               <a:spcBef>
                 <a:spcPts val="0"/>
               </a:spcBef>
@@ -4146,7 +4210,7 @@
               <a:buChar char="●"/>
               <a:defRPr sz="1200"/>
             </a:lvl7pPr>
-            <a:lvl8pPr indent="-304800" lvl="7" marL="3657600">
+            <a:lvl8pPr marL="3657600" lvl="7" indent="-304800">
               <a:spcBef>
                 <a:spcPts val="0"/>
               </a:spcBef>
@@ -4157,7 +4221,7 @@
               <a:buChar char="○"/>
               <a:defRPr sz="1200"/>
             </a:lvl8pPr>
-            <a:lvl9pPr indent="-304800" lvl="8" marL="4114800">
+            <a:lvl9pPr marL="4114800" lvl="8" indent="-304800">
               <a:spcBef>
                 <a:spcPts val="0"/>
               </a:spcBef>
@@ -4169,18 +4233,23 @@
               <a:defRPr sz="1200"/>
             </a:lvl9pPr>
           </a:lstStyle>
-          <a:p/>
+          <a:p>
+            <a:pPr>
+              <a:defRPr/>
+            </a:pPr>
+            <a:endParaRPr/>
+          </a:p>
         </p:txBody>
       </p:sp>
       <p:sp>
         <p:nvSpPr>
-          <p:cNvPr id="31" name="Google Shape;31;p7"/>
+          <p:cNvPr id="1796587090" name="Google Shape;31;p7"/>
           <p:cNvSpPr txBox="1"/>
           <p:nvPr>
-            <p:ph idx="12" type="sldNum"/>
+            <p:ph type="sldNum" idx="12"/>
           </p:nvPr>
         </p:nvSpPr>
-        <p:spPr>
+        <p:spPr bwMode="auto">
           <a:xfrm>
             <a:off x="8472458" y="4663217"/>
             <a:ext cx="548700" cy="393600"/>
@@ -4190,7 +4259,7 @@
           </a:prstGeom>
         </p:spPr>
         <p:txBody>
-          <a:bodyPr anchorCtr="0" anchor="ctr" bIns="91425" lIns="91425" spcFirstLastPara="1" rIns="91425" wrap="square" tIns="91425">
+          <a:bodyPr spcFirstLastPara="1" wrap="square" lIns="91425" tIns="91425" rIns="91425" bIns="91425" anchor="ctr" anchorCtr="0">
             <a:normAutofit/>
           </a:bodyPr>
           <a:lstStyle>
@@ -4232,14 +4301,15 @@
             </a:lvl9pPr>
           </a:lstStyle>
           <a:p>
-            <a:pPr indent="0" lvl="0" marL="0" rtl="0" algn="r">
-              <a:spcBef>
-                <a:spcPts val="0"/>
-              </a:spcBef>
-              <a:spcAft>
-                <a:spcPts val="0"/>
-              </a:spcAft>
-              <a:buNone/>
+            <a:pPr marL="0" lvl="0" indent="0" algn="r" rtl="0">
+              <a:spcBef>
+                <a:spcPts val="0"/>
+              </a:spcBef>
+              <a:spcAft>
+                <a:spcPts val="0"/>
+              </a:spcAft>
+              <a:buNone/>
+              <a:defRPr/>
             </a:pPr>
             <a:fld id="{00000000-1234-1234-1234-123412341234}" type="slidenum">
               <a:rPr lang="en"/>
@@ -4258,15 +4328,15 @@
 </file>
 
 <file path=ppt/slideLayouts/slideLayout7.xml><?xml version="1.0" encoding="utf-8"?>
-<p:sldLayout xmlns:a="http://schemas.openxmlformats.org/drawingml/2006/main" xmlns:r="http://schemas.openxmlformats.org/officeDocument/2006/relationships" xmlns:mc="http://schemas.openxmlformats.org/markup-compatibility/2006" xmlns:mv="urn:schemas-microsoft-com:mac:vml" xmlns:p="http://schemas.openxmlformats.org/presentationml/2006/main" xmlns:c="http://schemas.openxmlformats.org/drawingml/2006/chart" xmlns:dgm="http://schemas.openxmlformats.org/drawingml/2006/diagram" xmlns:o="urn:schemas-microsoft-com:office:office" xmlns:v="urn:schemas-microsoft-com:vml" xmlns:pvml="urn:schemas-microsoft-com:office:powerpoint" xmlns:com="http://schemas.openxmlformats.org/drawingml/2006/compatibility" xmlns:p14="http://schemas.microsoft.com/office/powerpoint/2010/main" xmlns:p15="http://schemas.microsoft.com/office/powerpoint/2012/main" xmlns:ahyp="http://schemas.microsoft.com/office/drawing/2018/hyperlinkcolor" matchingName="Main point">
+<p:sldLayout xmlns:a="http://schemas.openxmlformats.org/drawingml/2006/main" xmlns:r="http://schemas.openxmlformats.org/officeDocument/2006/relationships" xmlns:p="http://schemas.openxmlformats.org/presentationml/2006/main" xmlns:m="http://schemas.openxmlformats.org/officeDocument/2006/math" xmlns:w="http://schemas.openxmlformats.org/wordprocessingml/2006/main" matchingName="Main point" preserve="0" showMasterPhAnim="0" showMasterSp="1" userDrawn="1">
   <p:cSld name="MAIN_POINT">
     <p:spTree>
       <p:nvGrpSpPr>
-        <p:cNvPr id="32" name="Shape 32"/>
+        <p:cNvPr id="1" name=""/>
         <p:cNvGrpSpPr/>
         <p:nvPr/>
       </p:nvGrpSpPr>
-      <p:grpSpPr>
+      <p:grpSpPr bwMode="auto">
         <a:xfrm>
           <a:off x="0" y="0"/>
           <a:ext cx="0" cy="0"/>
@@ -4276,13 +4346,13 @@
       </p:grpSpPr>
       <p:sp>
         <p:nvSpPr>
-          <p:cNvPr id="33" name="Google Shape;33;p8"/>
+          <p:cNvPr id="2075488307" name="Google Shape;33;p8"/>
           <p:cNvSpPr txBox="1"/>
           <p:nvPr>
             <p:ph type="title"/>
           </p:nvPr>
         </p:nvSpPr>
-        <p:spPr>
+        <p:spPr bwMode="auto">
           <a:xfrm>
             <a:off x="490250" y="450150"/>
             <a:ext cx="6367800" cy="4090800"/>
@@ -4292,7 +4362,7 @@
           </a:prstGeom>
         </p:spPr>
         <p:txBody>
-          <a:bodyPr anchorCtr="0" anchor="ctr" bIns="91425" lIns="91425" spcFirstLastPara="1" rIns="91425" wrap="square" tIns="91425">
+          <a:bodyPr spcFirstLastPara="1" wrap="square" lIns="91425" tIns="91425" rIns="91425" bIns="91425" anchor="ctr" anchorCtr="0">
             <a:normAutofit/>
           </a:bodyPr>
           <a:lstStyle>
@@ -4396,18 +4466,23 @@
               <a:defRPr sz="4800"/>
             </a:lvl9pPr>
           </a:lstStyle>
-          <a:p/>
+          <a:p>
+            <a:pPr>
+              <a:defRPr/>
+            </a:pPr>
+            <a:endParaRPr/>
+          </a:p>
         </p:txBody>
       </p:sp>
       <p:sp>
         <p:nvSpPr>
-          <p:cNvPr id="34" name="Google Shape;34;p8"/>
+          <p:cNvPr id="405100832" name="Google Shape;34;p8"/>
           <p:cNvSpPr txBox="1"/>
           <p:nvPr>
-            <p:ph idx="12" type="sldNum"/>
+            <p:ph type="sldNum" idx="12"/>
           </p:nvPr>
         </p:nvSpPr>
-        <p:spPr>
+        <p:spPr bwMode="auto">
           <a:xfrm>
             <a:off x="8472458" y="4663217"/>
             <a:ext cx="548700" cy="393600"/>
@@ -4417,7 +4492,7 @@
           </a:prstGeom>
         </p:spPr>
         <p:txBody>
-          <a:bodyPr anchorCtr="0" anchor="ctr" bIns="91425" lIns="91425" spcFirstLastPara="1" rIns="91425" wrap="square" tIns="91425">
+          <a:bodyPr spcFirstLastPara="1" wrap="square" lIns="91425" tIns="91425" rIns="91425" bIns="91425" anchor="ctr" anchorCtr="0">
             <a:normAutofit/>
           </a:bodyPr>
           <a:lstStyle>
@@ -4459,14 +4534,15 @@
             </a:lvl9pPr>
           </a:lstStyle>
           <a:p>
-            <a:pPr indent="0" lvl="0" marL="0" rtl="0" algn="r">
-              <a:spcBef>
-                <a:spcPts val="0"/>
-              </a:spcBef>
-              <a:spcAft>
-                <a:spcPts val="0"/>
-              </a:spcAft>
-              <a:buNone/>
+            <a:pPr marL="0" lvl="0" indent="0" algn="r" rtl="0">
+              <a:spcBef>
+                <a:spcPts val="0"/>
+              </a:spcBef>
+              <a:spcAft>
+                <a:spcPts val="0"/>
+              </a:spcAft>
+              <a:buNone/>
+              <a:defRPr/>
             </a:pPr>
             <a:fld id="{00000000-1234-1234-1234-123412341234}" type="slidenum">
               <a:rPr lang="en"/>
@@ -4485,15 +4561,15 @@
 </file>
 
 <file path=ppt/slideLayouts/slideLayout8.xml><?xml version="1.0" encoding="utf-8"?>
-<p:sldLayout xmlns:a="http://schemas.openxmlformats.org/drawingml/2006/main" xmlns:r="http://schemas.openxmlformats.org/officeDocument/2006/relationships" xmlns:mc="http://schemas.openxmlformats.org/markup-compatibility/2006" xmlns:mv="urn:schemas-microsoft-com:mac:vml" xmlns:p="http://schemas.openxmlformats.org/presentationml/2006/main" xmlns:c="http://schemas.openxmlformats.org/drawingml/2006/chart" xmlns:dgm="http://schemas.openxmlformats.org/drawingml/2006/diagram" xmlns:o="urn:schemas-microsoft-com:office:office" xmlns:v="urn:schemas-microsoft-com:vml" xmlns:pvml="urn:schemas-microsoft-com:office:powerpoint" xmlns:com="http://schemas.openxmlformats.org/drawingml/2006/compatibility" xmlns:p14="http://schemas.microsoft.com/office/powerpoint/2010/main" xmlns:p15="http://schemas.microsoft.com/office/powerpoint/2012/main" xmlns:ahyp="http://schemas.microsoft.com/office/drawing/2018/hyperlinkcolor" matchingName="Section title and description">
+<p:sldLayout xmlns:a="http://schemas.openxmlformats.org/drawingml/2006/main" xmlns:r="http://schemas.openxmlformats.org/officeDocument/2006/relationships" xmlns:p="http://schemas.openxmlformats.org/presentationml/2006/main" xmlns:m="http://schemas.openxmlformats.org/officeDocument/2006/math" xmlns:w="http://schemas.openxmlformats.org/wordprocessingml/2006/main" matchingName="Section title and description" preserve="0" showMasterPhAnim="0" showMasterSp="1" userDrawn="1">
   <p:cSld name="SECTION_TITLE_AND_DESCRIPTION">
     <p:spTree>
       <p:nvGrpSpPr>
-        <p:cNvPr id="35" name="Shape 35"/>
+        <p:cNvPr id="1" name=""/>
         <p:cNvGrpSpPr/>
         <p:nvPr/>
       </p:nvGrpSpPr>
-      <p:grpSpPr>
+      <p:grpSpPr bwMode="auto">
         <a:xfrm>
           <a:off x="0" y="0"/>
           <a:ext cx="0" cy="0"/>
@@ -4503,11 +4579,11 @@
       </p:grpSpPr>
       <p:sp>
         <p:nvSpPr>
-          <p:cNvPr id="36" name="Google Shape;36;p9"/>
+          <p:cNvPr id="1408395831" name="Google Shape;36;p9"/>
           <p:cNvSpPr/>
           <p:nvPr/>
         </p:nvSpPr>
-        <p:spPr>
+        <p:spPr bwMode="auto">
           <a:xfrm>
             <a:off x="4572000" y="-125"/>
             <a:ext cx="4572000" cy="5143500"/>
@@ -4523,46 +4599,44 @@
           </a:ln>
         </p:spPr>
         <p:txBody>
-          <a:bodyPr anchorCtr="0" anchor="ctr" bIns="91425" lIns="91425" spcFirstLastPara="1" rIns="91425" wrap="square" tIns="91425">
+          <a:bodyPr spcFirstLastPara="1" wrap="square" lIns="91425" tIns="91425" rIns="91425" bIns="91425" anchor="ctr" anchorCtr="0">
             <a:noAutofit/>
           </a:bodyPr>
           <a:lstStyle/>
           <a:p>
-            <a:pPr indent="0" lvl="0" marL="0" rtl="0" algn="l">
-              <a:spcBef>
-                <a:spcPts val="0"/>
-              </a:spcBef>
-              <a:spcAft>
-                <a:spcPts val="0"/>
-              </a:spcAft>
-              <a:buNone/>
+            <a:pPr marL="0" lvl="0" indent="0" algn="l" rtl="0">
+              <a:spcBef>
+                <a:spcPts val="0"/>
+              </a:spcBef>
+              <a:spcAft>
+                <a:spcPts val="0"/>
+              </a:spcAft>
+              <a:buNone/>
+              <a:defRPr/>
             </a:pPr>
-            <a:r>
-              <a:t/>
-            </a:r>
             <a:endParaRPr/>
           </a:p>
         </p:txBody>
       </p:sp>
       <p:sp>
         <p:nvSpPr>
-          <p:cNvPr id="37" name="Google Shape;37;p9"/>
+          <p:cNvPr id="399342084" name="Google Shape;37;p9"/>
           <p:cNvSpPr txBox="1"/>
           <p:nvPr>
             <p:ph type="title"/>
           </p:nvPr>
         </p:nvSpPr>
-        <p:spPr>
+        <p:spPr bwMode="auto">
           <a:xfrm>
             <a:off x="265500" y="1233175"/>
-            <a:ext cx="4045200" cy="1482300"/>
+            <a:ext cx="4045199" cy="1482300"/>
           </a:xfrm>
           <a:prstGeom prst="rect">
             <a:avLst/>
           </a:prstGeom>
         </p:spPr>
         <p:txBody>
-          <a:bodyPr anchorCtr="0" anchor="b" bIns="91425" lIns="91425" spcFirstLastPara="1" rIns="91425" wrap="square" tIns="91425">
+          <a:bodyPr spcFirstLastPara="1" wrap="square" lIns="91425" tIns="91425" rIns="91425" bIns="91425" anchor="b" anchorCtr="0">
             <a:normAutofit/>
           </a:bodyPr>
           <a:lstStyle>
@@ -4666,28 +4740,33 @@
               <a:defRPr sz="4200"/>
             </a:lvl9pPr>
           </a:lstStyle>
-          <a:p/>
+          <a:p>
+            <a:pPr>
+              <a:defRPr/>
+            </a:pPr>
+            <a:endParaRPr/>
+          </a:p>
         </p:txBody>
       </p:sp>
       <p:sp>
         <p:nvSpPr>
-          <p:cNvPr id="38" name="Google Shape;38;p9"/>
+          <p:cNvPr id="819542772" name="Google Shape;38;p9"/>
           <p:cNvSpPr txBox="1"/>
           <p:nvPr>
-            <p:ph idx="1" type="subTitle"/>
+            <p:ph type="subTitle" idx="1"/>
           </p:nvPr>
         </p:nvSpPr>
-        <p:spPr>
+        <p:spPr bwMode="auto">
           <a:xfrm>
             <a:off x="265500" y="2803075"/>
-            <a:ext cx="4045200" cy="1235100"/>
+            <a:ext cx="4045199" cy="1235099"/>
           </a:xfrm>
           <a:prstGeom prst="rect">
             <a:avLst/>
           </a:prstGeom>
         </p:spPr>
         <p:txBody>
-          <a:bodyPr anchorCtr="0" anchor="t" bIns="91425" lIns="91425" spcFirstLastPara="1" rIns="91425" wrap="square" tIns="91425">
+          <a:bodyPr spcFirstLastPara="1" wrap="square" lIns="91425" tIns="91425" rIns="91425" bIns="91425" anchor="t" anchorCtr="0">
             <a:normAutofit/>
           </a:bodyPr>
           <a:lstStyle>
@@ -4818,18 +4897,23 @@
               <a:defRPr sz="2100"/>
             </a:lvl9pPr>
           </a:lstStyle>
-          <a:p/>
+          <a:p>
+            <a:pPr>
+              <a:defRPr/>
+            </a:pPr>
+            <a:endParaRPr/>
+          </a:p>
         </p:txBody>
       </p:sp>
       <p:sp>
         <p:nvSpPr>
-          <p:cNvPr id="39" name="Google Shape;39;p9"/>
+          <p:cNvPr id="1992219092" name="Google Shape;39;p9"/>
           <p:cNvSpPr txBox="1"/>
           <p:nvPr>
-            <p:ph idx="2" type="body"/>
+            <p:ph type="body" idx="2"/>
           </p:nvPr>
         </p:nvSpPr>
-        <p:spPr>
+        <p:spPr bwMode="auto">
           <a:xfrm>
             <a:off x="4939500" y="724075"/>
             <a:ext cx="3837000" cy="3695100"/>
@@ -4839,11 +4923,11 @@
           </a:prstGeom>
         </p:spPr>
         <p:txBody>
-          <a:bodyPr anchorCtr="0" anchor="ctr" bIns="91425" lIns="91425" spcFirstLastPara="1" rIns="91425" wrap="square" tIns="91425">
+          <a:bodyPr spcFirstLastPara="1" wrap="square" lIns="91425" tIns="91425" rIns="91425" bIns="91425" anchor="ctr" anchorCtr="0">
             <a:normAutofit/>
           </a:bodyPr>
           <a:lstStyle>
-            <a:lvl1pPr indent="-342900" lvl="0" marL="457200">
+            <a:lvl1pPr marL="457200" lvl="0" indent="-342900">
               <a:spcBef>
                 <a:spcPts val="0"/>
               </a:spcBef>
@@ -4854,7 +4938,7 @@
               <a:buChar char="●"/>
               <a:defRPr/>
             </a:lvl1pPr>
-            <a:lvl2pPr indent="-317500" lvl="1" marL="914400">
+            <a:lvl2pPr marL="914400" lvl="1" indent="-317500">
               <a:spcBef>
                 <a:spcPts val="0"/>
               </a:spcBef>
@@ -4865,7 +4949,7 @@
               <a:buChar char="○"/>
               <a:defRPr/>
             </a:lvl2pPr>
-            <a:lvl3pPr indent="-317500" lvl="2" marL="1371600">
+            <a:lvl3pPr marL="1371600" lvl="2" indent="-317500">
               <a:spcBef>
                 <a:spcPts val="0"/>
               </a:spcBef>
@@ -4876,7 +4960,7 @@
               <a:buChar char="■"/>
               <a:defRPr/>
             </a:lvl3pPr>
-            <a:lvl4pPr indent="-317500" lvl="3" marL="1828800">
+            <a:lvl4pPr marL="1828800" lvl="3" indent="-317500">
               <a:spcBef>
                 <a:spcPts val="0"/>
               </a:spcBef>
@@ -4887,7 +4971,7 @@
               <a:buChar char="●"/>
               <a:defRPr/>
             </a:lvl4pPr>
-            <a:lvl5pPr indent="-317500" lvl="4" marL="2286000">
+            <a:lvl5pPr marL="2286000" lvl="4" indent="-317500">
               <a:spcBef>
                 <a:spcPts val="0"/>
               </a:spcBef>
@@ -4898,7 +4982,7 @@
               <a:buChar char="○"/>
               <a:defRPr/>
             </a:lvl5pPr>
-            <a:lvl6pPr indent="-317500" lvl="5" marL="2743200">
+            <a:lvl6pPr marL="2743200" lvl="5" indent="-317500">
               <a:spcBef>
                 <a:spcPts val="0"/>
               </a:spcBef>
@@ -4909,7 +4993,7 @@
               <a:buChar char="■"/>
               <a:defRPr/>
             </a:lvl6pPr>
-            <a:lvl7pPr indent="-317500" lvl="6" marL="3200400">
+            <a:lvl7pPr marL="3200400" lvl="6" indent="-317500">
               <a:spcBef>
                 <a:spcPts val="0"/>
               </a:spcBef>
@@ -4920,7 +5004,7 @@
               <a:buChar char="●"/>
               <a:defRPr/>
             </a:lvl7pPr>
-            <a:lvl8pPr indent="-317500" lvl="7" marL="3657600">
+            <a:lvl8pPr marL="3657600" lvl="7" indent="-317500">
               <a:spcBef>
                 <a:spcPts val="0"/>
               </a:spcBef>
@@ -4931,7 +5015,7 @@
               <a:buChar char="○"/>
               <a:defRPr/>
             </a:lvl8pPr>
-            <a:lvl9pPr indent="-317500" lvl="8" marL="4114800">
+            <a:lvl9pPr marL="4114800" lvl="8" indent="-317500">
               <a:spcBef>
                 <a:spcPts val="0"/>
               </a:spcBef>
@@ -4943,18 +5027,23 @@
               <a:defRPr/>
             </a:lvl9pPr>
           </a:lstStyle>
-          <a:p/>
+          <a:p>
+            <a:pPr>
+              <a:defRPr/>
+            </a:pPr>
+            <a:endParaRPr/>
+          </a:p>
         </p:txBody>
       </p:sp>
       <p:sp>
         <p:nvSpPr>
-          <p:cNvPr id="40" name="Google Shape;40;p9"/>
+          <p:cNvPr id="271962011" name="Google Shape;40;p9"/>
           <p:cNvSpPr txBox="1"/>
           <p:nvPr>
-            <p:ph idx="12" type="sldNum"/>
+            <p:ph type="sldNum" idx="12"/>
           </p:nvPr>
         </p:nvSpPr>
-        <p:spPr>
+        <p:spPr bwMode="auto">
           <a:xfrm>
             <a:off x="8472458" y="4663217"/>
             <a:ext cx="548700" cy="393600"/>
@@ -4964,7 +5053,7 @@
           </a:prstGeom>
         </p:spPr>
         <p:txBody>
-          <a:bodyPr anchorCtr="0" anchor="ctr" bIns="91425" lIns="91425" spcFirstLastPara="1" rIns="91425" wrap="square" tIns="91425">
+          <a:bodyPr spcFirstLastPara="1" wrap="square" lIns="91425" tIns="91425" rIns="91425" bIns="91425" anchor="ctr" anchorCtr="0">
             <a:normAutofit/>
           </a:bodyPr>
           <a:lstStyle>
@@ -5006,14 +5095,15 @@
             </a:lvl9pPr>
           </a:lstStyle>
           <a:p>
-            <a:pPr indent="0" lvl="0" marL="0" rtl="0" algn="r">
-              <a:spcBef>
-                <a:spcPts val="0"/>
-              </a:spcBef>
-              <a:spcAft>
-                <a:spcPts val="0"/>
-              </a:spcAft>
-              <a:buNone/>
+            <a:pPr marL="0" lvl="0" indent="0" algn="r" rtl="0">
+              <a:spcBef>
+                <a:spcPts val="0"/>
+              </a:spcBef>
+              <a:spcAft>
+                <a:spcPts val="0"/>
+              </a:spcAft>
+              <a:buNone/>
+              <a:defRPr/>
             </a:pPr>
             <a:fld id="{00000000-1234-1234-1234-123412341234}" type="slidenum">
               <a:rPr lang="en"/>
@@ -5032,15 +5122,15 @@
 </file>
 
 <file path=ppt/slideLayouts/slideLayout9.xml><?xml version="1.0" encoding="utf-8"?>
-<p:sldLayout xmlns:a="http://schemas.openxmlformats.org/drawingml/2006/main" xmlns:r="http://schemas.openxmlformats.org/officeDocument/2006/relationships" xmlns:mc="http://schemas.openxmlformats.org/markup-compatibility/2006" xmlns:mv="urn:schemas-microsoft-com:mac:vml" xmlns:p="http://schemas.openxmlformats.org/presentationml/2006/main" xmlns:c="http://schemas.openxmlformats.org/drawingml/2006/chart" xmlns:dgm="http://schemas.openxmlformats.org/drawingml/2006/diagram" xmlns:o="urn:schemas-microsoft-com:office:office" xmlns:v="urn:schemas-microsoft-com:vml" xmlns:pvml="urn:schemas-microsoft-com:office:powerpoint" xmlns:com="http://schemas.openxmlformats.org/drawingml/2006/compatibility" xmlns:p14="http://schemas.microsoft.com/office/powerpoint/2010/main" xmlns:p15="http://schemas.microsoft.com/office/powerpoint/2012/main" xmlns:ahyp="http://schemas.microsoft.com/office/drawing/2018/hyperlinkcolor" matchingName="Caption">
+<p:sldLayout xmlns:a="http://schemas.openxmlformats.org/drawingml/2006/main" xmlns:r="http://schemas.openxmlformats.org/officeDocument/2006/relationships" xmlns:p="http://schemas.openxmlformats.org/presentationml/2006/main" xmlns:m="http://schemas.openxmlformats.org/officeDocument/2006/math" xmlns:w="http://schemas.openxmlformats.org/wordprocessingml/2006/main" matchingName="Caption" preserve="0" showMasterPhAnim="0" showMasterSp="1" userDrawn="1">
   <p:cSld name="CAPTION_ONLY">
     <p:spTree>
       <p:nvGrpSpPr>
-        <p:cNvPr id="41" name="Shape 41"/>
+        <p:cNvPr id="1" name=""/>
         <p:cNvGrpSpPr/>
         <p:nvPr/>
       </p:nvGrpSpPr>
-      <p:grpSpPr>
+      <p:grpSpPr bwMode="auto">
         <a:xfrm>
           <a:off x="0" y="0"/>
           <a:ext cx="0" cy="0"/>
@@ -5050,13 +5140,13 @@
       </p:grpSpPr>
       <p:sp>
         <p:nvSpPr>
-          <p:cNvPr id="42" name="Google Shape;42;p10"/>
+          <p:cNvPr id="1670799441" name="Google Shape;42;p10"/>
           <p:cNvSpPr txBox="1"/>
           <p:nvPr>
-            <p:ph idx="1" type="body"/>
+            <p:ph type="body" idx="1"/>
           </p:nvPr>
         </p:nvSpPr>
-        <p:spPr>
+        <p:spPr bwMode="auto">
           <a:xfrm>
             <a:off x="311700" y="4230575"/>
             <a:ext cx="5998800" cy="605100"/>
@@ -5066,11 +5156,11 @@
           </a:prstGeom>
         </p:spPr>
         <p:txBody>
-          <a:bodyPr anchorCtr="0" anchor="ctr" bIns="91425" lIns="91425" spcFirstLastPara="1" rIns="91425" wrap="square" tIns="91425">
+          <a:bodyPr spcFirstLastPara="1" wrap="square" lIns="91425" tIns="91425" rIns="91425" bIns="91425" anchor="ctr" anchorCtr="0">
             <a:normAutofit/>
           </a:bodyPr>
           <a:lstStyle>
-            <a:lvl1pPr indent="-228600" lvl="0" marL="457200">
+            <a:lvl1pPr marL="457200" lvl="0" indent="-228600">
               <a:lnSpc>
                 <a:spcPct val="100000"/>
               </a:lnSpc>
@@ -5085,18 +5175,23 @@
               <a:defRPr/>
             </a:lvl1pPr>
           </a:lstStyle>
-          <a:p/>
+          <a:p>
+            <a:pPr>
+              <a:defRPr/>
+            </a:pPr>
+            <a:endParaRPr/>
+          </a:p>
         </p:txBody>
       </p:sp>
       <p:sp>
         <p:nvSpPr>
-          <p:cNvPr id="43" name="Google Shape;43;p10"/>
+          <p:cNvPr id="1849755241" name="Google Shape;43;p10"/>
           <p:cNvSpPr txBox="1"/>
           <p:nvPr>
-            <p:ph idx="12" type="sldNum"/>
+            <p:ph type="sldNum" idx="12"/>
           </p:nvPr>
         </p:nvSpPr>
-        <p:spPr>
+        <p:spPr bwMode="auto">
           <a:xfrm>
             <a:off x="8472458" y="4663217"/>
             <a:ext cx="548700" cy="393600"/>
@@ -5106,7 +5201,7 @@
           </a:prstGeom>
         </p:spPr>
         <p:txBody>
-          <a:bodyPr anchorCtr="0" anchor="ctr" bIns="91425" lIns="91425" spcFirstLastPara="1" rIns="91425" wrap="square" tIns="91425">
+          <a:bodyPr spcFirstLastPara="1" wrap="square" lIns="91425" tIns="91425" rIns="91425" bIns="91425" anchor="ctr" anchorCtr="0">
             <a:normAutofit/>
           </a:bodyPr>
           <a:lstStyle>
@@ -5148,14 +5243,15 @@
             </a:lvl9pPr>
           </a:lstStyle>
           <a:p>
-            <a:pPr indent="0" lvl="0" marL="0" rtl="0" algn="r">
-              <a:spcBef>
-                <a:spcPts val="0"/>
-              </a:spcBef>
-              <a:spcAft>
-                <a:spcPts val="0"/>
-              </a:spcAft>
-              <a:buNone/>
+            <a:pPr marL="0" lvl="0" indent="0" algn="r" rtl="0">
+              <a:spcBef>
+                <a:spcPts val="0"/>
+              </a:spcBef>
+              <a:spcAft>
+                <a:spcPts val="0"/>
+              </a:spcAft>
+              <a:buNone/>
+              <a:defRPr/>
             </a:pPr>
             <a:fld id="{00000000-1234-1234-1234-123412341234}" type="slidenum">
               <a:rPr lang="en"/>
@@ -5174,10 +5270,10 @@
 </file>
 
 <file path=ppt/slideMasters/slideMaster1.xml><?xml version="1.0" encoding="utf-8"?>
-<p:sldMaster xmlns:a="http://schemas.openxmlformats.org/drawingml/2006/main" xmlns:r="http://schemas.openxmlformats.org/officeDocument/2006/relationships" xmlns:mc="http://schemas.openxmlformats.org/markup-compatibility/2006" xmlns:mv="urn:schemas-microsoft-com:mac:vml" xmlns:p="http://schemas.openxmlformats.org/presentationml/2006/main" xmlns:c="http://schemas.openxmlformats.org/drawingml/2006/chart" xmlns:dgm="http://schemas.openxmlformats.org/drawingml/2006/diagram" xmlns:o="urn:schemas-microsoft-com:office:office" xmlns:v="urn:schemas-microsoft-com:vml" xmlns:pvml="urn:schemas-microsoft-com:office:powerpoint" xmlns:com="http://schemas.openxmlformats.org/drawingml/2006/compatibility" xmlns:p14="http://schemas.microsoft.com/office/powerpoint/2010/main" xmlns:p15="http://schemas.microsoft.com/office/powerpoint/2012/main" xmlns:ahyp="http://schemas.microsoft.com/office/drawing/2018/hyperlinkcolor">
+<p:sldMaster xmlns:a="http://schemas.openxmlformats.org/drawingml/2006/main" xmlns:r="http://schemas.openxmlformats.org/officeDocument/2006/relationships" xmlns:p="http://schemas.openxmlformats.org/presentationml/2006/main" xmlns:m="http://schemas.openxmlformats.org/officeDocument/2006/math" xmlns:w="http://schemas.openxmlformats.org/wordprocessingml/2006/main" preserve="0">
   <p:cSld name="simple-light-2">
     <p:bg>
-      <p:bgPr>
+      <p:bgPr shadeToTitle="0">
         <a:solidFill>
           <a:schemeClr val="lt1"/>
         </a:solidFill>
@@ -5185,11 +5281,11 @@
     </p:bg>
     <p:spTree>
       <p:nvGrpSpPr>
-        <p:cNvPr id="5" name="Shape 5"/>
+        <p:cNvPr id="1" name=""/>
         <p:cNvGrpSpPr/>
         <p:nvPr/>
       </p:nvGrpSpPr>
-      <p:grpSpPr>
+      <p:grpSpPr bwMode="auto">
         <a:xfrm>
           <a:off x="0" y="0"/>
           <a:ext cx="0" cy="0"/>
@@ -5199,13 +5295,13 @@
       </p:grpSpPr>
       <p:sp>
         <p:nvSpPr>
-          <p:cNvPr id="6" name="Google Shape;6;p1"/>
+          <p:cNvPr id="1556930669" name="Google Shape;6;p1"/>
           <p:cNvSpPr txBox="1"/>
           <p:nvPr>
             <p:ph type="title"/>
           </p:nvPr>
         </p:nvSpPr>
-        <p:spPr>
+        <p:spPr bwMode="auto">
           <a:xfrm>
             <a:off x="311700" y="445025"/>
             <a:ext cx="8520600" cy="572700"/>
@@ -5219,7 +5315,7 @@
           </a:ln>
         </p:spPr>
         <p:txBody>
-          <a:bodyPr anchorCtr="0" anchor="t" bIns="91425" lIns="91425" spcFirstLastPara="1" rIns="91425" wrap="square" tIns="91425">
+          <a:bodyPr spcFirstLastPara="1" wrap="square" lIns="91425" tIns="91425" rIns="91425" bIns="91425" anchor="t" anchorCtr="0">
             <a:normAutofit/>
           </a:bodyPr>
           <a:lstStyle>
@@ -5386,18 +5482,23 @@
               </a:defRPr>
             </a:lvl9pPr>
           </a:lstStyle>
-          <a:p/>
+          <a:p>
+            <a:pPr>
+              <a:defRPr/>
+            </a:pPr>
+            <a:endParaRPr/>
+          </a:p>
         </p:txBody>
       </p:sp>
       <p:sp>
         <p:nvSpPr>
-          <p:cNvPr id="7" name="Google Shape;7;p1"/>
+          <p:cNvPr id="1305096886" name="Google Shape;7;p1"/>
           <p:cNvSpPr txBox="1"/>
           <p:nvPr>
-            <p:ph idx="1" type="body"/>
+            <p:ph type="body" idx="1"/>
           </p:nvPr>
         </p:nvSpPr>
-        <p:spPr>
+        <p:spPr bwMode="auto">
           <a:xfrm>
             <a:off x="311700" y="1152475"/>
             <a:ext cx="8520600" cy="3416400"/>
@@ -5411,13 +5512,13 @@
           </a:ln>
         </p:spPr>
         <p:txBody>
-          <a:bodyPr anchorCtr="0" anchor="t" bIns="91425" lIns="91425" spcFirstLastPara="1" rIns="91425" wrap="square" tIns="91425">
+          <a:bodyPr spcFirstLastPara="1" wrap="square" lIns="91425" tIns="91425" rIns="91425" bIns="91425" anchor="t" anchorCtr="0">
             <a:normAutofit/>
           </a:bodyPr>
           <a:lstStyle>
-            <a:lvl1pPr indent="-342900" lvl="0" marL="457200">
+            <a:lvl1pPr marL="457200" lvl="0" indent="-342900">
               <a:lnSpc>
-                <a:spcPct val="115000"/>
+                <a:spcPct val="114999"/>
               </a:lnSpc>
               <a:spcBef>
                 <a:spcPts val="0"/>
@@ -5436,9 +5537,9 @@
                 </a:solidFill>
               </a:defRPr>
             </a:lvl1pPr>
-            <a:lvl2pPr indent="-317500" lvl="1" marL="914400">
+            <a:lvl2pPr marL="914400" lvl="1" indent="-317500">
               <a:lnSpc>
-                <a:spcPct val="115000"/>
+                <a:spcPct val="114999"/>
               </a:lnSpc>
               <a:spcBef>
                 <a:spcPts val="0"/>
@@ -5457,9 +5558,9 @@
                 </a:solidFill>
               </a:defRPr>
             </a:lvl2pPr>
-            <a:lvl3pPr indent="-317500" lvl="2" marL="1371600">
+            <a:lvl3pPr marL="1371600" lvl="2" indent="-317500">
               <a:lnSpc>
-                <a:spcPct val="115000"/>
+                <a:spcPct val="114999"/>
               </a:lnSpc>
               <a:spcBef>
                 <a:spcPts val="0"/>
@@ -5478,9 +5579,9 @@
                 </a:solidFill>
               </a:defRPr>
             </a:lvl3pPr>
-            <a:lvl4pPr indent="-317500" lvl="3" marL="1828800">
+            <a:lvl4pPr marL="1828800" lvl="3" indent="-317500">
               <a:lnSpc>
-                <a:spcPct val="115000"/>
+                <a:spcPct val="114999"/>
               </a:lnSpc>
               <a:spcBef>
                 <a:spcPts val="0"/>
@@ -5499,9 +5600,9 @@
                 </a:solidFill>
               </a:defRPr>
             </a:lvl4pPr>
-            <a:lvl5pPr indent="-317500" lvl="4" marL="2286000">
+            <a:lvl5pPr marL="2286000" lvl="4" indent="-317500">
               <a:lnSpc>
-                <a:spcPct val="115000"/>
+                <a:spcPct val="114999"/>
               </a:lnSpc>
               <a:spcBef>
                 <a:spcPts val="0"/>
@@ -5520,9 +5621,9 @@
                 </a:solidFill>
               </a:defRPr>
             </a:lvl5pPr>
-            <a:lvl6pPr indent="-317500" lvl="5" marL="2743200">
+            <a:lvl6pPr marL="2743200" lvl="5" indent="-317500">
               <a:lnSpc>
-                <a:spcPct val="115000"/>
+                <a:spcPct val="114999"/>
               </a:lnSpc>
               <a:spcBef>
                 <a:spcPts val="0"/>
@@ -5541,9 +5642,9 @@
                 </a:solidFill>
               </a:defRPr>
             </a:lvl6pPr>
-            <a:lvl7pPr indent="-317500" lvl="6" marL="3200400">
+            <a:lvl7pPr marL="3200400" lvl="6" indent="-317500">
               <a:lnSpc>
-                <a:spcPct val="115000"/>
+                <a:spcPct val="114999"/>
               </a:lnSpc>
               <a:spcBef>
                 <a:spcPts val="0"/>
@@ -5562,9 +5663,9 @@
                 </a:solidFill>
               </a:defRPr>
             </a:lvl7pPr>
-            <a:lvl8pPr indent="-317500" lvl="7" marL="3657600">
+            <a:lvl8pPr marL="3657600" lvl="7" indent="-317500">
               <a:lnSpc>
-                <a:spcPct val="115000"/>
+                <a:spcPct val="114999"/>
               </a:lnSpc>
               <a:spcBef>
                 <a:spcPts val="0"/>
@@ -5583,9 +5684,9 @@
                 </a:solidFill>
               </a:defRPr>
             </a:lvl8pPr>
-            <a:lvl9pPr indent="-317500" lvl="8" marL="4114800">
+            <a:lvl9pPr marL="4114800" lvl="8" indent="-317500">
               <a:lnSpc>
-                <a:spcPct val="115000"/>
+                <a:spcPct val="114999"/>
               </a:lnSpc>
               <a:spcBef>
                 <a:spcPts val="0"/>
@@ -5605,18 +5706,23 @@
               </a:defRPr>
             </a:lvl9pPr>
           </a:lstStyle>
-          <a:p/>
+          <a:p>
+            <a:pPr>
+              <a:defRPr/>
+            </a:pPr>
+            <a:endParaRPr/>
+          </a:p>
         </p:txBody>
       </p:sp>
       <p:sp>
         <p:nvSpPr>
-          <p:cNvPr id="8" name="Google Shape;8;p1"/>
+          <p:cNvPr id="767447784" name="Google Shape;8;p1"/>
           <p:cNvSpPr txBox="1"/>
           <p:nvPr>
-            <p:ph idx="12" type="sldNum"/>
+            <p:ph type="sldNum" idx="12"/>
           </p:nvPr>
         </p:nvSpPr>
-        <p:spPr>
+        <p:spPr bwMode="auto">
           <a:xfrm>
             <a:off x="8472458" y="4663217"/>
             <a:ext cx="548700" cy="393600"/>
@@ -5630,7 +5736,7 @@
           </a:ln>
         </p:spPr>
         <p:txBody>
-          <a:bodyPr anchorCtr="0" anchor="ctr" bIns="91425" lIns="91425" spcFirstLastPara="1" rIns="91425" wrap="square" tIns="91425">
+          <a:bodyPr spcFirstLastPara="1" wrap="square" lIns="91425" tIns="91425" rIns="91425" bIns="91425" anchor="ctr" anchorCtr="0">
             <a:normAutofit/>
           </a:bodyPr>
           <a:lstStyle>
@@ -5708,14 +5814,15 @@
             </a:lvl9pPr>
           </a:lstStyle>
           <a:p>
-            <a:pPr indent="0" lvl="0" marL="0" rtl="0" algn="r">
-              <a:spcBef>
-                <a:spcPts val="0"/>
-              </a:spcBef>
-              <a:spcAft>
-                <a:spcPts val="0"/>
-              </a:spcAft>
-              <a:buNone/>
+            <a:pPr marL="0" lvl="0" indent="0" algn="r" rtl="0">
+              <a:spcBef>
+                <a:spcPts val="0"/>
+              </a:spcBef>
+              <a:spcAft>
+                <a:spcPts val="0"/>
+              </a:spcAft>
+              <a:buNone/>
+              <a:defRPr/>
             </a:pPr>
             <a:fld id="{00000000-1234-1234-1234-123412341234}" type="slidenum">
               <a:rPr lang="en"/>
@@ -5727,24 +5834,24 @@
       </p:sp>
     </p:spTree>
   </p:cSld>
-  <p:clrMap accent1="accent1" accent2="accent2" accent3="accent3" accent4="accent4" accent5="accent5" accent6="accent6" bg1="lt1" bg2="dk2" tx1="dk1" tx2="lt2" folHlink="folHlink" hlink="hlink"/>
+  <p:clrMap bg1="lt1" tx1="dk1" bg2="dk2" tx2="lt2" accent1="accent1" accent2="accent2" accent3="accent3" accent4="accent4" accent5="accent5" accent6="accent6" hlink="hlink" folHlink="folHlink"/>
   <p:sldLayoutIdLst>
-    <p:sldLayoutId id="2147483648" r:id="rId1"/>
-    <p:sldLayoutId id="2147483649" r:id="rId2"/>
-    <p:sldLayoutId id="2147483650" r:id="rId3"/>
-    <p:sldLayoutId id="2147483651" r:id="rId4"/>
-    <p:sldLayoutId id="2147483652" r:id="rId5"/>
-    <p:sldLayoutId id="2147483653" r:id="rId6"/>
-    <p:sldLayoutId id="2147483654" r:id="rId7"/>
-    <p:sldLayoutId id="2147483655" r:id="rId8"/>
-    <p:sldLayoutId id="2147483656" r:id="rId9"/>
-    <p:sldLayoutId id="2147483657" r:id="rId10"/>
-    <p:sldLayoutId id="2147483658" r:id="rId11"/>
+    <p:sldLayoutId id="2147483649" r:id="rId1"/>
+    <p:sldLayoutId id="2147483650" r:id="rId2"/>
+    <p:sldLayoutId id="2147483651" r:id="rId3"/>
+    <p:sldLayoutId id="2147483652" r:id="rId4"/>
+    <p:sldLayoutId id="2147483653" r:id="rId5"/>
+    <p:sldLayoutId id="2147483654" r:id="rId6"/>
+    <p:sldLayoutId id="2147483655" r:id="rId7"/>
+    <p:sldLayoutId id="2147483656" r:id="rId8"/>
+    <p:sldLayoutId id="2147483657" r:id="rId9"/>
+    <p:sldLayoutId id="2147483658" r:id="rId10"/>
+    <p:sldLayoutId id="2147483659" r:id="rId11"/>
   </p:sldLayoutIdLst>
   <p:hf dt="0" ftr="0" hdr="0" sldNum="0"/>
   <p:txStyles>
     <p:titleStyle>
-      <a:defPPr lvl="0" marR="0" rtl="0" algn="l">
+      <a:defPPr marR="0" lvl="0" algn="l" rtl="0">
         <a:lnSpc>
           <a:spcPct val="100000"/>
         </a:lnSpc>
@@ -5755,7 +5862,7 @@
           <a:spcPts val="0"/>
         </a:spcAft>
       </a:defPPr>
-      <a:lvl1pPr lvl="0" marR="0" rtl="0" algn="l">
+      <a:lvl1pPr marR="0" lvl="0" algn="l" rtl="0">
         <a:lnSpc>
           <a:spcPct val="100000"/>
         </a:lnSpc>
@@ -5769,17 +5876,16 @@
           <a:srgbClr val="000000"/>
         </a:buClr>
         <a:buFont typeface="Arial"/>
-        <a:defRPr b="0" i="0" sz="1400" u="none" cap="none" strike="noStrike">
+        <a:defRPr sz="1400" b="0" i="0" u="none" strike="noStrike" cap="none">
           <a:solidFill>
             <a:srgbClr val="000000"/>
           </a:solidFill>
           <a:latin typeface="Arial"/>
           <a:ea typeface="Arial"/>
           <a:cs typeface="Arial"/>
-          <a:sym typeface="Arial"/>
         </a:defRPr>
       </a:lvl1pPr>
-      <a:lvl2pPr lvl="1" marR="0" rtl="0" algn="l">
+      <a:lvl2pPr marR="0" lvl="1" algn="l" rtl="0">
         <a:lnSpc>
           <a:spcPct val="100000"/>
         </a:lnSpc>
@@ -5793,17 +5899,16 @@
           <a:srgbClr val="000000"/>
         </a:buClr>
         <a:buFont typeface="Arial"/>
-        <a:defRPr b="0" i="0" sz="1400" u="none" cap="none" strike="noStrike">
+        <a:defRPr sz="1400" b="0" i="0" u="none" strike="noStrike" cap="none">
           <a:solidFill>
             <a:srgbClr val="000000"/>
           </a:solidFill>
           <a:latin typeface="Arial"/>
           <a:ea typeface="Arial"/>
           <a:cs typeface="Arial"/>
-          <a:sym typeface="Arial"/>
         </a:defRPr>
       </a:lvl2pPr>
-      <a:lvl3pPr lvl="2" marR="0" rtl="0" algn="l">
+      <a:lvl3pPr marR="0" lvl="2" algn="l" rtl="0">
         <a:lnSpc>
           <a:spcPct val="100000"/>
         </a:lnSpc>
@@ -5817,17 +5922,16 @@
           <a:srgbClr val="000000"/>
         </a:buClr>
         <a:buFont typeface="Arial"/>
-        <a:defRPr b="0" i="0" sz="1400" u="none" cap="none" strike="noStrike">
+        <a:defRPr sz="1400" b="0" i="0" u="none" strike="noStrike" cap="none">
           <a:solidFill>
             <a:srgbClr val="000000"/>
           </a:solidFill>
           <a:latin typeface="Arial"/>
           <a:ea typeface="Arial"/>
           <a:cs typeface="Arial"/>
-          <a:sym typeface="Arial"/>
         </a:defRPr>
       </a:lvl3pPr>
-      <a:lvl4pPr lvl="3" marR="0" rtl="0" algn="l">
+      <a:lvl4pPr marR="0" lvl="3" algn="l" rtl="0">
         <a:lnSpc>
           <a:spcPct val="100000"/>
         </a:lnSpc>
@@ -5841,17 +5945,16 @@
           <a:srgbClr val="000000"/>
         </a:buClr>
         <a:buFont typeface="Arial"/>
-        <a:defRPr b="0" i="0" sz="1400" u="none" cap="none" strike="noStrike">
+        <a:defRPr sz="1400" b="0" i="0" u="none" strike="noStrike" cap="none">
           <a:solidFill>
             <a:srgbClr val="000000"/>
           </a:solidFill>
           <a:latin typeface="Arial"/>
           <a:ea typeface="Arial"/>
           <a:cs typeface="Arial"/>
-          <a:sym typeface="Arial"/>
         </a:defRPr>
       </a:lvl4pPr>
-      <a:lvl5pPr lvl="4" marR="0" rtl="0" algn="l">
+      <a:lvl5pPr marR="0" lvl="4" algn="l" rtl="0">
         <a:lnSpc>
           <a:spcPct val="100000"/>
         </a:lnSpc>
@@ -5865,17 +5968,16 @@
           <a:srgbClr val="000000"/>
         </a:buClr>
         <a:buFont typeface="Arial"/>
-        <a:defRPr b="0" i="0" sz="1400" u="none" cap="none" strike="noStrike">
+        <a:defRPr sz="1400" b="0" i="0" u="none" strike="noStrike" cap="none">
           <a:solidFill>
             <a:srgbClr val="000000"/>
           </a:solidFill>
           <a:latin typeface="Arial"/>
           <a:ea typeface="Arial"/>
           <a:cs typeface="Arial"/>
-          <a:sym typeface="Arial"/>
         </a:defRPr>
       </a:lvl5pPr>
-      <a:lvl6pPr lvl="5" marR="0" rtl="0" algn="l">
+      <a:lvl6pPr marR="0" lvl="5" algn="l" rtl="0">
         <a:lnSpc>
           <a:spcPct val="100000"/>
         </a:lnSpc>
@@ -5889,17 +5991,16 @@
           <a:srgbClr val="000000"/>
         </a:buClr>
         <a:buFont typeface="Arial"/>
-        <a:defRPr b="0" i="0" sz="1400" u="none" cap="none" strike="noStrike">
+        <a:defRPr sz="1400" b="0" i="0" u="none" strike="noStrike" cap="none">
           <a:solidFill>
             <a:srgbClr val="000000"/>
           </a:solidFill>
           <a:latin typeface="Arial"/>
           <a:ea typeface="Arial"/>
           <a:cs typeface="Arial"/>
-          <a:sym typeface="Arial"/>
         </a:defRPr>
       </a:lvl6pPr>
-      <a:lvl7pPr lvl="6" marR="0" rtl="0" algn="l">
+      <a:lvl7pPr marR="0" lvl="6" algn="l" rtl="0">
         <a:lnSpc>
           <a:spcPct val="100000"/>
         </a:lnSpc>
@@ -5913,17 +6014,16 @@
           <a:srgbClr val="000000"/>
         </a:buClr>
         <a:buFont typeface="Arial"/>
-        <a:defRPr b="0" i="0" sz="1400" u="none" cap="none" strike="noStrike">
+        <a:defRPr sz="1400" b="0" i="0" u="none" strike="noStrike" cap="none">
           <a:solidFill>
             <a:srgbClr val="000000"/>
           </a:solidFill>
           <a:latin typeface="Arial"/>
           <a:ea typeface="Arial"/>
           <a:cs typeface="Arial"/>
-          <a:sym typeface="Arial"/>
         </a:defRPr>
       </a:lvl7pPr>
-      <a:lvl8pPr lvl="7" marR="0" rtl="0" algn="l">
+      <a:lvl8pPr marR="0" lvl="7" algn="l" rtl="0">
         <a:lnSpc>
           <a:spcPct val="100000"/>
         </a:lnSpc>
@@ -5937,17 +6037,16 @@
           <a:srgbClr val="000000"/>
         </a:buClr>
         <a:buFont typeface="Arial"/>
-        <a:defRPr b="0" i="0" sz="1400" u="none" cap="none" strike="noStrike">
+        <a:defRPr sz="1400" b="0" i="0" u="none" strike="noStrike" cap="none">
           <a:solidFill>
             <a:srgbClr val="000000"/>
           </a:solidFill>
           <a:latin typeface="Arial"/>
           <a:ea typeface="Arial"/>
           <a:cs typeface="Arial"/>
-          <a:sym typeface="Arial"/>
         </a:defRPr>
       </a:lvl8pPr>
-      <a:lvl9pPr lvl="8" marR="0" rtl="0" algn="l">
+      <a:lvl9pPr marR="0" lvl="8" algn="l" rtl="0">
         <a:lnSpc>
           <a:spcPct val="100000"/>
         </a:lnSpc>
@@ -5961,19 +6060,18 @@
           <a:srgbClr val="000000"/>
         </a:buClr>
         <a:buFont typeface="Arial"/>
-        <a:defRPr b="0" i="0" sz="1400" u="none" cap="none" strike="noStrike">
+        <a:defRPr sz="1400" b="0" i="0" u="none" strike="noStrike" cap="none">
           <a:solidFill>
             <a:srgbClr val="000000"/>
           </a:solidFill>
           <a:latin typeface="Arial"/>
           <a:ea typeface="Arial"/>
           <a:cs typeface="Arial"/>
-          <a:sym typeface="Arial"/>
         </a:defRPr>
       </a:lvl9pPr>
     </p:titleStyle>
     <p:bodyStyle>
-      <a:defPPr lvl="0" marR="0" rtl="0" algn="l">
+      <a:defPPr marR="0" lvl="0" algn="l" rtl="0">
         <a:lnSpc>
           <a:spcPct val="100000"/>
         </a:lnSpc>
@@ -5984,7 +6082,7 @@
           <a:spcPts val="0"/>
         </a:spcAft>
       </a:defPPr>
-      <a:lvl1pPr lvl="0" marR="0" rtl="0" algn="l">
+      <a:lvl1pPr marR="0" lvl="0" algn="l" rtl="0">
         <a:lnSpc>
           <a:spcPct val="100000"/>
         </a:lnSpc>
@@ -5998,17 +6096,16 @@
           <a:srgbClr val="000000"/>
         </a:buClr>
         <a:buFont typeface="Arial"/>
-        <a:defRPr b="0" i="0" sz="1400" u="none" cap="none" strike="noStrike">
+        <a:defRPr sz="1400" b="0" i="0" u="none" strike="noStrike" cap="none">
           <a:solidFill>
             <a:srgbClr val="000000"/>
           </a:solidFill>
           <a:latin typeface="Arial"/>
           <a:ea typeface="Arial"/>
           <a:cs typeface="Arial"/>
-          <a:sym typeface="Arial"/>
         </a:defRPr>
       </a:lvl1pPr>
-      <a:lvl2pPr lvl="1" marR="0" rtl="0" algn="l">
+      <a:lvl2pPr marR="0" lvl="1" algn="l" rtl="0">
         <a:lnSpc>
           <a:spcPct val="100000"/>
         </a:lnSpc>
@@ -6022,17 +6119,16 @@
           <a:srgbClr val="000000"/>
         </a:buClr>
         <a:buFont typeface="Arial"/>
-        <a:defRPr b="0" i="0" sz="1400" u="none" cap="none" strike="noStrike">
+        <a:defRPr sz="1400" b="0" i="0" u="none" strike="noStrike" cap="none">
           <a:solidFill>
             <a:srgbClr val="000000"/>
           </a:solidFill>
           <a:latin typeface="Arial"/>
           <a:ea typeface="Arial"/>
           <a:cs typeface="Arial"/>
-          <a:sym typeface="Arial"/>
         </a:defRPr>
       </a:lvl2pPr>
-      <a:lvl3pPr lvl="2" marR="0" rtl="0" algn="l">
+      <a:lvl3pPr marR="0" lvl="2" algn="l" rtl="0">
         <a:lnSpc>
           <a:spcPct val="100000"/>
         </a:lnSpc>
@@ -6046,17 +6142,16 @@
           <a:srgbClr val="000000"/>
         </a:buClr>
         <a:buFont typeface="Arial"/>
-        <a:defRPr b="0" i="0" sz="1400" u="none" cap="none" strike="noStrike">
+        <a:defRPr sz="1400" b="0" i="0" u="none" strike="noStrike" cap="none">
           <a:solidFill>
             <a:srgbClr val="000000"/>
           </a:solidFill>
           <a:latin typeface="Arial"/>
           <a:ea typeface="Arial"/>
           <a:cs typeface="Arial"/>
-          <a:sym typeface="Arial"/>
         </a:defRPr>
       </a:lvl3pPr>
-      <a:lvl4pPr lvl="3" marR="0" rtl="0" algn="l">
+      <a:lvl4pPr marR="0" lvl="3" algn="l" rtl="0">
         <a:lnSpc>
           <a:spcPct val="100000"/>
         </a:lnSpc>
@@ -6070,17 +6165,16 @@
           <a:srgbClr val="000000"/>
         </a:buClr>
         <a:buFont typeface="Arial"/>
-        <a:defRPr b="0" i="0" sz="1400" u="none" cap="none" strike="noStrike">
+        <a:defRPr sz="1400" b="0" i="0" u="none" strike="noStrike" cap="none">
           <a:solidFill>
             <a:srgbClr val="000000"/>
           </a:solidFill>
           <a:latin typeface="Arial"/>
           <a:ea typeface="Arial"/>
           <a:cs typeface="Arial"/>
-          <a:sym typeface="Arial"/>
         </a:defRPr>
       </a:lvl4pPr>
-      <a:lvl5pPr lvl="4" marR="0" rtl="0" algn="l">
+      <a:lvl5pPr marR="0" lvl="4" algn="l" rtl="0">
         <a:lnSpc>
           <a:spcPct val="100000"/>
         </a:lnSpc>
@@ -6094,17 +6188,16 @@
           <a:srgbClr val="000000"/>
         </a:buClr>
         <a:buFont typeface="Arial"/>
-        <a:defRPr b="0" i="0" sz="1400" u="none" cap="none" strike="noStrike">
+        <a:defRPr sz="1400" b="0" i="0" u="none" strike="noStrike" cap="none">
           <a:solidFill>
             <a:srgbClr val="000000"/>
           </a:solidFill>
           <a:latin typeface="Arial"/>
           <a:ea typeface="Arial"/>
           <a:cs typeface="Arial"/>
-          <a:sym typeface="Arial"/>
         </a:defRPr>
       </a:lvl5pPr>
-      <a:lvl6pPr lvl="5" marR="0" rtl="0" algn="l">
+      <a:lvl6pPr marR="0" lvl="5" algn="l" rtl="0">
         <a:lnSpc>
           <a:spcPct val="100000"/>
         </a:lnSpc>
@@ -6118,17 +6211,16 @@
           <a:srgbClr val="000000"/>
         </a:buClr>
         <a:buFont typeface="Arial"/>
-        <a:defRPr b="0" i="0" sz="1400" u="none" cap="none" strike="noStrike">
+        <a:defRPr sz="1400" b="0" i="0" u="none" strike="noStrike" cap="none">
           <a:solidFill>
             <a:srgbClr val="000000"/>
           </a:solidFill>
           <a:latin typeface="Arial"/>
           <a:ea typeface="Arial"/>
           <a:cs typeface="Arial"/>
-          <a:sym typeface="Arial"/>
         </a:defRPr>
       </a:lvl6pPr>
-      <a:lvl7pPr lvl="6" marR="0" rtl="0" algn="l">
+      <a:lvl7pPr marR="0" lvl="6" algn="l" rtl="0">
         <a:lnSpc>
           <a:spcPct val="100000"/>
         </a:lnSpc>
@@ -6142,17 +6234,16 @@
           <a:srgbClr val="000000"/>
         </a:buClr>
         <a:buFont typeface="Arial"/>
-        <a:defRPr b="0" i="0" sz="1400" u="none" cap="none" strike="noStrike">
+        <a:defRPr sz="1400" b="0" i="0" u="none" strike="noStrike" cap="none">
           <a:solidFill>
             <a:srgbClr val="000000"/>
           </a:solidFill>
           <a:latin typeface="Arial"/>
           <a:ea typeface="Arial"/>
           <a:cs typeface="Arial"/>
-          <a:sym typeface="Arial"/>
         </a:defRPr>
       </a:lvl7pPr>
-      <a:lvl8pPr lvl="7" marR="0" rtl="0" algn="l">
+      <a:lvl8pPr marR="0" lvl="7" algn="l" rtl="0">
         <a:lnSpc>
           <a:spcPct val="100000"/>
         </a:lnSpc>
@@ -6166,17 +6257,16 @@
           <a:srgbClr val="000000"/>
         </a:buClr>
         <a:buFont typeface="Arial"/>
-        <a:defRPr b="0" i="0" sz="1400" u="none" cap="none" strike="noStrike">
+        <a:defRPr sz="1400" b="0" i="0" u="none" strike="noStrike" cap="none">
           <a:solidFill>
             <a:srgbClr val="000000"/>
           </a:solidFill>
           <a:latin typeface="Arial"/>
           <a:ea typeface="Arial"/>
           <a:cs typeface="Arial"/>
-          <a:sym typeface="Arial"/>
         </a:defRPr>
       </a:lvl8pPr>
-      <a:lvl9pPr lvl="8" marR="0" rtl="0" algn="l">
+      <a:lvl9pPr marR="0" lvl="8" algn="l" rtl="0">
         <a:lnSpc>
           <a:spcPct val="100000"/>
         </a:lnSpc>
@@ -6190,19 +6280,18 @@
           <a:srgbClr val="000000"/>
         </a:buClr>
         <a:buFont typeface="Arial"/>
-        <a:defRPr b="0" i="0" sz="1400" u="none" cap="none" strike="noStrike">
+        <a:defRPr sz="1400" b="0" i="0" u="none" strike="noStrike" cap="none">
           <a:solidFill>
             <a:srgbClr val="000000"/>
           </a:solidFill>
           <a:latin typeface="Arial"/>
           <a:ea typeface="Arial"/>
           <a:cs typeface="Arial"/>
-          <a:sym typeface="Arial"/>
         </a:defRPr>
       </a:lvl9pPr>
     </p:bodyStyle>
     <p:otherStyle>
-      <a:defPPr lvl="0" marR="0" rtl="0" algn="l">
+      <a:defPPr marR="0" lvl="0" algn="l" rtl="0">
         <a:lnSpc>
           <a:spcPct val="100000"/>
         </a:lnSpc>
@@ -6213,7 +6302,7 @@
           <a:spcPts val="0"/>
         </a:spcAft>
       </a:defPPr>
-      <a:lvl1pPr lvl="0" marR="0" rtl="0" algn="l">
+      <a:lvl1pPr marR="0" lvl="0" algn="l" rtl="0">
         <a:lnSpc>
           <a:spcPct val="100000"/>
         </a:lnSpc>
@@ -6227,17 +6316,16 @@
           <a:srgbClr val="000000"/>
         </a:buClr>
         <a:buFont typeface="Arial"/>
-        <a:defRPr b="0" i="0" sz="1400" u="none" cap="none" strike="noStrike">
+        <a:defRPr sz="1400" b="0" i="0" u="none" strike="noStrike" cap="none">
           <a:solidFill>
             <a:srgbClr val="000000"/>
           </a:solidFill>
           <a:latin typeface="Arial"/>
           <a:ea typeface="Arial"/>
           <a:cs typeface="Arial"/>
-          <a:sym typeface="Arial"/>
         </a:defRPr>
       </a:lvl1pPr>
-      <a:lvl2pPr lvl="1" marR="0" rtl="0" algn="l">
+      <a:lvl2pPr marR="0" lvl="1" algn="l" rtl="0">
         <a:lnSpc>
           <a:spcPct val="100000"/>
         </a:lnSpc>
@@ -6251,17 +6339,16 @@
           <a:srgbClr val="000000"/>
         </a:buClr>
         <a:buFont typeface="Arial"/>
-        <a:defRPr b="0" i="0" sz="1400" u="none" cap="none" strike="noStrike">
+        <a:defRPr sz="1400" b="0" i="0" u="none" strike="noStrike" cap="none">
           <a:solidFill>
             <a:srgbClr val="000000"/>
           </a:solidFill>
           <a:latin typeface="Arial"/>
           <a:ea typeface="Arial"/>
           <a:cs typeface="Arial"/>
-          <a:sym typeface="Arial"/>
         </a:defRPr>
       </a:lvl2pPr>
-      <a:lvl3pPr lvl="2" marR="0" rtl="0" algn="l">
+      <a:lvl3pPr marR="0" lvl="2" algn="l" rtl="0">
         <a:lnSpc>
           <a:spcPct val="100000"/>
         </a:lnSpc>
@@ -6275,17 +6362,16 @@
           <a:srgbClr val="000000"/>
         </a:buClr>
         <a:buFont typeface="Arial"/>
-        <a:defRPr b="0" i="0" sz="1400" u="none" cap="none" strike="noStrike">
+        <a:defRPr sz="1400" b="0" i="0" u="none" strike="noStrike" cap="none">
           <a:solidFill>
             <a:srgbClr val="000000"/>
           </a:solidFill>
           <a:latin typeface="Arial"/>
           <a:ea typeface="Arial"/>
           <a:cs typeface="Arial"/>
-          <a:sym typeface="Arial"/>
         </a:defRPr>
       </a:lvl3pPr>
-      <a:lvl4pPr lvl="3" marR="0" rtl="0" algn="l">
+      <a:lvl4pPr marR="0" lvl="3" algn="l" rtl="0">
         <a:lnSpc>
           <a:spcPct val="100000"/>
         </a:lnSpc>
@@ -6299,17 +6385,16 @@
           <a:srgbClr val="000000"/>
         </a:buClr>
         <a:buFont typeface="Arial"/>
-        <a:defRPr b="0" i="0" sz="1400" u="none" cap="none" strike="noStrike">
+        <a:defRPr sz="1400" b="0" i="0" u="none" strike="noStrike" cap="none">
           <a:solidFill>
             <a:srgbClr val="000000"/>
           </a:solidFill>
           <a:latin typeface="Arial"/>
           <a:ea typeface="Arial"/>
           <a:cs typeface="Arial"/>
-          <a:sym typeface="Arial"/>
         </a:defRPr>
       </a:lvl4pPr>
-      <a:lvl5pPr lvl="4" marR="0" rtl="0" algn="l">
+      <a:lvl5pPr marR="0" lvl="4" algn="l" rtl="0">
         <a:lnSpc>
           <a:spcPct val="100000"/>
         </a:lnSpc>
@@ -6323,17 +6408,16 @@
           <a:srgbClr val="000000"/>
         </a:buClr>
         <a:buFont typeface="Arial"/>
-        <a:defRPr b="0" i="0" sz="1400" u="none" cap="none" strike="noStrike">
+        <a:defRPr sz="1400" b="0" i="0" u="none" strike="noStrike" cap="none">
           <a:solidFill>
             <a:srgbClr val="000000"/>
           </a:solidFill>
           <a:latin typeface="Arial"/>
           <a:ea typeface="Arial"/>
           <a:cs typeface="Arial"/>
-          <a:sym typeface="Arial"/>
         </a:defRPr>
       </a:lvl5pPr>
-      <a:lvl6pPr lvl="5" marR="0" rtl="0" algn="l">
+      <a:lvl6pPr marR="0" lvl="5" algn="l" rtl="0">
         <a:lnSpc>
           <a:spcPct val="100000"/>
         </a:lnSpc>
@@ -6347,17 +6431,16 @@
           <a:srgbClr val="000000"/>
         </a:buClr>
         <a:buFont typeface="Arial"/>
-        <a:defRPr b="0" i="0" sz="1400" u="none" cap="none" strike="noStrike">
+        <a:defRPr sz="1400" b="0" i="0" u="none" strike="noStrike" cap="none">
           <a:solidFill>
             <a:srgbClr val="000000"/>
           </a:solidFill>
           <a:latin typeface="Arial"/>
           <a:ea typeface="Arial"/>
           <a:cs typeface="Arial"/>
-          <a:sym typeface="Arial"/>
         </a:defRPr>
       </a:lvl6pPr>
-      <a:lvl7pPr lvl="6" marR="0" rtl="0" algn="l">
+      <a:lvl7pPr marR="0" lvl="6" algn="l" rtl="0">
         <a:lnSpc>
           <a:spcPct val="100000"/>
         </a:lnSpc>
@@ -6371,17 +6454,16 @@
           <a:srgbClr val="000000"/>
         </a:buClr>
         <a:buFont typeface="Arial"/>
-        <a:defRPr b="0" i="0" sz="1400" u="none" cap="none" strike="noStrike">
+        <a:defRPr sz="1400" b="0" i="0" u="none" strike="noStrike" cap="none">
           <a:solidFill>
             <a:srgbClr val="000000"/>
           </a:solidFill>
           <a:latin typeface="Arial"/>
           <a:ea typeface="Arial"/>
           <a:cs typeface="Arial"/>
-          <a:sym typeface="Arial"/>
         </a:defRPr>
       </a:lvl7pPr>
-      <a:lvl8pPr lvl="7" marR="0" rtl="0" algn="l">
+      <a:lvl8pPr marR="0" lvl="7" algn="l" rtl="0">
         <a:lnSpc>
           <a:spcPct val="100000"/>
         </a:lnSpc>
@@ -6395,17 +6477,16 @@
           <a:srgbClr val="000000"/>
         </a:buClr>
         <a:buFont typeface="Arial"/>
-        <a:defRPr b="0" i="0" sz="1400" u="none" cap="none" strike="noStrike">
+        <a:defRPr sz="1400" b="0" i="0" u="none" strike="noStrike" cap="none">
           <a:solidFill>
             <a:srgbClr val="000000"/>
           </a:solidFill>
           <a:latin typeface="Arial"/>
           <a:ea typeface="Arial"/>
           <a:cs typeface="Arial"/>
-          <a:sym typeface="Arial"/>
         </a:defRPr>
       </a:lvl8pPr>
-      <a:lvl9pPr lvl="8" marR="0" rtl="0" algn="l">
+      <a:lvl9pPr marR="0" lvl="8" algn="l" rtl="0">
         <a:lnSpc>
           <a:spcPct val="100000"/>
         </a:lnSpc>
@@ -6419,14 +6500,13 @@
           <a:srgbClr val="000000"/>
         </a:buClr>
         <a:buFont typeface="Arial"/>
-        <a:defRPr b="0" i="0" sz="1400" u="none" cap="none" strike="noStrike">
+        <a:defRPr sz="1400" b="0" i="0" u="none" strike="noStrike" cap="none">
           <a:solidFill>
             <a:srgbClr val="000000"/>
           </a:solidFill>
           <a:latin typeface="Arial"/>
           <a:ea typeface="Arial"/>
           <a:cs typeface="Arial"/>
-          <a:sym typeface="Arial"/>
         </a:defRPr>
       </a:lvl9pPr>
     </p:otherStyle>
@@ -6435,15 +6515,15 @@
 </file>
 
 <file path=ppt/slides/slide1.xml><?xml version="1.0" encoding="utf-8"?>
-<p:sld xmlns:a="http://schemas.openxmlformats.org/drawingml/2006/main" xmlns:r="http://schemas.openxmlformats.org/officeDocument/2006/relationships" xmlns:mc="http://schemas.openxmlformats.org/markup-compatibility/2006" xmlns:mv="urn:schemas-microsoft-com:mac:vml" xmlns:p="http://schemas.openxmlformats.org/presentationml/2006/main" xmlns:c="http://schemas.openxmlformats.org/drawingml/2006/chart" xmlns:dgm="http://schemas.openxmlformats.org/drawingml/2006/diagram" xmlns:o="urn:schemas-microsoft-com:office:office" xmlns:v="urn:schemas-microsoft-com:vml" xmlns:pvml="urn:schemas-microsoft-com:office:powerpoint" xmlns:com="http://schemas.openxmlformats.org/drawingml/2006/compatibility" xmlns:p14="http://schemas.microsoft.com/office/powerpoint/2010/main" xmlns:p15="http://schemas.microsoft.com/office/powerpoint/2012/main" xmlns:ahyp="http://schemas.microsoft.com/office/drawing/2018/hyperlinkcolor">
-  <p:cSld>
+<p:sld xmlns:a="http://schemas.openxmlformats.org/drawingml/2006/main" xmlns:r="http://schemas.openxmlformats.org/officeDocument/2006/relationships" xmlns:p="http://schemas.openxmlformats.org/presentationml/2006/main" xmlns:m="http://schemas.openxmlformats.org/officeDocument/2006/math" xmlns:w="http://schemas.openxmlformats.org/wordprocessingml/2006/main" xmlns:mc="http://schemas.openxmlformats.org/markup-compatibility/2006" showMasterPhAnim="0" showMasterSp="1" show="1">
+  <p:cSld name="">
     <p:spTree>
       <p:nvGrpSpPr>
-        <p:cNvPr id="53" name="Shape 53"/>
+        <p:cNvPr id="1" name=""/>
         <p:cNvGrpSpPr/>
         <p:nvPr/>
       </p:nvGrpSpPr>
-      <p:grpSpPr>
+      <p:grpSpPr bwMode="auto">
         <a:xfrm>
           <a:off x="0" y="0"/>
           <a:ext cx="0" cy="0"/>
@@ -6453,13 +6533,13 @@
       </p:grpSpPr>
       <p:sp>
         <p:nvSpPr>
-          <p:cNvPr id="54" name="Google Shape;54;p13"/>
+          <p:cNvPr id="1735508370" name="Google Shape;54;p13"/>
           <p:cNvSpPr txBox="1"/>
           <p:nvPr>
             <p:ph type="ctrTitle"/>
           </p:nvPr>
         </p:nvSpPr>
-        <p:spPr>
+        <p:spPr bwMode="auto">
           <a:xfrm>
             <a:off x="311708" y="-721975"/>
             <a:ext cx="8520600" cy="2052600"/>
@@ -6469,19 +6549,20 @@
           </a:prstGeom>
         </p:spPr>
         <p:txBody>
-          <a:bodyPr anchorCtr="0" anchor="b" bIns="91425" lIns="91425" spcFirstLastPara="1" rIns="91425" wrap="square" tIns="91425">
+          <a:bodyPr spcFirstLastPara="1" wrap="square" lIns="91425" tIns="91425" rIns="91425" bIns="91425" anchor="b" anchorCtr="0">
             <a:normAutofit/>
           </a:bodyPr>
           <a:lstStyle/>
           <a:p>
-            <a:pPr indent="0" lvl="0" marL="0" rtl="0" algn="ctr">
-              <a:spcBef>
-                <a:spcPts val="0"/>
-              </a:spcBef>
-              <a:spcAft>
-                <a:spcPts val="0"/>
-              </a:spcAft>
-              <a:buNone/>
+            <a:pPr marL="0" lvl="0" indent="0" algn="ctr" rtl="0">
+              <a:spcBef>
+                <a:spcPts val="0"/>
+              </a:spcBef>
+              <a:spcAft>
+                <a:spcPts val="0"/>
+              </a:spcAft>
+              <a:buNone/>
+              <a:defRPr/>
             </a:pPr>
             <a:r>
               <a:rPr lang="en" sz="3600"/>
@@ -6493,116 +6574,11 @@
       </p:sp>
       <p:sp>
         <p:nvSpPr>
-          <p:cNvPr id="55" name="Google Shape;55;p13"/>
-          <p:cNvSpPr txBox="1"/>
-          <p:nvPr>
-            <p:ph idx="1" type="subTitle"/>
-          </p:nvPr>
-        </p:nvSpPr>
-        <p:spPr>
-          <a:xfrm>
-            <a:off x="353800" y="1921875"/>
-            <a:ext cx="8520600" cy="792600"/>
-          </a:xfrm>
-          <a:prstGeom prst="rect">
-            <a:avLst/>
-          </a:prstGeom>
-          <a:ln cap="flat" cmpd="sng" w="9525">
-            <a:solidFill>
-              <a:schemeClr val="dk1"/>
-            </a:solidFill>
-            <a:prstDash val="solid"/>
-            <a:round/>
-            <a:headEnd len="sm" w="sm" type="none"/>
-            <a:tailEnd len="sm" w="sm" type="none"/>
-          </a:ln>
-        </p:spPr>
-        <p:txBody>
-          <a:bodyPr anchorCtr="0" anchor="t" bIns="91425" lIns="91425" spcFirstLastPara="1" rIns="91425" wrap="square" tIns="91425">
-            <a:normAutofit fontScale="55000" lnSpcReduction="20000"/>
-          </a:bodyPr>
-          <a:lstStyle/>
-          <a:p>
-            <a:pPr indent="0" lvl="0" marL="0" rtl="0" algn="r">
-              <a:spcBef>
-                <a:spcPts val="0"/>
-              </a:spcBef>
-              <a:spcAft>
-                <a:spcPts val="0"/>
-              </a:spcAft>
-              <a:buNone/>
-            </a:pPr>
-            <a:r>
-              <a:rPr lang="en">
-                <a:solidFill>
-                  <a:schemeClr val="dk1"/>
-                </a:solidFill>
-              </a:rPr>
-              <a:t>Presented by - </a:t>
-            </a:r>
-            <a:endParaRPr>
-              <a:solidFill>
-                <a:schemeClr val="dk1"/>
-              </a:solidFill>
-            </a:endParaRPr>
-          </a:p>
-          <a:p>
-            <a:pPr indent="0" lvl="0" marL="0" rtl="0" algn="r">
-              <a:spcBef>
-                <a:spcPts val="0"/>
-              </a:spcBef>
-              <a:spcAft>
-                <a:spcPts val="0"/>
-              </a:spcAft>
-              <a:buNone/>
-            </a:pPr>
-            <a:r>
-              <a:rPr lang="en">
-                <a:solidFill>
-                  <a:schemeClr val="dk1"/>
-                </a:solidFill>
-              </a:rPr>
-              <a:t>Sayooj S</a:t>
-            </a:r>
-            <a:endParaRPr>
-              <a:solidFill>
-                <a:schemeClr val="dk1"/>
-              </a:solidFill>
-            </a:endParaRPr>
-          </a:p>
-          <a:p>
-            <a:pPr indent="0" lvl="0" marL="0" rtl="0" algn="r">
-              <a:spcBef>
-                <a:spcPts val="0"/>
-              </a:spcBef>
-              <a:spcAft>
-                <a:spcPts val="0"/>
-              </a:spcAft>
-              <a:buNone/>
-            </a:pPr>
-            <a:r>
-              <a:rPr lang="en">
-                <a:solidFill>
-                  <a:schemeClr val="dk1"/>
-                </a:solidFill>
-              </a:rPr>
-              <a:t>MD Sameer Ahmed</a:t>
-            </a:r>
-            <a:endParaRPr>
-              <a:solidFill>
-                <a:schemeClr val="dk1"/>
-              </a:solidFill>
-            </a:endParaRPr>
-          </a:p>
-        </p:txBody>
-      </p:sp>
-      <p:sp>
-        <p:nvSpPr>
-          <p:cNvPr id="56" name="Google Shape;56;p13"/>
+          <p:cNvPr id="1694113958" name="Google Shape;56;p13"/>
           <p:cNvSpPr txBox="1"/>
           <p:nvPr/>
         </p:nvSpPr>
-        <p:spPr>
+        <p:spPr bwMode="auto">
           <a:xfrm>
             <a:off x="2266500" y="3157675"/>
             <a:ext cx="5185500" cy="547200"/>
@@ -6616,33 +6592,86 @@
           </a:ln>
         </p:spPr>
         <p:txBody>
-          <a:bodyPr anchorCtr="0" anchor="t" bIns="91425" lIns="91425" spcFirstLastPara="1" rIns="91425" wrap="square" tIns="91425">
+          <a:bodyPr spcFirstLastPara="1" wrap="square" lIns="91425" tIns="91425" rIns="91425" bIns="91425" anchor="t" anchorCtr="0">
             <a:noAutofit/>
           </a:bodyPr>
           <a:lstStyle/>
           <a:p>
-            <a:pPr indent="0" lvl="0" marL="0" rtl="0" algn="ctr">
-              <a:spcBef>
-                <a:spcPts val="0"/>
-              </a:spcBef>
-              <a:spcAft>
-                <a:spcPts val="0"/>
-              </a:spcAft>
-              <a:buNone/>
+            <a:pPr marL="0" lvl="0" indent="0" algn="ctr" rtl="0">
+              <a:spcBef>
+                <a:spcPts val="0"/>
+              </a:spcBef>
+              <a:spcAft>
+                <a:spcPts val="0"/>
+              </a:spcAft>
+              <a:buNone/>
+              <a:defRPr/>
             </a:pPr>
             <a:r>
-              <a:rPr b="1" lang="en" sz="1800">
+              <a:rPr lang="en" sz="1800" b="1">
                 <a:solidFill>
                   <a:schemeClr val="dk1"/>
                 </a:solidFill>
               </a:rPr>
               <a:t>KL UNIVERSITY, AZIZNAGAR</a:t>
             </a:r>
-            <a:endParaRPr b="1" sz="1800">
+            <a:endParaRPr sz="1800" b="1">
               <a:solidFill>
                 <a:schemeClr val="dk1"/>
               </a:solidFill>
             </a:endParaRPr>
+          </a:p>
+        </p:txBody>
+      </p:sp>
+      <p:sp>
+        <p:nvSpPr>
+          <p:cNvPr id="1457664952" name=""/>
+          <p:cNvSpPr txBox="1"/>
+          <p:nvPr/>
+        </p:nvSpPr>
+        <p:spPr bwMode="auto">
+          <a:xfrm rot="0" flipH="0" flipV="0">
+            <a:off x="2075558" y="1647264"/>
+            <a:ext cx="6183395" cy="1006199"/>
+          </a:xfrm>
+          <a:prstGeom prst="rect">
+            <a:avLst/>
+          </a:prstGeom>
+          <a:noFill/>
+        </p:spPr>
+        <p:txBody>
+          <a:bodyPr vertOverflow="overflow" horzOverflow="overflow" vert="horz" wrap="square" lIns="91440" tIns="45720" rIns="91440" bIns="45720" numCol="1" spcCol="0" rtlCol="0" fromWordArt="0" anchor="t" anchorCtr="0" forceAA="0" upright="0" compatLnSpc="0">
+            <a:spAutoFit/>
+          </a:bodyPr>
+          <a:p>
+            <a:pPr algn="r">
+              <a:defRPr/>
+            </a:pPr>
+            <a:r>
+              <a:rPr sz="2000"/>
+              <a:t>Presented by - </a:t>
+            </a:r>
+            <a:endParaRPr sz="2000"/>
+          </a:p>
+          <a:p>
+            <a:pPr algn="r">
+              <a:defRPr/>
+            </a:pPr>
+            <a:r>
+              <a:rPr sz="2000"/>
+              <a:t>Sayooj S</a:t>
+            </a:r>
+            <a:endParaRPr sz="2000"/>
+          </a:p>
+          <a:p>
+            <a:pPr algn="r">
+              <a:defRPr/>
+            </a:pPr>
+            <a:r>
+              <a:rPr sz="2000"/>
+              <a:t>MD Sameer Ahmed</a:t>
+            </a:r>
+            <a:endParaRPr sz="2000"/>
           </a:p>
         </p:txBody>
       </p:sp>
@@ -6651,19 +6680,27 @@
   <p:clrMapOvr>
     <a:masterClrMapping/>
   </p:clrMapOvr>
+  <mc:AlternateContent xmlns:mc="http://schemas.openxmlformats.org/markup-compatibility/2006">
+    <mc:Choice xmlns:p159="http://schemas.microsoft.com/office/powerpoint/2015/09/main" xmlns:p14="http://schemas.microsoft.com/office/powerpoint/2010/main" Requires="p159">
+      <p:transition p14:dur="500" advClick="1"/>
+    </mc:Choice>
+    <mc:Fallback>
+      <p:transition advClick="1"/>
+    </mc:Fallback>
+  </mc:AlternateContent>
 </p:sld>
 </file>
 
 <file path=ppt/slides/slide10.xml><?xml version="1.0" encoding="utf-8"?>
-<p:sld xmlns:a="http://schemas.openxmlformats.org/drawingml/2006/main" xmlns:r="http://schemas.openxmlformats.org/officeDocument/2006/relationships" xmlns:mc="http://schemas.openxmlformats.org/markup-compatibility/2006" xmlns:mv="urn:schemas-microsoft-com:mac:vml" xmlns:p="http://schemas.openxmlformats.org/presentationml/2006/main" xmlns:c="http://schemas.openxmlformats.org/drawingml/2006/chart" xmlns:dgm="http://schemas.openxmlformats.org/drawingml/2006/diagram" xmlns:o="urn:schemas-microsoft-com:office:office" xmlns:v="urn:schemas-microsoft-com:vml" xmlns:pvml="urn:schemas-microsoft-com:office:powerpoint" xmlns:com="http://schemas.openxmlformats.org/drawingml/2006/compatibility" xmlns:p14="http://schemas.microsoft.com/office/powerpoint/2010/main" xmlns:p15="http://schemas.microsoft.com/office/powerpoint/2012/main" xmlns:ahyp="http://schemas.microsoft.com/office/drawing/2018/hyperlinkcolor">
-  <p:cSld>
+<p:sld xmlns:a="http://schemas.openxmlformats.org/drawingml/2006/main" xmlns:r="http://schemas.openxmlformats.org/officeDocument/2006/relationships" xmlns:p="http://schemas.openxmlformats.org/presentationml/2006/main" xmlns:m="http://schemas.openxmlformats.org/officeDocument/2006/math" xmlns:w="http://schemas.openxmlformats.org/wordprocessingml/2006/main" xmlns:mc="http://schemas.openxmlformats.org/markup-compatibility/2006" showMasterPhAnim="0" showMasterSp="1" show="1">
+  <p:cSld name="">
     <p:spTree>
       <p:nvGrpSpPr>
-        <p:cNvPr id="108" name="Shape 108"/>
+        <p:cNvPr id="1" name=""/>
         <p:cNvGrpSpPr/>
         <p:nvPr/>
       </p:nvGrpSpPr>
-      <p:grpSpPr>
+      <p:grpSpPr bwMode="auto">
         <a:xfrm>
           <a:off x="0" y="0"/>
           <a:ext cx="0" cy="0"/>
@@ -6673,13 +6710,13 @@
       </p:grpSpPr>
       <p:sp>
         <p:nvSpPr>
-          <p:cNvPr id="109" name="Google Shape;109;p22"/>
+          <p:cNvPr id="753517299" name="Google Shape;109;p22"/>
           <p:cNvSpPr txBox="1"/>
           <p:nvPr>
             <p:ph type="title"/>
           </p:nvPr>
         </p:nvSpPr>
-        <p:spPr>
+        <p:spPr bwMode="auto">
           <a:xfrm>
             <a:off x="311700" y="445025"/>
             <a:ext cx="8520600" cy="572700"/>
@@ -6689,29 +6726,29 @@
           </a:prstGeom>
         </p:spPr>
         <p:txBody>
-          <a:bodyPr anchorCtr="0" anchor="t" bIns="91425" lIns="91425" spcFirstLastPara="1" rIns="91425" wrap="square" tIns="91425">
+          <a:bodyPr spcFirstLastPara="1" wrap="square" lIns="91425" tIns="91425" rIns="91425" bIns="91425" anchor="t" anchorCtr="0">
             <a:noAutofit/>
           </a:bodyPr>
           <a:lstStyle/>
           <a:p>
-            <a:pPr indent="0" lvl="0" marL="0" rtl="0" algn="l">
-              <a:spcBef>
-                <a:spcPts val="0"/>
-              </a:spcBef>
-              <a:spcAft>
-                <a:spcPts val="0"/>
-              </a:spcAft>
-              <a:buNone/>
+            <a:pPr marL="0" lvl="0" indent="0" algn="l" rtl="0">
+              <a:spcBef>
+                <a:spcPts val="0"/>
+              </a:spcBef>
+              <a:spcAft>
+                <a:spcPts val="0"/>
+              </a:spcAft>
+              <a:buNone/>
+              <a:defRPr/>
             </a:pPr>
             <a:r>
-              <a:rPr b="1" lang="en" sz="3600">
+              <a:rPr lang="en" sz="3600" b="1">
                 <a:highlight>
                   <a:schemeClr val="lt1"/>
                 </a:highlight>
                 <a:latin typeface="Courier New"/>
                 <a:ea typeface="Courier New"/>
                 <a:cs typeface="Courier New"/>
-                <a:sym typeface="Courier New"/>
               </a:rPr>
               <a:t>DISADVANTAGES</a:t>
             </a:r>
@@ -6725,15 +6762,15 @@
       </p:sp>
       <p:sp>
         <p:nvSpPr>
-          <p:cNvPr id="110" name="Google Shape;110;p22"/>
+          <p:cNvPr id="1426921400" name="Google Shape;110;p22"/>
           <p:cNvSpPr txBox="1"/>
           <p:nvPr>
-            <p:ph idx="1" type="body"/>
+            <p:ph type="body" idx="1"/>
           </p:nvPr>
         </p:nvSpPr>
-        <p:spPr>
+        <p:spPr bwMode="auto">
           <a:xfrm>
-            <a:off x="213475" y="1313850"/>
+            <a:off x="213475" y="1313849"/>
             <a:ext cx="8520600" cy="3416400"/>
           </a:xfrm>
           <a:prstGeom prst="rect">
@@ -6741,12 +6778,12 @@
           </a:prstGeom>
         </p:spPr>
         <p:txBody>
-          <a:bodyPr anchorCtr="0" anchor="t" bIns="91425" lIns="91425" spcFirstLastPara="1" rIns="91425" wrap="square" tIns="91425">
+          <a:bodyPr spcFirstLastPara="1" wrap="square" lIns="91425" tIns="91425" rIns="91425" bIns="91425" anchor="t" anchorCtr="0">
             <a:noAutofit/>
           </a:bodyPr>
           <a:lstStyle/>
           <a:p>
-            <a:pPr indent="0" lvl="0" marL="0" rtl="0" algn="l">
+            <a:pPr marL="0" lvl="0" indent="0" algn="l" rtl="0">
               <a:lnSpc>
                 <a:spcPct val="135714"/>
               </a:lnSpc>
@@ -6762,6 +6799,7 @@
               <a:buSzPts val="1100"/>
               <a:buFont typeface="Arial"/>
               <a:buNone/>
+              <a:defRPr/>
             </a:pPr>
             <a:r>
               <a:rPr lang="en" sz="2000">
@@ -6774,12 +6812,11 @@
                 <a:latin typeface="Courier New"/>
                 <a:ea typeface="Courier New"/>
                 <a:cs typeface="Courier New"/>
-                <a:sym typeface="Courier New"/>
               </a:rPr>
               <a:t>- </a:t>
             </a:r>
             <a:r>
-              <a:rPr b="1" lang="en" sz="2000">
+              <a:rPr lang="en" sz="2000" b="1">
                 <a:solidFill>
                   <a:schemeClr val="dk1"/>
                 </a:solidFill>
@@ -6789,7 +6826,6 @@
                 <a:latin typeface="Courier New"/>
                 <a:ea typeface="Courier New"/>
                 <a:cs typeface="Courier New"/>
-                <a:sym typeface="Courier New"/>
               </a:rPr>
               <a:t>Area Overhead:</a:t>
             </a:r>
@@ -6804,7 +6840,6 @@
                 <a:latin typeface="Courier New"/>
                 <a:ea typeface="Courier New"/>
                 <a:cs typeface="Courier New"/>
-                <a:sym typeface="Courier New"/>
               </a:rPr>
               <a:t> Duplicate control path logic</a:t>
             </a:r>
@@ -6818,11 +6853,10 @@
               <a:latin typeface="Courier New"/>
               <a:ea typeface="Courier New"/>
               <a:cs typeface="Courier New"/>
-              <a:sym typeface="Courier New"/>
             </a:endParaRPr>
           </a:p>
           <a:p>
-            <a:pPr indent="0" lvl="0" marL="0" rtl="0" algn="l">
+            <a:pPr marL="0" lvl="0" indent="0" algn="l" rtl="0">
               <a:lnSpc>
                 <a:spcPct val="135714"/>
               </a:lnSpc>
@@ -6838,6 +6872,7 @@
               <a:buSzPts val="1100"/>
               <a:buFont typeface="Arial"/>
               <a:buNone/>
+              <a:defRPr/>
             </a:pPr>
             <a:r>
               <a:rPr lang="en" sz="2000">
@@ -6850,12 +6885,11 @@
                 <a:latin typeface="Courier New"/>
                 <a:ea typeface="Courier New"/>
                 <a:cs typeface="Courier New"/>
-                <a:sym typeface="Courier New"/>
               </a:rPr>
               <a:t>- </a:t>
             </a:r>
             <a:r>
-              <a:rPr b="1" lang="en" sz="2000">
+              <a:rPr lang="en" sz="2000" b="1">
                 <a:solidFill>
                   <a:schemeClr val="dk1"/>
                 </a:solidFill>
@@ -6865,7 +6899,6 @@
                 <a:latin typeface="Courier New"/>
                 <a:ea typeface="Courier New"/>
                 <a:cs typeface="Courier New"/>
-                <a:sym typeface="Courier New"/>
               </a:rPr>
               <a:t>Complexity:</a:t>
             </a:r>
@@ -6880,7 +6913,6 @@
                 <a:latin typeface="Courier New"/>
                 <a:ea typeface="Courier New"/>
                 <a:cs typeface="Courier New"/>
-                <a:sym typeface="Courier New"/>
               </a:rPr>
               <a:t> Mode switching introduces timing considerations</a:t>
             </a:r>
@@ -6894,11 +6926,10 @@
               <a:latin typeface="Courier New"/>
               <a:ea typeface="Courier New"/>
               <a:cs typeface="Courier New"/>
-              <a:sym typeface="Courier New"/>
             </a:endParaRPr>
           </a:p>
           <a:p>
-            <a:pPr indent="0" lvl="0" marL="0" rtl="0" algn="l">
+            <a:pPr marL="0" lvl="0" indent="0" algn="l" rtl="0">
               <a:lnSpc>
                 <a:spcPct val="135714"/>
               </a:lnSpc>
@@ -6914,6 +6945,7 @@
               <a:buSzPts val="1100"/>
               <a:buFont typeface="Arial"/>
               <a:buNone/>
+              <a:defRPr/>
             </a:pPr>
             <a:r>
               <a:rPr lang="en" sz="2000">
@@ -6926,12 +6958,11 @@
                 <a:latin typeface="Courier New"/>
                 <a:ea typeface="Courier New"/>
                 <a:cs typeface="Courier New"/>
-                <a:sym typeface="Courier New"/>
               </a:rPr>
               <a:t>- </a:t>
             </a:r>
             <a:r>
-              <a:rPr b="1" lang="en" sz="2000">
+              <a:rPr lang="en" sz="2000" b="1">
                 <a:solidFill>
                   <a:schemeClr val="dk1"/>
                 </a:solidFill>
@@ -6941,83 +6972,6 @@
                 <a:latin typeface="Courier New"/>
                 <a:ea typeface="Courier New"/>
                 <a:cs typeface="Courier New"/>
-                <a:sym typeface="Courier New"/>
-              </a:rPr>
-              <a:t>Latency:</a:t>
-            </a:r>
-            <a:r>
-              <a:rPr lang="en" sz="2000">
-                <a:solidFill>
-                  <a:schemeClr val="dk1"/>
-                </a:solidFill>
-                <a:highlight>
-                  <a:srgbClr val="FFFFFF"/>
-                </a:highlight>
-                <a:latin typeface="Courier New"/>
-                <a:ea typeface="Courier New"/>
-                <a:cs typeface="Courier New"/>
-                <a:sym typeface="Courier New"/>
-              </a:rPr>
-              <a:t> Low-power mode adds pipeline register delay</a:t>
-            </a:r>
-            <a:endParaRPr sz="2000">
-              <a:solidFill>
-                <a:schemeClr val="dk1"/>
-              </a:solidFill>
-              <a:highlight>
-                <a:srgbClr val="FFFFFF"/>
-              </a:highlight>
-              <a:latin typeface="Courier New"/>
-              <a:ea typeface="Courier New"/>
-              <a:cs typeface="Courier New"/>
-              <a:sym typeface="Courier New"/>
-            </a:endParaRPr>
-          </a:p>
-          <a:p>
-            <a:pPr indent="0" lvl="0" marL="0" rtl="0" algn="l">
-              <a:lnSpc>
-                <a:spcPct val="135714"/>
-              </a:lnSpc>
-              <a:spcBef>
-                <a:spcPts val="0"/>
-              </a:spcBef>
-              <a:spcAft>
-                <a:spcPts val="0"/>
-              </a:spcAft>
-              <a:buClr>
-                <a:schemeClr val="dk1"/>
-              </a:buClr>
-              <a:buSzPts val="1100"/>
-              <a:buFont typeface="Arial"/>
-              <a:buNone/>
-            </a:pPr>
-            <a:r>
-              <a:rPr lang="en" sz="2000">
-                <a:solidFill>
-                  <a:schemeClr val="dk1"/>
-                </a:solidFill>
-                <a:highlight>
-                  <a:srgbClr val="FFFFFF"/>
-                </a:highlight>
-                <a:latin typeface="Courier New"/>
-                <a:ea typeface="Courier New"/>
-                <a:cs typeface="Courier New"/>
-                <a:sym typeface="Courier New"/>
-              </a:rPr>
-              <a:t>- </a:t>
-            </a:r>
-            <a:r>
-              <a:rPr b="1" lang="en" sz="2000">
-                <a:solidFill>
-                  <a:schemeClr val="dk1"/>
-                </a:solidFill>
-                <a:highlight>
-                  <a:srgbClr val="FFFFFF"/>
-                </a:highlight>
-                <a:latin typeface="Courier New"/>
-                <a:ea typeface="Courier New"/>
-                <a:cs typeface="Courier New"/>
-                <a:sym typeface="Courier New"/>
               </a:rPr>
               <a:t>Design Effort:</a:t>
             </a:r>
@@ -7032,7 +6986,6 @@
                 <a:latin typeface="Courier New"/>
                 <a:ea typeface="Courier New"/>
                 <a:cs typeface="Courier New"/>
-                <a:sym typeface="Courier New"/>
               </a:rPr>
               <a:t> Need to maintain two control units</a:t>
             </a:r>
@@ -7046,11 +6999,10 @@
               <a:latin typeface="Courier New"/>
               <a:ea typeface="Courier New"/>
               <a:cs typeface="Courier New"/>
-              <a:sym typeface="Courier New"/>
             </a:endParaRPr>
           </a:p>
           <a:p>
-            <a:pPr indent="0" lvl="0" marL="0" rtl="0" algn="l">
+            <a:pPr marL="0" lvl="0" indent="0" algn="l" rtl="0">
               <a:spcBef>
                 <a:spcPts val="0"/>
               </a:spcBef>
@@ -7058,10 +7010,8 @@
                 <a:spcPts val="1200"/>
               </a:spcAft>
               <a:buNone/>
+              <a:defRPr/>
             </a:pPr>
-            <a:r>
-              <a:t/>
-            </a:r>
             <a:endParaRPr sz="2000">
               <a:solidFill>
                 <a:schemeClr val="dk1"/>
@@ -7072,7 +7022,6 @@
               <a:latin typeface="Courier New"/>
               <a:ea typeface="Courier New"/>
               <a:cs typeface="Courier New"/>
-              <a:sym typeface="Courier New"/>
             </a:endParaRPr>
           </a:p>
         </p:txBody>
@@ -7082,19 +7031,27 @@
   <p:clrMapOvr>
     <a:masterClrMapping/>
   </p:clrMapOvr>
+  <mc:AlternateContent xmlns:mc="http://schemas.openxmlformats.org/markup-compatibility/2006">
+    <mc:Choice xmlns:p159="http://schemas.microsoft.com/office/powerpoint/2015/09/main" xmlns:p14="http://schemas.microsoft.com/office/powerpoint/2010/main" Requires="p159">
+      <p:transition p14:dur="500" advClick="1"/>
+    </mc:Choice>
+    <mc:Fallback>
+      <p:transition advClick="1"/>
+    </mc:Fallback>
+  </mc:AlternateContent>
 </p:sld>
 </file>
 
 <file path=ppt/slides/slide11.xml><?xml version="1.0" encoding="utf-8"?>
-<p:sld xmlns:a="http://schemas.openxmlformats.org/drawingml/2006/main" xmlns:r="http://schemas.openxmlformats.org/officeDocument/2006/relationships" xmlns:mc="http://schemas.openxmlformats.org/markup-compatibility/2006" xmlns:mv="urn:schemas-microsoft-com:mac:vml" xmlns:p="http://schemas.openxmlformats.org/presentationml/2006/main" xmlns:c="http://schemas.openxmlformats.org/drawingml/2006/chart" xmlns:dgm="http://schemas.openxmlformats.org/drawingml/2006/diagram" xmlns:o="urn:schemas-microsoft-com:office:office" xmlns:v="urn:schemas-microsoft-com:vml" xmlns:pvml="urn:schemas-microsoft-com:office:powerpoint" xmlns:com="http://schemas.openxmlformats.org/drawingml/2006/compatibility" xmlns:p14="http://schemas.microsoft.com/office/powerpoint/2010/main" xmlns:p15="http://schemas.microsoft.com/office/powerpoint/2012/main" xmlns:ahyp="http://schemas.microsoft.com/office/drawing/2018/hyperlinkcolor">
-  <p:cSld>
+<p:sld xmlns:a="http://schemas.openxmlformats.org/drawingml/2006/main" xmlns:r="http://schemas.openxmlformats.org/officeDocument/2006/relationships" xmlns:p="http://schemas.openxmlformats.org/presentationml/2006/main" xmlns:m="http://schemas.openxmlformats.org/officeDocument/2006/math" xmlns:w="http://schemas.openxmlformats.org/wordprocessingml/2006/main" xmlns:mc="http://schemas.openxmlformats.org/markup-compatibility/2006" showMasterPhAnim="0" showMasterSp="1" show="1">
+  <p:cSld name="">
     <p:spTree>
       <p:nvGrpSpPr>
-        <p:cNvPr id="114" name="Shape 114"/>
+        <p:cNvPr id="1" name=""/>
         <p:cNvGrpSpPr/>
         <p:nvPr/>
       </p:nvGrpSpPr>
-      <p:grpSpPr>
+      <p:grpSpPr bwMode="auto">
         <a:xfrm>
           <a:off x="0" y="0"/>
           <a:ext cx="0" cy="0"/>
@@ -7104,13 +7061,13 @@
       </p:grpSpPr>
       <p:sp>
         <p:nvSpPr>
-          <p:cNvPr id="115" name="Google Shape;115;p23"/>
+          <p:cNvPr id="1824890258" name="Google Shape;115;p23"/>
           <p:cNvSpPr txBox="1"/>
           <p:nvPr>
             <p:ph type="title"/>
           </p:nvPr>
         </p:nvSpPr>
-        <p:spPr>
+        <p:spPr bwMode="auto">
           <a:xfrm>
             <a:off x="311700" y="445025"/>
             <a:ext cx="8520600" cy="572700"/>
@@ -7120,29 +7077,29 @@
           </a:prstGeom>
         </p:spPr>
         <p:txBody>
-          <a:bodyPr anchorCtr="0" anchor="t" bIns="91425" lIns="91425" spcFirstLastPara="1" rIns="91425" wrap="square" tIns="91425">
+          <a:bodyPr spcFirstLastPara="1" wrap="square" lIns="91425" tIns="91425" rIns="91425" bIns="91425" anchor="t" anchorCtr="0">
             <a:noAutofit/>
           </a:bodyPr>
           <a:lstStyle/>
           <a:p>
-            <a:pPr indent="0" lvl="0" marL="0" rtl="0" algn="l">
-              <a:spcBef>
-                <a:spcPts val="0"/>
-              </a:spcBef>
-              <a:spcAft>
-                <a:spcPts val="0"/>
-              </a:spcAft>
-              <a:buNone/>
+            <a:pPr marL="0" lvl="0" indent="0" algn="l" rtl="0">
+              <a:spcBef>
+                <a:spcPts val="0"/>
+              </a:spcBef>
+              <a:spcAft>
+                <a:spcPts val="0"/>
+              </a:spcAft>
+              <a:buNone/>
+              <a:defRPr/>
             </a:pPr>
             <a:r>
-              <a:rPr b="1" lang="en" sz="3600">
+              <a:rPr lang="en" sz="3600" b="1">
                 <a:highlight>
                   <a:schemeClr val="lt1"/>
                 </a:highlight>
                 <a:latin typeface="Courier New"/>
                 <a:ea typeface="Courier New"/>
                 <a:cs typeface="Courier New"/>
-                <a:sym typeface="Courier New"/>
               </a:rPr>
               <a:t>CONCLUSION</a:t>
             </a:r>
@@ -7156,15 +7113,15 @@
       </p:sp>
       <p:sp>
         <p:nvSpPr>
-          <p:cNvPr id="116" name="Google Shape;116;p23"/>
+          <p:cNvPr id="560200426" name="Google Shape;116;p23"/>
           <p:cNvSpPr txBox="1"/>
           <p:nvPr>
-            <p:ph idx="1" type="body"/>
+            <p:ph type="body" idx="1"/>
           </p:nvPr>
         </p:nvSpPr>
-        <p:spPr>
+        <p:spPr bwMode="auto">
           <a:xfrm>
-            <a:off x="213475" y="1313850"/>
+            <a:off x="213475" y="1313849"/>
             <a:ext cx="8768400" cy="3416400"/>
           </a:xfrm>
           <a:prstGeom prst="rect">
@@ -7172,12 +7129,12 @@
           </a:prstGeom>
         </p:spPr>
         <p:txBody>
-          <a:bodyPr anchorCtr="0" anchor="t" bIns="91425" lIns="91425" spcFirstLastPara="1" rIns="91425" wrap="square" tIns="91425">
+          <a:bodyPr spcFirstLastPara="1" wrap="square" lIns="91425" tIns="91425" rIns="91425" bIns="91425" anchor="t" anchorCtr="0">
             <a:noAutofit/>
           </a:bodyPr>
           <a:lstStyle/>
           <a:p>
-            <a:pPr indent="0" lvl="0" marL="0" rtl="0" algn="l">
+            <a:pPr marL="0" lvl="0" indent="0" algn="l" rtl="0">
               <a:lnSpc>
                 <a:spcPct val="135714"/>
               </a:lnSpc>
@@ -7193,6 +7150,7 @@
               <a:buSzPts val="1100"/>
               <a:buFont typeface="Arial"/>
               <a:buNone/>
+              <a:defRPr/>
             </a:pPr>
             <a:r>
               <a:rPr lang="en" sz="1900">
@@ -7205,7 +7163,6 @@
                 <a:latin typeface="Courier New"/>
                 <a:ea typeface="Courier New"/>
                 <a:cs typeface="Courier New"/>
-                <a:sym typeface="Courier New"/>
               </a:rPr>
               <a:t>-</a:t>
             </a:r>
@@ -7220,7 +7177,6 @@
                 <a:latin typeface="Courier New"/>
                 <a:ea typeface="Courier New"/>
                 <a:cs typeface="Courier New"/>
-                <a:sym typeface="Courier New"/>
               </a:rPr>
               <a:t> Successfully implemented adaptive control unit in SystemVerilog</a:t>
             </a:r>
@@ -7234,11 +7190,10 @@
               <a:latin typeface="Courier New"/>
               <a:ea typeface="Courier New"/>
               <a:cs typeface="Courier New"/>
-              <a:sym typeface="Courier New"/>
             </a:endParaRPr>
           </a:p>
           <a:p>
-            <a:pPr indent="0" lvl="0" marL="0" rtl="0" algn="l">
+            <a:pPr marL="0" lvl="0" indent="0" algn="l" rtl="0">
               <a:lnSpc>
                 <a:spcPct val="135714"/>
               </a:lnSpc>
@@ -7254,6 +7209,7 @@
               <a:buSzPts val="1100"/>
               <a:buFont typeface="Arial"/>
               <a:buNone/>
+              <a:defRPr/>
             </a:pPr>
             <a:r>
               <a:rPr lang="en" sz="1900">
@@ -7266,7 +7222,6 @@
                 <a:latin typeface="Courier New"/>
                 <a:ea typeface="Courier New"/>
                 <a:cs typeface="Courier New"/>
-                <a:sym typeface="Courier New"/>
               </a:rPr>
               <a:t>-</a:t>
             </a:r>
@@ -7281,7 +7236,6 @@
                 <a:latin typeface="Courier New"/>
                 <a:ea typeface="Courier New"/>
                 <a:cs typeface="Courier New"/>
-                <a:sym typeface="Courier New"/>
               </a:rPr>
               <a:t> Demonstrated power-performance tradeoff via dual-mode design</a:t>
             </a:r>
@@ -7295,11 +7249,10 @@
               <a:latin typeface="Courier New"/>
               <a:ea typeface="Courier New"/>
               <a:cs typeface="Courier New"/>
-              <a:sym typeface="Courier New"/>
             </a:endParaRPr>
           </a:p>
           <a:p>
-            <a:pPr indent="0" lvl="0" marL="0" rtl="0" algn="l">
+            <a:pPr marL="0" lvl="0" indent="0" algn="l" rtl="0">
               <a:lnSpc>
                 <a:spcPct val="135714"/>
               </a:lnSpc>
@@ -7315,6 +7268,7 @@
               <a:buSzPts val="1100"/>
               <a:buFont typeface="Arial"/>
               <a:buNone/>
+              <a:defRPr/>
             </a:pPr>
             <a:r>
               <a:rPr lang="en" sz="1900">
@@ -7327,7 +7281,6 @@
                 <a:latin typeface="Courier New"/>
                 <a:ea typeface="Courier New"/>
                 <a:cs typeface="Courier New"/>
-                <a:sym typeface="Courier New"/>
               </a:rPr>
               <a:t>-</a:t>
             </a:r>
@@ -7342,7 +7295,6 @@
                 <a:latin typeface="Courier New"/>
                 <a:ea typeface="Courier New"/>
                 <a:cs typeface="Courier New"/>
-                <a:sym typeface="Courier New"/>
               </a:rPr>
               <a:t> Verified functionality through comprehensive testbench</a:t>
             </a:r>
@@ -7356,11 +7308,10 @@
               <a:latin typeface="Courier New"/>
               <a:ea typeface="Courier New"/>
               <a:cs typeface="Courier New"/>
-              <a:sym typeface="Courier New"/>
             </a:endParaRPr>
           </a:p>
           <a:p>
-            <a:pPr indent="0" lvl="0" marL="0" rtl="0" algn="l">
+            <a:pPr marL="0" lvl="0" indent="0" algn="l" rtl="0">
               <a:lnSpc>
                 <a:spcPct val="135714"/>
               </a:lnSpc>
@@ -7376,37 +7327,8 @@
               <a:buSzPts val="1100"/>
               <a:buFont typeface="Arial"/>
               <a:buNone/>
+              <a:defRPr/>
             </a:pPr>
-            <a:r>
-              <a:rPr lang="en" sz="1900">
-                <a:solidFill>
-                  <a:srgbClr val="0451A5"/>
-                </a:solidFill>
-                <a:highlight>
-                  <a:srgbClr val="FFFFFF"/>
-                </a:highlight>
-                <a:latin typeface="Courier New"/>
-                <a:ea typeface="Courier New"/>
-                <a:cs typeface="Courier New"/>
-                <a:sym typeface="Courier New"/>
-              </a:rPr>
-              <a:t>-</a:t>
-            </a:r>
-            <a:r>
-              <a:rPr lang="en" sz="1900">
-                <a:solidFill>
-                  <a:schemeClr val="dk1"/>
-                </a:solidFill>
-                <a:highlight>
-                  <a:srgbClr val="FFFFFF"/>
-                </a:highlight>
-                <a:latin typeface="Courier New"/>
-                <a:ea typeface="Courier New"/>
-                <a:cs typeface="Courier New"/>
-                <a:sym typeface="Courier New"/>
-              </a:rPr>
-              <a:t> Future work: Add more control modes, integrate with processor pipeline</a:t>
-            </a:r>
             <a:endParaRPr sz="1900">
               <a:solidFill>
                 <a:schemeClr val="dk1"/>
@@ -7417,11 +7339,10 @@
               <a:latin typeface="Courier New"/>
               <a:ea typeface="Courier New"/>
               <a:cs typeface="Courier New"/>
-              <a:sym typeface="Courier New"/>
             </a:endParaRPr>
           </a:p>
           <a:p>
-            <a:pPr indent="0" lvl="0" marL="0" rtl="0" algn="l">
+            <a:pPr marL="0" lvl="0" indent="0" algn="l" rtl="0">
               <a:spcBef>
                 <a:spcPts val="0"/>
               </a:spcBef>
@@ -7429,10 +7350,8 @@
                 <a:spcPts val="1200"/>
               </a:spcAft>
               <a:buNone/>
+              <a:defRPr/>
             </a:pPr>
-            <a:r>
-              <a:t/>
-            </a:r>
             <a:endParaRPr sz="1900">
               <a:solidFill>
                 <a:schemeClr val="dk1"/>
@@ -7443,7 +7362,6 @@
               <a:latin typeface="Courier New"/>
               <a:ea typeface="Courier New"/>
               <a:cs typeface="Courier New"/>
-              <a:sym typeface="Courier New"/>
             </a:endParaRPr>
           </a:p>
         </p:txBody>
@@ -7453,19 +7371,27 @@
   <p:clrMapOvr>
     <a:masterClrMapping/>
   </p:clrMapOvr>
+  <mc:AlternateContent xmlns:mc="http://schemas.openxmlformats.org/markup-compatibility/2006">
+    <mc:Choice xmlns:p159="http://schemas.microsoft.com/office/powerpoint/2015/09/main" xmlns:p14="http://schemas.microsoft.com/office/powerpoint/2010/main" Requires="p159">
+      <p:transition p14:dur="500" advClick="1"/>
+    </mc:Choice>
+    <mc:Fallback>
+      <p:transition advClick="1"/>
+    </mc:Fallback>
+  </mc:AlternateContent>
 </p:sld>
 </file>
 
 <file path=ppt/slides/slide2.xml><?xml version="1.0" encoding="utf-8"?>
-<p:sld xmlns:a="http://schemas.openxmlformats.org/drawingml/2006/main" xmlns:r="http://schemas.openxmlformats.org/officeDocument/2006/relationships" xmlns:mc="http://schemas.openxmlformats.org/markup-compatibility/2006" xmlns:mv="urn:schemas-microsoft-com:mac:vml" xmlns:p="http://schemas.openxmlformats.org/presentationml/2006/main" xmlns:c="http://schemas.openxmlformats.org/drawingml/2006/chart" xmlns:dgm="http://schemas.openxmlformats.org/drawingml/2006/diagram" xmlns:o="urn:schemas-microsoft-com:office:office" xmlns:v="urn:schemas-microsoft-com:vml" xmlns:pvml="urn:schemas-microsoft-com:office:powerpoint" xmlns:com="http://schemas.openxmlformats.org/drawingml/2006/compatibility" xmlns:p14="http://schemas.microsoft.com/office/powerpoint/2010/main" xmlns:p15="http://schemas.microsoft.com/office/powerpoint/2012/main" xmlns:ahyp="http://schemas.microsoft.com/office/drawing/2018/hyperlinkcolor">
-  <p:cSld>
+<p:sld xmlns:a="http://schemas.openxmlformats.org/drawingml/2006/main" xmlns:r="http://schemas.openxmlformats.org/officeDocument/2006/relationships" xmlns:p="http://schemas.openxmlformats.org/presentationml/2006/main" xmlns:m="http://schemas.openxmlformats.org/officeDocument/2006/math" xmlns:w="http://schemas.openxmlformats.org/wordprocessingml/2006/main" xmlns:mc="http://schemas.openxmlformats.org/markup-compatibility/2006" showMasterPhAnim="0" showMasterSp="1" show="1">
+  <p:cSld name="">
     <p:spTree>
       <p:nvGrpSpPr>
-        <p:cNvPr id="60" name="Shape 60"/>
+        <p:cNvPr id="1" name=""/>
         <p:cNvGrpSpPr/>
         <p:nvPr/>
       </p:nvGrpSpPr>
-      <p:grpSpPr>
+      <p:grpSpPr bwMode="auto">
         <a:xfrm>
           <a:off x="0" y="0"/>
           <a:ext cx="0" cy="0"/>
@@ -7475,13 +7401,13 @@
       </p:grpSpPr>
       <p:sp>
         <p:nvSpPr>
-          <p:cNvPr id="61" name="Google Shape;61;p14"/>
+          <p:cNvPr id="1326745370" name="Google Shape;61;p14"/>
           <p:cNvSpPr txBox="1"/>
           <p:nvPr>
             <p:ph type="title"/>
           </p:nvPr>
         </p:nvSpPr>
-        <p:spPr>
+        <p:spPr bwMode="auto">
           <a:xfrm>
             <a:off x="311700" y="445025"/>
             <a:ext cx="8520600" cy="572700"/>
@@ -7491,29 +7417,29 @@
           </a:prstGeom>
         </p:spPr>
         <p:txBody>
-          <a:bodyPr anchorCtr="0" anchor="t" bIns="91425" lIns="91425" spcFirstLastPara="1" rIns="91425" wrap="square" tIns="91425">
+          <a:bodyPr spcFirstLastPara="1" wrap="square" lIns="91425" tIns="91425" rIns="91425" bIns="91425" anchor="t" anchorCtr="0">
             <a:noAutofit/>
           </a:bodyPr>
           <a:lstStyle/>
           <a:p>
-            <a:pPr indent="0" lvl="0" marL="0" rtl="0" algn="l">
-              <a:spcBef>
-                <a:spcPts val="0"/>
-              </a:spcBef>
-              <a:spcAft>
-                <a:spcPts val="0"/>
-              </a:spcAft>
-              <a:buNone/>
+            <a:pPr marL="0" lvl="0" indent="0" algn="l" rtl="0">
+              <a:spcBef>
+                <a:spcPts val="0"/>
+              </a:spcBef>
+              <a:spcAft>
+                <a:spcPts val="0"/>
+              </a:spcAft>
+              <a:buNone/>
+              <a:defRPr/>
             </a:pPr>
             <a:r>
-              <a:rPr b="1" lang="en" sz="3600">
+              <a:rPr lang="en" sz="3600" b="1">
                 <a:highlight>
                   <a:schemeClr val="lt1"/>
                 </a:highlight>
                 <a:latin typeface="Courier New"/>
                 <a:ea typeface="Courier New"/>
                 <a:cs typeface="Courier New"/>
-                <a:sym typeface="Courier New"/>
               </a:rPr>
               <a:t>ABSTRACT</a:t>
             </a:r>
@@ -7527,13 +7453,13 @@
       </p:sp>
       <p:sp>
         <p:nvSpPr>
-          <p:cNvPr id="62" name="Google Shape;62;p14"/>
+          <p:cNvPr id="1060515087" name="Google Shape;62;p14"/>
           <p:cNvSpPr txBox="1"/>
           <p:nvPr>
-            <p:ph idx="1" type="body"/>
+            <p:ph type="body" idx="1"/>
           </p:nvPr>
         </p:nvSpPr>
-        <p:spPr>
+        <p:spPr bwMode="auto">
           <a:xfrm>
             <a:off x="311700" y="1573500"/>
             <a:ext cx="8520600" cy="3416400"/>
@@ -7543,12 +7469,12 @@
           </a:prstGeom>
         </p:spPr>
         <p:txBody>
-          <a:bodyPr anchorCtr="0" anchor="t" bIns="91425" lIns="91425" spcFirstLastPara="1" rIns="91425" wrap="square" tIns="91425">
+          <a:bodyPr spcFirstLastPara="1" wrap="square" lIns="91425" tIns="91425" rIns="91425" bIns="91425" anchor="t" anchorCtr="0">
             <a:noAutofit/>
           </a:bodyPr>
           <a:lstStyle/>
           <a:p>
-            <a:pPr indent="-355600" lvl="0" marL="457200" rtl="0" algn="l">
+            <a:pPr marL="457200" lvl="0" indent="-355600" algn="l" rtl="0">
               <a:lnSpc>
                 <a:spcPct val="135714"/>
               </a:lnSpc>
@@ -7564,6 +7490,7 @@
               <a:buSzPts val="2000"/>
               <a:buFont typeface="Courier New"/>
               <a:buChar char="-"/>
+              <a:defRPr/>
             </a:pPr>
             <a:r>
               <a:rPr lang="en" sz="2000">
@@ -7576,7 +7503,6 @@
                 <a:latin typeface="Courier New"/>
                 <a:ea typeface="Courier New"/>
                 <a:cs typeface="Courier New"/>
-                <a:sym typeface="Courier New"/>
               </a:rPr>
               <a:t>RTL design implementing runtime-adaptive hardware control unit</a:t>
             </a:r>
@@ -7590,11 +7516,10 @@
               <a:latin typeface="Courier New"/>
               <a:ea typeface="Courier New"/>
               <a:cs typeface="Courier New"/>
-              <a:sym typeface="Courier New"/>
             </a:endParaRPr>
           </a:p>
           <a:p>
-            <a:pPr indent="-355600" lvl="0" marL="457200" rtl="0" algn="l">
+            <a:pPr marL="457200" lvl="0" indent="-355600" algn="l" rtl="0">
               <a:lnSpc>
                 <a:spcPct val="135714"/>
               </a:lnSpc>
@@ -7610,6 +7535,7 @@
               <a:buSzPts val="2000"/>
               <a:buFont typeface="Courier New"/>
               <a:buChar char="-"/>
+              <a:defRPr/>
             </a:pPr>
             <a:r>
               <a:rPr lang="en" sz="2000">
@@ -7622,7 +7548,6 @@
                 <a:latin typeface="Courier New"/>
                 <a:ea typeface="Courier New"/>
                 <a:cs typeface="Courier New"/>
-                <a:sym typeface="Courier New"/>
               </a:rPr>
               <a:t>Dynamically switches between low-power &amp; high-performance modes</a:t>
             </a:r>
@@ -7636,11 +7561,10 @@
               <a:latin typeface="Courier New"/>
               <a:ea typeface="Courier New"/>
               <a:cs typeface="Courier New"/>
-              <a:sym typeface="Courier New"/>
             </a:endParaRPr>
           </a:p>
           <a:p>
-            <a:pPr indent="-355600" lvl="0" marL="457200" rtl="0" algn="l">
+            <a:pPr marL="457200" lvl="0" indent="-355600" algn="l" rtl="0">
               <a:lnSpc>
                 <a:spcPct val="135714"/>
               </a:lnSpc>
@@ -7656,6 +7580,7 @@
               <a:buSzPts val="2000"/>
               <a:buFont typeface="Courier New"/>
               <a:buChar char="-"/>
+              <a:defRPr/>
             </a:pPr>
             <a:r>
               <a:rPr lang="en" sz="2000">
@@ -7668,7 +7593,6 @@
                 <a:latin typeface="Courier New"/>
                 <a:ea typeface="Courier New"/>
                 <a:cs typeface="Courier New"/>
-                <a:sym typeface="Courier New"/>
               </a:rPr>
               <a:t>Demonstrates power-efficiency vs speed trade-off optimization</a:t>
             </a:r>
@@ -7682,11 +7606,10 @@
               <a:latin typeface="Courier New"/>
               <a:ea typeface="Courier New"/>
               <a:cs typeface="Courier New"/>
-              <a:sym typeface="Courier New"/>
             </a:endParaRPr>
           </a:p>
           <a:p>
-            <a:pPr indent="0" lvl="0" marL="0" rtl="0" algn="l">
+            <a:pPr marL="0" lvl="0" indent="0" algn="l" rtl="0">
               <a:spcBef>
                 <a:spcPts val="0"/>
               </a:spcBef>
@@ -7694,10 +7617,8 @@
                 <a:spcPts val="1200"/>
               </a:spcAft>
               <a:buNone/>
+              <a:defRPr/>
             </a:pPr>
-            <a:r>
-              <a:t/>
-            </a:r>
             <a:endParaRPr sz="2000"/>
           </a:p>
         </p:txBody>
@@ -7707,19 +7628,27 @@
   <p:clrMapOvr>
     <a:masterClrMapping/>
   </p:clrMapOvr>
+  <mc:AlternateContent xmlns:mc="http://schemas.openxmlformats.org/markup-compatibility/2006">
+    <mc:Choice xmlns:p159="http://schemas.microsoft.com/office/powerpoint/2015/09/main" xmlns:p14="http://schemas.microsoft.com/office/powerpoint/2010/main" Requires="p159">
+      <p:transition p14:dur="500" advClick="1"/>
+    </mc:Choice>
+    <mc:Fallback>
+      <p:transition advClick="1"/>
+    </mc:Fallback>
+  </mc:AlternateContent>
 </p:sld>
 </file>
 
 <file path=ppt/slides/slide3.xml><?xml version="1.0" encoding="utf-8"?>
-<p:sld xmlns:a="http://schemas.openxmlformats.org/drawingml/2006/main" xmlns:r="http://schemas.openxmlformats.org/officeDocument/2006/relationships" xmlns:mc="http://schemas.openxmlformats.org/markup-compatibility/2006" xmlns:mv="urn:schemas-microsoft-com:mac:vml" xmlns:p="http://schemas.openxmlformats.org/presentationml/2006/main" xmlns:c="http://schemas.openxmlformats.org/drawingml/2006/chart" xmlns:dgm="http://schemas.openxmlformats.org/drawingml/2006/diagram" xmlns:o="urn:schemas-microsoft-com:office:office" xmlns:v="urn:schemas-microsoft-com:vml" xmlns:pvml="urn:schemas-microsoft-com:office:powerpoint" xmlns:com="http://schemas.openxmlformats.org/drawingml/2006/compatibility" xmlns:p14="http://schemas.microsoft.com/office/powerpoint/2010/main" xmlns:p15="http://schemas.microsoft.com/office/powerpoint/2012/main" xmlns:ahyp="http://schemas.microsoft.com/office/drawing/2018/hyperlinkcolor">
-  <p:cSld>
+<p:sld xmlns:a="http://schemas.openxmlformats.org/drawingml/2006/main" xmlns:r="http://schemas.openxmlformats.org/officeDocument/2006/relationships" xmlns:p="http://schemas.openxmlformats.org/presentationml/2006/main" xmlns:m="http://schemas.openxmlformats.org/officeDocument/2006/math" xmlns:w="http://schemas.openxmlformats.org/wordprocessingml/2006/main" xmlns:mc="http://schemas.openxmlformats.org/markup-compatibility/2006" showMasterPhAnim="0" showMasterSp="1" show="1">
+  <p:cSld name="">
     <p:spTree>
       <p:nvGrpSpPr>
-        <p:cNvPr id="66" name="Shape 66"/>
+        <p:cNvPr id="1" name=""/>
         <p:cNvGrpSpPr/>
         <p:nvPr/>
       </p:nvGrpSpPr>
-      <p:grpSpPr>
+      <p:grpSpPr bwMode="auto">
         <a:xfrm>
           <a:off x="0" y="0"/>
           <a:ext cx="0" cy="0"/>
@@ -7729,13 +7658,13 @@
       </p:grpSpPr>
       <p:sp>
         <p:nvSpPr>
-          <p:cNvPr id="67" name="Google Shape;67;p15"/>
+          <p:cNvPr id="1560848941" name="Google Shape;67;p15"/>
           <p:cNvSpPr txBox="1"/>
           <p:nvPr>
             <p:ph type="title"/>
           </p:nvPr>
         </p:nvSpPr>
-        <p:spPr>
+        <p:spPr bwMode="auto">
           <a:xfrm>
             <a:off x="311700" y="445025"/>
             <a:ext cx="8520600" cy="572700"/>
@@ -7745,29 +7674,29 @@
           </a:prstGeom>
         </p:spPr>
         <p:txBody>
-          <a:bodyPr anchorCtr="0" anchor="t" bIns="91425" lIns="91425" spcFirstLastPara="1" rIns="91425" wrap="square" tIns="91425">
+          <a:bodyPr spcFirstLastPara="1" wrap="square" lIns="91425" tIns="91425" rIns="91425" bIns="91425" anchor="t" anchorCtr="0">
             <a:noAutofit/>
           </a:bodyPr>
           <a:lstStyle/>
           <a:p>
-            <a:pPr indent="0" lvl="0" marL="0" rtl="0" algn="l">
-              <a:spcBef>
-                <a:spcPts val="0"/>
-              </a:spcBef>
-              <a:spcAft>
-                <a:spcPts val="0"/>
-              </a:spcAft>
-              <a:buNone/>
+            <a:pPr marL="0" lvl="0" indent="0" algn="l" rtl="0">
+              <a:spcBef>
+                <a:spcPts val="0"/>
+              </a:spcBef>
+              <a:spcAft>
+                <a:spcPts val="0"/>
+              </a:spcAft>
+              <a:buNone/>
+              <a:defRPr/>
             </a:pPr>
             <a:r>
-              <a:rPr b="1" lang="en" sz="3600">
+              <a:rPr lang="en" sz="3600" b="1">
                 <a:highlight>
                   <a:schemeClr val="lt1"/>
                 </a:highlight>
                 <a:latin typeface="Courier New"/>
                 <a:ea typeface="Courier New"/>
                 <a:cs typeface="Courier New"/>
-                <a:sym typeface="Courier New"/>
               </a:rPr>
               <a:t>OBJECTIVE</a:t>
             </a:r>
@@ -7781,13 +7710,13 @@
       </p:sp>
       <p:sp>
         <p:nvSpPr>
-          <p:cNvPr id="68" name="Google Shape;68;p15"/>
+          <p:cNvPr id="1844741384" name="Google Shape;68;p15"/>
           <p:cNvSpPr txBox="1"/>
           <p:nvPr>
-            <p:ph idx="1" type="body"/>
+            <p:ph type="body" idx="1"/>
           </p:nvPr>
         </p:nvSpPr>
-        <p:spPr>
+        <p:spPr bwMode="auto">
           <a:xfrm>
             <a:off x="311700" y="1573500"/>
             <a:ext cx="8520600" cy="3416400"/>
@@ -7797,12 +7726,12 @@
           </a:prstGeom>
         </p:spPr>
         <p:txBody>
-          <a:bodyPr anchorCtr="0" anchor="t" bIns="91425" lIns="91425" spcFirstLastPara="1" rIns="91425" wrap="square" tIns="91425">
+          <a:bodyPr spcFirstLastPara="1" wrap="square" lIns="91425" tIns="91425" rIns="91425" bIns="91425" anchor="t" anchorCtr="0">
             <a:noAutofit/>
           </a:bodyPr>
           <a:lstStyle/>
           <a:p>
-            <a:pPr indent="0" lvl="0" marL="0" rtl="0" algn="l">
+            <a:pPr marL="0" lvl="0" indent="0" algn="l" rtl="0">
               <a:lnSpc>
                 <a:spcPct val="135714"/>
               </a:lnSpc>
@@ -7818,6 +7747,7 @@
               <a:buSzPts val="1100"/>
               <a:buFont typeface="Arial"/>
               <a:buNone/>
+              <a:defRPr/>
             </a:pPr>
             <a:r>
               <a:rPr lang="en" sz="2000">
@@ -7830,7 +7760,6 @@
                 <a:latin typeface="Courier New"/>
                 <a:ea typeface="Courier New"/>
                 <a:cs typeface="Courier New"/>
-                <a:sym typeface="Courier New"/>
               </a:rPr>
               <a:t>-</a:t>
             </a:r>
@@ -7845,7 +7774,6 @@
                 <a:latin typeface="Courier New"/>
                 <a:ea typeface="Courier New"/>
                 <a:cs typeface="Courier New"/>
-                <a:sym typeface="Courier New"/>
               </a:rPr>
               <a:t> Design a reconfigurable control unit with dual execution paths</a:t>
             </a:r>
@@ -7859,11 +7787,10 @@
               <a:latin typeface="Courier New"/>
               <a:ea typeface="Courier New"/>
               <a:cs typeface="Courier New"/>
-              <a:sym typeface="Courier New"/>
             </a:endParaRPr>
           </a:p>
           <a:p>
-            <a:pPr indent="0" lvl="0" marL="0" rtl="0" algn="l">
+            <a:pPr marL="0" lvl="0" indent="0" algn="l" rtl="0">
               <a:lnSpc>
                 <a:spcPct val="135714"/>
               </a:lnSpc>
@@ -7879,6 +7806,7 @@
               <a:buSzPts val="1100"/>
               <a:buFont typeface="Arial"/>
               <a:buNone/>
+              <a:defRPr/>
             </a:pPr>
             <a:r>
               <a:rPr lang="en" sz="2000">
@@ -7891,7 +7819,6 @@
                 <a:latin typeface="Courier New"/>
                 <a:ea typeface="Courier New"/>
                 <a:cs typeface="Courier New"/>
-                <a:sym typeface="Courier New"/>
               </a:rPr>
               <a:t>-</a:t>
             </a:r>
@@ -7906,7 +7833,6 @@
                 <a:latin typeface="Courier New"/>
                 <a:ea typeface="Courier New"/>
                 <a:cs typeface="Courier New"/>
-                <a:sym typeface="Courier New"/>
               </a:rPr>
               <a:t> Achieve power optimization when speed is not critical</a:t>
             </a:r>
@@ -7920,11 +7846,10 @@
               <a:latin typeface="Courier New"/>
               <a:ea typeface="Courier New"/>
               <a:cs typeface="Courier New"/>
-              <a:sym typeface="Courier New"/>
             </a:endParaRPr>
           </a:p>
           <a:p>
-            <a:pPr indent="0" lvl="0" marL="0" rtl="0" algn="l">
+            <a:pPr marL="0" lvl="0" indent="0" algn="l" rtl="0">
               <a:lnSpc>
                 <a:spcPct val="135714"/>
               </a:lnSpc>
@@ -7940,6 +7865,7 @@
               <a:buSzPts val="1100"/>
               <a:buFont typeface="Arial"/>
               <a:buNone/>
+              <a:defRPr/>
             </a:pPr>
             <a:r>
               <a:rPr lang="en" sz="2000">
@@ -7952,7 +7878,6 @@
                 <a:latin typeface="Courier New"/>
                 <a:ea typeface="Courier New"/>
                 <a:cs typeface="Courier New"/>
-                <a:sym typeface="Courier New"/>
               </a:rPr>
               <a:t>-</a:t>
             </a:r>
@@ -7967,7 +7892,6 @@
                 <a:latin typeface="Courier New"/>
                 <a:ea typeface="Courier New"/>
                 <a:cs typeface="Courier New"/>
-                <a:sym typeface="Courier New"/>
               </a:rPr>
               <a:t> Achieve performance optimization when faster execution needed</a:t>
             </a:r>
@@ -7981,11 +7905,10 @@
               <a:latin typeface="Courier New"/>
               <a:ea typeface="Courier New"/>
               <a:cs typeface="Courier New"/>
-              <a:sym typeface="Courier New"/>
             </a:endParaRPr>
           </a:p>
           <a:p>
-            <a:pPr indent="0" lvl="0" marL="0" rtl="0" algn="l">
+            <a:pPr marL="0" lvl="0" indent="0" algn="l" rtl="0">
               <a:lnSpc>
                 <a:spcPct val="135714"/>
               </a:lnSpc>
@@ -8001,6 +7924,7 @@
               <a:buSzPts val="1100"/>
               <a:buFont typeface="Arial"/>
               <a:buNone/>
+              <a:defRPr/>
             </a:pPr>
             <a:r>
               <a:rPr lang="en" sz="2000">
@@ -8013,7 +7937,6 @@
                 <a:latin typeface="Courier New"/>
                 <a:ea typeface="Courier New"/>
                 <a:cs typeface="Courier New"/>
-                <a:sym typeface="Courier New"/>
               </a:rPr>
               <a:t>-</a:t>
             </a:r>
@@ -8028,7 +7951,6 @@
                 <a:latin typeface="Courier New"/>
                 <a:ea typeface="Courier New"/>
                 <a:cs typeface="Courier New"/>
-                <a:sym typeface="Courier New"/>
               </a:rPr>
               <a:t> Support dynamic switching between modes at runtime</a:t>
             </a:r>
@@ -8042,11 +7964,10 @@
               <a:latin typeface="Courier New"/>
               <a:ea typeface="Courier New"/>
               <a:cs typeface="Courier New"/>
-              <a:sym typeface="Courier New"/>
             </a:endParaRPr>
           </a:p>
           <a:p>
-            <a:pPr indent="0" lvl="0" marL="0" rtl="0" algn="l">
+            <a:pPr marL="0" lvl="0" indent="0" algn="l" rtl="0">
               <a:lnSpc>
                 <a:spcPct val="135714"/>
               </a:lnSpc>
@@ -8062,10 +7983,8 @@
               <a:buSzPts val="1100"/>
               <a:buFont typeface="Arial"/>
               <a:buNone/>
+              <a:defRPr/>
             </a:pPr>
-            <a:r>
-              <a:t/>
-            </a:r>
             <a:endParaRPr sz="2000">
               <a:solidFill>
                 <a:schemeClr val="dk1"/>
@@ -8076,11 +7995,10 @@
               <a:latin typeface="Courier New"/>
               <a:ea typeface="Courier New"/>
               <a:cs typeface="Courier New"/>
-              <a:sym typeface="Courier New"/>
             </a:endParaRPr>
           </a:p>
           <a:p>
-            <a:pPr indent="0" lvl="0" marL="0" rtl="0" algn="l">
+            <a:pPr marL="0" lvl="0" indent="0" algn="l" rtl="0">
               <a:spcBef>
                 <a:spcPts val="0"/>
               </a:spcBef>
@@ -8088,10 +8006,8 @@
                 <a:spcPts val="1200"/>
               </a:spcAft>
               <a:buNone/>
+              <a:defRPr/>
             </a:pPr>
-            <a:r>
-              <a:t/>
-            </a:r>
             <a:endParaRPr sz="2000">
               <a:solidFill>
                 <a:schemeClr val="dk1"/>
@@ -8102,7 +8018,6 @@
               <a:latin typeface="Courier New"/>
               <a:ea typeface="Courier New"/>
               <a:cs typeface="Courier New"/>
-              <a:sym typeface="Courier New"/>
             </a:endParaRPr>
           </a:p>
         </p:txBody>
@@ -8112,19 +8027,27 @@
   <p:clrMapOvr>
     <a:masterClrMapping/>
   </p:clrMapOvr>
+  <mc:AlternateContent xmlns:mc="http://schemas.openxmlformats.org/markup-compatibility/2006">
+    <mc:Choice xmlns:p159="http://schemas.microsoft.com/office/powerpoint/2015/09/main" xmlns:p14="http://schemas.microsoft.com/office/powerpoint/2010/main" Requires="p159">
+      <p:transition p14:dur="500" advClick="1"/>
+    </mc:Choice>
+    <mc:Fallback>
+      <p:transition advClick="1"/>
+    </mc:Fallback>
+  </mc:AlternateContent>
 </p:sld>
 </file>
 
 <file path=ppt/slides/slide4.xml><?xml version="1.0" encoding="utf-8"?>
-<p:sld xmlns:a="http://schemas.openxmlformats.org/drawingml/2006/main" xmlns:r="http://schemas.openxmlformats.org/officeDocument/2006/relationships" xmlns:mc="http://schemas.openxmlformats.org/markup-compatibility/2006" xmlns:mv="urn:schemas-microsoft-com:mac:vml" xmlns:p="http://schemas.openxmlformats.org/presentationml/2006/main" xmlns:c="http://schemas.openxmlformats.org/drawingml/2006/chart" xmlns:dgm="http://schemas.openxmlformats.org/drawingml/2006/diagram" xmlns:o="urn:schemas-microsoft-com:office:office" xmlns:v="urn:schemas-microsoft-com:vml" xmlns:pvml="urn:schemas-microsoft-com:office:powerpoint" xmlns:com="http://schemas.openxmlformats.org/drawingml/2006/compatibility" xmlns:p14="http://schemas.microsoft.com/office/powerpoint/2010/main" xmlns:p15="http://schemas.microsoft.com/office/powerpoint/2012/main" xmlns:ahyp="http://schemas.microsoft.com/office/drawing/2018/hyperlinkcolor">
-  <p:cSld>
+<p:sld xmlns:a="http://schemas.openxmlformats.org/drawingml/2006/main" xmlns:r="http://schemas.openxmlformats.org/officeDocument/2006/relationships" xmlns:p="http://schemas.openxmlformats.org/presentationml/2006/main" xmlns:m="http://schemas.openxmlformats.org/officeDocument/2006/math" xmlns:w="http://schemas.openxmlformats.org/wordprocessingml/2006/main" xmlns:mc="http://schemas.openxmlformats.org/markup-compatibility/2006" showMasterPhAnim="0" showMasterSp="1" show="1">
+  <p:cSld name="">
     <p:spTree>
       <p:nvGrpSpPr>
-        <p:cNvPr id="72" name="Shape 72"/>
+        <p:cNvPr id="1" name=""/>
         <p:cNvGrpSpPr/>
         <p:nvPr/>
       </p:nvGrpSpPr>
-      <p:grpSpPr>
+      <p:grpSpPr bwMode="auto">
         <a:xfrm>
           <a:off x="0" y="0"/>
           <a:ext cx="0" cy="0"/>
@@ -8134,13 +8057,13 @@
       </p:grpSpPr>
       <p:sp>
         <p:nvSpPr>
-          <p:cNvPr id="73" name="Google Shape;73;p16"/>
+          <p:cNvPr id="1430712829" name="Google Shape;73;p16"/>
           <p:cNvSpPr txBox="1"/>
           <p:nvPr>
             <p:ph type="title"/>
           </p:nvPr>
         </p:nvSpPr>
-        <p:spPr>
+        <p:spPr bwMode="auto">
           <a:xfrm>
             <a:off x="311700" y="445025"/>
             <a:ext cx="8520600" cy="572700"/>
@@ -8150,29 +8073,29 @@
           </a:prstGeom>
         </p:spPr>
         <p:txBody>
-          <a:bodyPr anchorCtr="0" anchor="t" bIns="91425" lIns="91425" spcFirstLastPara="1" rIns="91425" wrap="square" tIns="91425">
+          <a:bodyPr spcFirstLastPara="1" wrap="square" lIns="91425" tIns="91425" rIns="91425" bIns="91425" anchor="t" anchorCtr="0">
             <a:noAutofit/>
           </a:bodyPr>
           <a:lstStyle/>
           <a:p>
-            <a:pPr indent="0" lvl="0" marL="0" rtl="0" algn="l">
-              <a:spcBef>
-                <a:spcPts val="0"/>
-              </a:spcBef>
-              <a:spcAft>
-                <a:spcPts val="0"/>
-              </a:spcAft>
-              <a:buNone/>
+            <a:pPr marL="0" lvl="0" indent="0" algn="l" rtl="0">
+              <a:spcBef>
+                <a:spcPts val="0"/>
+              </a:spcBef>
+              <a:spcAft>
+                <a:spcPts val="0"/>
+              </a:spcAft>
+              <a:buNone/>
+              <a:defRPr/>
             </a:pPr>
             <a:r>
-              <a:rPr b="1" lang="en" sz="3600">
+              <a:rPr lang="en" sz="3600" b="1">
                 <a:highlight>
                   <a:schemeClr val="lt1"/>
                 </a:highlight>
                 <a:latin typeface="Courier New"/>
                 <a:ea typeface="Courier New"/>
                 <a:cs typeface="Courier New"/>
-                <a:sym typeface="Courier New"/>
               </a:rPr>
               <a:t>INTRODUCTION</a:t>
             </a:r>
@@ -8186,13 +8109,13 @@
       </p:sp>
       <p:sp>
         <p:nvSpPr>
-          <p:cNvPr id="74" name="Google Shape;74;p16"/>
+          <p:cNvPr id="1284363506" name="Google Shape;74;p16"/>
           <p:cNvSpPr txBox="1"/>
           <p:nvPr>
-            <p:ph idx="1" type="body"/>
+            <p:ph type="body" idx="1"/>
           </p:nvPr>
         </p:nvSpPr>
-        <p:spPr>
+        <p:spPr bwMode="auto">
           <a:xfrm>
             <a:off x="311700" y="1573500"/>
             <a:ext cx="8520600" cy="3416400"/>
@@ -8202,12 +8125,12 @@
           </a:prstGeom>
         </p:spPr>
         <p:txBody>
-          <a:bodyPr anchorCtr="0" anchor="t" bIns="91425" lIns="91425" spcFirstLastPara="1" rIns="91425" wrap="square" tIns="91425">
+          <a:bodyPr spcFirstLastPara="1" wrap="square" lIns="91425" tIns="91425" rIns="91425" bIns="91425" anchor="t" anchorCtr="0">
             <a:noAutofit/>
           </a:bodyPr>
           <a:lstStyle/>
           <a:p>
-            <a:pPr indent="0" lvl="0" marL="0" rtl="0" algn="l">
+            <a:pPr marL="0" lvl="0" indent="0" algn="l" rtl="0">
               <a:lnSpc>
                 <a:spcPct val="135714"/>
               </a:lnSpc>
@@ -8223,6 +8146,7 @@
               <a:buSzPts val="1100"/>
               <a:buFont typeface="Arial"/>
               <a:buNone/>
+              <a:defRPr/>
             </a:pPr>
             <a:r>
               <a:rPr lang="en" sz="2000">
@@ -8235,7 +8159,6 @@
                 <a:latin typeface="Courier New"/>
                 <a:ea typeface="Courier New"/>
                 <a:cs typeface="Courier New"/>
-                <a:sym typeface="Courier New"/>
               </a:rPr>
               <a:t>-</a:t>
             </a:r>
@@ -8250,7 +8173,6 @@
                 <a:latin typeface="Courier New"/>
                 <a:ea typeface="Courier New"/>
                 <a:cs typeface="Courier New"/>
-                <a:sym typeface="Courier New"/>
               </a:rPr>
               <a:t> Traditional hardware: fixed power/performance tradeoff</a:t>
             </a:r>
@@ -8264,11 +8186,10 @@
               <a:latin typeface="Courier New"/>
               <a:ea typeface="Courier New"/>
               <a:cs typeface="Courier New"/>
-              <a:sym typeface="Courier New"/>
             </a:endParaRPr>
           </a:p>
           <a:p>
-            <a:pPr indent="0" lvl="0" marL="0" rtl="0" algn="l">
+            <a:pPr marL="0" lvl="0" indent="0" algn="l" rtl="0">
               <a:lnSpc>
                 <a:spcPct val="135714"/>
               </a:lnSpc>
@@ -8284,6 +8205,7 @@
               <a:buSzPts val="1100"/>
               <a:buFont typeface="Arial"/>
               <a:buNone/>
+              <a:defRPr/>
             </a:pPr>
             <a:r>
               <a:rPr lang="en" sz="2000">
@@ -8296,7 +8218,6 @@
                 <a:latin typeface="Courier New"/>
                 <a:ea typeface="Courier New"/>
                 <a:cs typeface="Courier New"/>
-                <a:sym typeface="Courier New"/>
               </a:rPr>
               <a:t>-</a:t>
             </a:r>
@@ -8311,7 +8232,6 @@
                 <a:latin typeface="Courier New"/>
                 <a:ea typeface="Courier New"/>
                 <a:cs typeface="Courier New"/>
-                <a:sym typeface="Courier New"/>
               </a:rPr>
               <a:t> Need for adaptive systems in modern processors</a:t>
             </a:r>
@@ -8325,11 +8245,10 @@
               <a:latin typeface="Courier New"/>
               <a:ea typeface="Courier New"/>
               <a:cs typeface="Courier New"/>
-              <a:sym typeface="Courier New"/>
             </a:endParaRPr>
           </a:p>
           <a:p>
-            <a:pPr indent="0" lvl="0" marL="0" rtl="0" algn="l">
+            <a:pPr marL="0" lvl="0" indent="0" algn="l" rtl="0">
               <a:lnSpc>
                 <a:spcPct val="135714"/>
               </a:lnSpc>
@@ -8345,6 +8264,7 @@
               <a:buSzPts val="1100"/>
               <a:buFont typeface="Arial"/>
               <a:buNone/>
+              <a:defRPr/>
             </a:pPr>
             <a:r>
               <a:rPr lang="en" sz="2000">
@@ -8357,7 +8277,6 @@
                 <a:latin typeface="Courier New"/>
                 <a:ea typeface="Courier New"/>
                 <a:cs typeface="Courier New"/>
-                <a:sym typeface="Courier New"/>
               </a:rPr>
               <a:t>-</a:t>
             </a:r>
@@ -8372,7 +8291,6 @@
                 <a:latin typeface="Courier New"/>
                 <a:ea typeface="Courier New"/>
                 <a:cs typeface="Courier New"/>
-                <a:sym typeface="Courier New"/>
               </a:rPr>
               <a:t> Control unit: decodes instructions &amp; generates control signals</a:t>
             </a:r>
@@ -8386,11 +8304,10 @@
               <a:latin typeface="Courier New"/>
               <a:ea typeface="Courier New"/>
               <a:cs typeface="Courier New"/>
-              <a:sym typeface="Courier New"/>
             </a:endParaRPr>
           </a:p>
           <a:p>
-            <a:pPr indent="0" lvl="0" marL="0" rtl="0" algn="l">
+            <a:pPr marL="0" lvl="0" indent="0" algn="l" rtl="0">
               <a:lnSpc>
                 <a:spcPct val="135714"/>
               </a:lnSpc>
@@ -8406,6 +8323,7 @@
               <a:buSzPts val="1100"/>
               <a:buFont typeface="Arial"/>
               <a:buNone/>
+              <a:defRPr/>
             </a:pPr>
             <a:r>
               <a:rPr lang="en" sz="2000">
@@ -8418,7 +8336,6 @@
                 <a:latin typeface="Courier New"/>
                 <a:ea typeface="Courier New"/>
                 <a:cs typeface="Courier New"/>
-                <a:sym typeface="Courier New"/>
               </a:rPr>
               <a:t>-</a:t>
             </a:r>
@@ -8433,7 +8350,6 @@
                 <a:latin typeface="Courier New"/>
                 <a:ea typeface="Courier New"/>
                 <a:cs typeface="Courier New"/>
-                <a:sym typeface="Courier New"/>
               </a:rPr>
               <a:t> Two modes: Low-Power vs High-Performance </a:t>
             </a:r>
@@ -8447,11 +8363,10 @@
               <a:latin typeface="Courier New"/>
               <a:ea typeface="Courier New"/>
               <a:cs typeface="Courier New"/>
-              <a:sym typeface="Courier New"/>
             </a:endParaRPr>
           </a:p>
           <a:p>
-            <a:pPr indent="0" lvl="0" marL="0" rtl="0" algn="l">
+            <a:pPr marL="0" lvl="0" indent="0" algn="l" rtl="0">
               <a:lnSpc>
                 <a:spcPct val="135714"/>
               </a:lnSpc>
@@ -8467,6 +8382,7 @@
               <a:buSzPts val="1100"/>
               <a:buFont typeface="Arial"/>
               <a:buNone/>
+              <a:defRPr/>
             </a:pPr>
             <a:r>
               <a:rPr lang="en" sz="2000">
@@ -8479,7 +8395,6 @@
                 <a:latin typeface="Courier New"/>
                 <a:ea typeface="Courier New"/>
                 <a:cs typeface="Courier New"/>
-                <a:sym typeface="Courier New"/>
               </a:rPr>
               <a:t>-</a:t>
             </a:r>
@@ -8494,7 +8409,6 @@
                 <a:latin typeface="Courier New"/>
                 <a:ea typeface="Courier New"/>
                 <a:cs typeface="Courier New"/>
-                <a:sym typeface="Courier New"/>
               </a:rPr>
               <a:t> Mode selection via external input signal</a:t>
             </a:r>
@@ -8508,11 +8422,10 @@
               <a:latin typeface="Courier New"/>
               <a:ea typeface="Courier New"/>
               <a:cs typeface="Courier New"/>
-              <a:sym typeface="Courier New"/>
             </a:endParaRPr>
           </a:p>
           <a:p>
-            <a:pPr indent="0" lvl="0" marL="0" rtl="0" algn="l">
+            <a:pPr marL="0" lvl="0" indent="0" algn="l" rtl="0">
               <a:spcBef>
                 <a:spcPts val="0"/>
               </a:spcBef>
@@ -8520,10 +8433,8 @@
                 <a:spcPts val="1200"/>
               </a:spcAft>
               <a:buNone/>
+              <a:defRPr/>
             </a:pPr>
-            <a:r>
-              <a:t/>
-            </a:r>
             <a:endParaRPr sz="2000">
               <a:solidFill>
                 <a:srgbClr val="0451A5"/>
@@ -8534,7 +8445,6 @@
               <a:latin typeface="Courier New"/>
               <a:ea typeface="Courier New"/>
               <a:cs typeface="Courier New"/>
-              <a:sym typeface="Courier New"/>
             </a:endParaRPr>
           </a:p>
         </p:txBody>
@@ -8544,19 +8454,27 @@
   <p:clrMapOvr>
     <a:masterClrMapping/>
   </p:clrMapOvr>
+  <mc:AlternateContent xmlns:mc="http://schemas.openxmlformats.org/markup-compatibility/2006">
+    <mc:Choice xmlns:p159="http://schemas.microsoft.com/office/powerpoint/2015/09/main" xmlns:p14="http://schemas.microsoft.com/office/powerpoint/2010/main" Requires="p159">
+      <p:transition p14:dur="500" advClick="1"/>
+    </mc:Choice>
+    <mc:Fallback>
+      <p:transition advClick="1"/>
+    </mc:Fallback>
+  </mc:AlternateContent>
 </p:sld>
 </file>
 
 <file path=ppt/slides/slide5.xml><?xml version="1.0" encoding="utf-8"?>
-<p:sld xmlns:a="http://schemas.openxmlformats.org/drawingml/2006/main" xmlns:r="http://schemas.openxmlformats.org/officeDocument/2006/relationships" xmlns:mc="http://schemas.openxmlformats.org/markup-compatibility/2006" xmlns:mv="urn:schemas-microsoft-com:mac:vml" xmlns:p="http://schemas.openxmlformats.org/presentationml/2006/main" xmlns:c="http://schemas.openxmlformats.org/drawingml/2006/chart" xmlns:dgm="http://schemas.openxmlformats.org/drawingml/2006/diagram" xmlns:o="urn:schemas-microsoft-com:office:office" xmlns:v="urn:schemas-microsoft-com:vml" xmlns:pvml="urn:schemas-microsoft-com:office:powerpoint" xmlns:com="http://schemas.openxmlformats.org/drawingml/2006/compatibility" xmlns:p14="http://schemas.microsoft.com/office/powerpoint/2010/main" xmlns:p15="http://schemas.microsoft.com/office/powerpoint/2012/main" xmlns:ahyp="http://schemas.microsoft.com/office/drawing/2018/hyperlinkcolor">
-  <p:cSld>
+<p:sld xmlns:a="http://schemas.openxmlformats.org/drawingml/2006/main" xmlns:r="http://schemas.openxmlformats.org/officeDocument/2006/relationships" xmlns:p="http://schemas.openxmlformats.org/presentationml/2006/main" xmlns:m="http://schemas.openxmlformats.org/officeDocument/2006/math" xmlns:w="http://schemas.openxmlformats.org/wordprocessingml/2006/main" xmlns:mc="http://schemas.openxmlformats.org/markup-compatibility/2006" showMasterPhAnim="0" showMasterSp="1" show="1">
+  <p:cSld name="">
     <p:spTree>
       <p:nvGrpSpPr>
-        <p:cNvPr id="78" name="Shape 78"/>
+        <p:cNvPr id="1" name=""/>
         <p:cNvGrpSpPr/>
         <p:nvPr/>
       </p:nvGrpSpPr>
-      <p:grpSpPr>
+      <p:grpSpPr bwMode="auto">
         <a:xfrm>
           <a:off x="0" y="0"/>
           <a:ext cx="0" cy="0"/>
@@ -8566,13 +8484,13 @@
       </p:grpSpPr>
       <p:sp>
         <p:nvSpPr>
-          <p:cNvPr id="79" name="Google Shape;79;p17"/>
+          <p:cNvPr id="1306241514" name="Google Shape;79;p17"/>
           <p:cNvSpPr txBox="1"/>
           <p:nvPr>
             <p:ph type="title"/>
           </p:nvPr>
         </p:nvSpPr>
-        <p:spPr>
+        <p:spPr bwMode="auto">
           <a:xfrm>
             <a:off x="311700" y="445025"/>
             <a:ext cx="8520600" cy="572700"/>
@@ -8582,29 +8500,29 @@
           </a:prstGeom>
         </p:spPr>
         <p:txBody>
-          <a:bodyPr anchorCtr="0" anchor="t" bIns="91425" lIns="91425" spcFirstLastPara="1" rIns="91425" wrap="square" tIns="91425">
+          <a:bodyPr spcFirstLastPara="1" wrap="square" lIns="91425" tIns="91425" rIns="91425" bIns="91425" anchor="t" anchorCtr="0">
             <a:noAutofit/>
           </a:bodyPr>
           <a:lstStyle/>
           <a:p>
-            <a:pPr indent="0" lvl="0" marL="0" rtl="0" algn="l">
-              <a:spcBef>
-                <a:spcPts val="0"/>
-              </a:spcBef>
-              <a:spcAft>
-                <a:spcPts val="0"/>
-              </a:spcAft>
-              <a:buNone/>
+            <a:pPr marL="0" lvl="0" indent="0" algn="l" rtl="0">
+              <a:spcBef>
+                <a:spcPts val="0"/>
+              </a:spcBef>
+              <a:spcAft>
+                <a:spcPts val="0"/>
+              </a:spcAft>
+              <a:buNone/>
+              <a:defRPr/>
             </a:pPr>
             <a:r>
-              <a:rPr b="1" lang="en" sz="3600">
+              <a:rPr lang="en" sz="3600" b="1">
                 <a:highlight>
                   <a:schemeClr val="lt1"/>
                 </a:highlight>
                 <a:latin typeface="Courier New"/>
                 <a:ea typeface="Courier New"/>
                 <a:cs typeface="Courier New"/>
-                <a:sym typeface="Courier New"/>
               </a:rPr>
               <a:t>ARCHITECTURE AND HIERARCHY</a:t>
             </a:r>
@@ -8618,13 +8536,13 @@
       </p:sp>
       <p:sp>
         <p:nvSpPr>
-          <p:cNvPr id="80" name="Google Shape;80;p17"/>
+          <p:cNvPr id="428148793" name="Google Shape;80;p17"/>
           <p:cNvSpPr txBox="1"/>
           <p:nvPr>
-            <p:ph idx="1" type="body"/>
+            <p:ph type="body" idx="1"/>
           </p:nvPr>
         </p:nvSpPr>
-        <p:spPr>
+        <p:spPr bwMode="auto">
           <a:xfrm>
             <a:off x="311700" y="1573500"/>
             <a:ext cx="8520600" cy="3416400"/>
@@ -8634,12 +8552,12 @@
           </a:prstGeom>
         </p:spPr>
         <p:txBody>
-          <a:bodyPr anchorCtr="0" anchor="t" bIns="91425" lIns="91425" spcFirstLastPara="1" rIns="91425" wrap="square" tIns="91425">
+          <a:bodyPr spcFirstLastPara="1" wrap="square" lIns="91425" tIns="91425" rIns="91425" bIns="91425" anchor="t" anchorCtr="0">
             <a:noAutofit/>
           </a:bodyPr>
           <a:lstStyle/>
           <a:p>
-            <a:pPr indent="0" lvl="0" marL="0" rtl="0" algn="l">
+            <a:pPr marL="0" lvl="0" indent="0" algn="l" rtl="0">
               <a:lnSpc>
                 <a:spcPct val="135714"/>
               </a:lnSpc>
@@ -8655,6 +8573,7 @@
               <a:buSzPts val="1100"/>
               <a:buFont typeface="Arial"/>
               <a:buNone/>
+              <a:defRPr/>
             </a:pPr>
             <a:r>
               <a:rPr lang="en" sz="2000">
@@ -8667,12 +8586,11 @@
                 <a:latin typeface="Courier New"/>
                 <a:ea typeface="Courier New"/>
                 <a:cs typeface="Courier New"/>
-                <a:sym typeface="Courier New"/>
               </a:rPr>
               <a:t>- </a:t>
             </a:r>
             <a:r>
-              <a:rPr b="1" lang="en" sz="2000">
+              <a:rPr lang="en" sz="2000" b="1">
                 <a:solidFill>
                   <a:schemeClr val="dk1"/>
                 </a:solidFill>
@@ -8682,7 +8600,6 @@
                 <a:latin typeface="Courier New"/>
                 <a:ea typeface="Courier New"/>
                 <a:cs typeface="Courier New"/>
-                <a:sym typeface="Courier New"/>
               </a:rPr>
               <a:t>Top Module:</a:t>
             </a:r>
@@ -8697,7 +8614,6 @@
                 <a:latin typeface="Courier New"/>
                 <a:ea typeface="Courier New"/>
                 <a:cs typeface="Courier New"/>
-                <a:sym typeface="Courier New"/>
               </a:rPr>
               <a:t> I/O synchronization wrapper</a:t>
             </a:r>
@@ -8711,11 +8627,10 @@
               <a:latin typeface="Courier New"/>
               <a:ea typeface="Courier New"/>
               <a:cs typeface="Courier New"/>
-              <a:sym typeface="Courier New"/>
             </a:endParaRPr>
           </a:p>
           <a:p>
-            <a:pPr indent="0" lvl="0" marL="0" rtl="0" algn="l">
+            <a:pPr marL="0" lvl="0" indent="0" algn="l" rtl="0">
               <a:lnSpc>
                 <a:spcPct val="135714"/>
               </a:lnSpc>
@@ -8731,6 +8646,7 @@
               <a:buSzPts val="1100"/>
               <a:buFont typeface="Arial"/>
               <a:buNone/>
+              <a:defRPr/>
             </a:pPr>
             <a:r>
               <a:rPr lang="en" sz="2000">
@@ -8743,12 +8659,11 @@
                 <a:latin typeface="Courier New"/>
                 <a:ea typeface="Courier New"/>
                 <a:cs typeface="Courier New"/>
-                <a:sym typeface="Courier New"/>
               </a:rPr>
               <a:t>- </a:t>
             </a:r>
             <a:r>
-              <a:rPr b="1" lang="en" sz="2000">
+              <a:rPr lang="en" sz="2000" b="1">
                 <a:solidFill>
                   <a:schemeClr val="dk1"/>
                 </a:solidFill>
@@ -8758,7 +8673,6 @@
                 <a:latin typeface="Courier New"/>
                 <a:ea typeface="Courier New"/>
                 <a:cs typeface="Courier New"/>
-                <a:sym typeface="Courier New"/>
               </a:rPr>
               <a:t>Adaptive Module:</a:t>
             </a:r>
@@ -8773,7 +8687,6 @@
                 <a:latin typeface="Courier New"/>
                 <a:ea typeface="Courier New"/>
                 <a:cs typeface="Courier New"/>
-                <a:sym typeface="Courier New"/>
               </a:rPr>
               <a:t> Mode selector between control units</a:t>
             </a:r>
@@ -8787,11 +8700,10 @@
               <a:latin typeface="Courier New"/>
               <a:ea typeface="Courier New"/>
               <a:cs typeface="Courier New"/>
-              <a:sym typeface="Courier New"/>
             </a:endParaRPr>
           </a:p>
           <a:p>
-            <a:pPr indent="0" lvl="0" marL="0" rtl="0" algn="l">
+            <a:pPr marL="0" lvl="0" indent="0" algn="l" rtl="0">
               <a:lnSpc>
                 <a:spcPct val="135714"/>
               </a:lnSpc>
@@ -8807,6 +8719,7 @@
               <a:buSzPts val="1100"/>
               <a:buFont typeface="Arial"/>
               <a:buNone/>
+              <a:defRPr/>
             </a:pPr>
             <a:r>
               <a:rPr lang="en" sz="2000">
@@ -8819,12 +8732,11 @@
                 <a:latin typeface="Courier New"/>
                 <a:ea typeface="Courier New"/>
                 <a:cs typeface="Courier New"/>
-                <a:sym typeface="Courier New"/>
               </a:rPr>
               <a:t>- </a:t>
             </a:r>
             <a:r>
-              <a:rPr b="1" lang="en" sz="2000">
+              <a:rPr lang="en" sz="2000" b="1">
                 <a:solidFill>
                   <a:schemeClr val="dk1"/>
                 </a:solidFill>
@@ -8834,7 +8746,6 @@
                 <a:latin typeface="Courier New"/>
                 <a:ea typeface="Courier New"/>
                 <a:cs typeface="Courier New"/>
-                <a:sym typeface="Courier New"/>
               </a:rPr>
               <a:t>Low-Power:</a:t>
             </a:r>
@@ -8849,7 +8760,6 @@
                 <a:latin typeface="Courier New"/>
                 <a:ea typeface="Courier New"/>
                 <a:cs typeface="Courier New"/>
-                <a:sym typeface="Courier New"/>
               </a:rPr>
               <a:t> Power-efficient decoder (pipelined, registered)</a:t>
             </a:r>
@@ -8863,11 +8773,10 @@
               <a:latin typeface="Courier New"/>
               <a:ea typeface="Courier New"/>
               <a:cs typeface="Courier New"/>
-              <a:sym typeface="Courier New"/>
             </a:endParaRPr>
           </a:p>
           <a:p>
-            <a:pPr indent="0" lvl="0" marL="0" rtl="0" algn="l">
+            <a:pPr marL="0" lvl="0" indent="0" algn="l" rtl="0">
               <a:lnSpc>
                 <a:spcPct val="135714"/>
               </a:lnSpc>
@@ -8883,6 +8792,7 @@
               <a:buSzPts val="1100"/>
               <a:buFont typeface="Arial"/>
               <a:buNone/>
+              <a:defRPr/>
             </a:pPr>
             <a:r>
               <a:rPr lang="en" sz="2000">
@@ -8895,12 +8805,11 @@
                 <a:latin typeface="Courier New"/>
                 <a:ea typeface="Courier New"/>
                 <a:cs typeface="Courier New"/>
-                <a:sym typeface="Courier New"/>
               </a:rPr>
               <a:t>- </a:t>
             </a:r>
             <a:r>
-              <a:rPr b="1" lang="en" sz="2000">
+              <a:rPr lang="en" sz="2000" b="1">
                 <a:solidFill>
                   <a:schemeClr val="dk1"/>
                 </a:solidFill>
@@ -8910,7 +8819,6 @@
                 <a:latin typeface="Courier New"/>
                 <a:ea typeface="Courier New"/>
                 <a:cs typeface="Courier New"/>
-                <a:sym typeface="Courier New"/>
               </a:rPr>
               <a:t>High-Perf:</a:t>
             </a:r>
@@ -8925,7 +8833,6 @@
                 <a:latin typeface="Courier New"/>
                 <a:ea typeface="Courier New"/>
                 <a:cs typeface="Courier New"/>
-                <a:sym typeface="Courier New"/>
               </a:rPr>
               <a:t> High-speed decoder (parallel, combinational)</a:t>
             </a:r>
@@ -8939,11 +8846,10 @@
               <a:latin typeface="Courier New"/>
               <a:ea typeface="Courier New"/>
               <a:cs typeface="Courier New"/>
-              <a:sym typeface="Courier New"/>
             </a:endParaRPr>
           </a:p>
           <a:p>
-            <a:pPr indent="0" lvl="0" marL="0" rtl="0" algn="l">
+            <a:pPr marL="0" lvl="0" indent="0" algn="l" rtl="0">
               <a:spcBef>
                 <a:spcPts val="0"/>
               </a:spcBef>
@@ -8951,10 +8857,8 @@
                 <a:spcPts val="1200"/>
               </a:spcAft>
               <a:buNone/>
+              <a:defRPr/>
             </a:pPr>
-            <a:r>
-              <a:t/>
-            </a:r>
             <a:endParaRPr sz="2000">
               <a:solidFill>
                 <a:schemeClr val="dk1"/>
@@ -8965,7 +8869,6 @@
               <a:latin typeface="Courier New"/>
               <a:ea typeface="Courier New"/>
               <a:cs typeface="Courier New"/>
-              <a:sym typeface="Courier New"/>
             </a:endParaRPr>
           </a:p>
         </p:txBody>
@@ -8975,19 +8878,27 @@
   <p:clrMapOvr>
     <a:masterClrMapping/>
   </p:clrMapOvr>
+  <mc:AlternateContent xmlns:mc="http://schemas.openxmlformats.org/markup-compatibility/2006">
+    <mc:Choice xmlns:p159="http://schemas.microsoft.com/office/powerpoint/2015/09/main" xmlns:p14="http://schemas.microsoft.com/office/powerpoint/2010/main" Requires="p159">
+      <p:transition p14:dur="500" advClick="1"/>
+    </mc:Choice>
+    <mc:Fallback>
+      <p:transition advClick="1"/>
+    </mc:Fallback>
+  </mc:AlternateContent>
 </p:sld>
 </file>
 
 <file path=ppt/slides/slide6.xml><?xml version="1.0" encoding="utf-8"?>
-<p:sld xmlns:a="http://schemas.openxmlformats.org/drawingml/2006/main" xmlns:r="http://schemas.openxmlformats.org/officeDocument/2006/relationships" xmlns:mc="http://schemas.openxmlformats.org/markup-compatibility/2006" xmlns:mv="urn:schemas-microsoft-com:mac:vml" xmlns:p="http://schemas.openxmlformats.org/presentationml/2006/main" xmlns:c="http://schemas.openxmlformats.org/drawingml/2006/chart" xmlns:dgm="http://schemas.openxmlformats.org/drawingml/2006/diagram" xmlns:o="urn:schemas-microsoft-com:office:office" xmlns:v="urn:schemas-microsoft-com:vml" xmlns:pvml="urn:schemas-microsoft-com:office:powerpoint" xmlns:com="http://schemas.openxmlformats.org/drawingml/2006/compatibility" xmlns:p14="http://schemas.microsoft.com/office/powerpoint/2010/main" xmlns:p15="http://schemas.microsoft.com/office/powerpoint/2012/main" xmlns:ahyp="http://schemas.microsoft.com/office/drawing/2018/hyperlinkcolor">
-  <p:cSld>
+<p:sld xmlns:a="http://schemas.openxmlformats.org/drawingml/2006/main" xmlns:r="http://schemas.openxmlformats.org/officeDocument/2006/relationships" xmlns:p="http://schemas.openxmlformats.org/presentationml/2006/main" xmlns:m="http://schemas.openxmlformats.org/officeDocument/2006/math" xmlns:w="http://schemas.openxmlformats.org/wordprocessingml/2006/main" xmlns:mc="http://schemas.openxmlformats.org/markup-compatibility/2006" showMasterPhAnim="0" showMasterSp="1" show="1">
+  <p:cSld name="">
     <p:spTree>
       <p:nvGrpSpPr>
-        <p:cNvPr id="84" name="Shape 84"/>
+        <p:cNvPr id="1" name=""/>
         <p:cNvGrpSpPr/>
         <p:nvPr/>
       </p:nvGrpSpPr>
-      <p:grpSpPr>
+      <p:grpSpPr bwMode="auto">
         <a:xfrm>
           <a:off x="0" y="0"/>
           <a:ext cx="0" cy="0"/>
@@ -8997,13 +8908,13 @@
       </p:grpSpPr>
       <p:sp>
         <p:nvSpPr>
-          <p:cNvPr id="85" name="Google Shape;85;p18"/>
+          <p:cNvPr id="869373638" name="Google Shape;85;p18"/>
           <p:cNvSpPr txBox="1"/>
           <p:nvPr>
             <p:ph type="title"/>
           </p:nvPr>
         </p:nvSpPr>
-        <p:spPr>
+        <p:spPr bwMode="auto">
           <a:xfrm>
             <a:off x="311700" y="445025"/>
             <a:ext cx="8520600" cy="572700"/>
@@ -9013,29 +8924,29 @@
           </a:prstGeom>
         </p:spPr>
         <p:txBody>
-          <a:bodyPr anchorCtr="0" anchor="t" bIns="91425" lIns="91425" spcFirstLastPara="1" rIns="91425" wrap="square" tIns="91425">
+          <a:bodyPr spcFirstLastPara="1" wrap="square" lIns="91425" tIns="91425" rIns="91425" bIns="91425" anchor="t" anchorCtr="0">
             <a:noAutofit/>
           </a:bodyPr>
           <a:lstStyle/>
           <a:p>
-            <a:pPr indent="0" lvl="0" marL="0" rtl="0" algn="l">
-              <a:spcBef>
-                <a:spcPts val="0"/>
-              </a:spcBef>
-              <a:spcAft>
-                <a:spcPts val="0"/>
-              </a:spcAft>
-              <a:buNone/>
+            <a:pPr marL="0" lvl="0" indent="0" algn="l" rtl="0">
+              <a:spcBef>
+                <a:spcPts val="0"/>
+              </a:spcBef>
+              <a:spcAft>
+                <a:spcPts val="0"/>
+              </a:spcAft>
+              <a:buNone/>
+              <a:defRPr/>
             </a:pPr>
             <a:r>
-              <a:rPr b="1" lang="en" sz="3600">
+              <a:rPr lang="en" sz="3600" b="1">
                 <a:highlight>
                   <a:schemeClr val="lt1"/>
                 </a:highlight>
                 <a:latin typeface="Courier New"/>
                 <a:ea typeface="Courier New"/>
                 <a:cs typeface="Courier New"/>
-                <a:sym typeface="Courier New"/>
               </a:rPr>
               <a:t>WORKING PRINCIPLE</a:t>
             </a:r>
@@ -9049,28 +8960,28 @@
       </p:sp>
       <p:sp>
         <p:nvSpPr>
-          <p:cNvPr id="86" name="Google Shape;86;p18"/>
+          <p:cNvPr id="292497538" name="Google Shape;86;p18"/>
           <p:cNvSpPr txBox="1"/>
           <p:nvPr>
-            <p:ph idx="1" type="body"/>
+            <p:ph type="body" idx="1"/>
           </p:nvPr>
         </p:nvSpPr>
-        <p:spPr>
-          <a:xfrm>
-            <a:off x="213475" y="1313850"/>
-            <a:ext cx="8520600" cy="3416400"/>
+        <p:spPr bwMode="auto">
+          <a:xfrm flipH="0" flipV="0">
+            <a:off x="58500" y="1313849"/>
+            <a:ext cx="9043146" cy="3416400"/>
           </a:xfrm>
           <a:prstGeom prst="rect">
             <a:avLst/>
           </a:prstGeom>
         </p:spPr>
         <p:txBody>
-          <a:bodyPr anchorCtr="0" anchor="t" bIns="91425" lIns="91425" spcFirstLastPara="1" rIns="91425" wrap="square" tIns="91425">
+          <a:bodyPr spcFirstLastPara="1" wrap="square" lIns="91424" tIns="91424" rIns="91424" bIns="91424" anchor="t" anchorCtr="0">
             <a:noAutofit/>
           </a:bodyPr>
           <a:lstStyle/>
           <a:p>
-            <a:pPr indent="0" lvl="0" marL="0" rtl="0" algn="l">
+            <a:pPr marL="0" lvl="0" indent="0" algn="l" rtl="0">
               <a:lnSpc>
                 <a:spcPct val="135714"/>
               </a:lnSpc>
@@ -9086,6 +8997,7 @@
               <a:buSzPts val="1100"/>
               <a:buFont typeface="Arial"/>
               <a:buNone/>
+              <a:defRPr/>
             </a:pPr>
             <a:r>
               <a:rPr lang="en" sz="2000">
@@ -9098,7 +9010,6 @@
                 <a:latin typeface="Courier New"/>
                 <a:ea typeface="Courier New"/>
                 <a:cs typeface="Courier New"/>
-                <a:sym typeface="Courier New"/>
               </a:rPr>
               <a:t>-</a:t>
             </a:r>
@@ -9113,12 +9024,11 @@
                 <a:latin typeface="Courier New"/>
                 <a:ea typeface="Courier New"/>
                 <a:cs typeface="Courier New"/>
-                <a:sym typeface="Courier New"/>
               </a:rPr>
               <a:t> </a:t>
             </a:r>
             <a:r>
-              <a:rPr b="1" lang="en" sz="2000">
+              <a:rPr lang="en" sz="2000" b="1">
                 <a:solidFill>
                   <a:schemeClr val="dk1"/>
                 </a:solidFill>
@@ -9128,7 +9038,6 @@
                 <a:latin typeface="Courier New"/>
                 <a:ea typeface="Courier New"/>
                 <a:cs typeface="Courier New"/>
-                <a:sym typeface="Courier New"/>
               </a:rPr>
               <a:t>Input</a:t>
             </a:r>
@@ -9143,7 +9052,6 @@
                 <a:latin typeface="Courier New"/>
                 <a:ea typeface="Courier New"/>
                 <a:cs typeface="Courier New"/>
-                <a:sym typeface="Courier New"/>
               </a:rPr>
               <a:t>: clk, rst_n, opcode, valid, mode</a:t>
             </a:r>
@@ -9157,11 +9065,10 @@
               <a:latin typeface="Courier New"/>
               <a:ea typeface="Courier New"/>
               <a:cs typeface="Courier New"/>
-              <a:sym typeface="Courier New"/>
             </a:endParaRPr>
           </a:p>
           <a:p>
-            <a:pPr indent="0" lvl="0" marL="0" rtl="0" algn="l">
+            <a:pPr marL="0" lvl="0" indent="0" algn="l" rtl="0">
               <a:lnSpc>
                 <a:spcPct val="135714"/>
               </a:lnSpc>
@@ -9177,6 +9084,7 @@
               <a:buSzPts val="1100"/>
               <a:buFont typeface="Arial"/>
               <a:buNone/>
+              <a:defRPr/>
             </a:pPr>
             <a:r>
               <a:rPr lang="en" sz="2000">
@@ -9189,7 +9097,6 @@
                 <a:latin typeface="Courier New"/>
                 <a:ea typeface="Courier New"/>
                 <a:cs typeface="Courier New"/>
-                <a:sym typeface="Courier New"/>
               </a:rPr>
               <a:t>-</a:t>
             </a:r>
@@ -9204,12 +9111,11 @@
                 <a:latin typeface="Courier New"/>
                 <a:ea typeface="Courier New"/>
                 <a:cs typeface="Courier New"/>
-                <a:sym typeface="Courier New"/>
               </a:rPr>
               <a:t> </a:t>
             </a:r>
             <a:r>
-              <a:rPr b="1" lang="en" sz="2000">
+              <a:rPr lang="en" sz="2000" b="1">
                 <a:solidFill>
                   <a:schemeClr val="dk1"/>
                 </a:solidFill>
@@ -9219,7 +9125,6 @@
                 <a:latin typeface="Courier New"/>
                 <a:ea typeface="Courier New"/>
                 <a:cs typeface="Courier New"/>
-                <a:sym typeface="Courier New"/>
               </a:rPr>
               <a:t>Mode=0</a:t>
             </a:r>
@@ -9234,9 +9139,8 @@
                 <a:latin typeface="Courier New"/>
                 <a:ea typeface="Courier New"/>
                 <a:cs typeface="Courier New"/>
-                <a:sym typeface="Courier New"/>
               </a:rPr>
-              <a:t>: Uses Low-Power control unit (slower, less power)</a:t>
+              <a:t>: Uses Low-Power control unit (slower,less power)</a:t>
             </a:r>
             <a:endParaRPr sz="2000">
               <a:solidFill>
@@ -9248,11 +9152,10 @@
               <a:latin typeface="Courier New"/>
               <a:ea typeface="Courier New"/>
               <a:cs typeface="Courier New"/>
-              <a:sym typeface="Courier New"/>
             </a:endParaRPr>
           </a:p>
           <a:p>
-            <a:pPr indent="0" lvl="0" marL="0" rtl="0" algn="l">
+            <a:pPr marL="0" lvl="0" indent="0" algn="l" rtl="0">
               <a:lnSpc>
                 <a:spcPct val="135714"/>
               </a:lnSpc>
@@ -9268,6 +9171,7 @@
               <a:buSzPts val="1100"/>
               <a:buFont typeface="Arial"/>
               <a:buNone/>
+              <a:defRPr/>
             </a:pPr>
             <a:r>
               <a:rPr lang="en" sz="2000">
@@ -9280,7 +9184,6 @@
                 <a:latin typeface="Courier New"/>
                 <a:ea typeface="Courier New"/>
                 <a:cs typeface="Courier New"/>
-                <a:sym typeface="Courier New"/>
               </a:rPr>
               <a:t>-</a:t>
             </a:r>
@@ -9295,12 +9198,11 @@
                 <a:latin typeface="Courier New"/>
                 <a:ea typeface="Courier New"/>
                 <a:cs typeface="Courier New"/>
-                <a:sym typeface="Courier New"/>
               </a:rPr>
               <a:t> </a:t>
             </a:r>
             <a:r>
-              <a:rPr b="1" lang="en" sz="2000">
+              <a:rPr lang="en" sz="2000" b="1">
                 <a:solidFill>
                   <a:schemeClr val="dk1"/>
                 </a:solidFill>
@@ -9310,7 +9212,6 @@
                 <a:latin typeface="Courier New"/>
                 <a:ea typeface="Courier New"/>
                 <a:cs typeface="Courier New"/>
-                <a:sym typeface="Courier New"/>
               </a:rPr>
               <a:t>Mode=1</a:t>
             </a:r>
@@ -9325,7 +9226,6 @@
                 <a:latin typeface="Courier New"/>
                 <a:ea typeface="Courier New"/>
                 <a:cs typeface="Courier New"/>
-                <a:sym typeface="Courier New"/>
               </a:rPr>
               <a:t>: Uses High-Perf control unit (faster, more power)</a:t>
             </a:r>
@@ -9339,11 +9239,10 @@
               <a:latin typeface="Courier New"/>
               <a:ea typeface="Courier New"/>
               <a:cs typeface="Courier New"/>
-              <a:sym typeface="Courier New"/>
             </a:endParaRPr>
           </a:p>
           <a:p>
-            <a:pPr indent="0" lvl="0" marL="0" rtl="0" algn="l">
+            <a:pPr marL="0" lvl="0" indent="0" algn="l" rtl="0">
               <a:lnSpc>
                 <a:spcPct val="135714"/>
               </a:lnSpc>
@@ -9359,6 +9258,7 @@
               <a:buSzPts val="1100"/>
               <a:buFont typeface="Arial"/>
               <a:buNone/>
+              <a:defRPr/>
             </a:pPr>
             <a:r>
               <a:rPr lang="en" sz="2000">
@@ -9371,7 +9271,6 @@
                 <a:latin typeface="Courier New"/>
                 <a:ea typeface="Courier New"/>
                 <a:cs typeface="Courier New"/>
-                <a:sym typeface="Courier New"/>
               </a:rPr>
               <a:t>-</a:t>
             </a:r>
@@ -9386,7 +9285,6 @@
                 <a:latin typeface="Courier New"/>
                 <a:ea typeface="Courier New"/>
                 <a:cs typeface="Courier New"/>
-                <a:sym typeface="Courier New"/>
               </a:rPr>
               <a:t> Supports 5 opcodes: NOP, ADD, SUB, AND, OR</a:t>
             </a:r>
@@ -9400,11 +9298,10 @@
               <a:latin typeface="Courier New"/>
               <a:ea typeface="Courier New"/>
               <a:cs typeface="Courier New"/>
-              <a:sym typeface="Courier New"/>
             </a:endParaRPr>
           </a:p>
           <a:p>
-            <a:pPr indent="0" lvl="0" marL="0" rtl="0" algn="l">
+            <a:pPr marL="0" lvl="0" indent="0" algn="l" rtl="0">
               <a:lnSpc>
                 <a:spcPct val="135714"/>
               </a:lnSpc>
@@ -9420,10 +9317,8 @@
               <a:buSzPts val="1100"/>
               <a:buFont typeface="Arial"/>
               <a:buNone/>
+              <a:defRPr/>
             </a:pPr>
-            <a:r>
-              <a:t/>
-            </a:r>
             <a:endParaRPr sz="2000">
               <a:solidFill>
                 <a:schemeClr val="dk1"/>
@@ -9434,11 +9329,10 @@
               <a:latin typeface="Courier New"/>
               <a:ea typeface="Courier New"/>
               <a:cs typeface="Courier New"/>
-              <a:sym typeface="Courier New"/>
             </a:endParaRPr>
           </a:p>
           <a:p>
-            <a:pPr indent="0" lvl="0" marL="0" rtl="0" algn="l">
+            <a:pPr marL="0" lvl="0" indent="0" algn="l" rtl="0">
               <a:spcBef>
                 <a:spcPts val="0"/>
               </a:spcBef>
@@ -9446,10 +9340,8 @@
                 <a:spcPts val="1200"/>
               </a:spcAft>
               <a:buNone/>
+              <a:defRPr/>
             </a:pPr>
-            <a:r>
-              <a:t/>
-            </a:r>
             <a:endParaRPr sz="2000">
               <a:solidFill>
                 <a:schemeClr val="dk1"/>
@@ -9460,7 +9352,6 @@
               <a:latin typeface="Courier New"/>
               <a:ea typeface="Courier New"/>
               <a:cs typeface="Courier New"/>
-              <a:sym typeface="Courier New"/>
             </a:endParaRPr>
           </a:p>
         </p:txBody>
@@ -9470,19 +9361,27 @@
   <p:clrMapOvr>
     <a:masterClrMapping/>
   </p:clrMapOvr>
+  <mc:AlternateContent xmlns:mc="http://schemas.openxmlformats.org/markup-compatibility/2006">
+    <mc:Choice xmlns:p159="http://schemas.microsoft.com/office/powerpoint/2015/09/main" xmlns:p14="http://schemas.microsoft.com/office/powerpoint/2010/main" Requires="p159">
+      <p:transition p14:dur="500" advClick="1"/>
+    </mc:Choice>
+    <mc:Fallback>
+      <p:transition advClick="1"/>
+    </mc:Fallback>
+  </mc:AlternateContent>
 </p:sld>
 </file>
 
 <file path=ppt/slides/slide7.xml><?xml version="1.0" encoding="utf-8"?>
-<p:sld xmlns:a="http://schemas.openxmlformats.org/drawingml/2006/main" xmlns:r="http://schemas.openxmlformats.org/officeDocument/2006/relationships" xmlns:mc="http://schemas.openxmlformats.org/markup-compatibility/2006" xmlns:mv="urn:schemas-microsoft-com:mac:vml" xmlns:p="http://schemas.openxmlformats.org/presentationml/2006/main" xmlns:c="http://schemas.openxmlformats.org/drawingml/2006/chart" xmlns:dgm="http://schemas.openxmlformats.org/drawingml/2006/diagram" xmlns:o="urn:schemas-microsoft-com:office:office" xmlns:v="urn:schemas-microsoft-com:vml" xmlns:pvml="urn:schemas-microsoft-com:office:powerpoint" xmlns:com="http://schemas.openxmlformats.org/drawingml/2006/compatibility" xmlns:p14="http://schemas.microsoft.com/office/powerpoint/2010/main" xmlns:p15="http://schemas.microsoft.com/office/powerpoint/2012/main" xmlns:ahyp="http://schemas.microsoft.com/office/drawing/2018/hyperlinkcolor">
-  <p:cSld>
+<p:sld xmlns:a="http://schemas.openxmlformats.org/drawingml/2006/main" xmlns:r="http://schemas.openxmlformats.org/officeDocument/2006/relationships" xmlns:p="http://schemas.openxmlformats.org/presentationml/2006/main" xmlns:m="http://schemas.openxmlformats.org/officeDocument/2006/math" xmlns:w="http://schemas.openxmlformats.org/wordprocessingml/2006/main" xmlns:mc="http://schemas.openxmlformats.org/markup-compatibility/2006" showMasterPhAnim="0" showMasterSp="1" show="1">
+  <p:cSld name="">
     <p:spTree>
       <p:nvGrpSpPr>
-        <p:cNvPr id="90" name="Shape 90"/>
+        <p:cNvPr id="1" name=""/>
         <p:cNvGrpSpPr/>
         <p:nvPr/>
       </p:nvGrpSpPr>
-      <p:grpSpPr>
+      <p:grpSpPr bwMode="auto">
         <a:xfrm>
           <a:off x="0" y="0"/>
           <a:ext cx="0" cy="0"/>
@@ -9492,13 +9391,13 @@
       </p:grpSpPr>
       <p:sp>
         <p:nvSpPr>
-          <p:cNvPr id="91" name="Google Shape;91;p19"/>
+          <p:cNvPr id="1970490409" name="Google Shape;91;p19"/>
           <p:cNvSpPr txBox="1"/>
           <p:nvPr>
             <p:ph type="title"/>
           </p:nvPr>
         </p:nvSpPr>
-        <p:spPr>
+        <p:spPr bwMode="auto">
           <a:xfrm>
             <a:off x="311700" y="445025"/>
             <a:ext cx="8520600" cy="572700"/>
@@ -9508,29 +9407,29 @@
           </a:prstGeom>
         </p:spPr>
         <p:txBody>
-          <a:bodyPr anchorCtr="0" anchor="t" bIns="91425" lIns="91425" spcFirstLastPara="1" rIns="91425" wrap="square" tIns="91425">
+          <a:bodyPr spcFirstLastPara="1" wrap="square" lIns="91425" tIns="91425" rIns="91425" bIns="91425" anchor="t" anchorCtr="0">
             <a:noAutofit/>
           </a:bodyPr>
           <a:lstStyle/>
           <a:p>
-            <a:pPr indent="0" lvl="0" marL="0" rtl="0" algn="l">
-              <a:spcBef>
-                <a:spcPts val="0"/>
-              </a:spcBef>
-              <a:spcAft>
-                <a:spcPts val="0"/>
-              </a:spcAft>
-              <a:buNone/>
+            <a:pPr marL="0" lvl="0" indent="0" algn="l" rtl="0">
+              <a:spcBef>
+                <a:spcPts val="0"/>
+              </a:spcBef>
+              <a:spcAft>
+                <a:spcPts val="0"/>
+              </a:spcAft>
+              <a:buNone/>
+              <a:defRPr/>
             </a:pPr>
             <a:r>
-              <a:rPr b="1" lang="en" sz="3600">
+              <a:rPr lang="en" sz="3600" b="1">
                 <a:highlight>
                   <a:schemeClr val="lt1"/>
                 </a:highlight>
                 <a:latin typeface="Courier New"/>
                 <a:ea typeface="Courier New"/>
                 <a:cs typeface="Courier New"/>
-                <a:sym typeface="Courier New"/>
               </a:rPr>
               <a:t>POWER REPORT</a:t>
             </a:r>
@@ -9544,19 +9443,17 @@
       </p:sp>
       <p:pic>
         <p:nvPicPr>
-          <p:cNvPr id="92" name="Google Shape;92;p19"/>
-          <p:cNvPicPr preferRelativeResize="0"/>
+          <p:cNvPr id="395379786" name="Google Shape;92;p19"/>
+          <p:cNvPicPr/>
           <p:nvPr/>
         </p:nvPicPr>
-        <p:blipFill>
+        <p:blipFill rotWithShape="1">
           <a:blip r:embed="rId3">
             <a:alphaModFix/>
           </a:blip>
-          <a:stretch>
-            <a:fillRect/>
-          </a:stretch>
+          <a:stretch/>
         </p:blipFill>
-        <p:spPr>
+        <p:spPr bwMode="auto">
           <a:xfrm>
             <a:off x="213476" y="1650676"/>
             <a:ext cx="8520599" cy="1783381"/>
@@ -9575,19 +9472,27 @@
   <p:clrMapOvr>
     <a:masterClrMapping/>
   </p:clrMapOvr>
+  <mc:AlternateContent xmlns:mc="http://schemas.openxmlformats.org/markup-compatibility/2006">
+    <mc:Choice xmlns:p159="http://schemas.microsoft.com/office/powerpoint/2015/09/main" xmlns:p14="http://schemas.microsoft.com/office/powerpoint/2010/main" Requires="p159">
+      <p:transition p14:dur="500" advClick="1"/>
+    </mc:Choice>
+    <mc:Fallback>
+      <p:transition advClick="1"/>
+    </mc:Fallback>
+  </mc:AlternateContent>
 </p:sld>
 </file>
 
 <file path=ppt/slides/slide8.xml><?xml version="1.0" encoding="utf-8"?>
-<p:sld xmlns:a="http://schemas.openxmlformats.org/drawingml/2006/main" xmlns:r="http://schemas.openxmlformats.org/officeDocument/2006/relationships" xmlns:mc="http://schemas.openxmlformats.org/markup-compatibility/2006" xmlns:mv="urn:schemas-microsoft-com:mac:vml" xmlns:p="http://schemas.openxmlformats.org/presentationml/2006/main" xmlns:c="http://schemas.openxmlformats.org/drawingml/2006/chart" xmlns:dgm="http://schemas.openxmlformats.org/drawingml/2006/diagram" xmlns:o="urn:schemas-microsoft-com:office:office" xmlns:v="urn:schemas-microsoft-com:vml" xmlns:pvml="urn:schemas-microsoft-com:office:powerpoint" xmlns:com="http://schemas.openxmlformats.org/drawingml/2006/compatibility" xmlns:p14="http://schemas.microsoft.com/office/powerpoint/2010/main" xmlns:p15="http://schemas.microsoft.com/office/powerpoint/2012/main" xmlns:ahyp="http://schemas.microsoft.com/office/drawing/2018/hyperlinkcolor">
-  <p:cSld>
+<p:sld xmlns:a="http://schemas.openxmlformats.org/drawingml/2006/main" xmlns:r="http://schemas.openxmlformats.org/officeDocument/2006/relationships" xmlns:p="http://schemas.openxmlformats.org/presentationml/2006/main" xmlns:m="http://schemas.openxmlformats.org/officeDocument/2006/math" xmlns:w="http://schemas.openxmlformats.org/wordprocessingml/2006/main" xmlns:mc="http://schemas.openxmlformats.org/markup-compatibility/2006" showMasterPhAnim="0" showMasterSp="1" show="1">
+  <p:cSld name="">
     <p:spTree>
       <p:nvGrpSpPr>
-        <p:cNvPr id="96" name="Shape 96"/>
+        <p:cNvPr id="1" name=""/>
         <p:cNvGrpSpPr/>
         <p:nvPr/>
       </p:nvGrpSpPr>
-      <p:grpSpPr>
+      <p:grpSpPr bwMode="auto">
         <a:xfrm>
           <a:off x="0" y="0"/>
           <a:ext cx="0" cy="0"/>
@@ -9597,13 +9502,13 @@
       </p:grpSpPr>
       <p:sp>
         <p:nvSpPr>
-          <p:cNvPr id="97" name="Google Shape;97;p20"/>
+          <p:cNvPr id="1723028066" name="Google Shape;97;p20"/>
           <p:cNvSpPr txBox="1"/>
           <p:nvPr>
             <p:ph type="title"/>
           </p:nvPr>
         </p:nvSpPr>
-        <p:spPr>
+        <p:spPr bwMode="auto">
           <a:xfrm>
             <a:off x="311700" y="445025"/>
             <a:ext cx="8520600" cy="572700"/>
@@ -9613,29 +9518,29 @@
           </a:prstGeom>
         </p:spPr>
         <p:txBody>
-          <a:bodyPr anchorCtr="0" anchor="t" bIns="91425" lIns="91425" spcFirstLastPara="1" rIns="91425" wrap="square" tIns="91425">
+          <a:bodyPr spcFirstLastPara="1" wrap="square" lIns="91425" tIns="91425" rIns="91425" bIns="91425" anchor="t" anchorCtr="0">
             <a:noAutofit/>
           </a:bodyPr>
           <a:lstStyle/>
           <a:p>
-            <a:pPr indent="0" lvl="0" marL="0" rtl="0" algn="l">
-              <a:spcBef>
-                <a:spcPts val="0"/>
-              </a:spcBef>
-              <a:spcAft>
-                <a:spcPts val="0"/>
-              </a:spcAft>
-              <a:buNone/>
+            <a:pPr marL="0" lvl="0" indent="0" algn="l" rtl="0">
+              <a:spcBef>
+                <a:spcPts val="0"/>
+              </a:spcBef>
+              <a:spcAft>
+                <a:spcPts val="0"/>
+              </a:spcAft>
+              <a:buNone/>
+              <a:defRPr/>
             </a:pPr>
             <a:r>
-              <a:rPr b="1" lang="en" sz="3600">
+              <a:rPr lang="en" sz="3600" b="1">
                 <a:highlight>
                   <a:schemeClr val="lt1"/>
                 </a:highlight>
                 <a:latin typeface="Courier New"/>
                 <a:ea typeface="Courier New"/>
                 <a:cs typeface="Courier New"/>
-                <a:sym typeface="Courier New"/>
               </a:rPr>
               <a:t>TIMING REPORT</a:t>
             </a:r>
@@ -9649,20 +9554,20 @@
       </p:sp>
       <p:pic>
         <p:nvPicPr>
-          <p:cNvPr id="98" name="Google Shape;98;p20"/>
-          <p:cNvPicPr preferRelativeResize="0"/>
+          <p:cNvPr id="166922456" name="Google Shape;98;p20"/>
+          <p:cNvPicPr/>
           <p:nvPr/>
         </p:nvPicPr>
         <p:blipFill rotWithShape="1">
           <a:blip r:embed="rId3">
             <a:alphaModFix/>
           </a:blip>
-          <a:srcRect b="33402" l="8834" r="0" t="11252"/>
+          <a:srcRect l="8834" t="11252" r="0" b="33402"/>
           <a:stretch/>
         </p:blipFill>
-        <p:spPr>
+        <p:spPr bwMode="auto">
           <a:xfrm>
-            <a:off x="84225" y="1298150"/>
+            <a:off x="84224" y="1298150"/>
             <a:ext cx="8994424" cy="2133200"/>
           </a:xfrm>
           <a:prstGeom prst="rect">
@@ -9679,19 +9584,27 @@
   <p:clrMapOvr>
     <a:masterClrMapping/>
   </p:clrMapOvr>
+  <mc:AlternateContent xmlns:mc="http://schemas.openxmlformats.org/markup-compatibility/2006">
+    <mc:Choice xmlns:p159="http://schemas.microsoft.com/office/powerpoint/2015/09/main" xmlns:p14="http://schemas.microsoft.com/office/powerpoint/2010/main" Requires="p159">
+      <p:transition p14:dur="500" advClick="1"/>
+    </mc:Choice>
+    <mc:Fallback>
+      <p:transition advClick="1"/>
+    </mc:Fallback>
+  </mc:AlternateContent>
 </p:sld>
 </file>
 
 <file path=ppt/slides/slide9.xml><?xml version="1.0" encoding="utf-8"?>
-<p:sld xmlns:a="http://schemas.openxmlformats.org/drawingml/2006/main" xmlns:r="http://schemas.openxmlformats.org/officeDocument/2006/relationships" xmlns:mc="http://schemas.openxmlformats.org/markup-compatibility/2006" xmlns:mv="urn:schemas-microsoft-com:mac:vml" xmlns:p="http://schemas.openxmlformats.org/presentationml/2006/main" xmlns:c="http://schemas.openxmlformats.org/drawingml/2006/chart" xmlns:dgm="http://schemas.openxmlformats.org/drawingml/2006/diagram" xmlns:o="urn:schemas-microsoft-com:office:office" xmlns:v="urn:schemas-microsoft-com:vml" xmlns:pvml="urn:schemas-microsoft-com:office:powerpoint" xmlns:com="http://schemas.openxmlformats.org/drawingml/2006/compatibility" xmlns:p14="http://schemas.microsoft.com/office/powerpoint/2010/main" xmlns:p15="http://schemas.microsoft.com/office/powerpoint/2012/main" xmlns:ahyp="http://schemas.microsoft.com/office/drawing/2018/hyperlinkcolor">
-  <p:cSld>
+<p:sld xmlns:a="http://schemas.openxmlformats.org/drawingml/2006/main" xmlns:r="http://schemas.openxmlformats.org/officeDocument/2006/relationships" xmlns:p="http://schemas.openxmlformats.org/presentationml/2006/main" xmlns:m="http://schemas.openxmlformats.org/officeDocument/2006/math" xmlns:w="http://schemas.openxmlformats.org/wordprocessingml/2006/main" xmlns:mc="http://schemas.openxmlformats.org/markup-compatibility/2006" showMasterPhAnim="0" showMasterSp="1" show="1">
+  <p:cSld name="">
     <p:spTree>
       <p:nvGrpSpPr>
-        <p:cNvPr id="102" name="Shape 102"/>
+        <p:cNvPr id="1" name=""/>
         <p:cNvGrpSpPr/>
         <p:nvPr/>
       </p:nvGrpSpPr>
-      <p:grpSpPr>
+      <p:grpSpPr bwMode="auto">
         <a:xfrm>
           <a:off x="0" y="0"/>
           <a:ext cx="0" cy="0"/>
@@ -9701,13 +9614,13 @@
       </p:grpSpPr>
       <p:sp>
         <p:nvSpPr>
-          <p:cNvPr id="103" name="Google Shape;103;p21"/>
+          <p:cNvPr id="1187432945" name="Google Shape;103;p21"/>
           <p:cNvSpPr txBox="1"/>
           <p:nvPr>
             <p:ph type="title"/>
           </p:nvPr>
         </p:nvSpPr>
-        <p:spPr>
+        <p:spPr bwMode="auto">
           <a:xfrm>
             <a:off x="311700" y="445025"/>
             <a:ext cx="8520600" cy="572700"/>
@@ -9717,29 +9630,29 @@
           </a:prstGeom>
         </p:spPr>
         <p:txBody>
-          <a:bodyPr anchorCtr="0" anchor="t" bIns="91425" lIns="91425" spcFirstLastPara="1" rIns="91425" wrap="square" tIns="91425">
+          <a:bodyPr spcFirstLastPara="1" wrap="square" lIns="91425" tIns="91425" rIns="91425" bIns="91425" anchor="t" anchorCtr="0">
             <a:noAutofit/>
           </a:bodyPr>
           <a:lstStyle/>
           <a:p>
-            <a:pPr indent="0" lvl="0" marL="0" rtl="0" algn="l">
-              <a:spcBef>
-                <a:spcPts val="0"/>
-              </a:spcBef>
-              <a:spcAft>
-                <a:spcPts val="0"/>
-              </a:spcAft>
-              <a:buNone/>
+            <a:pPr marL="0" lvl="0" indent="0" algn="l" rtl="0">
+              <a:spcBef>
+                <a:spcPts val="0"/>
+              </a:spcBef>
+              <a:spcAft>
+                <a:spcPts val="0"/>
+              </a:spcAft>
+              <a:buNone/>
+              <a:defRPr/>
             </a:pPr>
             <a:r>
-              <a:rPr b="1" lang="en" sz="3600">
+              <a:rPr lang="en" sz="3600" b="1">
                 <a:highlight>
                   <a:schemeClr val="lt1"/>
                 </a:highlight>
                 <a:latin typeface="Courier New"/>
                 <a:ea typeface="Courier New"/>
                 <a:cs typeface="Courier New"/>
-                <a:sym typeface="Courier New"/>
               </a:rPr>
               <a:t>ADVANTAGES</a:t>
             </a:r>
@@ -9753,15 +9666,15 @@
       </p:sp>
       <p:sp>
         <p:nvSpPr>
-          <p:cNvPr id="104" name="Google Shape;104;p21"/>
+          <p:cNvPr id="431870019" name="Google Shape;104;p21"/>
           <p:cNvSpPr txBox="1"/>
           <p:nvPr>
-            <p:ph idx="1" type="body"/>
+            <p:ph type="body" idx="1"/>
           </p:nvPr>
         </p:nvSpPr>
-        <p:spPr>
+        <p:spPr bwMode="auto">
           <a:xfrm>
-            <a:off x="213475" y="1313850"/>
+            <a:off x="213475" y="1313849"/>
             <a:ext cx="8520600" cy="3416400"/>
           </a:xfrm>
           <a:prstGeom prst="rect">
@@ -9769,12 +9682,12 @@
           </a:prstGeom>
         </p:spPr>
         <p:txBody>
-          <a:bodyPr anchorCtr="0" anchor="t" bIns="91425" lIns="91425" spcFirstLastPara="1" rIns="91425" wrap="square" tIns="91425">
+          <a:bodyPr spcFirstLastPara="1" wrap="square" lIns="91425" tIns="91425" rIns="91425" bIns="91425" anchor="t" anchorCtr="0">
             <a:noAutofit/>
           </a:bodyPr>
           <a:lstStyle/>
           <a:p>
-            <a:pPr indent="0" lvl="0" marL="0" rtl="0" algn="l">
+            <a:pPr marL="0" lvl="0" indent="0" algn="l" rtl="0">
               <a:lnSpc>
                 <a:spcPct val="135714"/>
               </a:lnSpc>
@@ -9790,6 +9703,7 @@
               <a:buSzPts val="1100"/>
               <a:buFont typeface="Arial"/>
               <a:buNone/>
+              <a:defRPr/>
             </a:pPr>
             <a:r>
               <a:rPr lang="en" sz="2000">
@@ -9802,12 +9716,11 @@
                 <a:latin typeface="Courier New"/>
                 <a:ea typeface="Courier New"/>
                 <a:cs typeface="Courier New"/>
-                <a:sym typeface="Courier New"/>
               </a:rPr>
               <a:t>- </a:t>
             </a:r>
             <a:r>
-              <a:rPr b="1" lang="en" sz="2000">
+              <a:rPr lang="en" sz="2000" b="1">
                 <a:solidFill>
                   <a:schemeClr val="dk1"/>
                 </a:solidFill>
@@ -9817,7 +9730,6 @@
                 <a:latin typeface="Courier New"/>
                 <a:ea typeface="Courier New"/>
                 <a:cs typeface="Courier New"/>
-                <a:sym typeface="Courier New"/>
               </a:rPr>
               <a:t>Flexibility:</a:t>
             </a:r>
@@ -9832,7 +9744,6 @@
                 <a:latin typeface="Courier New"/>
                 <a:ea typeface="Courier New"/>
                 <a:cs typeface="Courier New"/>
-                <a:sym typeface="Courier New"/>
               </a:rPr>
               <a:t> Dynamic runtime mode switching</a:t>
             </a:r>
@@ -9846,11 +9757,10 @@
               <a:latin typeface="Courier New"/>
               <a:ea typeface="Courier New"/>
               <a:cs typeface="Courier New"/>
-              <a:sym typeface="Courier New"/>
             </a:endParaRPr>
           </a:p>
           <a:p>
-            <a:pPr indent="0" lvl="0" marL="0" rtl="0" algn="l">
+            <a:pPr marL="0" lvl="0" indent="0" algn="l" rtl="0">
               <a:lnSpc>
                 <a:spcPct val="135714"/>
               </a:lnSpc>
@@ -9866,6 +9776,7 @@
               <a:buSzPts val="1100"/>
               <a:buFont typeface="Arial"/>
               <a:buNone/>
+              <a:defRPr/>
             </a:pPr>
             <a:r>
               <a:rPr lang="en" sz="2000">
@@ -9878,12 +9789,11 @@
                 <a:latin typeface="Courier New"/>
                 <a:ea typeface="Courier New"/>
                 <a:cs typeface="Courier New"/>
-                <a:sym typeface="Courier New"/>
               </a:rPr>
               <a:t>- </a:t>
             </a:r>
             <a:r>
-              <a:rPr b="1" lang="en" sz="2000">
+              <a:rPr lang="en" sz="2000" b="1">
                 <a:solidFill>
                   <a:schemeClr val="dk1"/>
                 </a:solidFill>
@@ -9893,7 +9803,6 @@
                 <a:latin typeface="Courier New"/>
                 <a:ea typeface="Courier New"/>
                 <a:cs typeface="Courier New"/>
-                <a:sym typeface="Courier New"/>
               </a:rPr>
               <a:t>Power Saving:</a:t>
             </a:r>
@@ -9908,7 +9817,6 @@
                 <a:latin typeface="Courier New"/>
                 <a:ea typeface="Courier New"/>
                 <a:cs typeface="Courier New"/>
-                <a:sym typeface="Courier New"/>
               </a:rPr>
               <a:t> Use low-power mode for simple tasks</a:t>
             </a:r>
@@ -9922,11 +9830,10 @@
               <a:latin typeface="Courier New"/>
               <a:ea typeface="Courier New"/>
               <a:cs typeface="Courier New"/>
-              <a:sym typeface="Courier New"/>
             </a:endParaRPr>
           </a:p>
           <a:p>
-            <a:pPr indent="0" lvl="0" marL="0" rtl="0" algn="l">
+            <a:pPr marL="0" lvl="0" indent="0" algn="l" rtl="0">
               <a:lnSpc>
                 <a:spcPct val="135714"/>
               </a:lnSpc>
@@ -9942,6 +9849,7 @@
               <a:buSzPts val="1100"/>
               <a:buFont typeface="Arial"/>
               <a:buNone/>
+              <a:defRPr/>
             </a:pPr>
             <a:r>
               <a:rPr lang="en" sz="2000">
@@ -9954,12 +9862,11 @@
                 <a:latin typeface="Courier New"/>
                 <a:ea typeface="Courier New"/>
                 <a:cs typeface="Courier New"/>
-                <a:sym typeface="Courier New"/>
               </a:rPr>
               <a:t>- </a:t>
             </a:r>
             <a:r>
-              <a:rPr b="1" lang="en" sz="2000">
+              <a:rPr lang="en" sz="2000" b="1">
                 <a:solidFill>
                   <a:schemeClr val="dk1"/>
                 </a:solidFill>
@@ -9969,7 +9876,6 @@
                 <a:latin typeface="Courier New"/>
                 <a:ea typeface="Courier New"/>
                 <a:cs typeface="Courier New"/>
-                <a:sym typeface="Courier New"/>
               </a:rPr>
               <a:t>Performance:</a:t>
             </a:r>
@@ -9984,7 +9890,6 @@
                 <a:latin typeface="Courier New"/>
                 <a:ea typeface="Courier New"/>
                 <a:cs typeface="Courier New"/>
-                <a:sym typeface="Courier New"/>
               </a:rPr>
               <a:t> Use high-perf mode for critical operations</a:t>
             </a:r>
@@ -9998,11 +9903,10 @@
               <a:latin typeface="Courier New"/>
               <a:ea typeface="Courier New"/>
               <a:cs typeface="Courier New"/>
-              <a:sym typeface="Courier New"/>
             </a:endParaRPr>
           </a:p>
           <a:p>
-            <a:pPr indent="0" lvl="0" marL="0" rtl="0" algn="l">
+            <a:pPr marL="0" lvl="0" indent="0" algn="l" rtl="0">
               <a:lnSpc>
                 <a:spcPct val="135714"/>
               </a:lnSpc>
@@ -10018,6 +9922,7 @@
               <a:buSzPts val="1100"/>
               <a:buFont typeface="Arial"/>
               <a:buNone/>
+              <a:defRPr/>
             </a:pPr>
             <a:r>
               <a:rPr lang="en" sz="2000">
@@ -10030,12 +9935,11 @@
                 <a:latin typeface="Courier New"/>
                 <a:ea typeface="Courier New"/>
                 <a:cs typeface="Courier New"/>
-                <a:sym typeface="Courier New"/>
               </a:rPr>
               <a:t>- </a:t>
             </a:r>
             <a:r>
-              <a:rPr b="1" lang="en" sz="2000">
+              <a:rPr lang="en" sz="2000" b="1">
                 <a:solidFill>
                   <a:schemeClr val="dk1"/>
                 </a:solidFill>
@@ -10045,7 +9949,6 @@
                 <a:latin typeface="Courier New"/>
                 <a:ea typeface="Courier New"/>
                 <a:cs typeface="Courier New"/>
-                <a:sym typeface="Courier New"/>
               </a:rPr>
               <a:t>Scalability:</a:t>
             </a:r>
@@ -10060,7 +9963,6 @@
                 <a:latin typeface="Courier New"/>
                 <a:ea typeface="Courier New"/>
                 <a:cs typeface="Courier New"/>
-                <a:sym typeface="Courier New"/>
               </a:rPr>
               <a:t> Architecture easily extensible</a:t>
             </a:r>
@@ -10074,11 +9976,10 @@
               <a:latin typeface="Courier New"/>
               <a:ea typeface="Courier New"/>
               <a:cs typeface="Courier New"/>
-              <a:sym typeface="Courier New"/>
             </a:endParaRPr>
           </a:p>
           <a:p>
-            <a:pPr indent="0" lvl="0" marL="0" rtl="0" algn="l">
+            <a:pPr marL="0" lvl="0" indent="0" algn="l" rtl="0">
               <a:lnSpc>
                 <a:spcPct val="135714"/>
               </a:lnSpc>
@@ -10094,52 +9995,8 @@
               <a:buSzPts val="1100"/>
               <a:buFont typeface="Arial"/>
               <a:buNone/>
+              <a:defRPr/>
             </a:pPr>
-            <a:r>
-              <a:rPr lang="en" sz="2000">
-                <a:solidFill>
-                  <a:schemeClr val="dk1"/>
-                </a:solidFill>
-                <a:highlight>
-                  <a:srgbClr val="FFFFFF"/>
-                </a:highlight>
-                <a:latin typeface="Courier New"/>
-                <a:ea typeface="Courier New"/>
-                <a:cs typeface="Courier New"/>
-                <a:sym typeface="Courier New"/>
-              </a:rPr>
-              <a:t>- </a:t>
-            </a:r>
-            <a:r>
-              <a:rPr b="1" lang="en" sz="2000">
-                <a:solidFill>
-                  <a:schemeClr val="dk1"/>
-                </a:solidFill>
-                <a:highlight>
-                  <a:srgbClr val="FFFFFF"/>
-                </a:highlight>
-                <a:latin typeface="Courier New"/>
-                <a:ea typeface="Courier New"/>
-                <a:cs typeface="Courier New"/>
-                <a:sym typeface="Courier New"/>
-              </a:rPr>
-              <a:t>Verification:</a:t>
-            </a:r>
-            <a:r>
-              <a:rPr lang="en" sz="2000">
-                <a:solidFill>
-                  <a:schemeClr val="dk1"/>
-                </a:solidFill>
-                <a:highlight>
-                  <a:srgbClr val="FFFFFF"/>
-                </a:highlight>
-                <a:latin typeface="Courier New"/>
-                <a:ea typeface="Courier New"/>
-                <a:cs typeface="Courier New"/>
-                <a:sym typeface="Courier New"/>
-              </a:rPr>
-              <a:t> UVM-style testbench with comprehensive coverage</a:t>
-            </a:r>
             <a:endParaRPr sz="2000">
               <a:solidFill>
                 <a:schemeClr val="dk1"/>
@@ -10150,11 +10007,10 @@
               <a:latin typeface="Courier New"/>
               <a:ea typeface="Courier New"/>
               <a:cs typeface="Courier New"/>
-              <a:sym typeface="Courier New"/>
             </a:endParaRPr>
           </a:p>
           <a:p>
-            <a:pPr indent="0" lvl="0" marL="0" rtl="0" algn="l">
+            <a:pPr marL="0" lvl="0" indent="0" algn="l" rtl="0">
               <a:spcBef>
                 <a:spcPts val="0"/>
               </a:spcBef>
@@ -10162,10 +10018,8 @@
                 <a:spcPts val="1200"/>
               </a:spcAft>
               <a:buNone/>
+              <a:defRPr/>
             </a:pPr>
-            <a:r>
-              <a:t/>
-            </a:r>
             <a:endParaRPr sz="2000">
               <a:solidFill>
                 <a:schemeClr val="dk1"/>
@@ -10176,7 +10030,6 @@
               <a:latin typeface="Courier New"/>
               <a:ea typeface="Courier New"/>
               <a:cs typeface="Courier New"/>
-              <a:sym typeface="Courier New"/>
             </a:endParaRPr>
           </a:p>
         </p:txBody>
@@ -10186,13 +10039,21 @@
   <p:clrMapOvr>
     <a:masterClrMapping/>
   </p:clrMapOvr>
+  <mc:AlternateContent xmlns:mc="http://schemas.openxmlformats.org/markup-compatibility/2006">
+    <mc:Choice xmlns:p159="http://schemas.microsoft.com/office/powerpoint/2015/09/main" xmlns:p14="http://schemas.microsoft.com/office/powerpoint/2010/main" Requires="p159">
+      <p:transition p14:dur="500" advClick="1"/>
+    </mc:Choice>
+    <mc:Fallback>
+      <p:transition advClick="1"/>
+    </mc:Fallback>
+  </mc:AlternateContent>
 </p:sld>
 </file>
 
 <file path=ppt/theme/theme1.xml><?xml version="1.0" encoding="utf-8"?>
-<a:theme xmlns:a="http://schemas.openxmlformats.org/drawingml/2006/main" xmlns:r="http://schemas.openxmlformats.org/officeDocument/2006/relationships">
+<a:theme xmlns:a="http://schemas.openxmlformats.org/drawingml/2006/main" xmlns:r="http://schemas.openxmlformats.org/officeDocument/2006/relationships" xmlns:p="http://schemas.openxmlformats.org/presentationml/2006/main" name="Simple Light">
   <a:themeElements>
-    <a:clrScheme name="Default">
+    <a:clrScheme name="Simple Light">
       <a:dk1>
         <a:srgbClr val="000000"/>
       </a:dk1>
@@ -10200,106 +10061,46 @@
         <a:srgbClr val="FFFFFF"/>
       </a:lt1>
       <a:dk2>
-        <a:srgbClr val="158158"/>
+        <a:srgbClr val="595959"/>
       </a:dk2>
       <a:lt2>
-        <a:srgbClr val="F3F3F3"/>
+        <a:srgbClr val="EEEEEE"/>
       </a:lt2>
       <a:accent1>
-        <a:srgbClr val="058DC7"/>
+        <a:srgbClr val="4285F4"/>
       </a:accent1>
       <a:accent2>
-        <a:srgbClr val="50B432"/>
+        <a:srgbClr val="212121"/>
       </a:accent2>
       <a:accent3>
-        <a:srgbClr val="ED561B"/>
+        <a:srgbClr val="78909C"/>
       </a:accent3>
       <a:accent4>
-        <a:srgbClr val="EDEF00"/>
+        <a:srgbClr val="FFAB40"/>
       </a:accent4>
       <a:accent5>
-        <a:srgbClr val="24CBE5"/>
+        <a:srgbClr val="0097A7"/>
       </a:accent5>
       <a:accent6>
-        <a:srgbClr val="64E572"/>
+        <a:srgbClr val="EEFF41"/>
       </a:accent6>
       <a:hlink>
-        <a:srgbClr val="2200CC"/>
+        <a:srgbClr val="0097A7"/>
       </a:hlink>
       <a:folHlink>
-        <a:srgbClr val="551A8B"/>
+        <a:srgbClr val="0097A7"/>
       </a:folHlink>
     </a:clrScheme>
     <a:fontScheme name="Office">
       <a:majorFont>
         <a:latin typeface="Arial"/>
-        <a:ea typeface=""/>
-        <a:cs typeface=""/>
-        <a:font script="Jpan" typeface="ＭＳ Ｐゴシック"/>
-        <a:font script="Hang" typeface="맑은 고딕"/>
-        <a:font script="Hans" typeface="宋体"/>
-        <a:font script="Hant" typeface="新細明體"/>
-        <a:font script="Arab" typeface="Times New Roman"/>
-        <a:font script="Hebr" typeface="Times New Roman"/>
-        <a:font script="Thai" typeface="Angsana New"/>
-        <a:font script="Ethi" typeface="Nyala"/>
-        <a:font script="Beng" typeface="Vrinda"/>
-        <a:font script="Gujr" typeface="Shruti"/>
-        <a:font script="Khmr" typeface="MoolBoran"/>
-        <a:font script="Knda" typeface="Tunga"/>
-        <a:font script="Guru" typeface="Raavi"/>
-        <a:font script="Cans" typeface="Euphemia"/>
-        <a:font script="Cher" typeface="Plantagenet Cherokee"/>
-        <a:font script="Yiii" typeface="Microsoft Yi Baiti"/>
-        <a:font script="Tibt" typeface="Microsoft Himalaya"/>
-        <a:font script="Thaa" typeface="MV Boli"/>
-        <a:font script="Deva" typeface="Mangal"/>
-        <a:font script="Telu" typeface="Gautami"/>
-        <a:font script="Taml" typeface="Latha"/>
-        <a:font script="Syrc" typeface="Estrangelo Edessa"/>
-        <a:font script="Orya" typeface="Kalinga"/>
-        <a:font script="Mlym" typeface="Kartika"/>
-        <a:font script="Laoo" typeface="DokChampa"/>
-        <a:font script="Sinh" typeface="Iskoola Pota"/>
-        <a:font script="Mong" typeface="Mongolian Baiti"/>
-        <a:font script="Viet" typeface="Times New Roman"/>
-        <a:font script="Uigh" typeface="Microsoft Uighur"/>
-        <a:font script="Geor" typeface="Sylfaen"/>
+        <a:ea typeface="Arial"/>
+        <a:cs typeface="Arial"/>
       </a:majorFont>
       <a:minorFont>
         <a:latin typeface="Arial"/>
-        <a:ea typeface=""/>
-        <a:cs typeface=""/>
-        <a:font script="Jpan" typeface="ＭＳ Ｐゴシック"/>
-        <a:font script="Hang" typeface="맑은 고딕"/>
-        <a:font script="Hans" typeface="宋体"/>
-        <a:font script="Hant" typeface="新細明體"/>
-        <a:font script="Arab" typeface="Arial"/>
-        <a:font script="Hebr" typeface="Arial"/>
-        <a:font script="Thai" typeface="Cordia New"/>
-        <a:font script="Ethi" typeface="Nyala"/>
-        <a:font script="Beng" typeface="Vrinda"/>
-        <a:font script="Gujr" typeface="Shruti"/>
-        <a:font script="Khmr" typeface="DaunPenh"/>
-        <a:font script="Knda" typeface="Tunga"/>
-        <a:font script="Guru" typeface="Raavi"/>
-        <a:font script="Cans" typeface="Euphemia"/>
-        <a:font script="Cher" typeface="Plantagenet Cherokee"/>
-        <a:font script="Yiii" typeface="Microsoft Yi Baiti"/>
-        <a:font script="Tibt" typeface="Microsoft Himalaya"/>
-        <a:font script="Thaa" typeface="MV Boli"/>
-        <a:font script="Deva" typeface="Mangal"/>
-        <a:font script="Telu" typeface="Gautami"/>
-        <a:font script="Taml" typeface="Latha"/>
-        <a:font script="Syrc" typeface="Estrangelo Edessa"/>
-        <a:font script="Orya" typeface="Kalinga"/>
-        <a:font script="Mlym" typeface="Kartika"/>
-        <a:font script="Laoo" typeface="DokChampa"/>
-        <a:font script="Sinh" typeface="Iskoola Pota"/>
-        <a:font script="Mong" typeface="Mongolian Baiti"/>
-        <a:font script="Viet" typeface="Arial"/>
-        <a:font script="Uigh" typeface="Microsoft Uighur"/>
-        <a:font script="Geor" typeface="Sylfaen"/>
+        <a:ea typeface="Arial"/>
+        <a:cs typeface="Arial"/>
       </a:minorFont>
     </a:fontScheme>
     <a:fmtScheme name="Office">
@@ -10307,7 +10108,7 @@
         <a:solidFill>
           <a:schemeClr val="phClr"/>
         </a:solidFill>
-        <a:gradFill rotWithShape="1">
+        <a:gradFill>
           <a:gsLst>
             <a:gs pos="0">
               <a:schemeClr val="phClr">
@@ -10330,7 +10131,7 @@
           </a:gsLst>
           <a:lin ang="16200000" scaled="1"/>
         </a:gradFill>
-        <a:gradFill rotWithShape="1">
+        <a:gradFill>
           <a:gsLst>
             <a:gs pos="0">
               <a:schemeClr val="phClr">
@@ -10417,7 +10218,7 @@
         <a:solidFill>
           <a:schemeClr val="phClr"/>
         </a:solidFill>
-        <a:gradFill rotWithShape="1">
+        <a:gradFill>
           <a:gsLst>
             <a:gs pos="0">
               <a:schemeClr val="phClr">
@@ -10439,11 +10240,9 @@
               </a:schemeClr>
             </a:gs>
           </a:gsLst>
-          <a:path path="circle">
-            <a:fillToRect l="50000" t="-80000" r="50000" b="180000"/>
-          </a:path>
+          <a:path path="circle"/>
         </a:gradFill>
-        <a:gradFill rotWithShape="1">
+        <a:gradFill>
           <a:gsLst>
             <a:gs pos="0">
               <a:schemeClr val="phClr">
@@ -10458,20 +10257,19 @@
               </a:schemeClr>
             </a:gs>
           </a:gsLst>
-          <a:path path="circle">
-            <a:fillToRect l="50000" t="50000" r="50000" b="50000"/>
-          </a:path>
+          <a:path path="circle"/>
         </a:gradFill>
       </a:bgFillStyleLst>
     </a:fmtScheme>
   </a:themeElements>
+  <a:objectDefaults/>
 </a:theme>
 </file>
 
 <file path=ppt/theme/theme2.xml><?xml version="1.0" encoding="utf-8"?>
-<a:theme xmlns:a="http://schemas.openxmlformats.org/drawingml/2006/main" xmlns:r="http://schemas.openxmlformats.org/officeDocument/2006/relationships" name="Simple Light">
+<a:theme xmlns:a="http://schemas.openxmlformats.org/drawingml/2006/main" xmlns:r="http://schemas.openxmlformats.org/officeDocument/2006/relationships" xmlns:p="http://schemas.openxmlformats.org/presentationml/2006/main" name="">
   <a:themeElements>
-    <a:clrScheme name="Simple Light">
+    <a:clrScheme name="Default">
       <a:dk1>
         <a:srgbClr val="000000"/>
       </a:dk1>
@@ -10479,106 +10277,46 @@
         <a:srgbClr val="FFFFFF"/>
       </a:lt1>
       <a:dk2>
-        <a:srgbClr val="595959"/>
+        <a:srgbClr val="158158"/>
       </a:dk2>
       <a:lt2>
-        <a:srgbClr val="EEEEEE"/>
+        <a:srgbClr val="F3F3F3"/>
       </a:lt2>
       <a:accent1>
-        <a:srgbClr val="4285F4"/>
+        <a:srgbClr val="058DC7"/>
       </a:accent1>
       <a:accent2>
-        <a:srgbClr val="212121"/>
+        <a:srgbClr val="50B432"/>
       </a:accent2>
       <a:accent3>
-        <a:srgbClr val="78909C"/>
+        <a:srgbClr val="ED561B"/>
       </a:accent3>
       <a:accent4>
-        <a:srgbClr val="FFAB40"/>
+        <a:srgbClr val="EDEF00"/>
       </a:accent4>
       <a:accent5>
-        <a:srgbClr val="0097A7"/>
+        <a:srgbClr val="24CBE5"/>
       </a:accent5>
       <a:accent6>
-        <a:srgbClr val="EEFF41"/>
+        <a:srgbClr val="64E572"/>
       </a:accent6>
       <a:hlink>
-        <a:srgbClr val="0097A7"/>
+        <a:srgbClr val="2200CC"/>
       </a:hlink>
       <a:folHlink>
-        <a:srgbClr val="0097A7"/>
+        <a:srgbClr val="551A8B"/>
       </a:folHlink>
     </a:clrScheme>
     <a:fontScheme name="Office">
       <a:majorFont>
         <a:latin typeface="Arial"/>
-        <a:ea typeface=""/>
-        <a:cs typeface=""/>
-        <a:font script="Jpan" typeface="ＭＳ Ｐゴシック"/>
-        <a:font script="Hang" typeface="맑은 고딕"/>
-        <a:font script="Hans" typeface="宋体"/>
-        <a:font script="Hant" typeface="新細明體"/>
-        <a:font script="Arab" typeface="Times New Roman"/>
-        <a:font script="Hebr" typeface="Times New Roman"/>
-        <a:font script="Thai" typeface="Angsana New"/>
-        <a:font script="Ethi" typeface="Nyala"/>
-        <a:font script="Beng" typeface="Vrinda"/>
-        <a:font script="Gujr" typeface="Shruti"/>
-        <a:font script="Khmr" typeface="MoolBoran"/>
-        <a:font script="Knda" typeface="Tunga"/>
-        <a:font script="Guru" typeface="Raavi"/>
-        <a:font script="Cans" typeface="Euphemia"/>
-        <a:font script="Cher" typeface="Plantagenet Cherokee"/>
-        <a:font script="Yiii" typeface="Microsoft Yi Baiti"/>
-        <a:font script="Tibt" typeface="Microsoft Himalaya"/>
-        <a:font script="Thaa" typeface="MV Boli"/>
-        <a:font script="Deva" typeface="Mangal"/>
-        <a:font script="Telu" typeface="Gautami"/>
-        <a:font script="Taml" typeface="Latha"/>
-        <a:font script="Syrc" typeface="Estrangelo Edessa"/>
-        <a:font script="Orya" typeface="Kalinga"/>
-        <a:font script="Mlym" typeface="Kartika"/>
-        <a:font script="Laoo" typeface="DokChampa"/>
-        <a:font script="Sinh" typeface="Iskoola Pota"/>
-        <a:font script="Mong" typeface="Mongolian Baiti"/>
-        <a:font script="Viet" typeface="Times New Roman"/>
-        <a:font script="Uigh" typeface="Microsoft Uighur"/>
-        <a:font script="Geor" typeface="Sylfaen"/>
+        <a:ea typeface="Arial"/>
+        <a:cs typeface="Arial"/>
       </a:majorFont>
       <a:minorFont>
         <a:latin typeface="Arial"/>
-        <a:ea typeface=""/>
-        <a:cs typeface=""/>
-        <a:font script="Jpan" typeface="ＭＳ Ｐゴシック"/>
-        <a:font script="Hang" typeface="맑은 고딕"/>
-        <a:font script="Hans" typeface="宋体"/>
-        <a:font script="Hant" typeface="新細明體"/>
-        <a:font script="Arab" typeface="Arial"/>
-        <a:font script="Hebr" typeface="Arial"/>
-        <a:font script="Thai" typeface="Cordia New"/>
-        <a:font script="Ethi" typeface="Nyala"/>
-        <a:font script="Beng" typeface="Vrinda"/>
-        <a:font script="Gujr" typeface="Shruti"/>
-        <a:font script="Khmr" typeface="DaunPenh"/>
-        <a:font script="Knda" typeface="Tunga"/>
-        <a:font script="Guru" typeface="Raavi"/>
-        <a:font script="Cans" typeface="Euphemia"/>
-        <a:font script="Cher" typeface="Plantagenet Cherokee"/>
-        <a:font script="Yiii" typeface="Microsoft Yi Baiti"/>
-        <a:font script="Tibt" typeface="Microsoft Himalaya"/>
-        <a:font script="Thaa" typeface="MV Boli"/>
-        <a:font script="Deva" typeface="Mangal"/>
-        <a:font script="Telu" typeface="Gautami"/>
-        <a:font script="Taml" typeface="Latha"/>
-        <a:font script="Syrc" typeface="Estrangelo Edessa"/>
-        <a:font script="Orya" typeface="Kalinga"/>
-        <a:font script="Mlym" typeface="Kartika"/>
-        <a:font script="Laoo" typeface="DokChampa"/>
-        <a:font script="Sinh" typeface="Iskoola Pota"/>
-        <a:font script="Mong" typeface="Mongolian Baiti"/>
-        <a:font script="Viet" typeface="Arial"/>
-        <a:font script="Uigh" typeface="Microsoft Uighur"/>
-        <a:font script="Geor" typeface="Sylfaen"/>
+        <a:ea typeface="Arial"/>
+        <a:cs typeface="Arial"/>
       </a:minorFont>
     </a:fontScheme>
     <a:fmtScheme name="Office">
@@ -10586,7 +10324,7 @@
         <a:solidFill>
           <a:schemeClr val="phClr"/>
         </a:solidFill>
-        <a:gradFill rotWithShape="1">
+        <a:gradFill>
           <a:gsLst>
             <a:gs pos="0">
               <a:schemeClr val="phClr">
@@ -10609,7 +10347,7 @@
           </a:gsLst>
           <a:lin ang="16200000" scaled="1"/>
         </a:gradFill>
-        <a:gradFill rotWithShape="1">
+        <a:gradFill>
           <a:gsLst>
             <a:gs pos="0">
               <a:schemeClr val="phClr">
@@ -10696,7 +10434,7 @@
         <a:solidFill>
           <a:schemeClr val="phClr"/>
         </a:solidFill>
-        <a:gradFill rotWithShape="1">
+        <a:gradFill>
           <a:gsLst>
             <a:gs pos="0">
               <a:schemeClr val="phClr">
@@ -10718,11 +10456,9 @@
               </a:schemeClr>
             </a:gs>
           </a:gsLst>
-          <a:path path="circle">
-            <a:fillToRect l="50000" t="-80000" r="50000" b="180000"/>
-          </a:path>
+          <a:path path="circle"/>
         </a:gradFill>
-        <a:gradFill rotWithShape="1">
+        <a:gradFill>
           <a:gsLst>
             <a:gs pos="0">
               <a:schemeClr val="phClr">
@@ -10737,12 +10473,11 @@
               </a:schemeClr>
             </a:gs>
           </a:gsLst>
-          <a:path path="circle">
-            <a:fillToRect l="50000" t="50000" r="50000" b="50000"/>
-          </a:path>
+          <a:path path="circle"/>
         </a:gradFill>
       </a:bgFillStyleLst>
     </a:fmtScheme>
   </a:themeElements>
+  <a:objectDefaults/>
 </a:theme>
 </file>